--- a/스크립트언어/2021182014 박신우 숙제6. 다이나믹 프로그래밍.pptx
+++ b/스크립트언어/2021182014 박신우 숙제6. 다이나믹 프로그래밍.pptx
@@ -1,32 +1,38 @@
 
 <file path=ppt/presentation.xml><?xml version="1.0" encoding="utf-8"?>
-<p:presentation xmlns:a="http://schemas.openxmlformats.org/drawingml/2006/main" xmlns:r="http://schemas.openxmlformats.org/officeDocument/2006/relationships" xmlns:p="http://schemas.openxmlformats.org/presentationml/2006/main" showSpecialPlsOnTitleSld="0" saveSubsetFonts="1">
+<p:presentation xmlns:r="http://schemas.openxmlformats.org/officeDocument/2006/relationships" xmlns:c="http://schemas.openxmlformats.org/drawingml/2006/chart" xmlns:a="http://schemas.openxmlformats.org/drawingml/2006/main" xmlns:dgm="http://schemas.openxmlformats.org/drawingml/2006/diagram" xmlns:dsp="http://schemas.microsoft.com/office/drawing/2008/diagram" xmlns:p="http://schemas.openxmlformats.org/presentationml/2006/main" showSpecialPlsOnTitleSld="0" saveSubsetFonts="1">
   <p:sldMasterIdLst>
-    <p:sldMasterId id="2147483684" r:id="rId1"/>
+    <p:sldMasterId id="2147484180" r:id="rId1"/>
   </p:sldMasterIdLst>
   <p:notesMasterIdLst>
-    <p:notesMasterId r:id="rId21"/>
+    <p:notesMasterId r:id="rId2"/>
   </p:notesMasterIdLst>
   <p:sldIdLst>
-    <p:sldId id="258" r:id="rId2"/>
-    <p:sldId id="269" r:id="rId3"/>
-    <p:sldId id="335" r:id="rId4"/>
-    <p:sldId id="259" r:id="rId5"/>
-    <p:sldId id="276" r:id="rId6"/>
-    <p:sldId id="330" r:id="rId7"/>
-    <p:sldId id="350" r:id="rId8"/>
-    <p:sldId id="331" r:id="rId9"/>
-    <p:sldId id="277" r:id="rId10"/>
-    <p:sldId id="339" r:id="rId11"/>
-    <p:sldId id="341" r:id="rId12"/>
-    <p:sldId id="342" r:id="rId13"/>
-    <p:sldId id="349" r:id="rId14"/>
-    <p:sldId id="348" r:id="rId15"/>
-    <p:sldId id="343" r:id="rId16"/>
-    <p:sldId id="344" r:id="rId17"/>
-    <p:sldId id="345" r:id="rId18"/>
-    <p:sldId id="346" r:id="rId19"/>
-    <p:sldId id="347" r:id="rId20"/>
+    <p:sldId id="256" r:id="rId3"/>
+    <p:sldId id="257" r:id="rId4"/>
+    <p:sldId id="258" r:id="rId5"/>
+    <p:sldId id="259" r:id="rId6"/>
+    <p:sldId id="260" r:id="rId7"/>
+    <p:sldId id="261" r:id="rId8"/>
+    <p:sldId id="262" r:id="rId9"/>
+    <p:sldId id="263" r:id="rId10"/>
+    <p:sldId id="264" r:id="rId11"/>
+    <p:sldId id="265" r:id="rId12"/>
+    <p:sldId id="266" r:id="rId13"/>
+    <p:sldId id="267" r:id="rId14"/>
+    <p:sldId id="268" r:id="rId15"/>
+    <p:sldId id="269" r:id="rId16"/>
+    <p:sldId id="270" r:id="rId17"/>
+    <p:sldId id="271" r:id="rId18"/>
+    <p:sldId id="272" r:id="rId19"/>
+    <p:sldId id="273" r:id="rId20"/>
+    <p:sldId id="274" r:id="rId21"/>
+    <p:sldId id="275" r:id="rId22"/>
+    <p:sldId id="276" r:id="rId23"/>
+    <p:sldId id="277" r:id="rId24"/>
+    <p:sldId id="278" r:id="rId25"/>
+    <p:sldId id="279" r:id="rId26"/>
+    <p:sldId id="280" r:id="rId27"/>
   </p:sldIdLst>
   <p:sldSz cx="9144000" cy="6858000" type="screen4x3"/>
   <p:notesSz cx="6796088" cy="9926638"/>
@@ -45,8 +51,8 @@
         <a:solidFill>
           <a:schemeClr val="tx1"/>
         </a:solidFill>
-        <a:latin typeface="굴림" panose="020B0600000101010101" pitchFamily="50" charset="-127"/>
-        <a:ea typeface="굴림" panose="020B0600000101010101" pitchFamily="50" charset="-127"/>
+        <a:latin typeface="굴림"/>
+        <a:ea typeface="굴림"/>
         <a:cs typeface="+mn-cs"/>
       </a:defRPr>
     </a:lvl1pPr>
@@ -61,8 +67,8 @@
         <a:solidFill>
           <a:schemeClr val="tx1"/>
         </a:solidFill>
-        <a:latin typeface="굴림" panose="020B0600000101010101" pitchFamily="50" charset="-127"/>
-        <a:ea typeface="굴림" panose="020B0600000101010101" pitchFamily="50" charset="-127"/>
+        <a:latin typeface="굴림"/>
+        <a:ea typeface="굴림"/>
         <a:cs typeface="+mn-cs"/>
       </a:defRPr>
     </a:lvl2pPr>
@@ -77,8 +83,8 @@
         <a:solidFill>
           <a:schemeClr val="tx1"/>
         </a:solidFill>
-        <a:latin typeface="굴림" panose="020B0600000101010101" pitchFamily="50" charset="-127"/>
-        <a:ea typeface="굴림" panose="020B0600000101010101" pitchFamily="50" charset="-127"/>
+        <a:latin typeface="굴림"/>
+        <a:ea typeface="굴림"/>
         <a:cs typeface="+mn-cs"/>
       </a:defRPr>
     </a:lvl3pPr>
@@ -93,8 +99,8 @@
         <a:solidFill>
           <a:schemeClr val="tx1"/>
         </a:solidFill>
-        <a:latin typeface="굴림" panose="020B0600000101010101" pitchFamily="50" charset="-127"/>
-        <a:ea typeface="굴림" panose="020B0600000101010101" pitchFamily="50" charset="-127"/>
+        <a:latin typeface="굴림"/>
+        <a:ea typeface="굴림"/>
         <a:cs typeface="+mn-cs"/>
       </a:defRPr>
     </a:lvl4pPr>
@@ -109,8 +115,8 @@
         <a:solidFill>
           <a:schemeClr val="tx1"/>
         </a:solidFill>
-        <a:latin typeface="굴림" panose="020B0600000101010101" pitchFamily="50" charset="-127"/>
-        <a:ea typeface="굴림" panose="020B0600000101010101" pitchFamily="50" charset="-127"/>
+        <a:latin typeface="굴림"/>
+        <a:ea typeface="굴림"/>
         <a:cs typeface="+mn-cs"/>
       </a:defRPr>
     </a:lvl5pPr>
@@ -119,8 +125,8 @@
         <a:solidFill>
           <a:schemeClr val="tx1"/>
         </a:solidFill>
-        <a:latin typeface="굴림" panose="020B0600000101010101" pitchFamily="50" charset="-127"/>
-        <a:ea typeface="굴림" panose="020B0600000101010101" pitchFamily="50" charset="-127"/>
+        <a:latin typeface="굴림"/>
+        <a:ea typeface="굴림"/>
         <a:cs typeface="+mn-cs"/>
       </a:defRPr>
     </a:lvl6pPr>
@@ -129,8 +135,8 @@
         <a:solidFill>
           <a:schemeClr val="tx1"/>
         </a:solidFill>
-        <a:latin typeface="굴림" panose="020B0600000101010101" pitchFamily="50" charset="-127"/>
-        <a:ea typeface="굴림" panose="020B0600000101010101" pitchFamily="50" charset="-127"/>
+        <a:latin typeface="굴림"/>
+        <a:ea typeface="굴림"/>
         <a:cs typeface="+mn-cs"/>
       </a:defRPr>
     </a:lvl7pPr>
@@ -139,8 +145,8 @@
         <a:solidFill>
           <a:schemeClr val="tx1"/>
         </a:solidFill>
-        <a:latin typeface="굴림" panose="020B0600000101010101" pitchFamily="50" charset="-127"/>
-        <a:ea typeface="굴림" panose="020B0600000101010101" pitchFamily="50" charset="-127"/>
+        <a:latin typeface="굴림"/>
+        <a:ea typeface="굴림"/>
         <a:cs typeface="+mn-cs"/>
       </a:defRPr>
     </a:lvl8pPr>
@@ -149,40 +155,23 @@
         <a:solidFill>
           <a:schemeClr val="tx1"/>
         </a:solidFill>
-        <a:latin typeface="굴림" panose="020B0600000101010101" pitchFamily="50" charset="-127"/>
-        <a:ea typeface="굴림" panose="020B0600000101010101" pitchFamily="50" charset="-127"/>
+        <a:latin typeface="굴림"/>
+        <a:ea typeface="굴림"/>
         <a:cs typeface="+mn-cs"/>
       </a:defRPr>
     </a:lvl9pPr>
   </p:defaultTextStyle>
-  <p:extLst>
-    <p:ext uri="{EFAFB233-063F-42B5-8137-9DF3F51BA10A}">
-      <p15:sldGuideLst xmlns:p15="http://schemas.microsoft.com/office/powerpoint/2012/main">
-        <p15:guide id="1" orient="horz" pos="2160">
-          <p15:clr>
-            <a:srgbClr val="A4A3A4"/>
-          </p15:clr>
-        </p15:guide>
-        <p15:guide id="2" pos="2880">
-          <p15:clr>
-            <a:srgbClr val="A4A3A4"/>
-          </p15:clr>
-        </p15:guide>
-      </p15:sldGuideLst>
-    </p:ext>
-  </p:extLst>
 </p:presentation>
 </file>
 
 <file path=ppt/notesMasters/notesMaster1.xml><?xml version="1.0" encoding="utf-8"?>
-<p:notesMaster xmlns:a="http://schemas.openxmlformats.org/drawingml/2006/main" xmlns:r="http://schemas.openxmlformats.org/officeDocument/2006/relationships" xmlns:p="http://schemas.openxmlformats.org/presentationml/2006/main">
+<p:notesMaster xmlns:r="http://schemas.openxmlformats.org/officeDocument/2006/relationships" xmlns:c="http://schemas.openxmlformats.org/drawingml/2006/chart" xmlns:a="http://schemas.openxmlformats.org/drawingml/2006/main" xmlns:dgm="http://schemas.openxmlformats.org/drawingml/2006/diagram" xmlns:dsp="http://schemas.microsoft.com/office/drawing/2008/diagram" xmlns:p="http://schemas.openxmlformats.org/presentationml/2006/main">
   <p:cSld>
     <p:bg>
-      <p:bgPr>
+      <p:bgPr shadeToTitle="0">
         <a:solidFill>
           <a:schemeClr val="bg1"/>
         </a:solidFill>
-        <a:effectLst/>
       </p:bgPr>
     </p:bg>
     <p:spTree>
@@ -206,7 +195,7 @@
             <a:spLocks noGrp="1"/>
           </p:cNvSpPr>
           <p:nvPr>
-            <p:ph type="hdr" sz="quarter"/>
+            <p:ph type="hdr" sz="quarter" idx="0"/>
           </p:nvPr>
         </p:nvSpPr>
         <p:spPr>
@@ -219,7 +208,7 @@
           </a:prstGeom>
         </p:spPr>
         <p:txBody>
-          <a:bodyPr vert="horz" lIns="91440" tIns="45720" rIns="91440" bIns="45720" rtlCol="0"/>
+          <a:bodyPr vert="horz" lIns="91440" tIns="45720" rIns="91440" bIns="45720"/>
           <a:lstStyle>
             <a:lvl1pPr algn="l" eaLnBrk="1" fontAlgn="auto" latinLnBrk="1" hangingPunct="1">
               <a:spcBef>
@@ -238,6 +227,10 @@
             <a:pPr>
               <a:defRPr/>
             </a:pPr>
+            <a:r>
+              <a:rPr lang="ko-KR" altLang="en-US"/>
+              <a:t/>
+            </a:r>
             <a:endParaRPr lang="ko-KR" altLang="en-US"/>
           </a:p>
         </p:txBody>
@@ -262,7 +255,7 @@
           </a:prstGeom>
         </p:spPr>
         <p:txBody>
-          <a:bodyPr vert="horz" lIns="91440" tIns="45720" rIns="91440" bIns="45720" rtlCol="0"/>
+          <a:bodyPr vert="horz" lIns="91440" tIns="45720" rIns="91440" bIns="45720"/>
           <a:lstStyle>
             <a:lvl1pPr algn="r" eaLnBrk="1" fontAlgn="auto" latinLnBrk="1" hangingPunct="1">
               <a:spcBef>
@@ -281,12 +274,12 @@
             <a:pPr>
               <a:defRPr/>
             </a:pPr>
-            <a:fld id="{D755AD21-19C0-49A3-8C7F-3EE70D30FEBF}" type="datetimeFigureOut">
+            <a:fld id="{D755AD21-19C0-49A3-8C7F-3EE70D30FEBF}" type="datetime1">
               <a:rPr lang="ko-KR" altLang="en-US"/>
               <a:pPr>
                 <a:defRPr/>
               </a:pPr>
-              <a:t>2026-05-11</a:t>
+              <a:t>2026-05-16</a:t>
             </a:fld>
             <a:endParaRPr lang="ko-KR" altLang="en-US"/>
           </a:p>
@@ -296,7 +289,7 @@
         <p:nvSpPr>
           <p:cNvPr id="4" name="슬라이드 이미지 개체 틀 3"/>
           <p:cNvSpPr>
-            <a:spLocks noGrp="1" noRot="1" noChangeAspect="1"/>
+            <a:spLocks noGrp="1" noRot="1" noChangeAspect="1" noTextEdit="1"/>
           </p:cNvSpPr>
           <p:nvPr>
             <p:ph type="sldImg" idx="2"/>
@@ -318,11 +311,13 @@
           </a:ln>
         </p:spPr>
         <p:txBody>
-          <a:bodyPr vert="horz" lIns="91440" tIns="45720" rIns="91440" bIns="45720" rtlCol="0" anchor="ctr"/>
+          <a:bodyPr vert="horz" lIns="91440" tIns="45720" rIns="91440" bIns="45720" anchor="ctr"/>
           <a:lstStyle/>
           <a:p>
-            <a:pPr lvl="0"/>
-            <a:endParaRPr lang="ko-KR" altLang="en-US" noProof="0"/>
+            <a:pPr lvl="0">
+              <a:defRPr/>
+            </a:pPr>
+            <a:endParaRPr lang="ko-KR" altLang="en-US"/>
           </a:p>
         </p:txBody>
       </p:sp>
@@ -346,44 +341,59 @@
           </a:prstGeom>
         </p:spPr>
         <p:txBody>
-          <a:bodyPr vert="horz" lIns="91440" tIns="45720" rIns="91440" bIns="45720" rtlCol="0">
+          <a:bodyPr vert="horz" lIns="91440" tIns="45720" rIns="91440" bIns="45720">
             <a:normAutofit/>
           </a:bodyPr>
           <a:lstStyle/>
           <a:p>
-            <a:pPr lvl="0"/>
-            <a:r>
-              <a:rPr lang="ko-KR" altLang="en-US" noProof="0"/>
+            <a:pPr lvl="0">
+              <a:defRPr/>
+            </a:pPr>
+            <a:r>
+              <a:rPr lang="ko-KR" altLang="en-US"/>
               <a:t>마스터 텍스트 스타일을 편집합니다</a:t>
             </a:r>
-          </a:p>
-          <a:p>
-            <a:pPr lvl="1"/>
-            <a:r>
-              <a:rPr lang="ko-KR" altLang="en-US" noProof="0"/>
+            <a:endParaRPr lang="ko-KR" altLang="en-US"/>
+          </a:p>
+          <a:p>
+            <a:pPr lvl="1">
+              <a:defRPr/>
+            </a:pPr>
+            <a:r>
+              <a:rPr lang="ko-KR" altLang="en-US"/>
               <a:t>둘째 수준</a:t>
             </a:r>
-          </a:p>
-          <a:p>
-            <a:pPr lvl="2"/>
-            <a:r>
-              <a:rPr lang="ko-KR" altLang="en-US" noProof="0"/>
+            <a:endParaRPr lang="ko-KR" altLang="en-US"/>
+          </a:p>
+          <a:p>
+            <a:pPr lvl="2">
+              <a:defRPr/>
+            </a:pPr>
+            <a:r>
+              <a:rPr lang="ko-KR" altLang="en-US"/>
               <a:t>셋째 수준</a:t>
             </a:r>
-          </a:p>
-          <a:p>
-            <a:pPr lvl="3"/>
-            <a:r>
-              <a:rPr lang="ko-KR" altLang="en-US" noProof="0"/>
+            <a:endParaRPr lang="ko-KR" altLang="en-US"/>
+          </a:p>
+          <a:p>
+            <a:pPr lvl="3">
+              <a:defRPr/>
+            </a:pPr>
+            <a:r>
+              <a:rPr lang="ko-KR" altLang="en-US"/>
               <a:t>넷째 수준</a:t>
             </a:r>
-          </a:p>
-          <a:p>
-            <a:pPr lvl="4"/>
-            <a:r>
-              <a:rPr lang="ko-KR" altLang="en-US" noProof="0"/>
+            <a:endParaRPr lang="ko-KR" altLang="en-US"/>
+          </a:p>
+          <a:p>
+            <a:pPr lvl="4">
+              <a:defRPr/>
+            </a:pPr>
+            <a:r>
+              <a:rPr lang="ko-KR" altLang="en-US"/>
               <a:t>다섯째 수준</a:t>
             </a:r>
+            <a:endParaRPr lang="ko-KR" altLang="en-US"/>
           </a:p>
         </p:txBody>
       </p:sp>
@@ -407,7 +417,7 @@
           </a:prstGeom>
         </p:spPr>
         <p:txBody>
-          <a:bodyPr vert="horz" lIns="91440" tIns="45720" rIns="91440" bIns="45720" rtlCol="0" anchor="b"/>
+          <a:bodyPr vert="horz" lIns="91440" tIns="45720" rIns="91440" bIns="45720" anchor="b"/>
           <a:lstStyle>
             <a:lvl1pPr algn="l" eaLnBrk="1" fontAlgn="auto" latinLnBrk="1" hangingPunct="1">
               <a:spcBef>
@@ -426,6 +436,10 @@
             <a:pPr>
               <a:defRPr/>
             </a:pPr>
+            <a:r>
+              <a:rPr lang="ko-KR" altLang="en-US"/>
+              <a:t/>
+            </a:r>
             <a:endParaRPr lang="ko-KR" altLang="en-US"/>
           </a:p>
         </p:txBody>
@@ -450,7 +464,7 @@
           </a:prstGeom>
         </p:spPr>
         <p:txBody>
-          <a:bodyPr vert="horz" wrap="square" lIns="91440" tIns="45720" rIns="91440" bIns="45720" numCol="1" anchor="b" anchorCtr="0" compatLnSpc="1">
+          <a:bodyPr vert="horz" wrap="square" lIns="91440" tIns="45720" rIns="91440" bIns="45720" anchor="b" anchorCtr="0">
             <a:prstTxWarp prst="textNoShape">
               <a:avLst/>
             </a:prstTxWarp>
@@ -458,8 +472,8 @@
           <a:lstStyle>
             <a:lvl1pPr algn="r" eaLnBrk="1" latinLnBrk="1" hangingPunct="1">
               <a:defRPr kumimoji="0" sz="1200" smtClean="0">
-                <a:latin typeface="맑은 고딕" panose="020B0503020000020004" pitchFamily="50" charset="-127"/>
-                <a:ea typeface="맑은 고딕" panose="020B0503020000020004" pitchFamily="50" charset="-127"/>
+                <a:latin typeface="맑은 고딕"/>
+                <a:ea typeface="맑은 고딕"/>
               </a:defRPr>
             </a:lvl1pPr>
           </a:lstStyle>
@@ -481,6 +495,7 @@
     </p:spTree>
   </p:cSld>
   <p:clrMap bg1="lt1" tx1="dk1" bg2="lt2" tx2="dk2" accent1="accent1" accent2="accent2" accent3="accent3" accent4="accent4" accent5="accent5" accent6="accent6" hlink="hlink" folHlink="folHlink"/>
+  <p:hf hdr="0" ftr="0" dt="0"/>
   <p:notesStyle>
     <a:lvl1pPr algn="l" rtl="0" eaLnBrk="0" fontAlgn="base" latinLnBrk="1" hangingPunct="0">
       <a:spcBef>
@@ -607,7 +622,7 @@
 </file>
 
 <file path=ppt/notesSlides/notesSlide1.xml><?xml version="1.0" encoding="utf-8"?>
-<p:notes xmlns:a="http://schemas.openxmlformats.org/drawingml/2006/main" xmlns:r="http://schemas.openxmlformats.org/officeDocument/2006/relationships" xmlns:p="http://schemas.openxmlformats.org/presentationml/2006/main">
+<p:notes xmlns:r="http://schemas.openxmlformats.org/officeDocument/2006/relationships" xmlns:c="http://schemas.openxmlformats.org/drawingml/2006/chart" xmlns:a="http://schemas.openxmlformats.org/drawingml/2006/main" xmlns:dgm="http://schemas.openxmlformats.org/drawingml/2006/diagram" xmlns:dsp="http://schemas.microsoft.com/office/drawing/2008/diagram" xmlns:p="http://schemas.openxmlformats.org/presentationml/2006/main">
   <p:cSld>
     <p:spTree>
       <p:nvGrpSpPr>
@@ -630,28 +645,17 @@
             <a:spLocks noGrp="1" noRot="1" noChangeAspect="1" noTextEdit="1"/>
           </p:cNvSpPr>
           <p:nvPr>
-            <p:ph type="sldImg"/>
-          </p:nvPr>
-        </p:nvSpPr>
-        <p:spPr bwMode="auto">
+            <p:ph type="sldImg" idx="0"/>
+          </p:nvPr>
+        </p:nvSpPr>
+        <p:spPr>
           <a:noFill/>
           <a:ln>
             <a:solidFill>
               <a:srgbClr val="000000"/>
             </a:solidFill>
-            <a:miter lim="800000"/>
-            <a:headEnd/>
-            <a:tailEnd/>
+            <a:miter/>
           </a:ln>
-          <a:extLst>
-            <a:ext uri="{909E8E84-426E-40DD-AFC4-6F175D3DCCD1}">
-              <a14:hiddenFill xmlns:a14="http://schemas.microsoft.com/office/drawing/2010/main">
-                <a:solidFill>
-                  <a:srgbClr val="FFFFFF"/>
-                </a:solidFill>
-              </a14:hiddenFill>
-            </a:ext>
-          </a:extLst>
         </p:spPr>
       </p:sp>
       <p:sp>
@@ -664,36 +668,24 @@
             <p:ph type="body" idx="1"/>
           </p:nvPr>
         </p:nvSpPr>
-        <p:spPr bwMode="auto">
+        <p:spPr>
           <a:noFill/>
-          <a:extLst>
-            <a:ext uri="{909E8E84-426E-40DD-AFC4-6F175D3DCCD1}">
-              <a14:hiddenFill xmlns:a14="http://schemas.microsoft.com/office/drawing/2010/main">
-                <a:solidFill>
-                  <a:srgbClr val="FFFFFF"/>
-                </a:solidFill>
-              </a14:hiddenFill>
-            </a:ext>
-            <a:ext uri="{91240B29-F687-4F45-9708-019B960494DF}">
-              <a14:hiddenLine xmlns:a14="http://schemas.microsoft.com/office/drawing/2010/main" w="9525">
-                <a:solidFill>
-                  <a:srgbClr val="000000"/>
-                </a:solidFill>
-                <a:miter lim="800000"/>
-                <a:headEnd/>
-                <a:tailEnd/>
-              </a14:hiddenLine>
-            </a:ext>
-          </a:extLst>
         </p:spPr>
         <p:txBody>
-          <a:bodyPr wrap="square" numCol="1" anchor="t" anchorCtr="0" compatLnSpc="1">
+          <a:bodyPr wrap="square" anchor="t" anchorCtr="0">
             <a:prstTxWarp prst="textNoShape">
               <a:avLst/>
             </a:prstTxWarp>
           </a:bodyPr>
           <a:lstStyle/>
           <a:p>
+            <a:pPr lvl="0">
+              <a:defRPr/>
+            </a:pPr>
+            <a:r>
+              <a:rPr lang="ko-KR" altLang="en-US"/>
+              <a:t/>
+            </a:r>
             <a:endParaRPr lang="ko-KR" altLang="en-US"/>
           </a:p>
         </p:txBody>
@@ -708,27 +700,8 @@
             <p:ph type="sldNum" sz="quarter" idx="5"/>
           </p:nvPr>
         </p:nvSpPr>
-        <p:spPr bwMode="auto">
+        <p:spPr>
           <a:noFill/>
-          <a:extLst>
-            <a:ext uri="{909E8E84-426E-40DD-AFC4-6F175D3DCCD1}">
-              <a14:hiddenFill xmlns:a14="http://schemas.microsoft.com/office/drawing/2010/main">
-                <a:solidFill>
-                  <a:srgbClr val="FFFFFF"/>
-                </a:solidFill>
-              </a14:hiddenFill>
-            </a:ext>
-            <a:ext uri="{91240B29-F687-4F45-9708-019B960494DF}">
-              <a14:hiddenLine xmlns:a14="http://schemas.microsoft.com/office/drawing/2010/main" w="9525">
-                <a:solidFill>
-                  <a:srgbClr val="000000"/>
-                </a:solidFill>
-                <a:miter lim="800000"/>
-                <a:headEnd/>
-                <a:tailEnd/>
-              </a14:hiddenLine>
-            </a:ext>
-          </a:extLst>
         </p:spPr>
         <p:txBody>
           <a:bodyPr/>
@@ -741,8 +714,8 @@
                 <a:solidFill>
                   <a:schemeClr val="tx1"/>
                 </a:solidFill>
-                <a:latin typeface="맑은 고딕" panose="020B0503020000020004" pitchFamily="50" charset="-127"/>
-                <a:ea typeface="맑은 고딕" panose="020B0503020000020004" pitchFamily="50" charset="-127"/>
+                <a:latin typeface="맑은 고딕"/>
+                <a:ea typeface="맑은 고딕"/>
               </a:defRPr>
             </a:lvl1pPr>
             <a:lvl2pPr marL="742950" indent="-285750" latinLnBrk="1">
@@ -753,8 +726,8 @@
                 <a:solidFill>
                   <a:schemeClr val="tx1"/>
                 </a:solidFill>
-                <a:latin typeface="맑은 고딕" panose="020B0503020000020004" pitchFamily="50" charset="-127"/>
-                <a:ea typeface="맑은 고딕" panose="020B0503020000020004" pitchFamily="50" charset="-127"/>
+                <a:latin typeface="맑은 고딕"/>
+                <a:ea typeface="맑은 고딕"/>
               </a:defRPr>
             </a:lvl2pPr>
             <a:lvl3pPr marL="1143000" indent="-228600" latinLnBrk="1">
@@ -765,8 +738,8 @@
                 <a:solidFill>
                   <a:schemeClr val="tx1"/>
                 </a:solidFill>
-                <a:latin typeface="맑은 고딕" panose="020B0503020000020004" pitchFamily="50" charset="-127"/>
-                <a:ea typeface="맑은 고딕" panose="020B0503020000020004" pitchFamily="50" charset="-127"/>
+                <a:latin typeface="맑은 고딕"/>
+                <a:ea typeface="맑은 고딕"/>
               </a:defRPr>
             </a:lvl3pPr>
             <a:lvl4pPr marL="1600200" indent="-228600" latinLnBrk="1">
@@ -777,8 +750,8 @@
                 <a:solidFill>
                   <a:schemeClr val="tx1"/>
                 </a:solidFill>
-                <a:latin typeface="맑은 고딕" panose="020B0503020000020004" pitchFamily="50" charset="-127"/>
-                <a:ea typeface="맑은 고딕" panose="020B0503020000020004" pitchFamily="50" charset="-127"/>
+                <a:latin typeface="맑은 고딕"/>
+                <a:ea typeface="맑은 고딕"/>
               </a:defRPr>
             </a:lvl4pPr>
             <a:lvl5pPr marL="2057400" indent="-228600" latinLnBrk="1">
@@ -789,8 +762,8 @@
                 <a:solidFill>
                   <a:schemeClr val="tx1"/>
                 </a:solidFill>
-                <a:latin typeface="맑은 고딕" panose="020B0503020000020004" pitchFamily="50" charset="-127"/>
-                <a:ea typeface="맑은 고딕" panose="020B0503020000020004" pitchFamily="50" charset="-127"/>
+                <a:latin typeface="맑은 고딕"/>
+                <a:ea typeface="맑은 고딕"/>
               </a:defRPr>
             </a:lvl5pPr>
             <a:lvl6pPr marL="2514600" indent="-228600" eaLnBrk="0" fontAlgn="base" hangingPunct="0">
@@ -804,8 +777,8 @@
                 <a:solidFill>
                   <a:schemeClr val="tx1"/>
                 </a:solidFill>
-                <a:latin typeface="맑은 고딕" panose="020B0503020000020004" pitchFamily="50" charset="-127"/>
-                <a:ea typeface="맑은 고딕" panose="020B0503020000020004" pitchFamily="50" charset="-127"/>
+                <a:latin typeface="맑은 고딕"/>
+                <a:ea typeface="맑은 고딕"/>
               </a:defRPr>
             </a:lvl6pPr>
             <a:lvl7pPr marL="2971800" indent="-228600" eaLnBrk="0" fontAlgn="base" hangingPunct="0">
@@ -819,8 +792,8 @@
                 <a:solidFill>
                   <a:schemeClr val="tx1"/>
                 </a:solidFill>
-                <a:latin typeface="맑은 고딕" panose="020B0503020000020004" pitchFamily="50" charset="-127"/>
-                <a:ea typeface="맑은 고딕" panose="020B0503020000020004" pitchFamily="50" charset="-127"/>
+                <a:latin typeface="맑은 고딕"/>
+                <a:ea typeface="맑은 고딕"/>
               </a:defRPr>
             </a:lvl7pPr>
             <a:lvl8pPr marL="3429000" indent="-228600" eaLnBrk="0" fontAlgn="base" hangingPunct="0">
@@ -834,8 +807,8 @@
                 <a:solidFill>
                   <a:schemeClr val="tx1"/>
                 </a:solidFill>
-                <a:latin typeface="맑은 고딕" panose="020B0503020000020004" pitchFamily="50" charset="-127"/>
-                <a:ea typeface="맑은 고딕" panose="020B0503020000020004" pitchFamily="50" charset="-127"/>
+                <a:latin typeface="맑은 고딕"/>
+                <a:ea typeface="맑은 고딕"/>
               </a:defRPr>
             </a:lvl8pPr>
             <a:lvl9pPr marL="3886200" indent="-228600" eaLnBrk="0" fontAlgn="base" hangingPunct="0">
@@ -849,8 +822,8 @@
                 <a:solidFill>
                   <a:schemeClr val="tx1"/>
                 </a:solidFill>
-                <a:latin typeface="맑은 고딕" panose="020B0503020000020004" pitchFamily="50" charset="-127"/>
-                <a:ea typeface="맑은 고딕" panose="020B0503020000020004" pitchFamily="50" charset="-127"/>
+                <a:latin typeface="맑은 고딕"/>
+                <a:ea typeface="맑은 고딕"/>
               </a:defRPr>
             </a:lvl9pPr>
           </a:lstStyle>
@@ -859,17 +832,19 @@
               <a:spcBef>
                 <a:spcPct val="0"/>
               </a:spcBef>
+              <a:defRPr/>
             </a:pPr>
             <a:fld id="{399BD248-42D7-44D8-991C-BF0E4233C8AD}" type="slidenum">
-              <a:rPr lang="ko-KR" altLang="en-US"/>
+              <a:rPr lang="en-US" altLang="en-US"/>
               <a:pPr>
                 <a:spcBef>
                   <a:spcPct val="0"/>
                 </a:spcBef>
+                <a:defRPr/>
               </a:pPr>
               <a:t>1</a:t>
             </a:fld>
-            <a:endParaRPr lang="ko-KR" altLang="en-US"/>
+            <a:endParaRPr lang="en-US" altLang="en-US"/>
           </a:p>
         </p:txBody>
       </p:sp>
@@ -882,1527 +857,7 @@
 </file>
 
 <file path=ppt/notesSlides/notesSlide10.xml><?xml version="1.0" encoding="utf-8"?>
-<p:notes xmlns:a="http://schemas.openxmlformats.org/drawingml/2006/main" xmlns:r="http://schemas.openxmlformats.org/officeDocument/2006/relationships" xmlns:p="http://schemas.openxmlformats.org/presentationml/2006/main">
-  <p:cSld>
-    <p:spTree>
-      <p:nvGrpSpPr>
-        <p:cNvPr id="1" name="">
-          <a:extLst>
-            <a:ext uri="{FF2B5EF4-FFF2-40B4-BE49-F238E27FC236}">
-              <a16:creationId xmlns:a16="http://schemas.microsoft.com/office/drawing/2014/main" id="{C18D8154-5674-3592-043C-ED5B85D562DE}"/>
-            </a:ext>
-          </a:extLst>
-        </p:cNvPr>
-        <p:cNvGrpSpPr/>
-        <p:nvPr/>
-      </p:nvGrpSpPr>
-      <p:grpSpPr>
-        <a:xfrm>
-          <a:off x="0" y="0"/>
-          <a:ext cx="0" cy="0"/>
-          <a:chOff x="0" y="0"/>
-          <a:chExt cx="0" cy="0"/>
-        </a:xfrm>
-      </p:grpSpPr>
-      <p:sp>
-        <p:nvSpPr>
-          <p:cNvPr id="2" name="슬라이드 이미지 개체 틀 1">
-            <a:extLst>
-              <a:ext uri="{FF2B5EF4-FFF2-40B4-BE49-F238E27FC236}">
-                <a16:creationId xmlns:a16="http://schemas.microsoft.com/office/drawing/2014/main" id="{24196531-8DAF-7C4B-C085-A0F72FDF03DC}"/>
-              </a:ext>
-            </a:extLst>
-          </p:cNvPr>
-          <p:cNvSpPr>
-            <a:spLocks noGrp="1" noRot="1" noChangeAspect="1"/>
-          </p:cNvSpPr>
-          <p:nvPr>
-            <p:ph type="sldImg"/>
-          </p:nvPr>
-        </p:nvSpPr>
-        <p:spPr/>
-      </p:sp>
-      <p:sp>
-        <p:nvSpPr>
-          <p:cNvPr id="3" name="슬라이드 노트 개체 틀 2">
-            <a:extLst>
-              <a:ext uri="{FF2B5EF4-FFF2-40B4-BE49-F238E27FC236}">
-                <a16:creationId xmlns:a16="http://schemas.microsoft.com/office/drawing/2014/main" id="{CF11258C-00BC-693E-9655-C702C0AED591}"/>
-              </a:ext>
-            </a:extLst>
-          </p:cNvPr>
-          <p:cNvSpPr>
-            <a:spLocks noGrp="1"/>
-          </p:cNvSpPr>
-          <p:nvPr>
-            <p:ph type="body" idx="1"/>
-          </p:nvPr>
-        </p:nvSpPr>
-        <p:spPr/>
-        <p:txBody>
-          <a:bodyPr/>
-          <a:lstStyle/>
-          <a:p>
-            <a:endParaRPr lang="ko-KR" altLang="en-US"/>
-          </a:p>
-        </p:txBody>
-      </p:sp>
-      <p:sp>
-        <p:nvSpPr>
-          <p:cNvPr id="4" name="슬라이드 번호 개체 틀 3">
-            <a:extLst>
-              <a:ext uri="{FF2B5EF4-FFF2-40B4-BE49-F238E27FC236}">
-                <a16:creationId xmlns:a16="http://schemas.microsoft.com/office/drawing/2014/main" id="{4FE7B02C-31F7-C577-64B6-706B91BEEA21}"/>
-              </a:ext>
-            </a:extLst>
-          </p:cNvPr>
-          <p:cNvSpPr>
-            <a:spLocks noGrp="1"/>
-          </p:cNvSpPr>
-          <p:nvPr>
-            <p:ph type="sldNum" sz="quarter" idx="10"/>
-          </p:nvPr>
-        </p:nvSpPr>
-        <p:spPr/>
-        <p:txBody>
-          <a:bodyPr/>
-          <a:lstStyle/>
-          <a:p>
-            <a:pPr>
-              <a:defRPr/>
-            </a:pPr>
-            <a:fld id="{F8CEB46D-9B0E-47D1-8684-1DB50B81E07A}" type="slidenum">
-              <a:rPr lang="ko-KR" altLang="en-US" smtClean="0"/>
-              <a:pPr>
-                <a:defRPr/>
-              </a:pPr>
-              <a:t>11</a:t>
-            </a:fld>
-            <a:endParaRPr lang="ko-KR" altLang="en-US"/>
-          </a:p>
-        </p:txBody>
-      </p:sp>
-    </p:spTree>
-    <p:extLst>
-      <p:ext uri="{BB962C8B-B14F-4D97-AF65-F5344CB8AC3E}">
-        <p14:creationId xmlns:p14="http://schemas.microsoft.com/office/powerpoint/2010/main" val="1431229152"/>
-      </p:ext>
-    </p:extLst>
-  </p:cSld>
-  <p:clrMapOvr>
-    <a:masterClrMapping/>
-  </p:clrMapOvr>
-</p:notes>
-</file>
-
-<file path=ppt/notesSlides/notesSlide11.xml><?xml version="1.0" encoding="utf-8"?>
-<p:notes xmlns:a="http://schemas.openxmlformats.org/drawingml/2006/main" xmlns:r="http://schemas.openxmlformats.org/officeDocument/2006/relationships" xmlns:p="http://schemas.openxmlformats.org/presentationml/2006/main">
-  <p:cSld>
-    <p:spTree>
-      <p:nvGrpSpPr>
-        <p:cNvPr id="1" name="">
-          <a:extLst>
-            <a:ext uri="{FF2B5EF4-FFF2-40B4-BE49-F238E27FC236}">
-              <a16:creationId xmlns:a16="http://schemas.microsoft.com/office/drawing/2014/main" id="{2C1C5905-9421-8F95-57D2-36A21A955E37}"/>
-            </a:ext>
-          </a:extLst>
-        </p:cNvPr>
-        <p:cNvGrpSpPr/>
-        <p:nvPr/>
-      </p:nvGrpSpPr>
-      <p:grpSpPr>
-        <a:xfrm>
-          <a:off x="0" y="0"/>
-          <a:ext cx="0" cy="0"/>
-          <a:chOff x="0" y="0"/>
-          <a:chExt cx="0" cy="0"/>
-        </a:xfrm>
-      </p:grpSpPr>
-      <p:sp>
-        <p:nvSpPr>
-          <p:cNvPr id="2" name="슬라이드 이미지 개체 틀 1">
-            <a:extLst>
-              <a:ext uri="{FF2B5EF4-FFF2-40B4-BE49-F238E27FC236}">
-                <a16:creationId xmlns:a16="http://schemas.microsoft.com/office/drawing/2014/main" id="{659D7F44-93D4-55D4-C4B5-E8CB43B065D2}"/>
-              </a:ext>
-            </a:extLst>
-          </p:cNvPr>
-          <p:cNvSpPr>
-            <a:spLocks noGrp="1" noRot="1" noChangeAspect="1"/>
-          </p:cNvSpPr>
-          <p:nvPr>
-            <p:ph type="sldImg"/>
-          </p:nvPr>
-        </p:nvSpPr>
-        <p:spPr/>
-      </p:sp>
-      <p:sp>
-        <p:nvSpPr>
-          <p:cNvPr id="3" name="슬라이드 노트 개체 틀 2">
-            <a:extLst>
-              <a:ext uri="{FF2B5EF4-FFF2-40B4-BE49-F238E27FC236}">
-                <a16:creationId xmlns:a16="http://schemas.microsoft.com/office/drawing/2014/main" id="{1EB5A0B7-CC05-CA92-0DCA-2BC1E44273DB}"/>
-              </a:ext>
-            </a:extLst>
-          </p:cNvPr>
-          <p:cNvSpPr>
-            <a:spLocks noGrp="1"/>
-          </p:cNvSpPr>
-          <p:nvPr>
-            <p:ph type="body" idx="1"/>
-          </p:nvPr>
-        </p:nvSpPr>
-        <p:spPr/>
-        <p:txBody>
-          <a:bodyPr/>
-          <a:lstStyle/>
-          <a:p>
-            <a:endParaRPr lang="ko-KR" altLang="en-US"/>
-          </a:p>
-        </p:txBody>
-      </p:sp>
-      <p:sp>
-        <p:nvSpPr>
-          <p:cNvPr id="4" name="슬라이드 번호 개체 틀 3">
-            <a:extLst>
-              <a:ext uri="{FF2B5EF4-FFF2-40B4-BE49-F238E27FC236}">
-                <a16:creationId xmlns:a16="http://schemas.microsoft.com/office/drawing/2014/main" id="{09DAE5C7-F6D1-7CDC-FB04-7BE88DECBC15}"/>
-              </a:ext>
-            </a:extLst>
-          </p:cNvPr>
-          <p:cNvSpPr>
-            <a:spLocks noGrp="1"/>
-          </p:cNvSpPr>
-          <p:nvPr>
-            <p:ph type="sldNum" sz="quarter" idx="10"/>
-          </p:nvPr>
-        </p:nvSpPr>
-        <p:spPr/>
-        <p:txBody>
-          <a:bodyPr/>
-          <a:lstStyle/>
-          <a:p>
-            <a:pPr>
-              <a:defRPr/>
-            </a:pPr>
-            <a:fld id="{F8CEB46D-9B0E-47D1-8684-1DB50B81E07A}" type="slidenum">
-              <a:rPr lang="ko-KR" altLang="en-US" smtClean="0"/>
-              <a:pPr>
-                <a:defRPr/>
-              </a:pPr>
-              <a:t>12</a:t>
-            </a:fld>
-            <a:endParaRPr lang="ko-KR" altLang="en-US"/>
-          </a:p>
-        </p:txBody>
-      </p:sp>
-    </p:spTree>
-    <p:extLst>
-      <p:ext uri="{BB962C8B-B14F-4D97-AF65-F5344CB8AC3E}">
-        <p14:creationId xmlns:p14="http://schemas.microsoft.com/office/powerpoint/2010/main" val="4179170228"/>
-      </p:ext>
-    </p:extLst>
-  </p:cSld>
-  <p:clrMapOvr>
-    <a:masterClrMapping/>
-  </p:clrMapOvr>
-</p:notes>
-</file>
-
-<file path=ppt/notesSlides/notesSlide12.xml><?xml version="1.0" encoding="utf-8"?>
-<p:notes xmlns:a="http://schemas.openxmlformats.org/drawingml/2006/main" xmlns:r="http://schemas.openxmlformats.org/officeDocument/2006/relationships" xmlns:p="http://schemas.openxmlformats.org/presentationml/2006/main">
-  <p:cSld>
-    <p:spTree>
-      <p:nvGrpSpPr>
-        <p:cNvPr id="1" name="">
-          <a:extLst>
-            <a:ext uri="{FF2B5EF4-FFF2-40B4-BE49-F238E27FC236}">
-              <a16:creationId xmlns:a16="http://schemas.microsoft.com/office/drawing/2014/main" id="{72AA7062-49E1-2D84-735A-4112C55AEBAF}"/>
-            </a:ext>
-          </a:extLst>
-        </p:cNvPr>
-        <p:cNvGrpSpPr/>
-        <p:nvPr/>
-      </p:nvGrpSpPr>
-      <p:grpSpPr>
-        <a:xfrm>
-          <a:off x="0" y="0"/>
-          <a:ext cx="0" cy="0"/>
-          <a:chOff x="0" y="0"/>
-          <a:chExt cx="0" cy="0"/>
-        </a:xfrm>
-      </p:grpSpPr>
-      <p:sp>
-        <p:nvSpPr>
-          <p:cNvPr id="2" name="슬라이드 이미지 개체 틀 1">
-            <a:extLst>
-              <a:ext uri="{FF2B5EF4-FFF2-40B4-BE49-F238E27FC236}">
-                <a16:creationId xmlns:a16="http://schemas.microsoft.com/office/drawing/2014/main" id="{75B4B371-6D3B-893C-A3C5-84361D44597D}"/>
-              </a:ext>
-            </a:extLst>
-          </p:cNvPr>
-          <p:cNvSpPr>
-            <a:spLocks noGrp="1" noRot="1" noChangeAspect="1"/>
-          </p:cNvSpPr>
-          <p:nvPr>
-            <p:ph type="sldImg"/>
-          </p:nvPr>
-        </p:nvSpPr>
-        <p:spPr/>
-      </p:sp>
-      <p:sp>
-        <p:nvSpPr>
-          <p:cNvPr id="3" name="슬라이드 노트 개체 틀 2">
-            <a:extLst>
-              <a:ext uri="{FF2B5EF4-FFF2-40B4-BE49-F238E27FC236}">
-                <a16:creationId xmlns:a16="http://schemas.microsoft.com/office/drawing/2014/main" id="{5EDBA008-34C4-2792-4622-5A981FDE598F}"/>
-              </a:ext>
-            </a:extLst>
-          </p:cNvPr>
-          <p:cNvSpPr>
-            <a:spLocks noGrp="1"/>
-          </p:cNvSpPr>
-          <p:nvPr>
-            <p:ph type="body" idx="1"/>
-          </p:nvPr>
-        </p:nvSpPr>
-        <p:spPr/>
-        <p:txBody>
-          <a:bodyPr/>
-          <a:lstStyle/>
-          <a:p>
-            <a:endParaRPr lang="ko-KR" altLang="en-US"/>
-          </a:p>
-        </p:txBody>
-      </p:sp>
-      <p:sp>
-        <p:nvSpPr>
-          <p:cNvPr id="4" name="슬라이드 번호 개체 틀 3">
-            <a:extLst>
-              <a:ext uri="{FF2B5EF4-FFF2-40B4-BE49-F238E27FC236}">
-                <a16:creationId xmlns:a16="http://schemas.microsoft.com/office/drawing/2014/main" id="{A05B94E0-AC26-B0D0-FA6B-557B0EA47E10}"/>
-              </a:ext>
-            </a:extLst>
-          </p:cNvPr>
-          <p:cNvSpPr>
-            <a:spLocks noGrp="1"/>
-          </p:cNvSpPr>
-          <p:nvPr>
-            <p:ph type="sldNum" sz="quarter" idx="10"/>
-          </p:nvPr>
-        </p:nvSpPr>
-        <p:spPr/>
-        <p:txBody>
-          <a:bodyPr/>
-          <a:lstStyle/>
-          <a:p>
-            <a:pPr>
-              <a:defRPr/>
-            </a:pPr>
-            <a:fld id="{F8CEB46D-9B0E-47D1-8684-1DB50B81E07A}" type="slidenum">
-              <a:rPr lang="ko-KR" altLang="en-US" smtClean="0"/>
-              <a:pPr>
-                <a:defRPr/>
-              </a:pPr>
-              <a:t>14</a:t>
-            </a:fld>
-            <a:endParaRPr lang="ko-KR" altLang="en-US"/>
-          </a:p>
-        </p:txBody>
-      </p:sp>
-    </p:spTree>
-    <p:extLst>
-      <p:ext uri="{BB962C8B-B14F-4D97-AF65-F5344CB8AC3E}">
-        <p14:creationId xmlns:p14="http://schemas.microsoft.com/office/powerpoint/2010/main" val="2191144871"/>
-      </p:ext>
-    </p:extLst>
-  </p:cSld>
-  <p:clrMapOvr>
-    <a:masterClrMapping/>
-  </p:clrMapOvr>
-</p:notes>
-</file>
-
-<file path=ppt/notesSlides/notesSlide13.xml><?xml version="1.0" encoding="utf-8"?>
-<p:notes xmlns:a="http://schemas.openxmlformats.org/drawingml/2006/main" xmlns:r="http://schemas.openxmlformats.org/officeDocument/2006/relationships" xmlns:p="http://schemas.openxmlformats.org/presentationml/2006/main">
-  <p:cSld>
-    <p:spTree>
-      <p:nvGrpSpPr>
-        <p:cNvPr id="1" name="">
-          <a:extLst>
-            <a:ext uri="{FF2B5EF4-FFF2-40B4-BE49-F238E27FC236}">
-              <a16:creationId xmlns:a16="http://schemas.microsoft.com/office/drawing/2014/main" id="{C18D8154-5674-3592-043C-ED5B85D562DE}"/>
-            </a:ext>
-          </a:extLst>
-        </p:cNvPr>
-        <p:cNvGrpSpPr/>
-        <p:nvPr/>
-      </p:nvGrpSpPr>
-      <p:grpSpPr>
-        <a:xfrm>
-          <a:off x="0" y="0"/>
-          <a:ext cx="0" cy="0"/>
-          <a:chOff x="0" y="0"/>
-          <a:chExt cx="0" cy="0"/>
-        </a:xfrm>
-      </p:grpSpPr>
-      <p:sp>
-        <p:nvSpPr>
-          <p:cNvPr id="2" name="슬라이드 이미지 개체 틀 1">
-            <a:extLst>
-              <a:ext uri="{FF2B5EF4-FFF2-40B4-BE49-F238E27FC236}">
-                <a16:creationId xmlns:a16="http://schemas.microsoft.com/office/drawing/2014/main" id="{24196531-8DAF-7C4B-C085-A0F72FDF03DC}"/>
-              </a:ext>
-            </a:extLst>
-          </p:cNvPr>
-          <p:cNvSpPr>
-            <a:spLocks noGrp="1" noRot="1" noChangeAspect="1"/>
-          </p:cNvSpPr>
-          <p:nvPr>
-            <p:ph type="sldImg"/>
-          </p:nvPr>
-        </p:nvSpPr>
-        <p:spPr/>
-      </p:sp>
-      <p:sp>
-        <p:nvSpPr>
-          <p:cNvPr id="3" name="슬라이드 노트 개체 틀 2">
-            <a:extLst>
-              <a:ext uri="{FF2B5EF4-FFF2-40B4-BE49-F238E27FC236}">
-                <a16:creationId xmlns:a16="http://schemas.microsoft.com/office/drawing/2014/main" id="{CF11258C-00BC-693E-9655-C702C0AED591}"/>
-              </a:ext>
-            </a:extLst>
-          </p:cNvPr>
-          <p:cNvSpPr>
-            <a:spLocks noGrp="1"/>
-          </p:cNvSpPr>
-          <p:nvPr>
-            <p:ph type="body" idx="1"/>
-          </p:nvPr>
-        </p:nvSpPr>
-        <p:spPr/>
-        <p:txBody>
-          <a:bodyPr/>
-          <a:lstStyle/>
-          <a:p>
-            <a:endParaRPr lang="ko-KR" altLang="en-US"/>
-          </a:p>
-        </p:txBody>
-      </p:sp>
-      <p:sp>
-        <p:nvSpPr>
-          <p:cNvPr id="4" name="슬라이드 번호 개체 틀 3">
-            <a:extLst>
-              <a:ext uri="{FF2B5EF4-FFF2-40B4-BE49-F238E27FC236}">
-                <a16:creationId xmlns:a16="http://schemas.microsoft.com/office/drawing/2014/main" id="{4FE7B02C-31F7-C577-64B6-706B91BEEA21}"/>
-              </a:ext>
-            </a:extLst>
-          </p:cNvPr>
-          <p:cNvSpPr>
-            <a:spLocks noGrp="1"/>
-          </p:cNvSpPr>
-          <p:nvPr>
-            <p:ph type="sldNum" sz="quarter" idx="10"/>
-          </p:nvPr>
-        </p:nvSpPr>
-        <p:spPr/>
-        <p:txBody>
-          <a:bodyPr/>
-          <a:lstStyle/>
-          <a:p>
-            <a:pPr>
-              <a:defRPr/>
-            </a:pPr>
-            <a:fld id="{F8CEB46D-9B0E-47D1-8684-1DB50B81E07A}" type="slidenum">
-              <a:rPr lang="ko-KR" altLang="en-US" smtClean="0"/>
-              <a:pPr>
-                <a:defRPr/>
-              </a:pPr>
-              <a:t>15</a:t>
-            </a:fld>
-            <a:endParaRPr lang="ko-KR" altLang="en-US"/>
-          </a:p>
-        </p:txBody>
-      </p:sp>
-    </p:spTree>
-    <p:extLst>
-      <p:ext uri="{BB962C8B-B14F-4D97-AF65-F5344CB8AC3E}">
-        <p14:creationId xmlns:p14="http://schemas.microsoft.com/office/powerpoint/2010/main" val="3179227876"/>
-      </p:ext>
-    </p:extLst>
-  </p:cSld>
-  <p:clrMapOvr>
-    <a:masterClrMapping/>
-  </p:clrMapOvr>
-</p:notes>
-</file>
-
-<file path=ppt/notesSlides/notesSlide14.xml><?xml version="1.0" encoding="utf-8"?>
-<p:notes xmlns:a="http://schemas.openxmlformats.org/drawingml/2006/main" xmlns:r="http://schemas.openxmlformats.org/officeDocument/2006/relationships" xmlns:p="http://schemas.openxmlformats.org/presentationml/2006/main">
-  <p:cSld>
-    <p:spTree>
-      <p:nvGrpSpPr>
-        <p:cNvPr id="1" name="">
-          <a:extLst>
-            <a:ext uri="{FF2B5EF4-FFF2-40B4-BE49-F238E27FC236}">
-              <a16:creationId xmlns:a16="http://schemas.microsoft.com/office/drawing/2014/main" id="{C18D8154-5674-3592-043C-ED5B85D562DE}"/>
-            </a:ext>
-          </a:extLst>
-        </p:cNvPr>
-        <p:cNvGrpSpPr/>
-        <p:nvPr/>
-      </p:nvGrpSpPr>
-      <p:grpSpPr>
-        <a:xfrm>
-          <a:off x="0" y="0"/>
-          <a:ext cx="0" cy="0"/>
-          <a:chOff x="0" y="0"/>
-          <a:chExt cx="0" cy="0"/>
-        </a:xfrm>
-      </p:grpSpPr>
-      <p:sp>
-        <p:nvSpPr>
-          <p:cNvPr id="2" name="슬라이드 이미지 개체 틀 1">
-            <a:extLst>
-              <a:ext uri="{FF2B5EF4-FFF2-40B4-BE49-F238E27FC236}">
-                <a16:creationId xmlns:a16="http://schemas.microsoft.com/office/drawing/2014/main" id="{24196531-8DAF-7C4B-C085-A0F72FDF03DC}"/>
-              </a:ext>
-            </a:extLst>
-          </p:cNvPr>
-          <p:cNvSpPr>
-            <a:spLocks noGrp="1" noRot="1" noChangeAspect="1"/>
-          </p:cNvSpPr>
-          <p:nvPr>
-            <p:ph type="sldImg"/>
-          </p:nvPr>
-        </p:nvSpPr>
-        <p:spPr/>
-      </p:sp>
-      <p:sp>
-        <p:nvSpPr>
-          <p:cNvPr id="3" name="슬라이드 노트 개체 틀 2">
-            <a:extLst>
-              <a:ext uri="{FF2B5EF4-FFF2-40B4-BE49-F238E27FC236}">
-                <a16:creationId xmlns:a16="http://schemas.microsoft.com/office/drawing/2014/main" id="{CF11258C-00BC-693E-9655-C702C0AED591}"/>
-              </a:ext>
-            </a:extLst>
-          </p:cNvPr>
-          <p:cNvSpPr>
-            <a:spLocks noGrp="1"/>
-          </p:cNvSpPr>
-          <p:nvPr>
-            <p:ph type="body" idx="1"/>
-          </p:nvPr>
-        </p:nvSpPr>
-        <p:spPr/>
-        <p:txBody>
-          <a:bodyPr/>
-          <a:lstStyle/>
-          <a:p>
-            <a:endParaRPr lang="ko-KR" altLang="en-US"/>
-          </a:p>
-        </p:txBody>
-      </p:sp>
-      <p:sp>
-        <p:nvSpPr>
-          <p:cNvPr id="4" name="슬라이드 번호 개체 틀 3">
-            <a:extLst>
-              <a:ext uri="{FF2B5EF4-FFF2-40B4-BE49-F238E27FC236}">
-                <a16:creationId xmlns:a16="http://schemas.microsoft.com/office/drawing/2014/main" id="{4FE7B02C-31F7-C577-64B6-706B91BEEA21}"/>
-              </a:ext>
-            </a:extLst>
-          </p:cNvPr>
-          <p:cNvSpPr>
-            <a:spLocks noGrp="1"/>
-          </p:cNvSpPr>
-          <p:nvPr>
-            <p:ph type="sldNum" sz="quarter" idx="10"/>
-          </p:nvPr>
-        </p:nvSpPr>
-        <p:spPr/>
-        <p:txBody>
-          <a:bodyPr/>
-          <a:lstStyle/>
-          <a:p>
-            <a:pPr>
-              <a:defRPr/>
-            </a:pPr>
-            <a:fld id="{F8CEB46D-9B0E-47D1-8684-1DB50B81E07A}" type="slidenum">
-              <a:rPr lang="ko-KR" altLang="en-US" smtClean="0"/>
-              <a:pPr>
-                <a:defRPr/>
-              </a:pPr>
-              <a:t>16</a:t>
-            </a:fld>
-            <a:endParaRPr lang="ko-KR" altLang="en-US"/>
-          </a:p>
-        </p:txBody>
-      </p:sp>
-    </p:spTree>
-    <p:extLst>
-      <p:ext uri="{BB962C8B-B14F-4D97-AF65-F5344CB8AC3E}">
-        <p14:creationId xmlns:p14="http://schemas.microsoft.com/office/powerpoint/2010/main" val="2057800237"/>
-      </p:ext>
-    </p:extLst>
-  </p:cSld>
-  <p:clrMapOvr>
-    <a:masterClrMapping/>
-  </p:clrMapOvr>
-</p:notes>
-</file>
-
-<file path=ppt/notesSlides/notesSlide15.xml><?xml version="1.0" encoding="utf-8"?>
-<p:notes xmlns:a="http://schemas.openxmlformats.org/drawingml/2006/main" xmlns:r="http://schemas.openxmlformats.org/officeDocument/2006/relationships" xmlns:p="http://schemas.openxmlformats.org/presentationml/2006/main">
-  <p:cSld>
-    <p:spTree>
-      <p:nvGrpSpPr>
-        <p:cNvPr id="1" name="">
-          <a:extLst>
-            <a:ext uri="{FF2B5EF4-FFF2-40B4-BE49-F238E27FC236}">
-              <a16:creationId xmlns:a16="http://schemas.microsoft.com/office/drawing/2014/main" id="{C18D8154-5674-3592-043C-ED5B85D562DE}"/>
-            </a:ext>
-          </a:extLst>
-        </p:cNvPr>
-        <p:cNvGrpSpPr/>
-        <p:nvPr/>
-      </p:nvGrpSpPr>
-      <p:grpSpPr>
-        <a:xfrm>
-          <a:off x="0" y="0"/>
-          <a:ext cx="0" cy="0"/>
-          <a:chOff x="0" y="0"/>
-          <a:chExt cx="0" cy="0"/>
-        </a:xfrm>
-      </p:grpSpPr>
-      <p:sp>
-        <p:nvSpPr>
-          <p:cNvPr id="2" name="슬라이드 이미지 개체 틀 1">
-            <a:extLst>
-              <a:ext uri="{FF2B5EF4-FFF2-40B4-BE49-F238E27FC236}">
-                <a16:creationId xmlns:a16="http://schemas.microsoft.com/office/drawing/2014/main" id="{24196531-8DAF-7C4B-C085-A0F72FDF03DC}"/>
-              </a:ext>
-            </a:extLst>
-          </p:cNvPr>
-          <p:cNvSpPr>
-            <a:spLocks noGrp="1" noRot="1" noChangeAspect="1"/>
-          </p:cNvSpPr>
-          <p:nvPr>
-            <p:ph type="sldImg"/>
-          </p:nvPr>
-        </p:nvSpPr>
-        <p:spPr/>
-      </p:sp>
-      <p:sp>
-        <p:nvSpPr>
-          <p:cNvPr id="3" name="슬라이드 노트 개체 틀 2">
-            <a:extLst>
-              <a:ext uri="{FF2B5EF4-FFF2-40B4-BE49-F238E27FC236}">
-                <a16:creationId xmlns:a16="http://schemas.microsoft.com/office/drawing/2014/main" id="{CF11258C-00BC-693E-9655-C702C0AED591}"/>
-              </a:ext>
-            </a:extLst>
-          </p:cNvPr>
-          <p:cNvSpPr>
-            <a:spLocks noGrp="1"/>
-          </p:cNvSpPr>
-          <p:nvPr>
-            <p:ph type="body" idx="1"/>
-          </p:nvPr>
-        </p:nvSpPr>
-        <p:spPr/>
-        <p:txBody>
-          <a:bodyPr/>
-          <a:lstStyle/>
-          <a:p>
-            <a:endParaRPr lang="ko-KR" altLang="en-US"/>
-          </a:p>
-        </p:txBody>
-      </p:sp>
-      <p:sp>
-        <p:nvSpPr>
-          <p:cNvPr id="4" name="슬라이드 번호 개체 틀 3">
-            <a:extLst>
-              <a:ext uri="{FF2B5EF4-FFF2-40B4-BE49-F238E27FC236}">
-                <a16:creationId xmlns:a16="http://schemas.microsoft.com/office/drawing/2014/main" id="{4FE7B02C-31F7-C577-64B6-706B91BEEA21}"/>
-              </a:ext>
-            </a:extLst>
-          </p:cNvPr>
-          <p:cNvSpPr>
-            <a:spLocks noGrp="1"/>
-          </p:cNvSpPr>
-          <p:nvPr>
-            <p:ph type="sldNum" sz="quarter" idx="10"/>
-          </p:nvPr>
-        </p:nvSpPr>
-        <p:spPr/>
-        <p:txBody>
-          <a:bodyPr/>
-          <a:lstStyle/>
-          <a:p>
-            <a:pPr>
-              <a:defRPr/>
-            </a:pPr>
-            <a:fld id="{F8CEB46D-9B0E-47D1-8684-1DB50B81E07A}" type="slidenum">
-              <a:rPr lang="ko-KR" altLang="en-US" smtClean="0"/>
-              <a:pPr>
-                <a:defRPr/>
-              </a:pPr>
-              <a:t>17</a:t>
-            </a:fld>
-            <a:endParaRPr lang="ko-KR" altLang="en-US"/>
-          </a:p>
-        </p:txBody>
-      </p:sp>
-    </p:spTree>
-    <p:extLst>
-      <p:ext uri="{BB962C8B-B14F-4D97-AF65-F5344CB8AC3E}">
-        <p14:creationId xmlns:p14="http://schemas.microsoft.com/office/powerpoint/2010/main" val="477361152"/>
-      </p:ext>
-    </p:extLst>
-  </p:cSld>
-  <p:clrMapOvr>
-    <a:masterClrMapping/>
-  </p:clrMapOvr>
-</p:notes>
-</file>
-
-<file path=ppt/notesSlides/notesSlide16.xml><?xml version="1.0" encoding="utf-8"?>
-<p:notes xmlns:a="http://schemas.openxmlformats.org/drawingml/2006/main" xmlns:r="http://schemas.openxmlformats.org/officeDocument/2006/relationships" xmlns:p="http://schemas.openxmlformats.org/presentationml/2006/main">
-  <p:cSld>
-    <p:spTree>
-      <p:nvGrpSpPr>
-        <p:cNvPr id="1" name="">
-          <a:extLst>
-            <a:ext uri="{FF2B5EF4-FFF2-40B4-BE49-F238E27FC236}">
-              <a16:creationId xmlns:a16="http://schemas.microsoft.com/office/drawing/2014/main" id="{C18D8154-5674-3592-043C-ED5B85D562DE}"/>
-            </a:ext>
-          </a:extLst>
-        </p:cNvPr>
-        <p:cNvGrpSpPr/>
-        <p:nvPr/>
-      </p:nvGrpSpPr>
-      <p:grpSpPr>
-        <a:xfrm>
-          <a:off x="0" y="0"/>
-          <a:ext cx="0" cy="0"/>
-          <a:chOff x="0" y="0"/>
-          <a:chExt cx="0" cy="0"/>
-        </a:xfrm>
-      </p:grpSpPr>
-      <p:sp>
-        <p:nvSpPr>
-          <p:cNvPr id="2" name="슬라이드 이미지 개체 틀 1">
-            <a:extLst>
-              <a:ext uri="{FF2B5EF4-FFF2-40B4-BE49-F238E27FC236}">
-                <a16:creationId xmlns:a16="http://schemas.microsoft.com/office/drawing/2014/main" id="{24196531-8DAF-7C4B-C085-A0F72FDF03DC}"/>
-              </a:ext>
-            </a:extLst>
-          </p:cNvPr>
-          <p:cNvSpPr>
-            <a:spLocks noGrp="1" noRot="1" noChangeAspect="1"/>
-          </p:cNvSpPr>
-          <p:nvPr>
-            <p:ph type="sldImg"/>
-          </p:nvPr>
-        </p:nvSpPr>
-        <p:spPr/>
-      </p:sp>
-      <p:sp>
-        <p:nvSpPr>
-          <p:cNvPr id="3" name="슬라이드 노트 개체 틀 2">
-            <a:extLst>
-              <a:ext uri="{FF2B5EF4-FFF2-40B4-BE49-F238E27FC236}">
-                <a16:creationId xmlns:a16="http://schemas.microsoft.com/office/drawing/2014/main" id="{CF11258C-00BC-693E-9655-C702C0AED591}"/>
-              </a:ext>
-            </a:extLst>
-          </p:cNvPr>
-          <p:cNvSpPr>
-            <a:spLocks noGrp="1"/>
-          </p:cNvSpPr>
-          <p:nvPr>
-            <p:ph type="body" idx="1"/>
-          </p:nvPr>
-        </p:nvSpPr>
-        <p:spPr/>
-        <p:txBody>
-          <a:bodyPr/>
-          <a:lstStyle/>
-          <a:p>
-            <a:endParaRPr lang="ko-KR" altLang="en-US"/>
-          </a:p>
-        </p:txBody>
-      </p:sp>
-      <p:sp>
-        <p:nvSpPr>
-          <p:cNvPr id="4" name="슬라이드 번호 개체 틀 3">
-            <a:extLst>
-              <a:ext uri="{FF2B5EF4-FFF2-40B4-BE49-F238E27FC236}">
-                <a16:creationId xmlns:a16="http://schemas.microsoft.com/office/drawing/2014/main" id="{4FE7B02C-31F7-C577-64B6-706B91BEEA21}"/>
-              </a:ext>
-            </a:extLst>
-          </p:cNvPr>
-          <p:cNvSpPr>
-            <a:spLocks noGrp="1"/>
-          </p:cNvSpPr>
-          <p:nvPr>
-            <p:ph type="sldNum" sz="quarter" idx="10"/>
-          </p:nvPr>
-        </p:nvSpPr>
-        <p:spPr/>
-        <p:txBody>
-          <a:bodyPr/>
-          <a:lstStyle/>
-          <a:p>
-            <a:pPr>
-              <a:defRPr/>
-            </a:pPr>
-            <a:fld id="{F8CEB46D-9B0E-47D1-8684-1DB50B81E07A}" type="slidenum">
-              <a:rPr lang="ko-KR" altLang="en-US" smtClean="0"/>
-              <a:pPr>
-                <a:defRPr/>
-              </a:pPr>
-              <a:t>18</a:t>
-            </a:fld>
-            <a:endParaRPr lang="ko-KR" altLang="en-US"/>
-          </a:p>
-        </p:txBody>
-      </p:sp>
-    </p:spTree>
-    <p:extLst>
-      <p:ext uri="{BB962C8B-B14F-4D97-AF65-F5344CB8AC3E}">
-        <p14:creationId xmlns:p14="http://schemas.microsoft.com/office/powerpoint/2010/main" val="679483752"/>
-      </p:ext>
-    </p:extLst>
-  </p:cSld>
-  <p:clrMapOvr>
-    <a:masterClrMapping/>
-  </p:clrMapOvr>
-</p:notes>
-</file>
-
-<file path=ppt/notesSlides/notesSlide17.xml><?xml version="1.0" encoding="utf-8"?>
-<p:notes xmlns:a="http://schemas.openxmlformats.org/drawingml/2006/main" xmlns:r="http://schemas.openxmlformats.org/officeDocument/2006/relationships" xmlns:p="http://schemas.openxmlformats.org/presentationml/2006/main">
-  <p:cSld>
-    <p:spTree>
-      <p:nvGrpSpPr>
-        <p:cNvPr id="1" name="">
-          <a:extLst>
-            <a:ext uri="{FF2B5EF4-FFF2-40B4-BE49-F238E27FC236}">
-              <a16:creationId xmlns:a16="http://schemas.microsoft.com/office/drawing/2014/main" id="{BA5177CE-0C07-EECB-B702-9A5061952A8C}"/>
-            </a:ext>
-          </a:extLst>
-        </p:cNvPr>
-        <p:cNvGrpSpPr/>
-        <p:nvPr/>
-      </p:nvGrpSpPr>
-      <p:grpSpPr>
-        <a:xfrm>
-          <a:off x="0" y="0"/>
-          <a:ext cx="0" cy="0"/>
-          <a:chOff x="0" y="0"/>
-          <a:chExt cx="0" cy="0"/>
-        </a:xfrm>
-      </p:grpSpPr>
-      <p:sp>
-        <p:nvSpPr>
-          <p:cNvPr id="2" name="슬라이드 이미지 개체 틀 1">
-            <a:extLst>
-              <a:ext uri="{FF2B5EF4-FFF2-40B4-BE49-F238E27FC236}">
-                <a16:creationId xmlns:a16="http://schemas.microsoft.com/office/drawing/2014/main" id="{45D2D7CD-178D-4F5E-F957-8EF6A20869EA}"/>
-              </a:ext>
-            </a:extLst>
-          </p:cNvPr>
-          <p:cNvSpPr>
-            <a:spLocks noGrp="1" noRot="1" noChangeAspect="1"/>
-          </p:cNvSpPr>
-          <p:nvPr>
-            <p:ph type="sldImg"/>
-          </p:nvPr>
-        </p:nvSpPr>
-        <p:spPr/>
-      </p:sp>
-      <p:sp>
-        <p:nvSpPr>
-          <p:cNvPr id="3" name="슬라이드 노트 개체 틀 2">
-            <a:extLst>
-              <a:ext uri="{FF2B5EF4-FFF2-40B4-BE49-F238E27FC236}">
-                <a16:creationId xmlns:a16="http://schemas.microsoft.com/office/drawing/2014/main" id="{9B64418A-FF3E-E05F-7A02-BC1B4B69B3A9}"/>
-              </a:ext>
-            </a:extLst>
-          </p:cNvPr>
-          <p:cNvSpPr>
-            <a:spLocks noGrp="1"/>
-          </p:cNvSpPr>
-          <p:nvPr>
-            <p:ph type="body" idx="1"/>
-          </p:nvPr>
-        </p:nvSpPr>
-        <p:spPr/>
-        <p:txBody>
-          <a:bodyPr/>
-          <a:lstStyle/>
-          <a:p>
-            <a:endParaRPr lang="ko-KR" altLang="en-US"/>
-          </a:p>
-        </p:txBody>
-      </p:sp>
-      <p:sp>
-        <p:nvSpPr>
-          <p:cNvPr id="4" name="슬라이드 번호 개체 틀 3">
-            <a:extLst>
-              <a:ext uri="{FF2B5EF4-FFF2-40B4-BE49-F238E27FC236}">
-                <a16:creationId xmlns:a16="http://schemas.microsoft.com/office/drawing/2014/main" id="{4E604D99-5A03-9AEE-6937-76DB63759A4A}"/>
-              </a:ext>
-            </a:extLst>
-          </p:cNvPr>
-          <p:cNvSpPr>
-            <a:spLocks noGrp="1"/>
-          </p:cNvSpPr>
-          <p:nvPr>
-            <p:ph type="sldNum" sz="quarter" idx="10"/>
-          </p:nvPr>
-        </p:nvSpPr>
-        <p:spPr/>
-        <p:txBody>
-          <a:bodyPr/>
-          <a:lstStyle/>
-          <a:p>
-            <a:pPr>
-              <a:defRPr/>
-            </a:pPr>
-            <a:fld id="{F8CEB46D-9B0E-47D1-8684-1DB50B81E07A}" type="slidenum">
-              <a:rPr lang="ko-KR" altLang="en-US" smtClean="0"/>
-              <a:pPr>
-                <a:defRPr/>
-              </a:pPr>
-              <a:t>19</a:t>
-            </a:fld>
-            <a:endParaRPr lang="ko-KR" altLang="en-US"/>
-          </a:p>
-        </p:txBody>
-      </p:sp>
-    </p:spTree>
-    <p:extLst>
-      <p:ext uri="{BB962C8B-B14F-4D97-AF65-F5344CB8AC3E}">
-        <p14:creationId xmlns:p14="http://schemas.microsoft.com/office/powerpoint/2010/main" val="3747904937"/>
-      </p:ext>
-    </p:extLst>
-  </p:cSld>
-  <p:clrMapOvr>
-    <a:masterClrMapping/>
-  </p:clrMapOvr>
-</p:notes>
-</file>
-
-<file path=ppt/notesSlides/notesSlide2.xml><?xml version="1.0" encoding="utf-8"?>
-<p:notes xmlns:a="http://schemas.openxmlformats.org/drawingml/2006/main" xmlns:r="http://schemas.openxmlformats.org/officeDocument/2006/relationships" xmlns:p="http://schemas.openxmlformats.org/presentationml/2006/main">
-  <p:cSld>
-    <p:spTree>
-      <p:nvGrpSpPr>
-        <p:cNvPr id="1" name="">
-          <a:extLst>
-            <a:ext uri="{FF2B5EF4-FFF2-40B4-BE49-F238E27FC236}">
-              <a16:creationId xmlns:a16="http://schemas.microsoft.com/office/drawing/2014/main" id="{CBECE528-7F58-8114-7800-EFA4906820BA}"/>
-            </a:ext>
-          </a:extLst>
-        </p:cNvPr>
-        <p:cNvGrpSpPr/>
-        <p:nvPr/>
-      </p:nvGrpSpPr>
-      <p:grpSpPr>
-        <a:xfrm>
-          <a:off x="0" y="0"/>
-          <a:ext cx="0" cy="0"/>
-          <a:chOff x="0" y="0"/>
-          <a:chExt cx="0" cy="0"/>
-        </a:xfrm>
-      </p:grpSpPr>
-      <p:sp>
-        <p:nvSpPr>
-          <p:cNvPr id="17410" name="슬라이드 이미지 개체 틀 1">
-            <a:extLst>
-              <a:ext uri="{FF2B5EF4-FFF2-40B4-BE49-F238E27FC236}">
-                <a16:creationId xmlns:a16="http://schemas.microsoft.com/office/drawing/2014/main" id="{301D9848-AD40-DF15-D243-28D631A9CD52}"/>
-              </a:ext>
-            </a:extLst>
-          </p:cNvPr>
-          <p:cNvSpPr>
-            <a:spLocks noGrp="1" noRot="1" noChangeAspect="1" noTextEdit="1"/>
-          </p:cNvSpPr>
-          <p:nvPr>
-            <p:ph type="sldImg"/>
-          </p:nvPr>
-        </p:nvSpPr>
-        <p:spPr bwMode="auto">
-          <a:noFill/>
-          <a:ln>
-            <a:solidFill>
-              <a:srgbClr val="000000"/>
-            </a:solidFill>
-            <a:miter lim="800000"/>
-            <a:headEnd/>
-            <a:tailEnd/>
-          </a:ln>
-          <a:extLst>
-            <a:ext uri="{909E8E84-426E-40DD-AFC4-6F175D3DCCD1}">
-              <a14:hiddenFill xmlns:a14="http://schemas.microsoft.com/office/drawing/2010/main">
-                <a:solidFill>
-                  <a:srgbClr val="FFFFFF"/>
-                </a:solidFill>
-              </a14:hiddenFill>
-            </a:ext>
-          </a:extLst>
-        </p:spPr>
-      </p:sp>
-      <p:sp>
-        <p:nvSpPr>
-          <p:cNvPr id="17411" name="슬라이드 노트 개체 틀 2">
-            <a:extLst>
-              <a:ext uri="{FF2B5EF4-FFF2-40B4-BE49-F238E27FC236}">
-                <a16:creationId xmlns:a16="http://schemas.microsoft.com/office/drawing/2014/main" id="{091CA6EA-ABB6-24D8-9BAE-97421D8EE256}"/>
-              </a:ext>
-            </a:extLst>
-          </p:cNvPr>
-          <p:cNvSpPr>
-            <a:spLocks noGrp="1"/>
-          </p:cNvSpPr>
-          <p:nvPr>
-            <p:ph type="body" idx="1"/>
-          </p:nvPr>
-        </p:nvSpPr>
-        <p:spPr bwMode="auto">
-          <a:noFill/>
-          <a:extLst>
-            <a:ext uri="{909E8E84-426E-40DD-AFC4-6F175D3DCCD1}">
-              <a14:hiddenFill xmlns:a14="http://schemas.microsoft.com/office/drawing/2010/main">
-                <a:solidFill>
-                  <a:srgbClr val="FFFFFF"/>
-                </a:solidFill>
-              </a14:hiddenFill>
-            </a:ext>
-            <a:ext uri="{91240B29-F687-4F45-9708-019B960494DF}">
-              <a14:hiddenLine xmlns:a14="http://schemas.microsoft.com/office/drawing/2010/main" w="9525">
-                <a:solidFill>
-                  <a:srgbClr val="000000"/>
-                </a:solidFill>
-                <a:miter lim="800000"/>
-                <a:headEnd/>
-                <a:tailEnd/>
-              </a14:hiddenLine>
-            </a:ext>
-          </a:extLst>
-        </p:spPr>
-        <p:txBody>
-          <a:bodyPr wrap="square" numCol="1" anchor="t" anchorCtr="0" compatLnSpc="1">
-            <a:prstTxWarp prst="textNoShape">
-              <a:avLst/>
-            </a:prstTxWarp>
-          </a:bodyPr>
-          <a:lstStyle/>
-          <a:p>
-            <a:endParaRPr lang="ko-KR" altLang="en-US"/>
-          </a:p>
-        </p:txBody>
-      </p:sp>
-      <p:sp>
-        <p:nvSpPr>
-          <p:cNvPr id="17412" name="슬라이드 번호 개체 틀 3">
-            <a:extLst>
-              <a:ext uri="{FF2B5EF4-FFF2-40B4-BE49-F238E27FC236}">
-                <a16:creationId xmlns:a16="http://schemas.microsoft.com/office/drawing/2014/main" id="{937960F0-1989-1616-5FDB-55CF6FAE0614}"/>
-              </a:ext>
-            </a:extLst>
-          </p:cNvPr>
-          <p:cNvSpPr>
-            <a:spLocks noGrp="1"/>
-          </p:cNvSpPr>
-          <p:nvPr>
-            <p:ph type="sldNum" sz="quarter" idx="5"/>
-          </p:nvPr>
-        </p:nvSpPr>
-        <p:spPr bwMode="auto">
-          <a:noFill/>
-          <a:extLst>
-            <a:ext uri="{909E8E84-426E-40DD-AFC4-6F175D3DCCD1}">
-              <a14:hiddenFill xmlns:a14="http://schemas.microsoft.com/office/drawing/2010/main">
-                <a:solidFill>
-                  <a:srgbClr val="FFFFFF"/>
-                </a:solidFill>
-              </a14:hiddenFill>
-            </a:ext>
-            <a:ext uri="{91240B29-F687-4F45-9708-019B960494DF}">
-              <a14:hiddenLine xmlns:a14="http://schemas.microsoft.com/office/drawing/2010/main" w="9525">
-                <a:solidFill>
-                  <a:srgbClr val="000000"/>
-                </a:solidFill>
-                <a:miter lim="800000"/>
-                <a:headEnd/>
-                <a:tailEnd/>
-              </a14:hiddenLine>
-            </a:ext>
-          </a:extLst>
-        </p:spPr>
-        <p:txBody>
-          <a:bodyPr/>
-          <a:lstStyle>
-            <a:lvl1pPr latinLnBrk="1">
-              <a:spcBef>
-                <a:spcPct val="30000"/>
-              </a:spcBef>
-              <a:defRPr sz="1200">
-                <a:solidFill>
-                  <a:schemeClr val="tx1"/>
-                </a:solidFill>
-                <a:latin typeface="맑은 고딕" panose="020B0503020000020004" pitchFamily="50" charset="-127"/>
-                <a:ea typeface="맑은 고딕" panose="020B0503020000020004" pitchFamily="50" charset="-127"/>
-              </a:defRPr>
-            </a:lvl1pPr>
-            <a:lvl2pPr marL="742950" indent="-285750" latinLnBrk="1">
-              <a:spcBef>
-                <a:spcPct val="30000"/>
-              </a:spcBef>
-              <a:defRPr sz="1200">
-                <a:solidFill>
-                  <a:schemeClr val="tx1"/>
-                </a:solidFill>
-                <a:latin typeface="맑은 고딕" panose="020B0503020000020004" pitchFamily="50" charset="-127"/>
-                <a:ea typeface="맑은 고딕" panose="020B0503020000020004" pitchFamily="50" charset="-127"/>
-              </a:defRPr>
-            </a:lvl2pPr>
-            <a:lvl3pPr marL="1143000" indent="-228600" latinLnBrk="1">
-              <a:spcBef>
-                <a:spcPct val="30000"/>
-              </a:spcBef>
-              <a:defRPr sz="1200">
-                <a:solidFill>
-                  <a:schemeClr val="tx1"/>
-                </a:solidFill>
-                <a:latin typeface="맑은 고딕" panose="020B0503020000020004" pitchFamily="50" charset="-127"/>
-                <a:ea typeface="맑은 고딕" panose="020B0503020000020004" pitchFamily="50" charset="-127"/>
-              </a:defRPr>
-            </a:lvl3pPr>
-            <a:lvl4pPr marL="1600200" indent="-228600" latinLnBrk="1">
-              <a:spcBef>
-                <a:spcPct val="30000"/>
-              </a:spcBef>
-              <a:defRPr sz="1200">
-                <a:solidFill>
-                  <a:schemeClr val="tx1"/>
-                </a:solidFill>
-                <a:latin typeface="맑은 고딕" panose="020B0503020000020004" pitchFamily="50" charset="-127"/>
-                <a:ea typeface="맑은 고딕" panose="020B0503020000020004" pitchFamily="50" charset="-127"/>
-              </a:defRPr>
-            </a:lvl4pPr>
-            <a:lvl5pPr marL="2057400" indent="-228600" latinLnBrk="1">
-              <a:spcBef>
-                <a:spcPct val="30000"/>
-              </a:spcBef>
-              <a:defRPr sz="1200">
-                <a:solidFill>
-                  <a:schemeClr val="tx1"/>
-                </a:solidFill>
-                <a:latin typeface="맑은 고딕" panose="020B0503020000020004" pitchFamily="50" charset="-127"/>
-                <a:ea typeface="맑은 고딕" panose="020B0503020000020004" pitchFamily="50" charset="-127"/>
-              </a:defRPr>
-            </a:lvl5pPr>
-            <a:lvl6pPr marL="2514600" indent="-228600" eaLnBrk="0" fontAlgn="base" hangingPunct="0">
-              <a:spcBef>
-                <a:spcPct val="30000"/>
-              </a:spcBef>
-              <a:spcAft>
-                <a:spcPct val="0"/>
-              </a:spcAft>
-              <a:defRPr sz="1200">
-                <a:solidFill>
-                  <a:schemeClr val="tx1"/>
-                </a:solidFill>
-                <a:latin typeface="맑은 고딕" panose="020B0503020000020004" pitchFamily="50" charset="-127"/>
-                <a:ea typeface="맑은 고딕" panose="020B0503020000020004" pitchFamily="50" charset="-127"/>
-              </a:defRPr>
-            </a:lvl6pPr>
-            <a:lvl7pPr marL="2971800" indent="-228600" eaLnBrk="0" fontAlgn="base" hangingPunct="0">
-              <a:spcBef>
-                <a:spcPct val="30000"/>
-              </a:spcBef>
-              <a:spcAft>
-                <a:spcPct val="0"/>
-              </a:spcAft>
-              <a:defRPr sz="1200">
-                <a:solidFill>
-                  <a:schemeClr val="tx1"/>
-                </a:solidFill>
-                <a:latin typeface="맑은 고딕" panose="020B0503020000020004" pitchFamily="50" charset="-127"/>
-                <a:ea typeface="맑은 고딕" panose="020B0503020000020004" pitchFamily="50" charset="-127"/>
-              </a:defRPr>
-            </a:lvl7pPr>
-            <a:lvl8pPr marL="3429000" indent="-228600" eaLnBrk="0" fontAlgn="base" hangingPunct="0">
-              <a:spcBef>
-                <a:spcPct val="30000"/>
-              </a:spcBef>
-              <a:spcAft>
-                <a:spcPct val="0"/>
-              </a:spcAft>
-              <a:defRPr sz="1200">
-                <a:solidFill>
-                  <a:schemeClr val="tx1"/>
-                </a:solidFill>
-                <a:latin typeface="맑은 고딕" panose="020B0503020000020004" pitchFamily="50" charset="-127"/>
-                <a:ea typeface="맑은 고딕" panose="020B0503020000020004" pitchFamily="50" charset="-127"/>
-              </a:defRPr>
-            </a:lvl8pPr>
-            <a:lvl9pPr marL="3886200" indent="-228600" eaLnBrk="0" fontAlgn="base" hangingPunct="0">
-              <a:spcBef>
-                <a:spcPct val="30000"/>
-              </a:spcBef>
-              <a:spcAft>
-                <a:spcPct val="0"/>
-              </a:spcAft>
-              <a:defRPr sz="1200">
-                <a:solidFill>
-                  <a:schemeClr val="tx1"/>
-                </a:solidFill>
-                <a:latin typeface="맑은 고딕" panose="020B0503020000020004" pitchFamily="50" charset="-127"/>
-                <a:ea typeface="맑은 고딕" panose="020B0503020000020004" pitchFamily="50" charset="-127"/>
-              </a:defRPr>
-            </a:lvl9pPr>
-          </a:lstStyle>
-          <a:p>
-            <a:pPr>
-              <a:spcBef>
-                <a:spcPct val="0"/>
-              </a:spcBef>
-            </a:pPr>
-            <a:fld id="{AE97164F-AFE0-47CF-AE29-34AF6F04086E}" type="slidenum">
-              <a:rPr lang="ko-KR" altLang="en-US"/>
-              <a:pPr>
-                <a:spcBef>
-                  <a:spcPct val="0"/>
-                </a:spcBef>
-              </a:pPr>
-              <a:t>2</a:t>
-            </a:fld>
-            <a:endParaRPr lang="ko-KR" altLang="en-US"/>
-          </a:p>
-        </p:txBody>
-      </p:sp>
-    </p:spTree>
-    <p:extLst>
-      <p:ext uri="{BB962C8B-B14F-4D97-AF65-F5344CB8AC3E}">
-        <p14:creationId xmlns:p14="http://schemas.microsoft.com/office/powerpoint/2010/main" val="2528338647"/>
-      </p:ext>
-    </p:extLst>
-  </p:cSld>
-  <p:clrMapOvr>
-    <a:masterClrMapping/>
-  </p:clrMapOvr>
-</p:notes>
-</file>
-
-<file path=ppt/notesSlides/notesSlide3.xml><?xml version="1.0" encoding="utf-8"?>
-<p:notes xmlns:a="http://schemas.openxmlformats.org/drawingml/2006/main" xmlns:r="http://schemas.openxmlformats.org/officeDocument/2006/relationships" xmlns:p="http://schemas.openxmlformats.org/presentationml/2006/main">
-  <p:cSld>
-    <p:spTree>
-      <p:nvGrpSpPr>
-        <p:cNvPr id="1" name="">
-          <a:extLst>
-            <a:ext uri="{FF2B5EF4-FFF2-40B4-BE49-F238E27FC236}">
-              <a16:creationId xmlns:a16="http://schemas.microsoft.com/office/drawing/2014/main" id="{0A08FF79-6E0B-4FCD-4276-D4CAA1B9B70F}"/>
-            </a:ext>
-          </a:extLst>
-        </p:cNvPr>
-        <p:cNvGrpSpPr/>
-        <p:nvPr/>
-      </p:nvGrpSpPr>
-      <p:grpSpPr>
-        <a:xfrm>
-          <a:off x="0" y="0"/>
-          <a:ext cx="0" cy="0"/>
-          <a:chOff x="0" y="0"/>
-          <a:chExt cx="0" cy="0"/>
-        </a:xfrm>
-      </p:grpSpPr>
-      <p:sp>
-        <p:nvSpPr>
-          <p:cNvPr id="17410" name="슬라이드 이미지 개체 틀 1">
-            <a:extLst>
-              <a:ext uri="{FF2B5EF4-FFF2-40B4-BE49-F238E27FC236}">
-                <a16:creationId xmlns:a16="http://schemas.microsoft.com/office/drawing/2014/main" id="{2C6B5741-4F6C-4D1A-EEF6-369E9297ED61}"/>
-              </a:ext>
-            </a:extLst>
-          </p:cNvPr>
-          <p:cNvSpPr>
-            <a:spLocks noGrp="1" noRot="1" noChangeAspect="1" noTextEdit="1"/>
-          </p:cNvSpPr>
-          <p:nvPr>
-            <p:ph type="sldImg"/>
-          </p:nvPr>
-        </p:nvSpPr>
-        <p:spPr bwMode="auto">
-          <a:noFill/>
-          <a:ln>
-            <a:solidFill>
-              <a:srgbClr val="000000"/>
-            </a:solidFill>
-            <a:miter lim="800000"/>
-            <a:headEnd/>
-            <a:tailEnd/>
-          </a:ln>
-          <a:extLst>
-            <a:ext uri="{909E8E84-426E-40DD-AFC4-6F175D3DCCD1}">
-              <a14:hiddenFill xmlns:a14="http://schemas.microsoft.com/office/drawing/2010/main">
-                <a:solidFill>
-                  <a:srgbClr val="FFFFFF"/>
-                </a:solidFill>
-              </a14:hiddenFill>
-            </a:ext>
-          </a:extLst>
-        </p:spPr>
-      </p:sp>
-      <p:sp>
-        <p:nvSpPr>
-          <p:cNvPr id="17411" name="슬라이드 노트 개체 틀 2">
-            <a:extLst>
-              <a:ext uri="{FF2B5EF4-FFF2-40B4-BE49-F238E27FC236}">
-                <a16:creationId xmlns:a16="http://schemas.microsoft.com/office/drawing/2014/main" id="{73D3F1C7-091C-1E87-193D-1AF1F221AD67}"/>
-              </a:ext>
-            </a:extLst>
-          </p:cNvPr>
-          <p:cNvSpPr>
-            <a:spLocks noGrp="1"/>
-          </p:cNvSpPr>
-          <p:nvPr>
-            <p:ph type="body" idx="1"/>
-          </p:nvPr>
-        </p:nvSpPr>
-        <p:spPr bwMode="auto">
-          <a:noFill/>
-          <a:extLst>
-            <a:ext uri="{909E8E84-426E-40DD-AFC4-6F175D3DCCD1}">
-              <a14:hiddenFill xmlns:a14="http://schemas.microsoft.com/office/drawing/2010/main">
-                <a:solidFill>
-                  <a:srgbClr val="FFFFFF"/>
-                </a:solidFill>
-              </a14:hiddenFill>
-            </a:ext>
-            <a:ext uri="{91240B29-F687-4F45-9708-019B960494DF}">
-              <a14:hiddenLine xmlns:a14="http://schemas.microsoft.com/office/drawing/2010/main" w="9525">
-                <a:solidFill>
-                  <a:srgbClr val="000000"/>
-                </a:solidFill>
-                <a:miter lim="800000"/>
-                <a:headEnd/>
-                <a:tailEnd/>
-              </a14:hiddenLine>
-            </a:ext>
-          </a:extLst>
-        </p:spPr>
-        <p:txBody>
-          <a:bodyPr wrap="square" numCol="1" anchor="t" anchorCtr="0" compatLnSpc="1">
-            <a:prstTxWarp prst="textNoShape">
-              <a:avLst/>
-            </a:prstTxWarp>
-          </a:bodyPr>
-          <a:lstStyle/>
-          <a:p>
-            <a:endParaRPr lang="ko-KR" altLang="en-US"/>
-          </a:p>
-        </p:txBody>
-      </p:sp>
-      <p:sp>
-        <p:nvSpPr>
-          <p:cNvPr id="17412" name="슬라이드 번호 개체 틀 3">
-            <a:extLst>
-              <a:ext uri="{FF2B5EF4-FFF2-40B4-BE49-F238E27FC236}">
-                <a16:creationId xmlns:a16="http://schemas.microsoft.com/office/drawing/2014/main" id="{6F198135-18B5-ED7B-0127-7B81C3306D77}"/>
-              </a:ext>
-            </a:extLst>
-          </p:cNvPr>
-          <p:cNvSpPr>
-            <a:spLocks noGrp="1"/>
-          </p:cNvSpPr>
-          <p:nvPr>
-            <p:ph type="sldNum" sz="quarter" idx="5"/>
-          </p:nvPr>
-        </p:nvSpPr>
-        <p:spPr bwMode="auto">
-          <a:noFill/>
-          <a:extLst>
-            <a:ext uri="{909E8E84-426E-40DD-AFC4-6F175D3DCCD1}">
-              <a14:hiddenFill xmlns:a14="http://schemas.microsoft.com/office/drawing/2010/main">
-                <a:solidFill>
-                  <a:srgbClr val="FFFFFF"/>
-                </a:solidFill>
-              </a14:hiddenFill>
-            </a:ext>
-            <a:ext uri="{91240B29-F687-4F45-9708-019B960494DF}">
-              <a14:hiddenLine xmlns:a14="http://schemas.microsoft.com/office/drawing/2010/main" w="9525">
-                <a:solidFill>
-                  <a:srgbClr val="000000"/>
-                </a:solidFill>
-                <a:miter lim="800000"/>
-                <a:headEnd/>
-                <a:tailEnd/>
-              </a14:hiddenLine>
-            </a:ext>
-          </a:extLst>
-        </p:spPr>
-        <p:txBody>
-          <a:bodyPr/>
-          <a:lstStyle>
-            <a:lvl1pPr latinLnBrk="1">
-              <a:spcBef>
-                <a:spcPct val="30000"/>
-              </a:spcBef>
-              <a:defRPr sz="1200">
-                <a:solidFill>
-                  <a:schemeClr val="tx1"/>
-                </a:solidFill>
-                <a:latin typeface="맑은 고딕" panose="020B0503020000020004" pitchFamily="50" charset="-127"/>
-                <a:ea typeface="맑은 고딕" panose="020B0503020000020004" pitchFamily="50" charset="-127"/>
-              </a:defRPr>
-            </a:lvl1pPr>
-            <a:lvl2pPr marL="742950" indent="-285750" latinLnBrk="1">
-              <a:spcBef>
-                <a:spcPct val="30000"/>
-              </a:spcBef>
-              <a:defRPr sz="1200">
-                <a:solidFill>
-                  <a:schemeClr val="tx1"/>
-                </a:solidFill>
-                <a:latin typeface="맑은 고딕" panose="020B0503020000020004" pitchFamily="50" charset="-127"/>
-                <a:ea typeface="맑은 고딕" panose="020B0503020000020004" pitchFamily="50" charset="-127"/>
-              </a:defRPr>
-            </a:lvl2pPr>
-            <a:lvl3pPr marL="1143000" indent="-228600" latinLnBrk="1">
-              <a:spcBef>
-                <a:spcPct val="30000"/>
-              </a:spcBef>
-              <a:defRPr sz="1200">
-                <a:solidFill>
-                  <a:schemeClr val="tx1"/>
-                </a:solidFill>
-                <a:latin typeface="맑은 고딕" panose="020B0503020000020004" pitchFamily="50" charset="-127"/>
-                <a:ea typeface="맑은 고딕" panose="020B0503020000020004" pitchFamily="50" charset="-127"/>
-              </a:defRPr>
-            </a:lvl3pPr>
-            <a:lvl4pPr marL="1600200" indent="-228600" latinLnBrk="1">
-              <a:spcBef>
-                <a:spcPct val="30000"/>
-              </a:spcBef>
-              <a:defRPr sz="1200">
-                <a:solidFill>
-                  <a:schemeClr val="tx1"/>
-                </a:solidFill>
-                <a:latin typeface="맑은 고딕" panose="020B0503020000020004" pitchFamily="50" charset="-127"/>
-                <a:ea typeface="맑은 고딕" panose="020B0503020000020004" pitchFamily="50" charset="-127"/>
-              </a:defRPr>
-            </a:lvl4pPr>
-            <a:lvl5pPr marL="2057400" indent="-228600" latinLnBrk="1">
-              <a:spcBef>
-                <a:spcPct val="30000"/>
-              </a:spcBef>
-              <a:defRPr sz="1200">
-                <a:solidFill>
-                  <a:schemeClr val="tx1"/>
-                </a:solidFill>
-                <a:latin typeface="맑은 고딕" panose="020B0503020000020004" pitchFamily="50" charset="-127"/>
-                <a:ea typeface="맑은 고딕" panose="020B0503020000020004" pitchFamily="50" charset="-127"/>
-              </a:defRPr>
-            </a:lvl5pPr>
-            <a:lvl6pPr marL="2514600" indent="-228600" eaLnBrk="0" fontAlgn="base" hangingPunct="0">
-              <a:spcBef>
-                <a:spcPct val="30000"/>
-              </a:spcBef>
-              <a:spcAft>
-                <a:spcPct val="0"/>
-              </a:spcAft>
-              <a:defRPr sz="1200">
-                <a:solidFill>
-                  <a:schemeClr val="tx1"/>
-                </a:solidFill>
-                <a:latin typeface="맑은 고딕" panose="020B0503020000020004" pitchFamily="50" charset="-127"/>
-                <a:ea typeface="맑은 고딕" panose="020B0503020000020004" pitchFamily="50" charset="-127"/>
-              </a:defRPr>
-            </a:lvl6pPr>
-            <a:lvl7pPr marL="2971800" indent="-228600" eaLnBrk="0" fontAlgn="base" hangingPunct="0">
-              <a:spcBef>
-                <a:spcPct val="30000"/>
-              </a:spcBef>
-              <a:spcAft>
-                <a:spcPct val="0"/>
-              </a:spcAft>
-              <a:defRPr sz="1200">
-                <a:solidFill>
-                  <a:schemeClr val="tx1"/>
-                </a:solidFill>
-                <a:latin typeface="맑은 고딕" panose="020B0503020000020004" pitchFamily="50" charset="-127"/>
-                <a:ea typeface="맑은 고딕" panose="020B0503020000020004" pitchFamily="50" charset="-127"/>
-              </a:defRPr>
-            </a:lvl7pPr>
-            <a:lvl8pPr marL="3429000" indent="-228600" eaLnBrk="0" fontAlgn="base" hangingPunct="0">
-              <a:spcBef>
-                <a:spcPct val="30000"/>
-              </a:spcBef>
-              <a:spcAft>
-                <a:spcPct val="0"/>
-              </a:spcAft>
-              <a:defRPr sz="1200">
-                <a:solidFill>
-                  <a:schemeClr val="tx1"/>
-                </a:solidFill>
-                <a:latin typeface="맑은 고딕" panose="020B0503020000020004" pitchFamily="50" charset="-127"/>
-                <a:ea typeface="맑은 고딕" panose="020B0503020000020004" pitchFamily="50" charset="-127"/>
-              </a:defRPr>
-            </a:lvl8pPr>
-            <a:lvl9pPr marL="3886200" indent="-228600" eaLnBrk="0" fontAlgn="base" hangingPunct="0">
-              <a:spcBef>
-                <a:spcPct val="30000"/>
-              </a:spcBef>
-              <a:spcAft>
-                <a:spcPct val="0"/>
-              </a:spcAft>
-              <a:defRPr sz="1200">
-                <a:solidFill>
-                  <a:schemeClr val="tx1"/>
-                </a:solidFill>
-                <a:latin typeface="맑은 고딕" panose="020B0503020000020004" pitchFamily="50" charset="-127"/>
-                <a:ea typeface="맑은 고딕" panose="020B0503020000020004" pitchFamily="50" charset="-127"/>
-              </a:defRPr>
-            </a:lvl9pPr>
-          </a:lstStyle>
-          <a:p>
-            <a:pPr>
-              <a:spcBef>
-                <a:spcPct val="0"/>
-              </a:spcBef>
-            </a:pPr>
-            <a:fld id="{AE97164F-AFE0-47CF-AE29-34AF6F04086E}" type="slidenum">
-              <a:rPr lang="ko-KR" altLang="en-US"/>
-              <a:pPr>
-                <a:spcBef>
-                  <a:spcPct val="0"/>
-                </a:spcBef>
-              </a:pPr>
-              <a:t>3</a:t>
-            </a:fld>
-            <a:endParaRPr lang="ko-KR" altLang="en-US"/>
-          </a:p>
-        </p:txBody>
-      </p:sp>
-    </p:spTree>
-    <p:extLst>
-      <p:ext uri="{BB962C8B-B14F-4D97-AF65-F5344CB8AC3E}">
-        <p14:creationId xmlns:p14="http://schemas.microsoft.com/office/powerpoint/2010/main" val="3097398583"/>
-      </p:ext>
-    </p:extLst>
-  </p:cSld>
-  <p:clrMapOvr>
-    <a:masterClrMapping/>
-  </p:clrMapOvr>
-</p:notes>
-</file>
-
-<file path=ppt/notesSlides/notesSlide4.xml><?xml version="1.0" encoding="utf-8"?>
-<p:notes xmlns:a="http://schemas.openxmlformats.org/drawingml/2006/main" xmlns:r="http://schemas.openxmlformats.org/officeDocument/2006/relationships" xmlns:p="http://schemas.openxmlformats.org/presentationml/2006/main">
+<p:notes xmlns:r="http://schemas.openxmlformats.org/officeDocument/2006/relationships" xmlns:c="http://schemas.openxmlformats.org/drawingml/2006/chart" xmlns:a="http://schemas.openxmlformats.org/drawingml/2006/main" xmlns:dgm="http://schemas.openxmlformats.org/drawingml/2006/diagram" xmlns:dsp="http://schemas.microsoft.com/office/drawing/2008/diagram" xmlns:p="http://schemas.openxmlformats.org/presentationml/2006/main">
   <p:cSld>
     <p:spTree>
       <p:nvGrpSpPr>
@@ -2420,38 +875,19 @@
       </p:grpSpPr>
       <p:sp>
         <p:nvSpPr>
-          <p:cNvPr id="17410" name="슬라이드 이미지 개체 틀 1"/>
+          <p:cNvPr id="2" name="슬라이드 이미지 개체 틀 1"/>
           <p:cNvSpPr>
             <a:spLocks noGrp="1" noRot="1" noChangeAspect="1" noTextEdit="1"/>
           </p:cNvSpPr>
           <p:nvPr>
-            <p:ph type="sldImg"/>
-          </p:nvPr>
-        </p:nvSpPr>
-        <p:spPr bwMode="auto">
-          <a:noFill/>
-          <a:ln>
-            <a:solidFill>
-              <a:srgbClr val="000000"/>
-            </a:solidFill>
-            <a:miter lim="800000"/>
-            <a:headEnd/>
-            <a:tailEnd/>
-          </a:ln>
-          <a:extLst>
-            <a:ext uri="{909E8E84-426E-40DD-AFC4-6F175D3DCCD1}">
-              <a14:hiddenFill xmlns:a14="http://schemas.microsoft.com/office/drawing/2010/main">
-                <a:solidFill>
-                  <a:srgbClr val="FFFFFF"/>
-                </a:solidFill>
-              </a14:hiddenFill>
-            </a:ext>
-          </a:extLst>
-        </p:spPr>
-      </p:sp>
-      <p:sp>
-        <p:nvSpPr>
-          <p:cNvPr id="17411" name="슬라이드 노트 개체 틀 2"/>
+            <p:ph type="sldImg" idx="0"/>
+          </p:nvPr>
+        </p:nvSpPr>
+        <p:spPr/>
+      </p:sp>
+      <p:sp>
+        <p:nvSpPr>
+          <p:cNvPr id="3" name="슬라이드 노트 개체 틀 2"/>
           <p:cNvSpPr>
             <a:spLocks noGrp="1"/>
           </p:cNvSpPr>
@@ -2459,212 +895,48 @@
             <p:ph type="body" idx="1"/>
           </p:nvPr>
         </p:nvSpPr>
-        <p:spPr bwMode="auto">
-          <a:noFill/>
-          <a:extLst>
-            <a:ext uri="{909E8E84-426E-40DD-AFC4-6F175D3DCCD1}">
-              <a14:hiddenFill xmlns:a14="http://schemas.microsoft.com/office/drawing/2010/main">
-                <a:solidFill>
-                  <a:srgbClr val="FFFFFF"/>
-                </a:solidFill>
-              </a14:hiddenFill>
-            </a:ext>
-            <a:ext uri="{91240B29-F687-4F45-9708-019B960494DF}">
-              <a14:hiddenLine xmlns:a14="http://schemas.microsoft.com/office/drawing/2010/main" w="9525">
-                <a:solidFill>
-                  <a:srgbClr val="000000"/>
-                </a:solidFill>
-                <a:miter lim="800000"/>
-                <a:headEnd/>
-                <a:tailEnd/>
-              </a14:hiddenLine>
-            </a:ext>
-          </a:extLst>
-        </p:spPr>
-        <p:txBody>
-          <a:bodyPr wrap="square" numCol="1" anchor="t" anchorCtr="0" compatLnSpc="1">
-            <a:prstTxWarp prst="textNoShape">
-              <a:avLst/>
-            </a:prstTxWarp>
-          </a:bodyPr>
+        <p:spPr/>
+        <p:txBody>
+          <a:bodyPr/>
           <a:lstStyle/>
           <a:p>
+            <a:pPr lvl="0">
+              <a:defRPr/>
+            </a:pPr>
+            <a:r>
+              <a:rPr lang="ko-KR" altLang="en-US"/>
+              <a:t/>
+            </a:r>
             <a:endParaRPr lang="ko-KR" altLang="en-US"/>
           </a:p>
         </p:txBody>
       </p:sp>
       <p:sp>
         <p:nvSpPr>
-          <p:cNvPr id="17412" name="슬라이드 번호 개체 틀 3"/>
-          <p:cNvSpPr>
-            <a:spLocks noGrp="1"/>
-          </p:cNvSpPr>
-          <p:nvPr>
-            <p:ph type="sldNum" sz="quarter" idx="5"/>
-          </p:nvPr>
-        </p:nvSpPr>
-        <p:spPr bwMode="auto">
-          <a:noFill/>
-          <a:extLst>
-            <a:ext uri="{909E8E84-426E-40DD-AFC4-6F175D3DCCD1}">
-              <a14:hiddenFill xmlns:a14="http://schemas.microsoft.com/office/drawing/2010/main">
-                <a:solidFill>
-                  <a:srgbClr val="FFFFFF"/>
-                </a:solidFill>
-              </a14:hiddenFill>
-            </a:ext>
-            <a:ext uri="{91240B29-F687-4F45-9708-019B960494DF}">
-              <a14:hiddenLine xmlns:a14="http://schemas.microsoft.com/office/drawing/2010/main" w="9525">
-                <a:solidFill>
-                  <a:srgbClr val="000000"/>
-                </a:solidFill>
-                <a:miter lim="800000"/>
-                <a:headEnd/>
-                <a:tailEnd/>
-              </a14:hiddenLine>
-            </a:ext>
-          </a:extLst>
-        </p:spPr>
+          <p:cNvPr id="4" name="슬라이드 번호 개체 틀 3"/>
+          <p:cNvSpPr>
+            <a:spLocks noGrp="1"/>
+          </p:cNvSpPr>
+          <p:nvPr>
+            <p:ph type="sldNum" sz="quarter" idx="10"/>
+          </p:nvPr>
+        </p:nvSpPr>
+        <p:spPr/>
         <p:txBody>
           <a:bodyPr/>
-          <a:lstStyle>
-            <a:lvl1pPr latinLnBrk="1">
-              <a:spcBef>
-                <a:spcPct val="30000"/>
-              </a:spcBef>
-              <a:defRPr sz="1200">
-                <a:solidFill>
-                  <a:schemeClr val="tx1"/>
-                </a:solidFill>
-                <a:latin typeface="맑은 고딕" panose="020B0503020000020004" pitchFamily="50" charset="-127"/>
-                <a:ea typeface="맑은 고딕" panose="020B0503020000020004" pitchFamily="50" charset="-127"/>
-              </a:defRPr>
-            </a:lvl1pPr>
-            <a:lvl2pPr marL="742950" indent="-285750" latinLnBrk="1">
-              <a:spcBef>
-                <a:spcPct val="30000"/>
-              </a:spcBef>
-              <a:defRPr sz="1200">
-                <a:solidFill>
-                  <a:schemeClr val="tx1"/>
-                </a:solidFill>
-                <a:latin typeface="맑은 고딕" panose="020B0503020000020004" pitchFamily="50" charset="-127"/>
-                <a:ea typeface="맑은 고딕" panose="020B0503020000020004" pitchFamily="50" charset="-127"/>
-              </a:defRPr>
-            </a:lvl2pPr>
-            <a:lvl3pPr marL="1143000" indent="-228600" latinLnBrk="1">
-              <a:spcBef>
-                <a:spcPct val="30000"/>
-              </a:spcBef>
-              <a:defRPr sz="1200">
-                <a:solidFill>
-                  <a:schemeClr val="tx1"/>
-                </a:solidFill>
-                <a:latin typeface="맑은 고딕" panose="020B0503020000020004" pitchFamily="50" charset="-127"/>
-                <a:ea typeface="맑은 고딕" panose="020B0503020000020004" pitchFamily="50" charset="-127"/>
-              </a:defRPr>
-            </a:lvl3pPr>
-            <a:lvl4pPr marL="1600200" indent="-228600" latinLnBrk="1">
-              <a:spcBef>
-                <a:spcPct val="30000"/>
-              </a:spcBef>
-              <a:defRPr sz="1200">
-                <a:solidFill>
-                  <a:schemeClr val="tx1"/>
-                </a:solidFill>
-                <a:latin typeface="맑은 고딕" panose="020B0503020000020004" pitchFamily="50" charset="-127"/>
-                <a:ea typeface="맑은 고딕" panose="020B0503020000020004" pitchFamily="50" charset="-127"/>
-              </a:defRPr>
-            </a:lvl4pPr>
-            <a:lvl5pPr marL="2057400" indent="-228600" latinLnBrk="1">
-              <a:spcBef>
-                <a:spcPct val="30000"/>
-              </a:spcBef>
-              <a:defRPr sz="1200">
-                <a:solidFill>
-                  <a:schemeClr val="tx1"/>
-                </a:solidFill>
-                <a:latin typeface="맑은 고딕" panose="020B0503020000020004" pitchFamily="50" charset="-127"/>
-                <a:ea typeface="맑은 고딕" panose="020B0503020000020004" pitchFamily="50" charset="-127"/>
-              </a:defRPr>
-            </a:lvl5pPr>
-            <a:lvl6pPr marL="2514600" indent="-228600" eaLnBrk="0" fontAlgn="base" hangingPunct="0">
-              <a:spcBef>
-                <a:spcPct val="30000"/>
-              </a:spcBef>
-              <a:spcAft>
-                <a:spcPct val="0"/>
-              </a:spcAft>
-              <a:defRPr sz="1200">
-                <a:solidFill>
-                  <a:schemeClr val="tx1"/>
-                </a:solidFill>
-                <a:latin typeface="맑은 고딕" panose="020B0503020000020004" pitchFamily="50" charset="-127"/>
-                <a:ea typeface="맑은 고딕" panose="020B0503020000020004" pitchFamily="50" charset="-127"/>
-              </a:defRPr>
-            </a:lvl6pPr>
-            <a:lvl7pPr marL="2971800" indent="-228600" eaLnBrk="0" fontAlgn="base" hangingPunct="0">
-              <a:spcBef>
-                <a:spcPct val="30000"/>
-              </a:spcBef>
-              <a:spcAft>
-                <a:spcPct val="0"/>
-              </a:spcAft>
-              <a:defRPr sz="1200">
-                <a:solidFill>
-                  <a:schemeClr val="tx1"/>
-                </a:solidFill>
-                <a:latin typeface="맑은 고딕" panose="020B0503020000020004" pitchFamily="50" charset="-127"/>
-                <a:ea typeface="맑은 고딕" panose="020B0503020000020004" pitchFamily="50" charset="-127"/>
-              </a:defRPr>
-            </a:lvl7pPr>
-            <a:lvl8pPr marL="3429000" indent="-228600" eaLnBrk="0" fontAlgn="base" hangingPunct="0">
-              <a:spcBef>
-                <a:spcPct val="30000"/>
-              </a:spcBef>
-              <a:spcAft>
-                <a:spcPct val="0"/>
-              </a:spcAft>
-              <a:defRPr sz="1200">
-                <a:solidFill>
-                  <a:schemeClr val="tx1"/>
-                </a:solidFill>
-                <a:latin typeface="맑은 고딕" panose="020B0503020000020004" pitchFamily="50" charset="-127"/>
-                <a:ea typeface="맑은 고딕" panose="020B0503020000020004" pitchFamily="50" charset="-127"/>
-              </a:defRPr>
-            </a:lvl8pPr>
-            <a:lvl9pPr marL="3886200" indent="-228600" eaLnBrk="0" fontAlgn="base" hangingPunct="0">
-              <a:spcBef>
-                <a:spcPct val="30000"/>
-              </a:spcBef>
-              <a:spcAft>
-                <a:spcPct val="0"/>
-              </a:spcAft>
-              <a:defRPr sz="1200">
-                <a:solidFill>
-                  <a:schemeClr val="tx1"/>
-                </a:solidFill>
-                <a:latin typeface="맑은 고딕" panose="020B0503020000020004" pitchFamily="50" charset="-127"/>
-                <a:ea typeface="맑은 고딕" panose="020B0503020000020004" pitchFamily="50" charset="-127"/>
-              </a:defRPr>
-            </a:lvl9pPr>
-          </a:lstStyle>
+          <a:lstStyle/>
           <a:p>
             <a:pPr>
-              <a:spcBef>
-                <a:spcPct val="0"/>
-              </a:spcBef>
+              <a:defRPr/>
             </a:pPr>
-            <a:fld id="{AE97164F-AFE0-47CF-AE29-34AF6F04086E}" type="slidenum">
-              <a:rPr lang="ko-KR" altLang="en-US"/>
+            <a:fld id="{F8CEB46D-9B0E-47D1-8684-1DB50B81E07A}" type="slidenum">
+              <a:rPr lang="en-US" altLang="en-US"/>
               <a:pPr>
-                <a:spcBef>
-                  <a:spcPct val="0"/>
-                </a:spcBef>
+                <a:defRPr/>
               </a:pPr>
-              <a:t>4</a:t>
+              <a:t>11</a:t>
             </a:fld>
-            <a:endParaRPr lang="ko-KR" altLang="en-US"/>
+            <a:endParaRPr lang="en-US" altLang="en-US"/>
           </a:p>
         </p:txBody>
       </p:sp>
@@ -2676,8 +948,8 @@
 </p:notes>
 </file>
 
-<file path=ppt/notesSlides/notesSlide5.xml><?xml version="1.0" encoding="utf-8"?>
-<p:notes xmlns:a="http://schemas.openxmlformats.org/drawingml/2006/main" xmlns:r="http://schemas.openxmlformats.org/officeDocument/2006/relationships" xmlns:p="http://schemas.openxmlformats.org/presentationml/2006/main">
+<file path=ppt/notesSlides/notesSlide11.xml><?xml version="1.0" encoding="utf-8"?>
+<p:notes xmlns:r="http://schemas.openxmlformats.org/officeDocument/2006/relationships" xmlns:c="http://schemas.openxmlformats.org/drawingml/2006/chart" xmlns:a="http://schemas.openxmlformats.org/drawingml/2006/main" xmlns:dgm="http://schemas.openxmlformats.org/drawingml/2006/diagram" xmlns:dsp="http://schemas.microsoft.com/office/drawing/2008/diagram" xmlns:p="http://schemas.openxmlformats.org/presentationml/2006/main">
   <p:cSld>
     <p:spTree>
       <p:nvGrpSpPr>
@@ -2697,10 +969,10 @@
         <p:nvSpPr>
           <p:cNvPr id="2" name="슬라이드 이미지 개체 틀 1"/>
           <p:cNvSpPr>
-            <a:spLocks noGrp="1" noRot="1" noChangeAspect="1"/>
-          </p:cNvSpPr>
-          <p:nvPr>
-            <p:ph type="sldImg"/>
+            <a:spLocks noGrp="1" noRot="1" noChangeAspect="1" noTextEdit="1"/>
+          </p:cNvSpPr>
+          <p:nvPr>
+            <p:ph type="sldImg" idx="0"/>
           </p:nvPr>
         </p:nvSpPr>
         <p:spPr/>
@@ -2720,6 +992,13 @@
           <a:bodyPr/>
           <a:lstStyle/>
           <a:p>
+            <a:pPr lvl="0">
+              <a:defRPr/>
+            </a:pPr>
+            <a:r>
+              <a:rPr lang="ko-KR" altLang="en-US"/>
+              <a:t/>
+            </a:r>
             <a:endParaRPr lang="ko-KR" altLang="en-US"/>
           </a:p>
         </p:txBody>
@@ -2743,22 +1022,17 @@
               <a:defRPr/>
             </a:pPr>
             <a:fld id="{F8CEB46D-9B0E-47D1-8684-1DB50B81E07A}" type="slidenum">
-              <a:rPr lang="ko-KR" altLang="en-US" smtClean="0"/>
+              <a:rPr lang="en-US" altLang="en-US"/>
               <a:pPr>
                 <a:defRPr/>
               </a:pPr>
-              <a:t>5</a:t>
+              <a:t>12</a:t>
             </a:fld>
-            <a:endParaRPr lang="ko-KR" altLang="en-US"/>
+            <a:endParaRPr lang="en-US" altLang="en-US"/>
           </a:p>
         </p:txBody>
       </p:sp>
     </p:spTree>
-    <p:extLst>
-      <p:ext uri="{BB962C8B-B14F-4D97-AF65-F5344CB8AC3E}">
-        <p14:creationId xmlns:p14="http://schemas.microsoft.com/office/powerpoint/2010/main" val="942034524"/>
-      </p:ext>
-    </p:extLst>
   </p:cSld>
   <p:clrMapOvr>
     <a:masterClrMapping/>
@@ -2766,8 +1040,8 @@
 </p:notes>
 </file>
 
-<file path=ppt/notesSlides/notesSlide6.xml><?xml version="1.0" encoding="utf-8"?>
-<p:notes xmlns:a="http://schemas.openxmlformats.org/drawingml/2006/main" xmlns:r="http://schemas.openxmlformats.org/officeDocument/2006/relationships" xmlns:p="http://schemas.openxmlformats.org/presentationml/2006/main">
+<file path=ppt/notesSlides/notesSlide12.xml><?xml version="1.0" encoding="utf-8"?>
+<p:notes xmlns:r="http://schemas.openxmlformats.org/officeDocument/2006/relationships" xmlns:c="http://schemas.openxmlformats.org/drawingml/2006/chart" xmlns:a="http://schemas.openxmlformats.org/drawingml/2006/main" xmlns:dgm="http://schemas.openxmlformats.org/drawingml/2006/diagram" xmlns:dsp="http://schemas.microsoft.com/office/drawing/2008/diagram" xmlns:p="http://schemas.openxmlformats.org/presentationml/2006/main">
   <p:cSld>
     <p:spTree>
       <p:nvGrpSpPr>
@@ -2787,10 +1061,10 @@
         <p:nvSpPr>
           <p:cNvPr id="2" name="슬라이드 이미지 개체 틀 1"/>
           <p:cNvSpPr>
-            <a:spLocks noGrp="1" noRot="1" noChangeAspect="1"/>
-          </p:cNvSpPr>
-          <p:nvPr>
-            <p:ph type="sldImg"/>
+            <a:spLocks noGrp="1" noRot="1" noChangeAspect="1" noTextEdit="1"/>
+          </p:cNvSpPr>
+          <p:nvPr>
+            <p:ph type="sldImg" idx="0"/>
           </p:nvPr>
         </p:nvSpPr>
         <p:spPr/>
@@ -2810,6 +1084,13 @@
           <a:bodyPr/>
           <a:lstStyle/>
           <a:p>
+            <a:pPr lvl="0">
+              <a:defRPr/>
+            </a:pPr>
+            <a:r>
+              <a:rPr lang="ko-KR" altLang="en-US"/>
+              <a:t/>
+            </a:r>
             <a:endParaRPr lang="ko-KR" altLang="en-US"/>
           </a:p>
         </p:txBody>
@@ -2833,22 +1114,17 @@
               <a:defRPr/>
             </a:pPr>
             <a:fld id="{F8CEB46D-9B0E-47D1-8684-1DB50B81E07A}" type="slidenum">
-              <a:rPr lang="ko-KR" altLang="en-US" smtClean="0"/>
+              <a:rPr lang="en-US" altLang="en-US"/>
               <a:pPr>
                 <a:defRPr/>
               </a:pPr>
-              <a:t>6</a:t>
+              <a:t>13</a:t>
             </a:fld>
-            <a:endParaRPr lang="ko-KR" altLang="en-US"/>
+            <a:endParaRPr lang="en-US" altLang="en-US"/>
           </a:p>
         </p:txBody>
       </p:sp>
     </p:spTree>
-    <p:extLst>
-      <p:ext uri="{BB962C8B-B14F-4D97-AF65-F5344CB8AC3E}">
-        <p14:creationId xmlns:p14="http://schemas.microsoft.com/office/powerpoint/2010/main" val="2191163632"/>
-      </p:ext>
-    </p:extLst>
   </p:cSld>
   <p:clrMapOvr>
     <a:masterClrMapping/>
@@ -2856,8 +1132,8 @@
 </p:notes>
 </file>
 
-<file path=ppt/notesSlides/notesSlide7.xml><?xml version="1.0" encoding="utf-8"?>
-<p:notes xmlns:a="http://schemas.openxmlformats.org/drawingml/2006/main" xmlns:r="http://schemas.openxmlformats.org/officeDocument/2006/relationships" xmlns:p="http://schemas.openxmlformats.org/presentationml/2006/main">
+<file path=ppt/notesSlides/notesSlide13.xml><?xml version="1.0" encoding="utf-8"?>
+<p:notes xmlns:r="http://schemas.openxmlformats.org/officeDocument/2006/relationships" xmlns:c="http://schemas.openxmlformats.org/drawingml/2006/chart" xmlns:a="http://schemas.openxmlformats.org/drawingml/2006/main" xmlns:dgm="http://schemas.openxmlformats.org/drawingml/2006/diagram" xmlns:dsp="http://schemas.microsoft.com/office/drawing/2008/diagram" xmlns:p="http://schemas.openxmlformats.org/presentationml/2006/main">
   <p:cSld>
     <p:spTree>
       <p:nvGrpSpPr>
@@ -2877,10 +1153,10 @@
         <p:nvSpPr>
           <p:cNvPr id="2" name="슬라이드 이미지 개체 틀 1"/>
           <p:cNvSpPr>
-            <a:spLocks noGrp="1" noRot="1" noChangeAspect="1"/>
-          </p:cNvSpPr>
-          <p:nvPr>
-            <p:ph type="sldImg"/>
+            <a:spLocks noGrp="1" noRot="1" noChangeAspect="1" noTextEdit="1"/>
+          </p:cNvSpPr>
+          <p:nvPr>
+            <p:ph type="sldImg" idx="0"/>
           </p:nvPr>
         </p:nvSpPr>
         <p:spPr/>
@@ -2900,6 +1176,13 @@
           <a:bodyPr/>
           <a:lstStyle/>
           <a:p>
+            <a:pPr lvl="0">
+              <a:defRPr/>
+            </a:pPr>
+            <a:r>
+              <a:rPr lang="ko-KR" altLang="en-US"/>
+              <a:t/>
+            </a:r>
             <a:endParaRPr lang="ko-KR" altLang="en-US"/>
           </a:p>
         </p:txBody>
@@ -2923,22 +1206,17 @@
               <a:defRPr/>
             </a:pPr>
             <a:fld id="{F8CEB46D-9B0E-47D1-8684-1DB50B81E07A}" type="slidenum">
-              <a:rPr lang="ko-KR" altLang="en-US" smtClean="0"/>
+              <a:rPr lang="en-US" altLang="en-US"/>
               <a:pPr>
                 <a:defRPr/>
               </a:pPr>
-              <a:t>8</a:t>
+              <a:t>14</a:t>
             </a:fld>
-            <a:endParaRPr lang="ko-KR" altLang="en-US"/>
+            <a:endParaRPr lang="en-US" altLang="en-US"/>
           </a:p>
         </p:txBody>
       </p:sp>
     </p:spTree>
-    <p:extLst>
-      <p:ext uri="{BB962C8B-B14F-4D97-AF65-F5344CB8AC3E}">
-        <p14:creationId xmlns:p14="http://schemas.microsoft.com/office/powerpoint/2010/main" val="3490002350"/>
-      </p:ext>
-    </p:extLst>
   </p:cSld>
   <p:clrMapOvr>
     <a:masterClrMapping/>
@@ -2946,8 +1224,8 @@
 </p:notes>
 </file>
 
-<file path=ppt/notesSlides/notesSlide8.xml><?xml version="1.0" encoding="utf-8"?>
-<p:notes xmlns:a="http://schemas.openxmlformats.org/drawingml/2006/main" xmlns:r="http://schemas.openxmlformats.org/officeDocument/2006/relationships" xmlns:p="http://schemas.openxmlformats.org/presentationml/2006/main">
+<file path=ppt/notesSlides/notesSlide14.xml><?xml version="1.0" encoding="utf-8"?>
+<p:notes xmlns:r="http://schemas.openxmlformats.org/officeDocument/2006/relationships" xmlns:c="http://schemas.openxmlformats.org/drawingml/2006/chart" xmlns:a="http://schemas.openxmlformats.org/drawingml/2006/main" xmlns:dgm="http://schemas.openxmlformats.org/drawingml/2006/diagram" xmlns:dsp="http://schemas.microsoft.com/office/drawing/2008/diagram" xmlns:p="http://schemas.openxmlformats.org/presentationml/2006/main">
   <p:cSld>
     <p:spTree>
       <p:nvGrpSpPr>
@@ -2967,10 +1245,10 @@
         <p:nvSpPr>
           <p:cNvPr id="2" name="슬라이드 이미지 개체 틀 1"/>
           <p:cNvSpPr>
-            <a:spLocks noGrp="1" noRot="1" noChangeAspect="1"/>
-          </p:cNvSpPr>
-          <p:nvPr>
-            <p:ph type="sldImg"/>
+            <a:spLocks noGrp="1" noRot="1" noChangeAspect="1" noTextEdit="1"/>
+          </p:cNvSpPr>
+          <p:nvPr>
+            <p:ph type="sldImg" idx="0"/>
           </p:nvPr>
         </p:nvSpPr>
         <p:spPr/>
@@ -2990,6 +1268,13 @@
           <a:bodyPr/>
           <a:lstStyle/>
           <a:p>
+            <a:pPr lvl="0">
+              <a:defRPr/>
+            </a:pPr>
+            <a:r>
+              <a:rPr lang="ko-KR" altLang="en-US"/>
+              <a:t/>
+            </a:r>
             <a:endParaRPr lang="ko-KR" altLang="en-US"/>
           </a:p>
         </p:txBody>
@@ -3013,22 +1298,17 @@
               <a:defRPr/>
             </a:pPr>
             <a:fld id="{F8CEB46D-9B0E-47D1-8684-1DB50B81E07A}" type="slidenum">
-              <a:rPr lang="ko-KR" altLang="en-US" smtClean="0"/>
+              <a:rPr lang="en-US" altLang="en-US"/>
               <a:pPr>
                 <a:defRPr/>
               </a:pPr>
-              <a:t>9</a:t>
+              <a:t>15</a:t>
             </a:fld>
-            <a:endParaRPr lang="ko-KR" altLang="en-US"/>
+            <a:endParaRPr lang="en-US" altLang="en-US"/>
           </a:p>
         </p:txBody>
       </p:sp>
     </p:spTree>
-    <p:extLst>
-      <p:ext uri="{BB962C8B-B14F-4D97-AF65-F5344CB8AC3E}">
-        <p14:creationId xmlns:p14="http://schemas.microsoft.com/office/powerpoint/2010/main" val="2009899776"/>
-      </p:ext>
-    </p:extLst>
   </p:cSld>
   <p:clrMapOvr>
     <a:masterClrMapping/>
@@ -3036,18 +1316,12 @@
 </p:notes>
 </file>
 
-<file path=ppt/notesSlides/notesSlide9.xml><?xml version="1.0" encoding="utf-8"?>
-<p:notes xmlns:a="http://schemas.openxmlformats.org/drawingml/2006/main" xmlns:r="http://schemas.openxmlformats.org/officeDocument/2006/relationships" xmlns:p="http://schemas.openxmlformats.org/presentationml/2006/main">
+<file path=ppt/notesSlides/notesSlide15.xml><?xml version="1.0" encoding="utf-8"?>
+<p:notes xmlns:r="http://schemas.openxmlformats.org/officeDocument/2006/relationships" xmlns:c="http://schemas.openxmlformats.org/drawingml/2006/chart" xmlns:a="http://schemas.openxmlformats.org/drawingml/2006/main" xmlns:dgm="http://schemas.openxmlformats.org/drawingml/2006/diagram" xmlns:dsp="http://schemas.microsoft.com/office/drawing/2008/diagram" xmlns:p="http://schemas.openxmlformats.org/presentationml/2006/main">
   <p:cSld>
     <p:spTree>
       <p:nvGrpSpPr>
-        <p:cNvPr id="1" name="">
-          <a:extLst>
-            <a:ext uri="{FF2B5EF4-FFF2-40B4-BE49-F238E27FC236}">
-              <a16:creationId xmlns:a16="http://schemas.microsoft.com/office/drawing/2014/main" id="{AD4AF4A5-5617-2BA3-1998-B43431DBBACA}"/>
-            </a:ext>
-          </a:extLst>
-        </p:cNvPr>
+        <p:cNvPr id="1" name=""/>
         <p:cNvGrpSpPr/>
         <p:nvPr/>
       </p:nvGrpSpPr>
@@ -3061,31 +1335,19 @@
       </p:grpSpPr>
       <p:sp>
         <p:nvSpPr>
-          <p:cNvPr id="2" name="슬라이드 이미지 개체 틀 1">
-            <a:extLst>
-              <a:ext uri="{FF2B5EF4-FFF2-40B4-BE49-F238E27FC236}">
-                <a16:creationId xmlns:a16="http://schemas.microsoft.com/office/drawing/2014/main" id="{B067605B-0E30-2C3F-90AB-0349812CBDA2}"/>
-              </a:ext>
-            </a:extLst>
-          </p:cNvPr>
-          <p:cNvSpPr>
-            <a:spLocks noGrp="1" noRot="1" noChangeAspect="1"/>
-          </p:cNvSpPr>
-          <p:nvPr>
-            <p:ph type="sldImg"/>
+          <p:cNvPr id="2" name="슬라이드 이미지 개체 틀 1"/>
+          <p:cNvSpPr>
+            <a:spLocks noGrp="1" noRot="1" noChangeAspect="1" noTextEdit="1"/>
+          </p:cNvSpPr>
+          <p:nvPr>
+            <p:ph type="sldImg" idx="0"/>
           </p:nvPr>
         </p:nvSpPr>
         <p:spPr/>
       </p:sp>
       <p:sp>
         <p:nvSpPr>
-          <p:cNvPr id="3" name="슬라이드 노트 개체 틀 2">
-            <a:extLst>
-              <a:ext uri="{FF2B5EF4-FFF2-40B4-BE49-F238E27FC236}">
-                <a16:creationId xmlns:a16="http://schemas.microsoft.com/office/drawing/2014/main" id="{CA6FCDA3-DE81-C79D-7CFA-90D64473B977}"/>
-              </a:ext>
-            </a:extLst>
-          </p:cNvPr>
+          <p:cNvPr id="3" name="슬라이드 노트 개체 틀 2"/>
           <p:cNvSpPr>
             <a:spLocks noGrp="1"/>
           </p:cNvSpPr>
@@ -3098,19 +1360,20 @@
           <a:bodyPr/>
           <a:lstStyle/>
           <a:p>
+            <a:pPr lvl="0">
+              <a:defRPr/>
+            </a:pPr>
+            <a:r>
+              <a:rPr lang="ko-KR" altLang="en-US"/>
+              <a:t/>
+            </a:r>
             <a:endParaRPr lang="ko-KR" altLang="en-US"/>
           </a:p>
         </p:txBody>
       </p:sp>
       <p:sp>
         <p:nvSpPr>
-          <p:cNvPr id="4" name="슬라이드 번호 개체 틀 3">
-            <a:extLst>
-              <a:ext uri="{FF2B5EF4-FFF2-40B4-BE49-F238E27FC236}">
-                <a16:creationId xmlns:a16="http://schemas.microsoft.com/office/drawing/2014/main" id="{85E7FB2C-EF50-069C-CDBF-B40305EF9A53}"/>
-              </a:ext>
-            </a:extLst>
-          </p:cNvPr>
+          <p:cNvPr id="4" name="슬라이드 번호 개체 틀 3"/>
           <p:cNvSpPr>
             <a:spLocks noGrp="1"/>
           </p:cNvSpPr>
@@ -3127,22 +1390,1366 @@
               <a:defRPr/>
             </a:pPr>
             <a:fld id="{F8CEB46D-9B0E-47D1-8684-1DB50B81E07A}" type="slidenum">
-              <a:rPr lang="ko-KR" altLang="en-US" smtClean="0"/>
+              <a:rPr lang="en-US" altLang="en-US"/>
+              <a:pPr>
+                <a:defRPr/>
+              </a:pPr>
+              <a:t>16</a:t>
+            </a:fld>
+            <a:endParaRPr lang="en-US" altLang="en-US"/>
+          </a:p>
+        </p:txBody>
+      </p:sp>
+    </p:spTree>
+  </p:cSld>
+  <p:clrMapOvr>
+    <a:masterClrMapping/>
+  </p:clrMapOvr>
+</p:notes>
+</file>
+
+<file path=ppt/notesSlides/notesSlide16.xml><?xml version="1.0" encoding="utf-8"?>
+<p:notes xmlns:r="http://schemas.openxmlformats.org/officeDocument/2006/relationships" xmlns:c="http://schemas.openxmlformats.org/drawingml/2006/chart" xmlns:a="http://schemas.openxmlformats.org/drawingml/2006/main" xmlns:dgm="http://schemas.openxmlformats.org/drawingml/2006/diagram" xmlns:dsp="http://schemas.microsoft.com/office/drawing/2008/diagram" xmlns:p="http://schemas.openxmlformats.org/presentationml/2006/main">
+  <p:cSld>
+    <p:spTree>
+      <p:nvGrpSpPr>
+        <p:cNvPr id="1" name=""/>
+        <p:cNvGrpSpPr/>
+        <p:nvPr/>
+      </p:nvGrpSpPr>
+      <p:grpSpPr>
+        <a:xfrm>
+          <a:off x="0" y="0"/>
+          <a:ext cx="0" cy="0"/>
+          <a:chOff x="0" y="0"/>
+          <a:chExt cx="0" cy="0"/>
+        </a:xfrm>
+      </p:grpSpPr>
+      <p:sp>
+        <p:nvSpPr>
+          <p:cNvPr id="2" name="슬라이드 이미지 개체 틀 1"/>
+          <p:cNvSpPr>
+            <a:spLocks noGrp="1" noRot="1" noChangeAspect="1" noTextEdit="1"/>
+          </p:cNvSpPr>
+          <p:nvPr>
+            <p:ph type="sldImg" idx="0"/>
+          </p:nvPr>
+        </p:nvSpPr>
+        <p:spPr/>
+      </p:sp>
+      <p:sp>
+        <p:nvSpPr>
+          <p:cNvPr id="3" name="슬라이드 노트 개체 틀 2"/>
+          <p:cNvSpPr>
+            <a:spLocks noGrp="1"/>
+          </p:cNvSpPr>
+          <p:nvPr>
+            <p:ph type="body" idx="1"/>
+          </p:nvPr>
+        </p:nvSpPr>
+        <p:spPr/>
+        <p:txBody>
+          <a:bodyPr/>
+          <a:lstStyle/>
+          <a:p>
+            <a:pPr lvl="0">
+              <a:defRPr/>
+            </a:pPr>
+            <a:r>
+              <a:rPr lang="ko-KR" altLang="en-US"/>
+              <a:t/>
+            </a:r>
+            <a:endParaRPr lang="ko-KR" altLang="en-US"/>
+          </a:p>
+        </p:txBody>
+      </p:sp>
+      <p:sp>
+        <p:nvSpPr>
+          <p:cNvPr id="4" name="슬라이드 번호 개체 틀 3"/>
+          <p:cNvSpPr>
+            <a:spLocks noGrp="1"/>
+          </p:cNvSpPr>
+          <p:nvPr>
+            <p:ph type="sldNum" sz="quarter" idx="10"/>
+          </p:nvPr>
+        </p:nvSpPr>
+        <p:spPr/>
+        <p:txBody>
+          <a:bodyPr/>
+          <a:lstStyle/>
+          <a:p>
+            <a:pPr>
+              <a:defRPr/>
+            </a:pPr>
+            <a:fld id="{F8CEB46D-9B0E-47D1-8684-1DB50B81E07A}" type="slidenum">
+              <a:rPr lang="en-US" altLang="en-US"/>
+              <a:pPr>
+                <a:defRPr/>
+              </a:pPr>
+              <a:t>17</a:t>
+            </a:fld>
+            <a:endParaRPr lang="en-US" altLang="en-US"/>
+          </a:p>
+        </p:txBody>
+      </p:sp>
+    </p:spTree>
+  </p:cSld>
+  <p:clrMapOvr>
+    <a:masterClrMapping/>
+  </p:clrMapOvr>
+</p:notes>
+</file>
+
+<file path=ppt/notesSlides/notesSlide17.xml><?xml version="1.0" encoding="utf-8"?>
+<p:notes xmlns:r="http://schemas.openxmlformats.org/officeDocument/2006/relationships" xmlns:c="http://schemas.openxmlformats.org/drawingml/2006/chart" xmlns:a="http://schemas.openxmlformats.org/drawingml/2006/main" xmlns:dgm="http://schemas.openxmlformats.org/drawingml/2006/diagram" xmlns:dsp="http://schemas.microsoft.com/office/drawing/2008/diagram" xmlns:p="http://schemas.openxmlformats.org/presentationml/2006/main">
+  <p:cSld>
+    <p:spTree>
+      <p:nvGrpSpPr>
+        <p:cNvPr id="1" name=""/>
+        <p:cNvGrpSpPr/>
+        <p:nvPr/>
+      </p:nvGrpSpPr>
+      <p:grpSpPr>
+        <a:xfrm>
+          <a:off x="0" y="0"/>
+          <a:ext cx="0" cy="0"/>
+          <a:chOff x="0" y="0"/>
+          <a:chExt cx="0" cy="0"/>
+        </a:xfrm>
+      </p:grpSpPr>
+      <p:sp>
+        <p:nvSpPr>
+          <p:cNvPr id="2" name="슬라이드 이미지 개체 틀 1"/>
+          <p:cNvSpPr>
+            <a:spLocks noGrp="1" noRot="1" noChangeAspect="1" noTextEdit="1"/>
+          </p:cNvSpPr>
+          <p:nvPr>
+            <p:ph type="sldImg" idx="0"/>
+          </p:nvPr>
+        </p:nvSpPr>
+        <p:spPr/>
+      </p:sp>
+      <p:sp>
+        <p:nvSpPr>
+          <p:cNvPr id="3" name="슬라이드 노트 개체 틀 2"/>
+          <p:cNvSpPr>
+            <a:spLocks noGrp="1"/>
+          </p:cNvSpPr>
+          <p:nvPr>
+            <p:ph type="body" idx="1"/>
+          </p:nvPr>
+        </p:nvSpPr>
+        <p:spPr/>
+        <p:txBody>
+          <a:bodyPr/>
+          <a:lstStyle/>
+          <a:p>
+            <a:pPr lvl="0">
+              <a:defRPr/>
+            </a:pPr>
+            <a:r>
+              <a:rPr lang="ko-KR" altLang="en-US"/>
+              <a:t/>
+            </a:r>
+            <a:endParaRPr lang="ko-KR" altLang="en-US"/>
+          </a:p>
+        </p:txBody>
+      </p:sp>
+      <p:sp>
+        <p:nvSpPr>
+          <p:cNvPr id="4" name="슬라이드 번호 개체 틀 3"/>
+          <p:cNvSpPr>
+            <a:spLocks noGrp="1"/>
+          </p:cNvSpPr>
+          <p:nvPr>
+            <p:ph type="sldNum" sz="quarter" idx="10"/>
+          </p:nvPr>
+        </p:nvSpPr>
+        <p:spPr/>
+        <p:txBody>
+          <a:bodyPr/>
+          <a:lstStyle/>
+          <a:p>
+            <a:pPr>
+              <a:defRPr/>
+            </a:pPr>
+            <a:fld id="{F8CEB46D-9B0E-47D1-8684-1DB50B81E07A}" type="slidenum">
+              <a:rPr lang="en-US" altLang="en-US"/>
+              <a:pPr>
+                <a:defRPr/>
+              </a:pPr>
+              <a:t>18</a:t>
+            </a:fld>
+            <a:endParaRPr lang="en-US" altLang="en-US"/>
+          </a:p>
+        </p:txBody>
+      </p:sp>
+    </p:spTree>
+  </p:cSld>
+  <p:clrMapOvr>
+    <a:masterClrMapping/>
+  </p:clrMapOvr>
+</p:notes>
+</file>
+
+<file path=ppt/notesSlides/notesSlide2.xml><?xml version="1.0" encoding="utf-8"?>
+<p:notes xmlns:r="http://schemas.openxmlformats.org/officeDocument/2006/relationships" xmlns:c="http://schemas.openxmlformats.org/drawingml/2006/chart" xmlns:a="http://schemas.openxmlformats.org/drawingml/2006/main" xmlns:dgm="http://schemas.openxmlformats.org/drawingml/2006/diagram" xmlns:dsp="http://schemas.microsoft.com/office/drawing/2008/diagram" xmlns:p="http://schemas.openxmlformats.org/presentationml/2006/main">
+  <p:cSld>
+    <p:spTree>
+      <p:nvGrpSpPr>
+        <p:cNvPr id="1" name=""/>
+        <p:cNvGrpSpPr/>
+        <p:nvPr/>
+      </p:nvGrpSpPr>
+      <p:grpSpPr>
+        <a:xfrm>
+          <a:off x="0" y="0"/>
+          <a:ext cx="0" cy="0"/>
+          <a:chOff x="0" y="0"/>
+          <a:chExt cx="0" cy="0"/>
+        </a:xfrm>
+      </p:grpSpPr>
+      <p:sp>
+        <p:nvSpPr>
+          <p:cNvPr id="17410" name="슬라이드 이미지 개체 틀 1"/>
+          <p:cNvSpPr>
+            <a:spLocks noGrp="1" noRot="1" noChangeAspect="1" noTextEdit="1"/>
+          </p:cNvSpPr>
+          <p:nvPr>
+            <p:ph type="sldImg" idx="0"/>
+          </p:nvPr>
+        </p:nvSpPr>
+        <p:spPr>
+          <a:noFill/>
+          <a:ln>
+            <a:solidFill>
+              <a:srgbClr val="000000"/>
+            </a:solidFill>
+            <a:miter/>
+          </a:ln>
+        </p:spPr>
+      </p:sp>
+      <p:sp>
+        <p:nvSpPr>
+          <p:cNvPr id="17411" name="슬라이드 노트 개체 틀 2"/>
+          <p:cNvSpPr>
+            <a:spLocks noGrp="1"/>
+          </p:cNvSpPr>
+          <p:nvPr>
+            <p:ph type="body" idx="1"/>
+          </p:nvPr>
+        </p:nvSpPr>
+        <p:spPr>
+          <a:noFill/>
+        </p:spPr>
+        <p:txBody>
+          <a:bodyPr wrap="square" anchor="t" anchorCtr="0">
+            <a:prstTxWarp prst="textNoShape">
+              <a:avLst/>
+            </a:prstTxWarp>
+          </a:bodyPr>
+          <a:lstStyle/>
+          <a:p>
+            <a:pPr lvl="0">
+              <a:defRPr/>
+            </a:pPr>
+            <a:r>
+              <a:rPr lang="ko-KR" altLang="en-US"/>
+              <a:t/>
+            </a:r>
+            <a:endParaRPr lang="ko-KR" altLang="en-US"/>
+          </a:p>
+        </p:txBody>
+      </p:sp>
+      <p:sp>
+        <p:nvSpPr>
+          <p:cNvPr id="17412" name="슬라이드 번호 개체 틀 3"/>
+          <p:cNvSpPr>
+            <a:spLocks noGrp="1"/>
+          </p:cNvSpPr>
+          <p:nvPr>
+            <p:ph type="sldNum" sz="quarter" idx="5"/>
+          </p:nvPr>
+        </p:nvSpPr>
+        <p:spPr>
+          <a:noFill/>
+        </p:spPr>
+        <p:txBody>
+          <a:bodyPr/>
+          <a:lstStyle>
+            <a:lvl1pPr latinLnBrk="1">
+              <a:spcBef>
+                <a:spcPct val="30000"/>
+              </a:spcBef>
+              <a:defRPr sz="1200">
+                <a:solidFill>
+                  <a:schemeClr val="tx1"/>
+                </a:solidFill>
+                <a:latin typeface="맑은 고딕"/>
+                <a:ea typeface="맑은 고딕"/>
+              </a:defRPr>
+            </a:lvl1pPr>
+            <a:lvl2pPr marL="742950" indent="-285750" latinLnBrk="1">
+              <a:spcBef>
+                <a:spcPct val="30000"/>
+              </a:spcBef>
+              <a:defRPr sz="1200">
+                <a:solidFill>
+                  <a:schemeClr val="tx1"/>
+                </a:solidFill>
+                <a:latin typeface="맑은 고딕"/>
+                <a:ea typeface="맑은 고딕"/>
+              </a:defRPr>
+            </a:lvl2pPr>
+            <a:lvl3pPr marL="1143000" indent="-228600" latinLnBrk="1">
+              <a:spcBef>
+                <a:spcPct val="30000"/>
+              </a:spcBef>
+              <a:defRPr sz="1200">
+                <a:solidFill>
+                  <a:schemeClr val="tx1"/>
+                </a:solidFill>
+                <a:latin typeface="맑은 고딕"/>
+                <a:ea typeface="맑은 고딕"/>
+              </a:defRPr>
+            </a:lvl3pPr>
+            <a:lvl4pPr marL="1600200" indent="-228600" latinLnBrk="1">
+              <a:spcBef>
+                <a:spcPct val="30000"/>
+              </a:spcBef>
+              <a:defRPr sz="1200">
+                <a:solidFill>
+                  <a:schemeClr val="tx1"/>
+                </a:solidFill>
+                <a:latin typeface="맑은 고딕"/>
+                <a:ea typeface="맑은 고딕"/>
+              </a:defRPr>
+            </a:lvl4pPr>
+            <a:lvl5pPr marL="2057400" indent="-228600" latinLnBrk="1">
+              <a:spcBef>
+                <a:spcPct val="30000"/>
+              </a:spcBef>
+              <a:defRPr sz="1200">
+                <a:solidFill>
+                  <a:schemeClr val="tx1"/>
+                </a:solidFill>
+                <a:latin typeface="맑은 고딕"/>
+                <a:ea typeface="맑은 고딕"/>
+              </a:defRPr>
+            </a:lvl5pPr>
+            <a:lvl6pPr marL="2514600" indent="-228600" eaLnBrk="0" fontAlgn="base" hangingPunct="0">
+              <a:spcBef>
+                <a:spcPct val="30000"/>
+              </a:spcBef>
+              <a:spcAft>
+                <a:spcPct val="0"/>
+              </a:spcAft>
+              <a:defRPr sz="1200">
+                <a:solidFill>
+                  <a:schemeClr val="tx1"/>
+                </a:solidFill>
+                <a:latin typeface="맑은 고딕"/>
+                <a:ea typeface="맑은 고딕"/>
+              </a:defRPr>
+            </a:lvl6pPr>
+            <a:lvl7pPr marL="2971800" indent="-228600" eaLnBrk="0" fontAlgn="base" hangingPunct="0">
+              <a:spcBef>
+                <a:spcPct val="30000"/>
+              </a:spcBef>
+              <a:spcAft>
+                <a:spcPct val="0"/>
+              </a:spcAft>
+              <a:defRPr sz="1200">
+                <a:solidFill>
+                  <a:schemeClr val="tx1"/>
+                </a:solidFill>
+                <a:latin typeface="맑은 고딕"/>
+                <a:ea typeface="맑은 고딕"/>
+              </a:defRPr>
+            </a:lvl7pPr>
+            <a:lvl8pPr marL="3429000" indent="-228600" eaLnBrk="0" fontAlgn="base" hangingPunct="0">
+              <a:spcBef>
+                <a:spcPct val="30000"/>
+              </a:spcBef>
+              <a:spcAft>
+                <a:spcPct val="0"/>
+              </a:spcAft>
+              <a:defRPr sz="1200">
+                <a:solidFill>
+                  <a:schemeClr val="tx1"/>
+                </a:solidFill>
+                <a:latin typeface="맑은 고딕"/>
+                <a:ea typeface="맑은 고딕"/>
+              </a:defRPr>
+            </a:lvl8pPr>
+            <a:lvl9pPr marL="3886200" indent="-228600" eaLnBrk="0" fontAlgn="base" hangingPunct="0">
+              <a:spcBef>
+                <a:spcPct val="30000"/>
+              </a:spcBef>
+              <a:spcAft>
+                <a:spcPct val="0"/>
+              </a:spcAft>
+              <a:defRPr sz="1200">
+                <a:solidFill>
+                  <a:schemeClr val="tx1"/>
+                </a:solidFill>
+                <a:latin typeface="맑은 고딕"/>
+                <a:ea typeface="맑은 고딕"/>
+              </a:defRPr>
+            </a:lvl9pPr>
+          </a:lstStyle>
+          <a:p>
+            <a:pPr>
+              <a:spcBef>
+                <a:spcPct val="0"/>
+              </a:spcBef>
+              <a:defRPr/>
+            </a:pPr>
+            <a:fld id="{AE97164F-AFE0-47CF-AE29-34AF6F04086E}" type="slidenum">
+              <a:rPr lang="en-US" altLang="en-US"/>
+              <a:pPr>
+                <a:spcBef>
+                  <a:spcPct val="0"/>
+                </a:spcBef>
+                <a:defRPr/>
+              </a:pPr>
+              <a:t>2</a:t>
+            </a:fld>
+            <a:endParaRPr lang="en-US" altLang="en-US"/>
+          </a:p>
+        </p:txBody>
+      </p:sp>
+    </p:spTree>
+  </p:cSld>
+  <p:clrMapOvr>
+    <a:masterClrMapping/>
+  </p:clrMapOvr>
+</p:notes>
+</file>
+
+<file path=ppt/notesSlides/notesSlide3.xml><?xml version="1.0" encoding="utf-8"?>
+<p:notes xmlns:r="http://schemas.openxmlformats.org/officeDocument/2006/relationships" xmlns:c="http://schemas.openxmlformats.org/drawingml/2006/chart" xmlns:a="http://schemas.openxmlformats.org/drawingml/2006/main" xmlns:dgm="http://schemas.openxmlformats.org/drawingml/2006/diagram" xmlns:dsp="http://schemas.microsoft.com/office/drawing/2008/diagram" xmlns:p="http://schemas.openxmlformats.org/presentationml/2006/main">
+  <p:cSld>
+    <p:spTree>
+      <p:nvGrpSpPr>
+        <p:cNvPr id="1" name=""/>
+        <p:cNvGrpSpPr/>
+        <p:nvPr/>
+      </p:nvGrpSpPr>
+      <p:grpSpPr>
+        <a:xfrm>
+          <a:off x="0" y="0"/>
+          <a:ext cx="0" cy="0"/>
+          <a:chOff x="0" y="0"/>
+          <a:chExt cx="0" cy="0"/>
+        </a:xfrm>
+      </p:grpSpPr>
+      <p:sp>
+        <p:nvSpPr>
+          <p:cNvPr id="17410" name="슬라이드 이미지 개체 틀 1"/>
+          <p:cNvSpPr>
+            <a:spLocks noGrp="1" noRot="1" noChangeAspect="1" noTextEdit="1"/>
+          </p:cNvSpPr>
+          <p:nvPr>
+            <p:ph type="sldImg" idx="0"/>
+          </p:nvPr>
+        </p:nvSpPr>
+        <p:spPr>
+          <a:noFill/>
+          <a:ln>
+            <a:solidFill>
+              <a:srgbClr val="000000"/>
+            </a:solidFill>
+            <a:miter/>
+          </a:ln>
+        </p:spPr>
+      </p:sp>
+      <p:sp>
+        <p:nvSpPr>
+          <p:cNvPr id="17411" name="슬라이드 노트 개체 틀 2"/>
+          <p:cNvSpPr>
+            <a:spLocks noGrp="1"/>
+          </p:cNvSpPr>
+          <p:nvPr>
+            <p:ph type="body" idx="1"/>
+          </p:nvPr>
+        </p:nvSpPr>
+        <p:spPr>
+          <a:noFill/>
+        </p:spPr>
+        <p:txBody>
+          <a:bodyPr wrap="square" anchor="t" anchorCtr="0">
+            <a:prstTxWarp prst="textNoShape">
+              <a:avLst/>
+            </a:prstTxWarp>
+          </a:bodyPr>
+          <a:lstStyle/>
+          <a:p>
+            <a:pPr lvl="0">
+              <a:defRPr/>
+            </a:pPr>
+            <a:r>
+              <a:rPr lang="ko-KR" altLang="en-US"/>
+              <a:t/>
+            </a:r>
+            <a:endParaRPr lang="ko-KR" altLang="en-US"/>
+          </a:p>
+        </p:txBody>
+      </p:sp>
+      <p:sp>
+        <p:nvSpPr>
+          <p:cNvPr id="17412" name="슬라이드 번호 개체 틀 3"/>
+          <p:cNvSpPr>
+            <a:spLocks noGrp="1"/>
+          </p:cNvSpPr>
+          <p:nvPr>
+            <p:ph type="sldNum" sz="quarter" idx="5"/>
+          </p:nvPr>
+        </p:nvSpPr>
+        <p:spPr>
+          <a:noFill/>
+        </p:spPr>
+        <p:txBody>
+          <a:bodyPr/>
+          <a:lstStyle>
+            <a:lvl1pPr latinLnBrk="1">
+              <a:spcBef>
+                <a:spcPct val="30000"/>
+              </a:spcBef>
+              <a:defRPr sz="1200">
+                <a:solidFill>
+                  <a:schemeClr val="tx1"/>
+                </a:solidFill>
+                <a:latin typeface="맑은 고딕"/>
+                <a:ea typeface="맑은 고딕"/>
+              </a:defRPr>
+            </a:lvl1pPr>
+            <a:lvl2pPr marL="742950" indent="-285750" latinLnBrk="1">
+              <a:spcBef>
+                <a:spcPct val="30000"/>
+              </a:spcBef>
+              <a:defRPr sz="1200">
+                <a:solidFill>
+                  <a:schemeClr val="tx1"/>
+                </a:solidFill>
+                <a:latin typeface="맑은 고딕"/>
+                <a:ea typeface="맑은 고딕"/>
+              </a:defRPr>
+            </a:lvl2pPr>
+            <a:lvl3pPr marL="1143000" indent="-228600" latinLnBrk="1">
+              <a:spcBef>
+                <a:spcPct val="30000"/>
+              </a:spcBef>
+              <a:defRPr sz="1200">
+                <a:solidFill>
+                  <a:schemeClr val="tx1"/>
+                </a:solidFill>
+                <a:latin typeface="맑은 고딕"/>
+                <a:ea typeface="맑은 고딕"/>
+              </a:defRPr>
+            </a:lvl3pPr>
+            <a:lvl4pPr marL="1600200" indent="-228600" latinLnBrk="1">
+              <a:spcBef>
+                <a:spcPct val="30000"/>
+              </a:spcBef>
+              <a:defRPr sz="1200">
+                <a:solidFill>
+                  <a:schemeClr val="tx1"/>
+                </a:solidFill>
+                <a:latin typeface="맑은 고딕"/>
+                <a:ea typeface="맑은 고딕"/>
+              </a:defRPr>
+            </a:lvl4pPr>
+            <a:lvl5pPr marL="2057400" indent="-228600" latinLnBrk="1">
+              <a:spcBef>
+                <a:spcPct val="30000"/>
+              </a:spcBef>
+              <a:defRPr sz="1200">
+                <a:solidFill>
+                  <a:schemeClr val="tx1"/>
+                </a:solidFill>
+                <a:latin typeface="맑은 고딕"/>
+                <a:ea typeface="맑은 고딕"/>
+              </a:defRPr>
+            </a:lvl5pPr>
+            <a:lvl6pPr marL="2514600" indent="-228600" eaLnBrk="0" fontAlgn="base" hangingPunct="0">
+              <a:spcBef>
+                <a:spcPct val="30000"/>
+              </a:spcBef>
+              <a:spcAft>
+                <a:spcPct val="0"/>
+              </a:spcAft>
+              <a:defRPr sz="1200">
+                <a:solidFill>
+                  <a:schemeClr val="tx1"/>
+                </a:solidFill>
+                <a:latin typeface="맑은 고딕"/>
+                <a:ea typeface="맑은 고딕"/>
+              </a:defRPr>
+            </a:lvl6pPr>
+            <a:lvl7pPr marL="2971800" indent="-228600" eaLnBrk="0" fontAlgn="base" hangingPunct="0">
+              <a:spcBef>
+                <a:spcPct val="30000"/>
+              </a:spcBef>
+              <a:spcAft>
+                <a:spcPct val="0"/>
+              </a:spcAft>
+              <a:defRPr sz="1200">
+                <a:solidFill>
+                  <a:schemeClr val="tx1"/>
+                </a:solidFill>
+                <a:latin typeface="맑은 고딕"/>
+                <a:ea typeface="맑은 고딕"/>
+              </a:defRPr>
+            </a:lvl7pPr>
+            <a:lvl8pPr marL="3429000" indent="-228600" eaLnBrk="0" fontAlgn="base" hangingPunct="0">
+              <a:spcBef>
+                <a:spcPct val="30000"/>
+              </a:spcBef>
+              <a:spcAft>
+                <a:spcPct val="0"/>
+              </a:spcAft>
+              <a:defRPr sz="1200">
+                <a:solidFill>
+                  <a:schemeClr val="tx1"/>
+                </a:solidFill>
+                <a:latin typeface="맑은 고딕"/>
+                <a:ea typeface="맑은 고딕"/>
+              </a:defRPr>
+            </a:lvl8pPr>
+            <a:lvl9pPr marL="3886200" indent="-228600" eaLnBrk="0" fontAlgn="base" hangingPunct="0">
+              <a:spcBef>
+                <a:spcPct val="30000"/>
+              </a:spcBef>
+              <a:spcAft>
+                <a:spcPct val="0"/>
+              </a:spcAft>
+              <a:defRPr sz="1200">
+                <a:solidFill>
+                  <a:schemeClr val="tx1"/>
+                </a:solidFill>
+                <a:latin typeface="맑은 고딕"/>
+                <a:ea typeface="맑은 고딕"/>
+              </a:defRPr>
+            </a:lvl9pPr>
+          </a:lstStyle>
+          <a:p>
+            <a:pPr>
+              <a:spcBef>
+                <a:spcPct val="0"/>
+              </a:spcBef>
+              <a:defRPr/>
+            </a:pPr>
+            <a:fld id="{AE97164F-AFE0-47CF-AE29-34AF6F04086E}" type="slidenum">
+              <a:rPr lang="en-US" altLang="en-US"/>
+              <a:pPr>
+                <a:spcBef>
+                  <a:spcPct val="0"/>
+                </a:spcBef>
+                <a:defRPr/>
+              </a:pPr>
+              <a:t>3</a:t>
+            </a:fld>
+            <a:endParaRPr lang="en-US" altLang="en-US"/>
+          </a:p>
+        </p:txBody>
+      </p:sp>
+    </p:spTree>
+  </p:cSld>
+  <p:clrMapOvr>
+    <a:masterClrMapping/>
+  </p:clrMapOvr>
+</p:notes>
+</file>
+
+<file path=ppt/notesSlides/notesSlide4.xml><?xml version="1.0" encoding="utf-8"?>
+<p:notes xmlns:r="http://schemas.openxmlformats.org/officeDocument/2006/relationships" xmlns:c="http://schemas.openxmlformats.org/drawingml/2006/chart" xmlns:a="http://schemas.openxmlformats.org/drawingml/2006/main" xmlns:dgm="http://schemas.openxmlformats.org/drawingml/2006/diagram" xmlns:dsp="http://schemas.microsoft.com/office/drawing/2008/diagram" xmlns:p="http://schemas.openxmlformats.org/presentationml/2006/main">
+  <p:cSld>
+    <p:spTree>
+      <p:nvGrpSpPr>
+        <p:cNvPr id="1" name=""/>
+        <p:cNvGrpSpPr/>
+        <p:nvPr/>
+      </p:nvGrpSpPr>
+      <p:grpSpPr>
+        <a:xfrm>
+          <a:off x="0" y="0"/>
+          <a:ext cx="0" cy="0"/>
+          <a:chOff x="0" y="0"/>
+          <a:chExt cx="0" cy="0"/>
+        </a:xfrm>
+      </p:grpSpPr>
+      <p:sp>
+        <p:nvSpPr>
+          <p:cNvPr id="17410" name="슬라이드 이미지 개체 틀 1"/>
+          <p:cNvSpPr>
+            <a:spLocks noGrp="1" noRot="1" noChangeAspect="1" noTextEdit="1"/>
+          </p:cNvSpPr>
+          <p:nvPr>
+            <p:ph type="sldImg" idx="0"/>
+          </p:nvPr>
+        </p:nvSpPr>
+        <p:spPr>
+          <a:noFill/>
+          <a:ln>
+            <a:solidFill>
+              <a:srgbClr val="000000"/>
+            </a:solidFill>
+            <a:miter/>
+          </a:ln>
+        </p:spPr>
+      </p:sp>
+      <p:sp>
+        <p:nvSpPr>
+          <p:cNvPr id="17411" name="슬라이드 노트 개체 틀 2"/>
+          <p:cNvSpPr>
+            <a:spLocks noGrp="1"/>
+          </p:cNvSpPr>
+          <p:nvPr>
+            <p:ph type="body" idx="1"/>
+          </p:nvPr>
+        </p:nvSpPr>
+        <p:spPr>
+          <a:noFill/>
+        </p:spPr>
+        <p:txBody>
+          <a:bodyPr wrap="square" anchor="t" anchorCtr="0">
+            <a:prstTxWarp prst="textNoShape">
+              <a:avLst/>
+            </a:prstTxWarp>
+          </a:bodyPr>
+          <a:lstStyle/>
+          <a:p>
+            <a:pPr lvl="0">
+              <a:defRPr/>
+            </a:pPr>
+            <a:r>
+              <a:rPr lang="ko-KR" altLang="en-US"/>
+              <a:t/>
+            </a:r>
+            <a:endParaRPr lang="ko-KR" altLang="en-US"/>
+          </a:p>
+        </p:txBody>
+      </p:sp>
+      <p:sp>
+        <p:nvSpPr>
+          <p:cNvPr id="17412" name="슬라이드 번호 개체 틀 3"/>
+          <p:cNvSpPr>
+            <a:spLocks noGrp="1"/>
+          </p:cNvSpPr>
+          <p:nvPr>
+            <p:ph type="sldNum" sz="quarter" idx="5"/>
+          </p:nvPr>
+        </p:nvSpPr>
+        <p:spPr>
+          <a:noFill/>
+        </p:spPr>
+        <p:txBody>
+          <a:bodyPr/>
+          <a:lstStyle>
+            <a:lvl1pPr latinLnBrk="1">
+              <a:spcBef>
+                <a:spcPct val="30000"/>
+              </a:spcBef>
+              <a:defRPr sz="1200">
+                <a:solidFill>
+                  <a:schemeClr val="tx1"/>
+                </a:solidFill>
+                <a:latin typeface="맑은 고딕"/>
+                <a:ea typeface="맑은 고딕"/>
+              </a:defRPr>
+            </a:lvl1pPr>
+            <a:lvl2pPr marL="742950" indent="-285750" latinLnBrk="1">
+              <a:spcBef>
+                <a:spcPct val="30000"/>
+              </a:spcBef>
+              <a:defRPr sz="1200">
+                <a:solidFill>
+                  <a:schemeClr val="tx1"/>
+                </a:solidFill>
+                <a:latin typeface="맑은 고딕"/>
+                <a:ea typeface="맑은 고딕"/>
+              </a:defRPr>
+            </a:lvl2pPr>
+            <a:lvl3pPr marL="1143000" indent="-228600" latinLnBrk="1">
+              <a:spcBef>
+                <a:spcPct val="30000"/>
+              </a:spcBef>
+              <a:defRPr sz="1200">
+                <a:solidFill>
+                  <a:schemeClr val="tx1"/>
+                </a:solidFill>
+                <a:latin typeface="맑은 고딕"/>
+                <a:ea typeface="맑은 고딕"/>
+              </a:defRPr>
+            </a:lvl3pPr>
+            <a:lvl4pPr marL="1600200" indent="-228600" latinLnBrk="1">
+              <a:spcBef>
+                <a:spcPct val="30000"/>
+              </a:spcBef>
+              <a:defRPr sz="1200">
+                <a:solidFill>
+                  <a:schemeClr val="tx1"/>
+                </a:solidFill>
+                <a:latin typeface="맑은 고딕"/>
+                <a:ea typeface="맑은 고딕"/>
+              </a:defRPr>
+            </a:lvl4pPr>
+            <a:lvl5pPr marL="2057400" indent="-228600" latinLnBrk="1">
+              <a:spcBef>
+                <a:spcPct val="30000"/>
+              </a:spcBef>
+              <a:defRPr sz="1200">
+                <a:solidFill>
+                  <a:schemeClr val="tx1"/>
+                </a:solidFill>
+                <a:latin typeface="맑은 고딕"/>
+                <a:ea typeface="맑은 고딕"/>
+              </a:defRPr>
+            </a:lvl5pPr>
+            <a:lvl6pPr marL="2514600" indent="-228600" eaLnBrk="0" fontAlgn="base" hangingPunct="0">
+              <a:spcBef>
+                <a:spcPct val="30000"/>
+              </a:spcBef>
+              <a:spcAft>
+                <a:spcPct val="0"/>
+              </a:spcAft>
+              <a:defRPr sz="1200">
+                <a:solidFill>
+                  <a:schemeClr val="tx1"/>
+                </a:solidFill>
+                <a:latin typeface="맑은 고딕"/>
+                <a:ea typeface="맑은 고딕"/>
+              </a:defRPr>
+            </a:lvl6pPr>
+            <a:lvl7pPr marL="2971800" indent="-228600" eaLnBrk="0" fontAlgn="base" hangingPunct="0">
+              <a:spcBef>
+                <a:spcPct val="30000"/>
+              </a:spcBef>
+              <a:spcAft>
+                <a:spcPct val="0"/>
+              </a:spcAft>
+              <a:defRPr sz="1200">
+                <a:solidFill>
+                  <a:schemeClr val="tx1"/>
+                </a:solidFill>
+                <a:latin typeface="맑은 고딕"/>
+                <a:ea typeface="맑은 고딕"/>
+              </a:defRPr>
+            </a:lvl7pPr>
+            <a:lvl8pPr marL="3429000" indent="-228600" eaLnBrk="0" fontAlgn="base" hangingPunct="0">
+              <a:spcBef>
+                <a:spcPct val="30000"/>
+              </a:spcBef>
+              <a:spcAft>
+                <a:spcPct val="0"/>
+              </a:spcAft>
+              <a:defRPr sz="1200">
+                <a:solidFill>
+                  <a:schemeClr val="tx1"/>
+                </a:solidFill>
+                <a:latin typeface="맑은 고딕"/>
+                <a:ea typeface="맑은 고딕"/>
+              </a:defRPr>
+            </a:lvl8pPr>
+            <a:lvl9pPr marL="3886200" indent="-228600" eaLnBrk="0" fontAlgn="base" hangingPunct="0">
+              <a:spcBef>
+                <a:spcPct val="30000"/>
+              </a:spcBef>
+              <a:spcAft>
+                <a:spcPct val="0"/>
+              </a:spcAft>
+              <a:defRPr sz="1200">
+                <a:solidFill>
+                  <a:schemeClr val="tx1"/>
+                </a:solidFill>
+                <a:latin typeface="맑은 고딕"/>
+                <a:ea typeface="맑은 고딕"/>
+              </a:defRPr>
+            </a:lvl9pPr>
+          </a:lstStyle>
+          <a:p>
+            <a:pPr>
+              <a:spcBef>
+                <a:spcPct val="0"/>
+              </a:spcBef>
+              <a:defRPr/>
+            </a:pPr>
+            <a:fld id="{AE97164F-AFE0-47CF-AE29-34AF6F04086E}" type="slidenum">
+              <a:rPr lang="en-US" altLang="en-US"/>
+              <a:pPr>
+                <a:spcBef>
+                  <a:spcPct val="0"/>
+                </a:spcBef>
+                <a:defRPr/>
+              </a:pPr>
+              <a:t>4</a:t>
+            </a:fld>
+            <a:endParaRPr lang="en-US" altLang="en-US"/>
+          </a:p>
+        </p:txBody>
+      </p:sp>
+    </p:spTree>
+  </p:cSld>
+  <p:clrMapOvr>
+    <a:masterClrMapping/>
+  </p:clrMapOvr>
+</p:notes>
+</file>
+
+<file path=ppt/notesSlides/notesSlide5.xml><?xml version="1.0" encoding="utf-8"?>
+<p:notes xmlns:r="http://schemas.openxmlformats.org/officeDocument/2006/relationships" xmlns:c="http://schemas.openxmlformats.org/drawingml/2006/chart" xmlns:a="http://schemas.openxmlformats.org/drawingml/2006/main" xmlns:dgm="http://schemas.openxmlformats.org/drawingml/2006/diagram" xmlns:dsp="http://schemas.microsoft.com/office/drawing/2008/diagram" xmlns:p="http://schemas.openxmlformats.org/presentationml/2006/main">
+  <p:cSld>
+    <p:spTree>
+      <p:nvGrpSpPr>
+        <p:cNvPr id="1" name=""/>
+        <p:cNvGrpSpPr/>
+        <p:nvPr/>
+      </p:nvGrpSpPr>
+      <p:grpSpPr>
+        <a:xfrm>
+          <a:off x="0" y="0"/>
+          <a:ext cx="0" cy="0"/>
+          <a:chOff x="0" y="0"/>
+          <a:chExt cx="0" cy="0"/>
+        </a:xfrm>
+      </p:grpSpPr>
+      <p:sp>
+        <p:nvSpPr>
+          <p:cNvPr id="2" name="슬라이드 이미지 개체 틀 1"/>
+          <p:cNvSpPr>
+            <a:spLocks noGrp="1" noRot="1" noChangeAspect="1" noTextEdit="1"/>
+          </p:cNvSpPr>
+          <p:nvPr>
+            <p:ph type="sldImg" idx="0"/>
+          </p:nvPr>
+        </p:nvSpPr>
+        <p:spPr/>
+      </p:sp>
+      <p:sp>
+        <p:nvSpPr>
+          <p:cNvPr id="3" name="슬라이드 노트 개체 틀 2"/>
+          <p:cNvSpPr>
+            <a:spLocks noGrp="1"/>
+          </p:cNvSpPr>
+          <p:nvPr>
+            <p:ph type="body" idx="1"/>
+          </p:nvPr>
+        </p:nvSpPr>
+        <p:spPr/>
+        <p:txBody>
+          <a:bodyPr/>
+          <a:lstStyle/>
+          <a:p>
+            <a:pPr lvl="0">
+              <a:defRPr/>
+            </a:pPr>
+            <a:r>
+              <a:rPr lang="ko-KR" altLang="en-US"/>
+              <a:t/>
+            </a:r>
+            <a:endParaRPr lang="ko-KR" altLang="en-US"/>
+          </a:p>
+        </p:txBody>
+      </p:sp>
+      <p:sp>
+        <p:nvSpPr>
+          <p:cNvPr id="4" name="슬라이드 번호 개체 틀 3"/>
+          <p:cNvSpPr>
+            <a:spLocks noGrp="1"/>
+          </p:cNvSpPr>
+          <p:nvPr>
+            <p:ph type="sldNum" sz="quarter" idx="10"/>
+          </p:nvPr>
+        </p:nvSpPr>
+        <p:spPr/>
+        <p:txBody>
+          <a:bodyPr/>
+          <a:lstStyle/>
+          <a:p>
+            <a:pPr>
+              <a:defRPr/>
+            </a:pPr>
+            <a:fld id="{F8CEB46D-9B0E-47D1-8684-1DB50B81E07A}" type="slidenum">
+              <a:rPr lang="en-US" altLang="en-US"/>
+              <a:pPr>
+                <a:defRPr/>
+              </a:pPr>
+              <a:t>5</a:t>
+            </a:fld>
+            <a:endParaRPr lang="en-US" altLang="en-US"/>
+          </a:p>
+        </p:txBody>
+      </p:sp>
+    </p:spTree>
+  </p:cSld>
+  <p:clrMapOvr>
+    <a:masterClrMapping/>
+  </p:clrMapOvr>
+</p:notes>
+</file>
+
+<file path=ppt/notesSlides/notesSlide6.xml><?xml version="1.0" encoding="utf-8"?>
+<p:notes xmlns:r="http://schemas.openxmlformats.org/officeDocument/2006/relationships" xmlns:c="http://schemas.openxmlformats.org/drawingml/2006/chart" xmlns:a="http://schemas.openxmlformats.org/drawingml/2006/main" xmlns:dgm="http://schemas.openxmlformats.org/drawingml/2006/diagram" xmlns:dsp="http://schemas.microsoft.com/office/drawing/2008/diagram" xmlns:p="http://schemas.openxmlformats.org/presentationml/2006/main">
+  <p:cSld>
+    <p:spTree>
+      <p:nvGrpSpPr>
+        <p:cNvPr id="1" name=""/>
+        <p:cNvGrpSpPr/>
+        <p:nvPr/>
+      </p:nvGrpSpPr>
+      <p:grpSpPr>
+        <a:xfrm>
+          <a:off x="0" y="0"/>
+          <a:ext cx="0" cy="0"/>
+          <a:chOff x="0" y="0"/>
+          <a:chExt cx="0" cy="0"/>
+        </a:xfrm>
+      </p:grpSpPr>
+      <p:sp>
+        <p:nvSpPr>
+          <p:cNvPr id="2" name="슬라이드 이미지 개체 틀 1"/>
+          <p:cNvSpPr>
+            <a:spLocks noGrp="1" noRot="1" noChangeAspect="1" noTextEdit="1"/>
+          </p:cNvSpPr>
+          <p:nvPr>
+            <p:ph type="sldImg" idx="0"/>
+          </p:nvPr>
+        </p:nvSpPr>
+        <p:spPr/>
+      </p:sp>
+      <p:sp>
+        <p:nvSpPr>
+          <p:cNvPr id="3" name="슬라이드 노트 개체 틀 2"/>
+          <p:cNvSpPr>
+            <a:spLocks noGrp="1"/>
+          </p:cNvSpPr>
+          <p:nvPr>
+            <p:ph type="body" idx="1"/>
+          </p:nvPr>
+        </p:nvSpPr>
+        <p:spPr/>
+        <p:txBody>
+          <a:bodyPr/>
+          <a:lstStyle/>
+          <a:p>
+            <a:pPr lvl="0">
+              <a:defRPr/>
+            </a:pPr>
+            <a:r>
+              <a:rPr lang="ko-KR" altLang="en-US"/>
+              <a:t/>
+            </a:r>
+            <a:endParaRPr lang="ko-KR" altLang="en-US"/>
+          </a:p>
+        </p:txBody>
+      </p:sp>
+      <p:sp>
+        <p:nvSpPr>
+          <p:cNvPr id="4" name="슬라이드 번호 개체 틀 3"/>
+          <p:cNvSpPr>
+            <a:spLocks noGrp="1"/>
+          </p:cNvSpPr>
+          <p:nvPr>
+            <p:ph type="sldNum" sz="quarter" idx="10"/>
+          </p:nvPr>
+        </p:nvSpPr>
+        <p:spPr/>
+        <p:txBody>
+          <a:bodyPr/>
+          <a:lstStyle/>
+          <a:p>
+            <a:pPr>
+              <a:defRPr/>
+            </a:pPr>
+            <a:fld id="{F8CEB46D-9B0E-47D1-8684-1DB50B81E07A}" type="slidenum">
+              <a:rPr lang="en-US" altLang="en-US"/>
+              <a:pPr>
+                <a:defRPr/>
+              </a:pPr>
+              <a:t>6</a:t>
+            </a:fld>
+            <a:endParaRPr lang="en-US" altLang="en-US"/>
+          </a:p>
+        </p:txBody>
+      </p:sp>
+    </p:spTree>
+  </p:cSld>
+  <p:clrMapOvr>
+    <a:masterClrMapping/>
+  </p:clrMapOvr>
+</p:notes>
+</file>
+
+<file path=ppt/notesSlides/notesSlide7.xml><?xml version="1.0" encoding="utf-8"?>
+<p:notes xmlns:r="http://schemas.openxmlformats.org/officeDocument/2006/relationships" xmlns:c="http://schemas.openxmlformats.org/drawingml/2006/chart" xmlns:a="http://schemas.openxmlformats.org/drawingml/2006/main" xmlns:dgm="http://schemas.openxmlformats.org/drawingml/2006/diagram" xmlns:dsp="http://schemas.microsoft.com/office/drawing/2008/diagram" xmlns:p="http://schemas.openxmlformats.org/presentationml/2006/main">
+  <p:cSld>
+    <p:spTree>
+      <p:nvGrpSpPr>
+        <p:cNvPr id="1" name=""/>
+        <p:cNvGrpSpPr/>
+        <p:nvPr/>
+      </p:nvGrpSpPr>
+      <p:grpSpPr>
+        <a:xfrm>
+          <a:off x="0" y="0"/>
+          <a:ext cx="0" cy="0"/>
+          <a:chOff x="0" y="0"/>
+          <a:chExt cx="0" cy="0"/>
+        </a:xfrm>
+      </p:grpSpPr>
+      <p:sp>
+        <p:nvSpPr>
+          <p:cNvPr id="2" name="슬라이드 이미지 개체 틀 1"/>
+          <p:cNvSpPr>
+            <a:spLocks noGrp="1" noRot="1" noChangeAspect="1" noTextEdit="1"/>
+          </p:cNvSpPr>
+          <p:nvPr>
+            <p:ph type="sldImg" idx="0"/>
+          </p:nvPr>
+        </p:nvSpPr>
+        <p:spPr/>
+      </p:sp>
+      <p:sp>
+        <p:nvSpPr>
+          <p:cNvPr id="3" name="슬라이드 노트 개체 틀 2"/>
+          <p:cNvSpPr>
+            <a:spLocks noGrp="1"/>
+          </p:cNvSpPr>
+          <p:nvPr>
+            <p:ph type="body" idx="1"/>
+          </p:nvPr>
+        </p:nvSpPr>
+        <p:spPr/>
+        <p:txBody>
+          <a:bodyPr/>
+          <a:lstStyle/>
+          <a:p>
+            <a:pPr lvl="0">
+              <a:defRPr/>
+            </a:pPr>
+            <a:r>
+              <a:rPr lang="ko-KR" altLang="en-US"/>
+              <a:t/>
+            </a:r>
+            <a:endParaRPr lang="ko-KR" altLang="en-US"/>
+          </a:p>
+        </p:txBody>
+      </p:sp>
+      <p:sp>
+        <p:nvSpPr>
+          <p:cNvPr id="4" name="슬라이드 번호 개체 틀 3"/>
+          <p:cNvSpPr>
+            <a:spLocks noGrp="1"/>
+          </p:cNvSpPr>
+          <p:nvPr>
+            <p:ph type="sldNum" sz="quarter" idx="10"/>
+          </p:nvPr>
+        </p:nvSpPr>
+        <p:spPr/>
+        <p:txBody>
+          <a:bodyPr/>
+          <a:lstStyle/>
+          <a:p>
+            <a:pPr>
+              <a:defRPr/>
+            </a:pPr>
+            <a:fld id="{F8CEB46D-9B0E-47D1-8684-1DB50B81E07A}" type="slidenum">
+              <a:rPr lang="en-US" altLang="en-US"/>
+              <a:pPr>
+                <a:defRPr/>
+              </a:pPr>
+              <a:t>8</a:t>
+            </a:fld>
+            <a:endParaRPr lang="en-US" altLang="en-US"/>
+          </a:p>
+        </p:txBody>
+      </p:sp>
+    </p:spTree>
+  </p:cSld>
+  <p:clrMapOvr>
+    <a:masterClrMapping/>
+  </p:clrMapOvr>
+</p:notes>
+</file>
+
+<file path=ppt/notesSlides/notesSlide8.xml><?xml version="1.0" encoding="utf-8"?>
+<p:notes xmlns:r="http://schemas.openxmlformats.org/officeDocument/2006/relationships" xmlns:c="http://schemas.openxmlformats.org/drawingml/2006/chart" xmlns:a="http://schemas.openxmlformats.org/drawingml/2006/main" xmlns:dgm="http://schemas.openxmlformats.org/drawingml/2006/diagram" xmlns:dsp="http://schemas.microsoft.com/office/drawing/2008/diagram" xmlns:p="http://schemas.openxmlformats.org/presentationml/2006/main">
+  <p:cSld>
+    <p:spTree>
+      <p:nvGrpSpPr>
+        <p:cNvPr id="1" name=""/>
+        <p:cNvGrpSpPr/>
+        <p:nvPr/>
+      </p:nvGrpSpPr>
+      <p:grpSpPr>
+        <a:xfrm>
+          <a:off x="0" y="0"/>
+          <a:ext cx="0" cy="0"/>
+          <a:chOff x="0" y="0"/>
+          <a:chExt cx="0" cy="0"/>
+        </a:xfrm>
+      </p:grpSpPr>
+      <p:sp>
+        <p:nvSpPr>
+          <p:cNvPr id="2" name="슬라이드 이미지 개체 틀 1"/>
+          <p:cNvSpPr>
+            <a:spLocks noGrp="1" noRot="1" noChangeAspect="1" noTextEdit="1"/>
+          </p:cNvSpPr>
+          <p:nvPr>
+            <p:ph type="sldImg" idx="0"/>
+          </p:nvPr>
+        </p:nvSpPr>
+        <p:spPr/>
+      </p:sp>
+      <p:sp>
+        <p:nvSpPr>
+          <p:cNvPr id="3" name="슬라이드 노트 개체 틀 2"/>
+          <p:cNvSpPr>
+            <a:spLocks noGrp="1"/>
+          </p:cNvSpPr>
+          <p:nvPr>
+            <p:ph type="body" idx="1"/>
+          </p:nvPr>
+        </p:nvSpPr>
+        <p:spPr/>
+        <p:txBody>
+          <a:bodyPr/>
+          <a:lstStyle/>
+          <a:p>
+            <a:pPr lvl="0">
+              <a:defRPr/>
+            </a:pPr>
+            <a:r>
+              <a:rPr lang="ko-KR" altLang="en-US"/>
+              <a:t/>
+            </a:r>
+            <a:endParaRPr lang="ko-KR" altLang="en-US"/>
+          </a:p>
+        </p:txBody>
+      </p:sp>
+      <p:sp>
+        <p:nvSpPr>
+          <p:cNvPr id="4" name="슬라이드 번호 개체 틀 3"/>
+          <p:cNvSpPr>
+            <a:spLocks noGrp="1"/>
+          </p:cNvSpPr>
+          <p:nvPr>
+            <p:ph type="sldNum" sz="quarter" idx="10"/>
+          </p:nvPr>
+        </p:nvSpPr>
+        <p:spPr/>
+        <p:txBody>
+          <a:bodyPr/>
+          <a:lstStyle/>
+          <a:p>
+            <a:pPr>
+              <a:defRPr/>
+            </a:pPr>
+            <a:fld id="{F8CEB46D-9B0E-47D1-8684-1DB50B81E07A}" type="slidenum">
+              <a:rPr lang="en-US" altLang="en-US"/>
+              <a:pPr>
+                <a:defRPr/>
+              </a:pPr>
+              <a:t>9</a:t>
+            </a:fld>
+            <a:endParaRPr lang="en-US" altLang="en-US"/>
+          </a:p>
+        </p:txBody>
+      </p:sp>
+    </p:spTree>
+  </p:cSld>
+  <p:clrMapOvr>
+    <a:masterClrMapping/>
+  </p:clrMapOvr>
+</p:notes>
+</file>
+
+<file path=ppt/notesSlides/notesSlide9.xml><?xml version="1.0" encoding="utf-8"?>
+<p:notes xmlns:r="http://schemas.openxmlformats.org/officeDocument/2006/relationships" xmlns:c="http://schemas.openxmlformats.org/drawingml/2006/chart" xmlns:a="http://schemas.openxmlformats.org/drawingml/2006/main" xmlns:dgm="http://schemas.openxmlformats.org/drawingml/2006/diagram" xmlns:dsp="http://schemas.microsoft.com/office/drawing/2008/diagram" xmlns:p="http://schemas.openxmlformats.org/presentationml/2006/main">
+  <p:cSld>
+    <p:spTree>
+      <p:nvGrpSpPr>
+        <p:cNvPr id="1" name=""/>
+        <p:cNvGrpSpPr/>
+        <p:nvPr/>
+      </p:nvGrpSpPr>
+      <p:grpSpPr>
+        <a:xfrm>
+          <a:off x="0" y="0"/>
+          <a:ext cx="0" cy="0"/>
+          <a:chOff x="0" y="0"/>
+          <a:chExt cx="0" cy="0"/>
+        </a:xfrm>
+      </p:grpSpPr>
+      <p:sp>
+        <p:nvSpPr>
+          <p:cNvPr id="2" name="슬라이드 이미지 개체 틀 1"/>
+          <p:cNvSpPr>
+            <a:spLocks noGrp="1" noRot="1" noChangeAspect="1" noTextEdit="1"/>
+          </p:cNvSpPr>
+          <p:nvPr>
+            <p:ph type="sldImg" idx="0"/>
+          </p:nvPr>
+        </p:nvSpPr>
+        <p:spPr/>
+      </p:sp>
+      <p:sp>
+        <p:nvSpPr>
+          <p:cNvPr id="3" name="슬라이드 노트 개체 틀 2"/>
+          <p:cNvSpPr>
+            <a:spLocks noGrp="1"/>
+          </p:cNvSpPr>
+          <p:nvPr>
+            <p:ph type="body" idx="1"/>
+          </p:nvPr>
+        </p:nvSpPr>
+        <p:spPr/>
+        <p:txBody>
+          <a:bodyPr/>
+          <a:lstStyle/>
+          <a:p>
+            <a:pPr lvl="0">
+              <a:defRPr/>
+            </a:pPr>
+            <a:r>
+              <a:rPr lang="ko-KR" altLang="en-US"/>
+              <a:t/>
+            </a:r>
+            <a:endParaRPr lang="ko-KR" altLang="en-US"/>
+          </a:p>
+        </p:txBody>
+      </p:sp>
+      <p:sp>
+        <p:nvSpPr>
+          <p:cNvPr id="4" name="슬라이드 번호 개체 틀 3"/>
+          <p:cNvSpPr>
+            <a:spLocks noGrp="1"/>
+          </p:cNvSpPr>
+          <p:nvPr>
+            <p:ph type="sldNum" sz="quarter" idx="10"/>
+          </p:nvPr>
+        </p:nvSpPr>
+        <p:spPr/>
+        <p:txBody>
+          <a:bodyPr/>
+          <a:lstStyle/>
+          <a:p>
+            <a:pPr>
+              <a:defRPr/>
+            </a:pPr>
+            <a:fld id="{F8CEB46D-9B0E-47D1-8684-1DB50B81E07A}" type="slidenum">
+              <a:rPr lang="en-US" altLang="en-US"/>
               <a:pPr>
                 <a:defRPr/>
               </a:pPr>
               <a:t>10</a:t>
             </a:fld>
-            <a:endParaRPr lang="ko-KR" altLang="en-US"/>
+            <a:endParaRPr lang="en-US" altLang="en-US"/>
           </a:p>
         </p:txBody>
       </p:sp>
     </p:spTree>
-    <p:extLst>
-      <p:ext uri="{BB962C8B-B14F-4D97-AF65-F5344CB8AC3E}">
-        <p14:creationId xmlns:p14="http://schemas.microsoft.com/office/powerpoint/2010/main" val="2134229936"/>
-      </p:ext>
-    </p:extLst>
   </p:cSld>
   <p:clrMapOvr>
     <a:masterClrMapping/>
@@ -7669,6 +7276,230 @@
 </file>
 
 <file path=ppt/slides/slide10.xml><?xml version="1.0" encoding="utf-8"?>
+<p:sld xmlns:r="http://schemas.openxmlformats.org/officeDocument/2006/relationships" xmlns:c="http://schemas.openxmlformats.org/drawingml/2006/chart" xmlns:a="http://schemas.openxmlformats.org/drawingml/2006/main" xmlns:dgm="http://schemas.openxmlformats.org/drawingml/2006/diagram" xmlns:dsp="http://schemas.microsoft.com/office/drawing/2008/diagram" xmlns:p="http://schemas.openxmlformats.org/presentationml/2006/main">
+  <p:cSld>
+    <p:spTree>
+      <p:nvGrpSpPr>
+        <p:cNvPr id="1" name=""/>
+        <p:cNvGrpSpPr/>
+        <p:nvPr/>
+      </p:nvGrpSpPr>
+      <p:grpSpPr>
+        <a:xfrm>
+          <a:off x="0" y="0"/>
+          <a:ext cx="0" cy="0"/>
+          <a:chOff x="0" y="0"/>
+          <a:chExt cx="0" cy="0"/>
+        </a:xfrm>
+      </p:grpSpPr>
+      <p:sp>
+        <p:nvSpPr>
+          <p:cNvPr id="2" name="제목 1"/>
+          <p:cNvSpPr>
+            <a:spLocks noGrp="1"/>
+          </p:cNvSpPr>
+          <p:nvPr>
+            <p:ph type="title" idx="0"/>
+          </p:nvPr>
+        </p:nvSpPr>
+        <p:spPr/>
+        <p:txBody>
+          <a:bodyPr/>
+          <a:lstStyle/>
+          <a:p>
+            <a:pPr>
+              <a:defRPr/>
+            </a:pPr>
+            <a:r>
+              <a:rPr lang="ko-KR" altLang="en-US"/>
+              <a:t/>
+            </a:r>
+            <a:endParaRPr lang="ko-KR" altLang="en-US"/>
+          </a:p>
+        </p:txBody>
+      </p:sp>
+      <p:sp>
+        <p:nvSpPr>
+          <p:cNvPr id="3" name="내용 개체 틀 2"/>
+          <p:cNvSpPr>
+            <a:spLocks noGrp="1"/>
+          </p:cNvSpPr>
+          <p:nvPr>
+            <p:ph idx="1"/>
+          </p:nvPr>
+        </p:nvSpPr>
+        <p:spPr/>
+        <p:txBody>
+          <a:bodyPr/>
+          <a:lstStyle/>
+          <a:p>
+            <a:pPr>
+              <a:defRPr/>
+            </a:pPr>
+            <a:r>
+              <a:rPr lang="ko-KR" altLang="en-US"/>
+              <a:t/>
+            </a:r>
+            <a:endParaRPr lang="ko-KR" altLang="en-US"/>
+          </a:p>
+        </p:txBody>
+      </p:sp>
+      <p:sp>
+        <p:nvSpPr>
+          <p:cNvPr id="4" name="날짜 개체 틀 3"/>
+          <p:cNvSpPr>
+            <a:spLocks noGrp="1"/>
+          </p:cNvSpPr>
+          <p:nvPr>
+            <p:ph type="dt" sz="half" idx="10"/>
+          </p:nvPr>
+        </p:nvSpPr>
+        <p:spPr/>
+        <p:txBody>
+          <a:bodyPr/>
+          <a:lstStyle/>
+          <a:p>
+            <a:pPr>
+              <a:defRPr/>
+            </a:pPr>
+            <a:r>
+              <a:rPr lang="en-US" altLang="ko-KR"/>
+              <a:t>2008</a:t>
+            </a:r>
+            <a:r>
+              <a:rPr lang="ko-KR" altLang="en-US"/>
+              <a:t>년</a:t>
+            </a:r>
+            <a:r>
+              <a:rPr lang="en-US" altLang="ko-KR"/>
+              <a:t>2</a:t>
+            </a:r>
+            <a:r>
+              <a:rPr lang="ko-KR" altLang="en-US"/>
+              <a:t>학기 </a:t>
+            </a:r>
+            <a:r>
+              <a:rPr lang="en-US" altLang="ko-KR"/>
+              <a:t>3D</a:t>
+            </a:r>
+            <a:r>
+              <a:rPr lang="ko-KR" altLang="en-US"/>
+              <a:t>게임프로그래밍</a:t>
+            </a:r>
+            <a:r>
+              <a:rPr lang="en-US" altLang="ko-KR"/>
+              <a:t>II </a:t>
+            </a:r>
+            <a:r>
+              <a:rPr lang="ko-KR" altLang="en-US"/>
+              <a:t>담당교수</a:t>
+            </a:r>
+            <a:r>
+              <a:rPr lang="en-US" altLang="ko-KR"/>
+              <a:t>:</a:t>
+            </a:r>
+            <a:r>
+              <a:rPr lang="ko-KR" altLang="en-US"/>
+              <a:t>김영식</a:t>
+            </a:r>
+            <a:endParaRPr lang="ko-KR" altLang="en-US"/>
+          </a:p>
+        </p:txBody>
+      </p:sp>
+      <p:sp>
+        <p:nvSpPr>
+          <p:cNvPr id="5" name="슬라이드 번호 개체 틀 5"/>
+          <p:cNvSpPr>
+            <a:spLocks noGrp="1"/>
+          </p:cNvSpPr>
+          <p:nvPr>
+            <p:ph type="sldNum" sz="quarter" idx="12"/>
+          </p:nvPr>
+        </p:nvSpPr>
+        <p:spPr/>
+        <p:txBody>
+          <a:bodyPr/>
+          <a:lstStyle/>
+          <a:p>
+            <a:pPr>
+              <a:defRPr/>
+            </a:pPr>
+            <a:fld id="{A268DA64-E15D-4814-A1DA-86D92D550423}" type="slidenum">
+              <a:rPr lang="en-US" altLang="en-US"/>
+              <a:pPr>
+                <a:defRPr/>
+              </a:pPr>
+              <a:t>10</a:t>
+            </a:fld>
+            <a:endParaRPr lang="en-US" altLang="en-US"/>
+          </a:p>
+        </p:txBody>
+      </p:sp>
+      <p:pic>
+        <p:nvPicPr>
+          <p:cNvPr id="6" name=""/>
+          <p:cNvPicPr>
+            <a:picLocks noChangeAspect="1"/>
+          </p:cNvPicPr>
+          <p:nvPr/>
+        </p:nvPicPr>
+        <p:blipFill rotWithShape="1">
+          <a:blip r:embed="rId2"/>
+          <a:stretch>
+            <a:fillRect/>
+          </a:stretch>
+        </p:blipFill>
+        <p:spPr>
+          <a:xfrm>
+            <a:off x="323528" y="1413062"/>
+            <a:ext cx="4738517" cy="3528105"/>
+          </a:xfrm>
+          <a:prstGeom prst="rect">
+            <a:avLst/>
+          </a:prstGeom>
+        </p:spPr>
+      </p:pic>
+      <p:pic>
+        <p:nvPicPr>
+          <p:cNvPr id="7" name=""/>
+          <p:cNvPicPr>
+            <a:picLocks noChangeAspect="1"/>
+          </p:cNvPicPr>
+          <p:nvPr/>
+        </p:nvPicPr>
+        <p:blipFill rotWithShape="1">
+          <a:blip r:embed="rId3"/>
+          <a:stretch>
+            <a:fillRect/>
+          </a:stretch>
+        </p:blipFill>
+        <p:spPr>
+          <a:xfrm>
+            <a:off x="5364088" y="178566"/>
+            <a:ext cx="3067478" cy="6058745"/>
+          </a:xfrm>
+          <a:prstGeom prst="rect">
+            <a:avLst/>
+          </a:prstGeom>
+        </p:spPr>
+      </p:pic>
+    </p:spTree>
+  </p:cSld>
+  <p:clrMapOvr>
+    <a:masterClrMapping/>
+  </p:clrMapOvr>
+  <mc:AlternateContent xmlns:mc="http://schemas.openxmlformats.org/markup-compatibility/2006">
+    <mc:Choice xmlns:p14="http://schemas.microsoft.com/office/powerpoint/2010/main" Requires="p14">
+      <p:transition xmlns:mc="http://schemas.openxmlformats.org/markup-compatibility/2006" xmlns:p14="http://schemas.microsoft.com/office/powerpoint/2010/main" mc:Ignorable="p14" p14:dur="500"/>
+    </mc:Choice>
+    <mc:Fallback>
+      <p:transition/>
+    </mc:Fallback>
+  </mc:AlternateContent>
+</p:sld>
+</file>
+
+<file path=ppt/slides/slide11.xml><?xml version="1.0" encoding="utf-8"?>
 <p:sld xmlns:a="http://schemas.openxmlformats.org/drawingml/2006/main" xmlns:r="http://schemas.openxmlformats.org/officeDocument/2006/relationships" xmlns:p="http://schemas.openxmlformats.org/presentationml/2006/main">
   <p:cSld>
     <p:spTree>
@@ -7915,7 +7746,7 @@
               <a:pPr>
                 <a:defRPr/>
               </a:pPr>
-              <a:t>10</a:t>
+              <a:t>9</a:t>
             </a:fld>
             <a:endParaRPr lang="ko-KR" altLang="en-US"/>
           </a:p>
@@ -7964,7 +7795,242 @@
 </p:sld>
 </file>
 
-<file path=ppt/slides/slide11.xml><?xml version="1.0" encoding="utf-8"?>
+<file path=ppt/slides/slide12.xml><?xml version="1.0" encoding="utf-8"?>
+<p:sld xmlns:r="http://schemas.openxmlformats.org/officeDocument/2006/relationships" xmlns:c="http://schemas.openxmlformats.org/drawingml/2006/chart" xmlns:a="http://schemas.openxmlformats.org/drawingml/2006/main" xmlns:dgm="http://schemas.openxmlformats.org/drawingml/2006/diagram" xmlns:dsp="http://schemas.microsoft.com/office/drawing/2008/diagram" xmlns:p="http://schemas.openxmlformats.org/presentationml/2006/main">
+  <p:cSld>
+    <p:spTree>
+      <p:nvGrpSpPr>
+        <p:cNvPr id="1" name=""/>
+        <p:cNvGrpSpPr/>
+        <p:nvPr/>
+      </p:nvGrpSpPr>
+      <p:grpSpPr>
+        <a:xfrm>
+          <a:off x="0" y="0"/>
+          <a:ext cx="0" cy="0"/>
+          <a:chOff x="0" y="0"/>
+          <a:chExt cx="0" cy="0"/>
+        </a:xfrm>
+      </p:grpSpPr>
+      <p:sp>
+        <p:nvSpPr>
+          <p:cNvPr id="2" name="제목 1"/>
+          <p:cNvSpPr>
+            <a:spLocks noGrp="1"/>
+          </p:cNvSpPr>
+          <p:nvPr>
+            <p:ph type="title" idx="0"/>
+          </p:nvPr>
+        </p:nvSpPr>
+        <p:spPr/>
+        <p:txBody>
+          <a:bodyPr/>
+          <a:lstStyle/>
+          <a:p>
+            <a:pPr>
+              <a:defRPr/>
+            </a:pPr>
+            <a:r>
+              <a:rPr lang="ko-KR" altLang="en-US"/>
+              <a:t/>
+            </a:r>
+            <a:endParaRPr lang="ko-KR" altLang="en-US"/>
+          </a:p>
+        </p:txBody>
+      </p:sp>
+      <p:pic>
+        <p:nvPicPr>
+          <p:cNvPr id="3" name=""/>
+          <p:cNvPicPr>
+            <a:picLocks noGrp="1" noChangeAspect="1"/>
+          </p:cNvPicPr>
+          <p:nvPr>
+            <p:ph idx="1"/>
+          </p:nvPr>
+        </p:nvPicPr>
+        <p:blipFill rotWithShape="1">
+          <a:blip r:embed="rId2"/>
+          <a:stretch>
+            <a:fillRect/>
+          </a:stretch>
+        </p:blipFill>
+        <p:spPr>
+          <a:xfrm>
+            <a:off x="2957480" y="1213851"/>
+            <a:ext cx="3229040" cy="5095468"/>
+          </a:xfrm>
+          <a:prstGeom prst="rect">
+            <a:avLst/>
+          </a:prstGeom>
+          <a:noFill/>
+          <a:ln w="9525" cap="flat" cmpd="sng" algn="ctr">
+            <a:noFill/>
+            <a:prstDash val="solid"/>
+            <a:round/>
+          </a:ln>
+        </p:spPr>
+      </p:pic>
+      <p:sp>
+        <p:nvSpPr>
+          <p:cNvPr id="4" name="날짜 개체 틀 3"/>
+          <p:cNvSpPr>
+            <a:spLocks noGrp="1"/>
+          </p:cNvSpPr>
+          <p:nvPr>
+            <p:ph type="dt" sz="half" idx="10"/>
+          </p:nvPr>
+        </p:nvSpPr>
+        <p:spPr/>
+        <p:txBody>
+          <a:bodyPr/>
+          <a:lstStyle/>
+          <a:p>
+            <a:pPr>
+              <a:defRPr/>
+            </a:pPr>
+            <a:r>
+              <a:rPr lang="en-US" altLang="ko-KR"/>
+              <a:t>2008</a:t>
+            </a:r>
+            <a:r>
+              <a:rPr lang="ko-KR" altLang="en-US"/>
+              <a:t>년</a:t>
+            </a:r>
+            <a:r>
+              <a:rPr lang="en-US" altLang="ko-KR"/>
+              <a:t>2</a:t>
+            </a:r>
+            <a:r>
+              <a:rPr lang="ko-KR" altLang="en-US"/>
+              <a:t>학기 </a:t>
+            </a:r>
+            <a:r>
+              <a:rPr lang="en-US" altLang="ko-KR"/>
+              <a:t>3D</a:t>
+            </a:r>
+            <a:r>
+              <a:rPr lang="ko-KR" altLang="en-US"/>
+              <a:t>게임프로그래밍</a:t>
+            </a:r>
+            <a:r>
+              <a:rPr lang="en-US" altLang="ko-KR"/>
+              <a:t>II </a:t>
+            </a:r>
+            <a:r>
+              <a:rPr lang="ko-KR" altLang="en-US"/>
+              <a:t>담당교수</a:t>
+            </a:r>
+            <a:r>
+              <a:rPr lang="en-US" altLang="ko-KR"/>
+              <a:t>:</a:t>
+            </a:r>
+            <a:r>
+              <a:rPr lang="ko-KR" altLang="en-US"/>
+              <a:t>김영식</a:t>
+            </a:r>
+            <a:endParaRPr lang="ko-KR" altLang="en-US"/>
+          </a:p>
+        </p:txBody>
+      </p:sp>
+      <p:sp>
+        <p:nvSpPr>
+          <p:cNvPr id="5" name="슬라이드 번호 개체 틀 5"/>
+          <p:cNvSpPr>
+            <a:spLocks noGrp="1"/>
+          </p:cNvSpPr>
+          <p:nvPr>
+            <p:ph type="sldNum" sz="quarter" idx="12"/>
+          </p:nvPr>
+        </p:nvSpPr>
+        <p:spPr>
+          <a:xfrm>
+            <a:off x="2339752" y="4648051"/>
+            <a:ext cx="2133600" cy="365125"/>
+          </a:xfrm>
+        </p:spPr>
+        <p:txBody>
+          <a:bodyPr/>
+          <a:lstStyle/>
+          <a:p>
+            <a:pPr>
+              <a:defRPr/>
+            </a:pPr>
+            <a:fld id="{A268DA64-E15D-4814-A1DA-86D92D550423}" type="slidenum">
+              <a:rPr lang="en-US" altLang="en-US"/>
+              <a:pPr>
+                <a:defRPr/>
+              </a:pPr>
+              <a:t>12</a:t>
+            </a:fld>
+            <a:endParaRPr lang="en-US" altLang="en-US"/>
+          </a:p>
+        </p:txBody>
+      </p:sp>
+      <p:pic>
+        <p:nvPicPr>
+          <p:cNvPr id="6" name=""/>
+          <p:cNvPicPr>
+            <a:picLocks noChangeAspect="1"/>
+          </p:cNvPicPr>
+          <p:nvPr/>
+        </p:nvPicPr>
+        <p:blipFill rotWithShape="1">
+          <a:blip r:embed="rId3"/>
+          <a:stretch>
+            <a:fillRect/>
+          </a:stretch>
+        </p:blipFill>
+        <p:spPr>
+          <a:xfrm>
+            <a:off x="179512" y="1022762"/>
+            <a:ext cx="2736304" cy="5070534"/>
+          </a:xfrm>
+          <a:prstGeom prst="rect">
+            <a:avLst/>
+          </a:prstGeom>
+        </p:spPr>
+      </p:pic>
+      <p:pic>
+        <p:nvPicPr>
+          <p:cNvPr id="7" name=""/>
+          <p:cNvPicPr>
+            <a:picLocks noChangeAspect="1"/>
+          </p:cNvPicPr>
+          <p:nvPr/>
+        </p:nvPicPr>
+        <p:blipFill rotWithShape="1">
+          <a:blip r:embed="rId4"/>
+          <a:stretch>
+            <a:fillRect/>
+          </a:stretch>
+        </p:blipFill>
+        <p:spPr>
+          <a:xfrm>
+            <a:off x="6244219" y="1268760"/>
+            <a:ext cx="2736606" cy="3888432"/>
+          </a:xfrm>
+          <a:prstGeom prst="rect">
+            <a:avLst/>
+          </a:prstGeom>
+        </p:spPr>
+      </p:pic>
+    </p:spTree>
+  </p:cSld>
+  <p:clrMapOvr>
+    <a:masterClrMapping/>
+  </p:clrMapOvr>
+  <mc:AlternateContent xmlns:mc="http://schemas.openxmlformats.org/markup-compatibility/2006">
+    <mc:Choice xmlns:p14="http://schemas.microsoft.com/office/powerpoint/2010/main" Requires="p14">
+      <p:transition xmlns:mc="http://schemas.openxmlformats.org/markup-compatibility/2006" xmlns:p14="http://schemas.microsoft.com/office/powerpoint/2010/main" mc:Ignorable="p14" p14:dur="500"/>
+    </mc:Choice>
+    <mc:Fallback>
+      <p:transition/>
+    </mc:Fallback>
+  </mc:AlternateContent>
+</p:sld>
+</file>
+
+<file path=ppt/slides/slide13.xml><?xml version="1.0" encoding="utf-8"?>
 <p:sld xmlns:a="http://schemas.openxmlformats.org/drawingml/2006/main" xmlns:r="http://schemas.openxmlformats.org/officeDocument/2006/relationships" xmlns:p="http://schemas.openxmlformats.org/presentationml/2006/main">
   <p:cSld>
     <p:spTree>
@@ -8072,7 +8138,7 @@
               <a:pPr>
                 <a:defRPr/>
               </a:pPr>
-              <a:t>11</a:t>
+              <a:t>10</a:t>
             </a:fld>
             <a:endParaRPr lang="ko-KR" altLang="en-US"/>
           </a:p>
@@ -8266,7 +8332,7 @@
 </p:sld>
 </file>
 
-<file path=ppt/slides/slide12.xml><?xml version="1.0" encoding="utf-8"?>
+<file path=ppt/slides/slide14.xml><?xml version="1.0" encoding="utf-8"?>
 <p:sld xmlns:a="http://schemas.openxmlformats.org/drawingml/2006/main" xmlns:r="http://schemas.openxmlformats.org/officeDocument/2006/relationships" xmlns:p="http://schemas.openxmlformats.org/presentationml/2006/main">
   <p:cSld>
     <p:spTree>
@@ -8374,7 +8440,7 @@
               <a:pPr>
                 <a:defRPr/>
               </a:pPr>
-              <a:t>12</a:t>
+              <a:t>11</a:t>
             </a:fld>
             <a:endParaRPr lang="ko-KR" altLang="en-US"/>
           </a:p>
@@ -8549,8 +8615,8 @@
 </p:sld>
 </file>
 
-<file path=ppt/slides/slide13.xml><?xml version="1.0" encoding="utf-8"?>
-<p:sld xmlns:a="http://schemas.openxmlformats.org/drawingml/2006/main" xmlns:r="http://schemas.openxmlformats.org/officeDocument/2006/relationships" xmlns:p="http://schemas.openxmlformats.org/presentationml/2006/main">
+<file path=ppt/slides/slide15.xml><?xml version="1.0" encoding="utf-8"?>
+<p:sld xmlns:r="http://schemas.openxmlformats.org/officeDocument/2006/relationships" xmlns:c="http://schemas.openxmlformats.org/drawingml/2006/chart" xmlns:a="http://schemas.openxmlformats.org/drawingml/2006/main" xmlns:dgm="http://schemas.openxmlformats.org/drawingml/2006/diagram" xmlns:dsp="http://schemas.microsoft.com/office/drawing/2008/diagram" xmlns:p="http://schemas.openxmlformats.org/presentationml/2006/main">
   <p:cSld>
     <p:spTree>
       <p:nvGrpSpPr>
@@ -8568,18 +8634,12 @@
       </p:grpSpPr>
       <p:sp>
         <p:nvSpPr>
-          <p:cNvPr id="2" name="제목 1">
-            <a:extLst>
-              <a:ext uri="{FF2B5EF4-FFF2-40B4-BE49-F238E27FC236}">
-                <a16:creationId xmlns:a16="http://schemas.microsoft.com/office/drawing/2014/main" id="{C22FE492-5F9D-84DD-376F-3C8E5E12A349}"/>
-              </a:ext>
-            </a:extLst>
-          </p:cNvPr>
-          <p:cNvSpPr>
-            <a:spLocks noGrp="1"/>
-          </p:cNvSpPr>
-          <p:nvPr>
-            <p:ph type="title"/>
+          <p:cNvPr id="2" name="제목 1"/>
+          <p:cNvSpPr>
+            <a:spLocks noGrp="1"/>
+          </p:cNvSpPr>
+          <p:nvPr>
+            <p:ph type="title" idx="0"/>
           </p:nvPr>
         </p:nvSpPr>
         <p:spPr/>
@@ -8587,19 +8647,20 @@
           <a:bodyPr/>
           <a:lstStyle/>
           <a:p>
+            <a:pPr>
+              <a:defRPr/>
+            </a:pPr>
+            <a:r>
+              <a:rPr lang="ko-KR" altLang="en-US"/>
+              <a:t/>
+            </a:r>
             <a:endParaRPr lang="ko-KR" altLang="en-US"/>
           </a:p>
         </p:txBody>
       </p:sp>
       <p:pic>
         <p:nvPicPr>
-          <p:cNvPr id="7" name="내용 개체 틀 6">
-            <a:extLst>
-              <a:ext uri="{FF2B5EF4-FFF2-40B4-BE49-F238E27FC236}">
-                <a16:creationId xmlns:a16="http://schemas.microsoft.com/office/drawing/2014/main" id="{557222E9-3316-4170-495B-70A7B9CD6AB5}"/>
-              </a:ext>
-            </a:extLst>
-          </p:cNvPr>
+          <p:cNvPr id="3" name=""/>
           <p:cNvPicPr>
             <a:picLocks noGrp="1" noChangeAspect="1"/>
           </p:cNvPicPr>
@@ -8607,54 +8668,31 @@
             <p:ph idx="1"/>
           </p:nvPr>
         </p:nvPicPr>
-        <p:blipFill>
+        <p:blipFill rotWithShape="1">
           <a:blip r:embed="rId2"/>
           <a:stretch>
             <a:fillRect/>
           </a:stretch>
         </p:blipFill>
-        <p:spPr bwMode="auto">
+        <p:spPr>
           <a:xfrm>
-            <a:off x="269269" y="1196752"/>
-            <a:ext cx="4009333" cy="2791197"/>
+            <a:off x="6156176" y="1196752"/>
+            <a:ext cx="2456758" cy="4840303"/>
           </a:xfrm>
           <a:prstGeom prst="rect">
             <a:avLst/>
           </a:prstGeom>
           <a:noFill/>
-          <a:ln>
+          <a:ln w="9525" cap="flat" cmpd="sng" algn="ctr">
             <a:noFill/>
+            <a:prstDash val="solid"/>
+            <a:round/>
           </a:ln>
-          <a:extLst>
-            <a:ext uri="{909E8E84-426E-40DD-AFC4-6F175D3DCCD1}">
-              <a14:hiddenFill xmlns:a14="http://schemas.microsoft.com/office/drawing/2010/main">
-                <a:solidFill>
-                  <a:srgbClr val="FFFFFF"/>
-                </a:solidFill>
-              </a14:hiddenFill>
-            </a:ext>
-            <a:ext uri="{91240B29-F687-4F45-9708-019B960494DF}">
-              <a14:hiddenLine xmlns:a14="http://schemas.microsoft.com/office/drawing/2010/main" w="9525">
-                <a:solidFill>
-                  <a:srgbClr val="000000"/>
-                </a:solidFill>
-                <a:miter lim="800000"/>
-                <a:headEnd/>
-                <a:tailEnd/>
-              </a14:hiddenLine>
-            </a:ext>
-          </a:extLst>
         </p:spPr>
       </p:pic>
       <p:sp>
         <p:nvSpPr>
-          <p:cNvPr id="4" name="날짜 개체 틀 3">
-            <a:extLst>
-              <a:ext uri="{FF2B5EF4-FFF2-40B4-BE49-F238E27FC236}">
-                <a16:creationId xmlns:a16="http://schemas.microsoft.com/office/drawing/2014/main" id="{7EC6C101-8352-F86A-2477-B40998E5AF8D}"/>
-              </a:ext>
-            </a:extLst>
-          </p:cNvPr>
+          <p:cNvPr id="4" name="날짜 개체 틀 3"/>
           <p:cNvSpPr>
             <a:spLocks noGrp="1"/>
           </p:cNvSpPr>
@@ -8710,18 +8748,13 @@
               <a:rPr lang="ko-KR" altLang="en-US"/>
               <a:t>김영식</a:t>
             </a:r>
-          </a:p>
-        </p:txBody>
-      </p:sp>
-      <p:sp>
-        <p:nvSpPr>
-          <p:cNvPr id="5" name="슬라이드 번호 개체 틀 4">
-            <a:extLst>
-              <a:ext uri="{FF2B5EF4-FFF2-40B4-BE49-F238E27FC236}">
-                <a16:creationId xmlns:a16="http://schemas.microsoft.com/office/drawing/2014/main" id="{82CB65C4-1997-2D82-1664-CCD2E05B041B}"/>
-              </a:ext>
-            </a:extLst>
-          </p:cNvPr>
+            <a:endParaRPr lang="ko-KR" altLang="en-US"/>
+          </a:p>
+        </p:txBody>
+      </p:sp>
+      <p:sp>
+        <p:nvSpPr>
+          <p:cNvPr id="5" name="슬라이드 번호 개체 틀 5"/>
           <p:cNvSpPr>
             <a:spLocks noGrp="1"/>
           </p:cNvSpPr>
@@ -8738,31 +8771,25 @@
               <a:defRPr/>
             </a:pPr>
             <a:fld id="{A268DA64-E15D-4814-A1DA-86D92D550423}" type="slidenum">
-              <a:rPr lang="ko-KR" altLang="en-US" smtClean="0"/>
+              <a:rPr lang="en-US" altLang="en-US"/>
               <a:pPr>
                 <a:defRPr/>
               </a:pPr>
-              <a:t>13</a:t>
+              <a:t>15</a:t>
             </a:fld>
-            <a:endParaRPr lang="ko-KR" altLang="en-US"/>
+            <a:endParaRPr lang="en-US" altLang="en-US"/>
           </a:p>
         </p:txBody>
       </p:sp>
       <p:pic>
         <p:nvPicPr>
-          <p:cNvPr id="9" name="그림 8">
-            <a:extLst>
-              <a:ext uri="{FF2B5EF4-FFF2-40B4-BE49-F238E27FC236}">
-                <a16:creationId xmlns:a16="http://schemas.microsoft.com/office/drawing/2014/main" id="{1E10AC37-0510-8B14-8DBC-7819CD2CBC40}"/>
-              </a:ext>
-            </a:extLst>
-          </p:cNvPr>
+          <p:cNvPr id="6" name=""/>
           <p:cNvPicPr>
             <a:picLocks noChangeAspect="1"/>
           </p:cNvPicPr>
           <p:nvPr/>
         </p:nvPicPr>
-        <p:blipFill>
+        <p:blipFill rotWithShape="1">
           <a:blip r:embed="rId3"/>
           <a:stretch>
             <a:fillRect/>
@@ -8770,38 +8797,8 @@
         </p:blipFill>
         <p:spPr>
           <a:xfrm>
-            <a:off x="395536" y="4092189"/>
-            <a:ext cx="3393100" cy="2232248"/>
-          </a:xfrm>
-          <a:prstGeom prst="rect">
-            <a:avLst/>
-          </a:prstGeom>
-        </p:spPr>
-      </p:pic>
-      <p:pic>
-        <p:nvPicPr>
-          <p:cNvPr id="11" name="그림 10">
-            <a:extLst>
-              <a:ext uri="{FF2B5EF4-FFF2-40B4-BE49-F238E27FC236}">
-                <a16:creationId xmlns:a16="http://schemas.microsoft.com/office/drawing/2014/main" id="{FB8A6677-50EA-1FA3-99D2-F29F3DE99438}"/>
-              </a:ext>
-            </a:extLst>
-          </p:cNvPr>
-          <p:cNvPicPr>
-            <a:picLocks noChangeAspect="1"/>
-          </p:cNvPicPr>
-          <p:nvPr/>
-        </p:nvPicPr>
-        <p:blipFill>
-          <a:blip r:embed="rId4"/>
-          <a:stretch>
-            <a:fillRect/>
-          </a:stretch>
-        </p:blipFill>
-        <p:spPr>
-          <a:xfrm>
-            <a:off x="4795282" y="606596"/>
-            <a:ext cx="3092108" cy="5760640"/>
+            <a:off x="251520" y="265780"/>
+            <a:ext cx="5896798" cy="6592220"/>
           </a:xfrm>
           <a:prstGeom prst="rect">
             <a:avLst/>
@@ -8809,19 +8806,22 @@
         </p:spPr>
       </p:pic>
     </p:spTree>
-    <p:extLst>
-      <p:ext uri="{BB962C8B-B14F-4D97-AF65-F5344CB8AC3E}">
-        <p14:creationId xmlns:p14="http://schemas.microsoft.com/office/powerpoint/2010/main" val="3057869540"/>
-      </p:ext>
-    </p:extLst>
   </p:cSld>
   <p:clrMapOvr>
     <a:masterClrMapping/>
   </p:clrMapOvr>
+  <mc:AlternateContent xmlns:mc="http://schemas.openxmlformats.org/markup-compatibility/2006">
+    <mc:Choice xmlns:p14="http://schemas.microsoft.com/office/powerpoint/2010/main" Requires="p14">
+      <p:transition xmlns:mc="http://schemas.openxmlformats.org/markup-compatibility/2006" xmlns:p14="http://schemas.microsoft.com/office/powerpoint/2010/main" mc:Ignorable="p14" p14:dur="500"/>
+    </mc:Choice>
+    <mc:Fallback>
+      <p:transition/>
+    </mc:Fallback>
+  </mc:AlternateContent>
 </p:sld>
 </file>
 
-<file path=ppt/slides/slide14.xml><?xml version="1.0" encoding="utf-8"?>
+<file path=ppt/slides/slide16.xml><?xml version="1.0" encoding="utf-8"?>
 <p:sld xmlns:a="http://schemas.openxmlformats.org/drawingml/2006/main" xmlns:r="http://schemas.openxmlformats.org/officeDocument/2006/relationships" xmlns:p="http://schemas.openxmlformats.org/presentationml/2006/main">
   <p:cSld>
     <p:spTree>
@@ -8917,7 +8917,7 @@
               <a:pPr>
                 <a:defRPr/>
               </a:pPr>
-              <a:t>14</a:t>
+              <a:t>12</a:t>
             </a:fld>
             <a:endParaRPr lang="ko-KR" altLang="en-US"/>
           </a:p>
@@ -9139,7 +9139,213 @@
 </p:sld>
 </file>
 
-<file path=ppt/slides/slide15.xml><?xml version="1.0" encoding="utf-8"?>
+<file path=ppt/slides/slide17.xml><?xml version="1.0" encoding="utf-8"?>
+<p:sld xmlns:r="http://schemas.openxmlformats.org/officeDocument/2006/relationships" xmlns:c="http://schemas.openxmlformats.org/drawingml/2006/chart" xmlns:a="http://schemas.openxmlformats.org/drawingml/2006/main" xmlns:dgm="http://schemas.openxmlformats.org/drawingml/2006/diagram" xmlns:dsp="http://schemas.microsoft.com/office/drawing/2008/diagram" xmlns:p="http://schemas.openxmlformats.org/presentationml/2006/main">
+  <p:cSld>
+    <p:spTree>
+      <p:nvGrpSpPr>
+        <p:cNvPr id="1" name=""/>
+        <p:cNvGrpSpPr/>
+        <p:nvPr/>
+      </p:nvGrpSpPr>
+      <p:grpSpPr>
+        <a:xfrm>
+          <a:off x="0" y="0"/>
+          <a:ext cx="0" cy="0"/>
+          <a:chOff x="0" y="0"/>
+          <a:chExt cx="0" cy="0"/>
+        </a:xfrm>
+      </p:grpSpPr>
+      <p:sp>
+        <p:nvSpPr>
+          <p:cNvPr id="2" name="제목 1"/>
+          <p:cNvSpPr>
+            <a:spLocks noGrp="1"/>
+          </p:cNvSpPr>
+          <p:nvPr>
+            <p:ph type="title" idx="0"/>
+          </p:nvPr>
+        </p:nvSpPr>
+        <p:spPr/>
+        <p:txBody>
+          <a:bodyPr/>
+          <a:lstStyle/>
+          <a:p>
+            <a:pPr>
+              <a:defRPr/>
+            </a:pPr>
+            <a:r>
+              <a:rPr lang="ko-KR" altLang="en-US"/>
+              <a:t/>
+            </a:r>
+            <a:endParaRPr lang="ko-KR" altLang="en-US"/>
+          </a:p>
+        </p:txBody>
+      </p:sp>
+      <p:pic>
+        <p:nvPicPr>
+          <p:cNvPr id="3" name=""/>
+          <p:cNvPicPr>
+            <a:picLocks noGrp="1" noChangeAspect="1"/>
+          </p:cNvPicPr>
+          <p:nvPr>
+            <p:ph idx="1"/>
+          </p:nvPr>
+        </p:nvPicPr>
+        <p:blipFill rotWithShape="1">
+          <a:blip r:embed="rId2"/>
+          <a:stretch>
+            <a:fillRect/>
+          </a:stretch>
+        </p:blipFill>
+        <p:spPr>
+          <a:xfrm>
+            <a:off x="5076056" y="404664"/>
+            <a:ext cx="3356435" cy="6335400"/>
+          </a:xfrm>
+          <a:prstGeom prst="rect">
+            <a:avLst/>
+          </a:prstGeom>
+          <a:noFill/>
+          <a:ln w="9525" cap="flat" cmpd="sng" algn="ctr">
+            <a:noFill/>
+            <a:prstDash val="solid"/>
+            <a:round/>
+          </a:ln>
+        </p:spPr>
+      </p:pic>
+      <p:sp>
+        <p:nvSpPr>
+          <p:cNvPr id="4" name="날짜 개체 틀 3"/>
+          <p:cNvSpPr>
+            <a:spLocks noGrp="1"/>
+          </p:cNvSpPr>
+          <p:nvPr>
+            <p:ph type="dt" sz="half" idx="10"/>
+          </p:nvPr>
+        </p:nvSpPr>
+        <p:spPr/>
+        <p:txBody>
+          <a:bodyPr/>
+          <a:lstStyle/>
+          <a:p>
+            <a:pPr>
+              <a:defRPr/>
+            </a:pPr>
+            <a:r>
+              <a:rPr lang="en-US" altLang="ko-KR"/>
+              <a:t>2008</a:t>
+            </a:r>
+            <a:r>
+              <a:rPr lang="ko-KR" altLang="en-US"/>
+              <a:t>년</a:t>
+            </a:r>
+            <a:r>
+              <a:rPr lang="en-US" altLang="ko-KR"/>
+              <a:t>2</a:t>
+            </a:r>
+            <a:r>
+              <a:rPr lang="ko-KR" altLang="en-US"/>
+              <a:t>학기 </a:t>
+            </a:r>
+            <a:r>
+              <a:rPr lang="en-US" altLang="ko-KR"/>
+              <a:t>3D</a:t>
+            </a:r>
+            <a:r>
+              <a:rPr lang="ko-KR" altLang="en-US"/>
+              <a:t>게임프로그래밍</a:t>
+            </a:r>
+            <a:r>
+              <a:rPr lang="en-US" altLang="ko-KR"/>
+              <a:t>II </a:t>
+            </a:r>
+            <a:r>
+              <a:rPr lang="ko-KR" altLang="en-US"/>
+              <a:t>담당교수</a:t>
+            </a:r>
+            <a:r>
+              <a:rPr lang="en-US" altLang="ko-KR"/>
+              <a:t>:</a:t>
+            </a:r>
+            <a:r>
+              <a:rPr lang="ko-KR" altLang="en-US"/>
+              <a:t>김영식</a:t>
+            </a:r>
+            <a:endParaRPr lang="ko-KR" altLang="en-US"/>
+          </a:p>
+        </p:txBody>
+      </p:sp>
+      <p:sp>
+        <p:nvSpPr>
+          <p:cNvPr id="5" name="슬라이드 번호 개체 틀 5"/>
+          <p:cNvSpPr>
+            <a:spLocks noGrp="1"/>
+          </p:cNvSpPr>
+          <p:nvPr>
+            <p:ph type="sldNum" sz="quarter" idx="12"/>
+          </p:nvPr>
+        </p:nvSpPr>
+        <p:spPr/>
+        <p:txBody>
+          <a:bodyPr/>
+          <a:lstStyle/>
+          <a:p>
+            <a:pPr>
+              <a:defRPr/>
+            </a:pPr>
+            <a:fld id="{A268DA64-E15D-4814-A1DA-86D92D550423}" type="slidenum">
+              <a:rPr lang="en-US" altLang="en-US"/>
+              <a:pPr>
+                <a:defRPr/>
+              </a:pPr>
+              <a:t>17</a:t>
+            </a:fld>
+            <a:endParaRPr lang="en-US" altLang="en-US"/>
+          </a:p>
+        </p:txBody>
+      </p:sp>
+      <p:pic>
+        <p:nvPicPr>
+          <p:cNvPr id="6" name=""/>
+          <p:cNvPicPr>
+            <a:picLocks noChangeAspect="1"/>
+          </p:cNvPicPr>
+          <p:nvPr/>
+        </p:nvPicPr>
+        <p:blipFill rotWithShape="1">
+          <a:blip r:embed="rId3"/>
+          <a:stretch>
+            <a:fillRect/>
+          </a:stretch>
+        </p:blipFill>
+        <p:spPr>
+          <a:xfrm>
+            <a:off x="440733" y="764703"/>
+            <a:ext cx="4347290" cy="5328592"/>
+          </a:xfrm>
+          <a:prstGeom prst="rect">
+            <a:avLst/>
+          </a:prstGeom>
+        </p:spPr>
+      </p:pic>
+    </p:spTree>
+  </p:cSld>
+  <p:clrMapOvr>
+    <a:masterClrMapping/>
+  </p:clrMapOvr>
+  <mc:AlternateContent xmlns:mc="http://schemas.openxmlformats.org/markup-compatibility/2006">
+    <mc:Choice xmlns:p14="http://schemas.microsoft.com/office/powerpoint/2010/main" Requires="p14">
+      <p:transition xmlns:mc="http://schemas.openxmlformats.org/markup-compatibility/2006" xmlns:p14="http://schemas.microsoft.com/office/powerpoint/2010/main" mc:Ignorable="p14" p14:dur="500"/>
+    </mc:Choice>
+    <mc:Fallback>
+      <p:transition/>
+    </mc:Fallback>
+  </mc:AlternateContent>
+</p:sld>
+</file>
+
+<file path=ppt/slides/slide18.xml><?xml version="1.0" encoding="utf-8"?>
 <p:sld xmlns:a="http://schemas.openxmlformats.org/drawingml/2006/main" xmlns:r="http://schemas.openxmlformats.org/officeDocument/2006/relationships" xmlns:p="http://schemas.openxmlformats.org/presentationml/2006/main">
   <p:cSld>
     <p:spTree>
@@ -9258,7 +9464,7 @@
               <a:pPr>
                 <a:defRPr/>
               </a:pPr>
-              <a:t>15</a:t>
+              <a:t>13</a:t>
             </a:fld>
             <a:endParaRPr lang="ko-KR" altLang="en-US"/>
           </a:p>
@@ -9604,18 +9810,12 @@
 </p:sld>
 </file>
 
-<file path=ppt/slides/slide16.xml><?xml version="1.0" encoding="utf-8"?>
-<p:sld xmlns:a="http://schemas.openxmlformats.org/drawingml/2006/main" xmlns:r="http://schemas.openxmlformats.org/officeDocument/2006/relationships" xmlns:p="http://schemas.openxmlformats.org/presentationml/2006/main">
+<file path=ppt/slides/slide19.xml><?xml version="1.0" encoding="utf-8"?>
+<p:sld xmlns:r="http://schemas.openxmlformats.org/officeDocument/2006/relationships" xmlns:c="http://schemas.openxmlformats.org/drawingml/2006/chart" xmlns:a="http://schemas.openxmlformats.org/drawingml/2006/main" xmlns:dgm="http://schemas.openxmlformats.org/drawingml/2006/diagram" xmlns:dsp="http://schemas.microsoft.com/office/drawing/2008/diagram" xmlns:p="http://schemas.openxmlformats.org/presentationml/2006/main">
   <p:cSld>
     <p:spTree>
       <p:nvGrpSpPr>
-        <p:cNvPr id="1" name="">
-          <a:extLst>
-            <a:ext uri="{FF2B5EF4-FFF2-40B4-BE49-F238E27FC236}">
-              <a16:creationId xmlns:a16="http://schemas.microsoft.com/office/drawing/2014/main" id="{BB2182D6-7C3A-1450-0957-0736228992F8}"/>
-            </a:ext>
-          </a:extLst>
-        </p:cNvPr>
+        <p:cNvPr id="1" name=""/>
         <p:cNvGrpSpPr/>
         <p:nvPr/>
       </p:nvGrpSpPr>
@@ -9629,18 +9829,12 @@
       </p:grpSpPr>
       <p:sp>
         <p:nvSpPr>
-          <p:cNvPr id="2" name="제목 1">
-            <a:extLst>
-              <a:ext uri="{FF2B5EF4-FFF2-40B4-BE49-F238E27FC236}">
-                <a16:creationId xmlns:a16="http://schemas.microsoft.com/office/drawing/2014/main" id="{00FC0AAC-B616-D4EC-909C-ECC3F2A8B843}"/>
-              </a:ext>
-            </a:extLst>
-          </p:cNvPr>
-          <p:cNvSpPr>
-            <a:spLocks noGrp="1"/>
-          </p:cNvSpPr>
-          <p:nvPr>
-            <p:ph type="title"/>
+          <p:cNvPr id="2" name="제목 1"/>
+          <p:cNvSpPr>
+            <a:spLocks noGrp="1"/>
+          </p:cNvSpPr>
+          <p:nvPr>
+            <p:ph type="title" idx="0"/>
           </p:nvPr>
         </p:nvSpPr>
         <p:spPr/>
@@ -9648,61 +9842,108 @@
           <a:bodyPr/>
           <a:lstStyle/>
           <a:p>
-            <a:r>
-              <a:rPr lang="en-US" altLang="ko-KR" sz="2800" dirty="0"/>
-              <a:t>7. 1</a:t>
-            </a:r>
-            <a:r>
-              <a:rPr lang="ko-KR" altLang="en-US" sz="2800" dirty="0"/>
-              <a:t>로 만들기 </a:t>
-            </a:r>
-            <a:r>
-              <a:rPr lang="en-US" altLang="ko-KR" sz="2800" dirty="0"/>
-              <a:t>(</a:t>
-            </a:r>
-            <a:r>
-              <a:rPr lang="en-US" altLang="ko-KR" sz="2800" dirty="0" err="1"/>
-              <a:t>TUKorea</a:t>
-            </a:r>
-            <a:r>
-              <a:rPr lang="en-US" altLang="ko-KR" sz="2800" dirty="0"/>
-              <a:t>, </a:t>
-            </a:r>
-            <a:r>
-              <a:rPr lang="ko-KR" altLang="en-US" sz="2800" dirty="0"/>
-              <a:t>백준</a:t>
-            </a:r>
-            <a:r>
-              <a:rPr lang="en-US" altLang="ko-KR" sz="2800" dirty="0"/>
-              <a:t>1463, DP) </a:t>
-            </a:r>
-            <a:br>
-              <a:rPr lang="en-US" altLang="ko-KR" sz="2800" dirty="0"/>
-            </a:br>
-            <a:r>
-              <a:rPr lang="en-US" altLang="ko-KR" sz="2000" dirty="0"/>
-              <a:t>http://210.93.60.51/problem/0183</a:t>
-            </a:r>
-            <a:br>
-              <a:rPr lang="en-US" altLang="ko-KR" sz="2000" dirty="0"/>
-            </a:br>
-            <a:r>
-              <a:rPr lang="en-US" altLang="ko-KR" sz="2000" dirty="0"/>
-              <a:t>https://www.acmicpc.net/problem/1463</a:t>
-            </a:r>
-            <a:endParaRPr lang="ko-KR" altLang="en-US" sz="2000" dirty="0"/>
-          </a:p>
-        </p:txBody>
-      </p:sp>
-      <p:sp>
-        <p:nvSpPr>
-          <p:cNvPr id="5" name="슬라이드 번호 개체 틀 4">
-            <a:extLst>
-              <a:ext uri="{FF2B5EF4-FFF2-40B4-BE49-F238E27FC236}">
-                <a16:creationId xmlns:a16="http://schemas.microsoft.com/office/drawing/2014/main" id="{81099AAD-C6EA-CB4B-F77E-8434C7D5EADC}"/>
-              </a:ext>
-            </a:extLst>
-          </p:cNvPr>
+            <a:pPr>
+              <a:defRPr/>
+            </a:pPr>
+            <a:r>
+              <a:rPr lang="ko-KR" altLang="en-US"/>
+              <a:t/>
+            </a:r>
+            <a:endParaRPr lang="ko-KR" altLang="en-US"/>
+          </a:p>
+        </p:txBody>
+      </p:sp>
+      <p:sp>
+        <p:nvSpPr>
+          <p:cNvPr id="3" name="내용 개체 틀 2"/>
+          <p:cNvSpPr>
+            <a:spLocks noGrp="1"/>
+          </p:cNvSpPr>
+          <p:nvPr>
+            <p:ph idx="1"/>
+          </p:nvPr>
+        </p:nvSpPr>
+        <p:spPr/>
+        <p:txBody>
+          <a:bodyPr/>
+          <a:lstStyle/>
+          <a:p>
+            <a:pPr>
+              <a:defRPr/>
+            </a:pPr>
+            <a:r>
+              <a:rPr lang="ko-KR" altLang="en-US"/>
+              <a:t/>
+            </a:r>
+            <a:endParaRPr lang="ko-KR" altLang="en-US"/>
+          </a:p>
+        </p:txBody>
+      </p:sp>
+      <p:sp>
+        <p:nvSpPr>
+          <p:cNvPr id="4" name="날짜 개체 틀 3"/>
+          <p:cNvSpPr>
+            <a:spLocks noGrp="1"/>
+          </p:cNvSpPr>
+          <p:nvPr>
+            <p:ph type="dt" sz="half" idx="10"/>
+          </p:nvPr>
+        </p:nvSpPr>
+        <p:spPr/>
+        <p:txBody>
+          <a:bodyPr/>
+          <a:lstStyle/>
+          <a:p>
+            <a:pPr>
+              <a:defRPr/>
+            </a:pPr>
+            <a:r>
+              <a:rPr lang="en-US" altLang="ko-KR"/>
+              <a:t>2008</a:t>
+            </a:r>
+            <a:r>
+              <a:rPr lang="ko-KR" altLang="en-US"/>
+              <a:t>년</a:t>
+            </a:r>
+            <a:r>
+              <a:rPr lang="en-US" altLang="ko-KR"/>
+              <a:t>2</a:t>
+            </a:r>
+            <a:r>
+              <a:rPr lang="ko-KR" altLang="en-US"/>
+              <a:t>학기 </a:t>
+            </a:r>
+            <a:r>
+              <a:rPr lang="en-US" altLang="ko-KR"/>
+              <a:t>3D</a:t>
+            </a:r>
+            <a:r>
+              <a:rPr lang="ko-KR" altLang="en-US"/>
+              <a:t>게임프로그래밍</a:t>
+            </a:r>
+            <a:r>
+              <a:rPr lang="en-US" altLang="ko-KR"/>
+              <a:t>II </a:t>
+            </a:r>
+            <a:r>
+              <a:rPr lang="ko-KR" altLang="en-US"/>
+              <a:t>담당교수</a:t>
+            </a:r>
+            <a:r>
+              <a:rPr lang="en-US" altLang="ko-KR"/>
+              <a:t>:</a:t>
+            </a:r>
+            <a:r>
+              <a:rPr lang="ko-KR" altLang="en-US"/>
+              <a:t>김영식</a:t>
+            </a:r>
+            <a:endParaRPr lang="ko-KR" altLang="en-US"/>
+          </a:p>
+        </p:txBody>
+      </p:sp>
+      <p:sp>
+        <p:nvSpPr>
+          <p:cNvPr id="5" name="슬라이드 번호 개체 틀 5"/>
           <p:cNvSpPr>
             <a:spLocks noGrp="1"/>
           </p:cNvSpPr>
@@ -9719,275 +9960,49 @@
               <a:defRPr/>
             </a:pPr>
             <a:fld id="{A268DA64-E15D-4814-A1DA-86D92D550423}" type="slidenum">
-              <a:rPr lang="ko-KR" altLang="en-US" smtClean="0"/>
+              <a:rPr lang="en-US" altLang="en-US"/>
               <a:pPr>
                 <a:defRPr/>
               </a:pPr>
-              <a:t>16</a:t>
+              <a:t>19</a:t>
             </a:fld>
-            <a:endParaRPr lang="ko-KR" altLang="en-US"/>
-          </a:p>
-        </p:txBody>
-      </p:sp>
-      <p:sp>
-        <p:nvSpPr>
-          <p:cNvPr id="3" name="내용 개체 틀 2">
-            <a:extLst>
-              <a:ext uri="{FF2B5EF4-FFF2-40B4-BE49-F238E27FC236}">
-                <a16:creationId xmlns:a16="http://schemas.microsoft.com/office/drawing/2014/main" id="{858C86E8-5349-F7B3-AFB6-B10A83FC024F}"/>
-              </a:ext>
-            </a:extLst>
-          </p:cNvPr>
-          <p:cNvSpPr>
-            <a:spLocks noGrp="1"/>
-          </p:cNvSpPr>
-          <p:nvPr>
-            <p:ph idx="1"/>
-          </p:nvPr>
-        </p:nvSpPr>
-        <p:spPr>
-          <a:xfrm>
-            <a:off x="457200" y="1340768"/>
-            <a:ext cx="8229600" cy="4785395"/>
-          </a:xfrm>
-        </p:spPr>
-        <p:txBody>
-          <a:bodyPr/>
-          <a:lstStyle/>
-          <a:p>
-            <a:pPr algn="just"/>
-            <a:r>
-              <a:rPr lang="ko-KR" altLang="en-US" sz="1800" dirty="0">
-                <a:latin typeface="Open Sans" panose="020F0502020204030204" pitchFamily="34" charset="0"/>
-              </a:rPr>
-              <a:t>정수 </a:t>
-            </a:r>
-            <a:r>
-              <a:rPr lang="en-US" altLang="ko-KR" sz="1800" dirty="0">
-                <a:latin typeface="Open Sans" panose="020F0502020204030204" pitchFamily="34" charset="0"/>
-              </a:rPr>
-              <a:t>X</a:t>
-            </a:r>
-            <a:r>
-              <a:rPr lang="ko-KR" altLang="en-US" sz="1800" dirty="0">
-                <a:latin typeface="Open Sans" panose="020F0502020204030204" pitchFamily="34" charset="0"/>
-              </a:rPr>
-              <a:t>에 사용할 수 있는 연산은 다음과 같이 세 가지 이다</a:t>
-            </a:r>
-            <a:r>
-              <a:rPr lang="en-US" altLang="ko-KR" sz="1800" dirty="0">
-                <a:latin typeface="Open Sans" panose="020F0502020204030204" pitchFamily="34" charset="0"/>
-              </a:rPr>
-              <a:t>.</a:t>
-            </a:r>
-          </a:p>
-          <a:p>
-            <a:pPr algn="just"/>
-            <a:endParaRPr lang="en-US" altLang="ko-KR" sz="1800" dirty="0">
-              <a:latin typeface="Open Sans" panose="020F0502020204030204" pitchFamily="34" charset="0"/>
-            </a:endParaRPr>
-          </a:p>
-          <a:p>
-            <a:pPr algn="just"/>
-            <a:r>
-              <a:rPr lang="en-US" altLang="ko-KR" sz="1800" b="1" dirty="0">
-                <a:latin typeface="Open Sans" panose="020F0502020204030204" pitchFamily="34" charset="0"/>
-              </a:rPr>
-              <a:t>X</a:t>
-            </a:r>
-            <a:r>
-              <a:rPr lang="ko-KR" altLang="en-US" sz="1800" b="1" dirty="0">
-                <a:latin typeface="Open Sans" panose="020F0502020204030204" pitchFamily="34" charset="0"/>
-              </a:rPr>
-              <a:t>가 </a:t>
-            </a:r>
-            <a:r>
-              <a:rPr lang="en-US" altLang="ko-KR" sz="1800" b="1" dirty="0">
-                <a:latin typeface="Open Sans" panose="020F0502020204030204" pitchFamily="34" charset="0"/>
-              </a:rPr>
-              <a:t>3</a:t>
-            </a:r>
-            <a:r>
-              <a:rPr lang="ko-KR" altLang="en-US" sz="1800" b="1" dirty="0">
-                <a:latin typeface="Open Sans" panose="020F0502020204030204" pitchFamily="34" charset="0"/>
-              </a:rPr>
-              <a:t>으로 나누어 떨어지면</a:t>
-            </a:r>
-            <a:r>
-              <a:rPr lang="en-US" altLang="ko-KR" sz="1800" b="1" dirty="0">
-                <a:latin typeface="Open Sans" panose="020F0502020204030204" pitchFamily="34" charset="0"/>
-              </a:rPr>
-              <a:t>, 3</a:t>
-            </a:r>
-            <a:r>
-              <a:rPr lang="ko-KR" altLang="en-US" sz="1800" b="1" dirty="0">
-                <a:latin typeface="Open Sans" panose="020F0502020204030204" pitchFamily="34" charset="0"/>
-              </a:rPr>
-              <a:t>으로 나눈다</a:t>
-            </a:r>
-            <a:r>
-              <a:rPr lang="en-US" altLang="ko-KR" sz="1800" b="1" dirty="0">
-                <a:latin typeface="Open Sans" panose="020F0502020204030204" pitchFamily="34" charset="0"/>
-              </a:rPr>
-              <a:t>.</a:t>
-            </a:r>
-          </a:p>
-          <a:p>
-            <a:pPr algn="just"/>
-            <a:r>
-              <a:rPr lang="en-US" altLang="ko-KR" sz="1800" b="1" dirty="0">
-                <a:latin typeface="Open Sans" panose="020F0502020204030204" pitchFamily="34" charset="0"/>
-              </a:rPr>
-              <a:t>X</a:t>
-            </a:r>
-            <a:r>
-              <a:rPr lang="ko-KR" altLang="en-US" sz="1800" b="1" dirty="0">
-                <a:latin typeface="Open Sans" panose="020F0502020204030204" pitchFamily="34" charset="0"/>
-              </a:rPr>
-              <a:t>가 </a:t>
-            </a:r>
-            <a:r>
-              <a:rPr lang="en-US" altLang="ko-KR" sz="1800" b="1" dirty="0">
-                <a:latin typeface="Open Sans" panose="020F0502020204030204" pitchFamily="34" charset="0"/>
-              </a:rPr>
-              <a:t>2</a:t>
-            </a:r>
-            <a:r>
-              <a:rPr lang="ko-KR" altLang="en-US" sz="1800" b="1" dirty="0">
-                <a:latin typeface="Open Sans" panose="020F0502020204030204" pitchFamily="34" charset="0"/>
-              </a:rPr>
-              <a:t>로 나누어 떨어지면</a:t>
-            </a:r>
-            <a:r>
-              <a:rPr lang="en-US" altLang="ko-KR" sz="1800" b="1" dirty="0">
-                <a:latin typeface="Open Sans" panose="020F0502020204030204" pitchFamily="34" charset="0"/>
-              </a:rPr>
-              <a:t>, 2</a:t>
-            </a:r>
-            <a:r>
-              <a:rPr lang="ko-KR" altLang="en-US" sz="1800" b="1" dirty="0">
-                <a:latin typeface="Open Sans" panose="020F0502020204030204" pitchFamily="34" charset="0"/>
-              </a:rPr>
-              <a:t>로 나눈다</a:t>
-            </a:r>
-            <a:r>
-              <a:rPr lang="en-US" altLang="ko-KR" sz="1800" b="1" dirty="0">
-                <a:latin typeface="Open Sans" panose="020F0502020204030204" pitchFamily="34" charset="0"/>
-              </a:rPr>
-              <a:t>.</a:t>
-            </a:r>
-          </a:p>
-          <a:p>
-            <a:pPr algn="just"/>
-            <a:r>
-              <a:rPr lang="en-US" altLang="ko-KR" sz="1800" b="1" dirty="0">
-                <a:latin typeface="Open Sans" panose="020F0502020204030204" pitchFamily="34" charset="0"/>
-              </a:rPr>
-              <a:t>1</a:t>
-            </a:r>
-            <a:r>
-              <a:rPr lang="ko-KR" altLang="en-US" sz="1800" b="1" dirty="0">
-                <a:latin typeface="Open Sans" panose="020F0502020204030204" pitchFamily="34" charset="0"/>
-              </a:rPr>
-              <a:t>을 뺀다</a:t>
-            </a:r>
-            <a:r>
-              <a:rPr lang="en-US" altLang="ko-KR" sz="1800" b="1" dirty="0">
-                <a:latin typeface="Open Sans" panose="020F0502020204030204" pitchFamily="34" charset="0"/>
-              </a:rPr>
-              <a:t>.</a:t>
-            </a:r>
-          </a:p>
-          <a:p>
-            <a:pPr algn="just"/>
-            <a:endParaRPr lang="en-US" altLang="ko-KR" sz="1800" b="1" dirty="0">
-              <a:latin typeface="Open Sans" panose="020F0502020204030204" pitchFamily="34" charset="0"/>
-            </a:endParaRPr>
-          </a:p>
-          <a:p>
-            <a:pPr algn="just"/>
-            <a:r>
-              <a:rPr lang="ko-KR" altLang="en-US" sz="1800" b="1" dirty="0">
-                <a:latin typeface="Open Sans" panose="020F0502020204030204" pitchFamily="34" charset="0"/>
-              </a:rPr>
-              <a:t>정수 </a:t>
-            </a:r>
-            <a:r>
-              <a:rPr lang="en-US" altLang="ko-KR" sz="1800" b="1" dirty="0">
-                <a:latin typeface="Open Sans" panose="020F0502020204030204" pitchFamily="34" charset="0"/>
-              </a:rPr>
-              <a:t>N</a:t>
-            </a:r>
-            <a:r>
-              <a:rPr lang="ko-KR" altLang="en-US" sz="1800" b="1" dirty="0">
-                <a:latin typeface="Open Sans" panose="020F0502020204030204" pitchFamily="34" charset="0"/>
-              </a:rPr>
-              <a:t>이 주어졌을 때</a:t>
-            </a:r>
-            <a:r>
-              <a:rPr lang="en-US" altLang="ko-KR" sz="1800" b="1" dirty="0">
-                <a:latin typeface="Open Sans" panose="020F0502020204030204" pitchFamily="34" charset="0"/>
-              </a:rPr>
-              <a:t>, </a:t>
-            </a:r>
-            <a:r>
-              <a:rPr lang="ko-KR" altLang="en-US" sz="1800" dirty="0">
-                <a:latin typeface="Open Sans" panose="020F0502020204030204" pitchFamily="34" charset="0"/>
-              </a:rPr>
-              <a:t>위와 같은 연산 세 개를 적절히 사용해서 </a:t>
-            </a:r>
-            <a:r>
-              <a:rPr lang="en-US" altLang="ko-KR" sz="1800" dirty="0">
-                <a:latin typeface="Open Sans" panose="020F0502020204030204" pitchFamily="34" charset="0"/>
-              </a:rPr>
-              <a:t>1</a:t>
-            </a:r>
-            <a:r>
-              <a:rPr lang="ko-KR" altLang="en-US" sz="1800" dirty="0">
-                <a:latin typeface="Open Sans" panose="020F0502020204030204" pitchFamily="34" charset="0"/>
-              </a:rPr>
-              <a:t>을 만들려고 한다</a:t>
-            </a:r>
-            <a:r>
-              <a:rPr lang="en-US" altLang="ko-KR" sz="1800" dirty="0">
-                <a:latin typeface="Open Sans" panose="020F0502020204030204" pitchFamily="34" charset="0"/>
-              </a:rPr>
-              <a:t>. </a:t>
-            </a:r>
-            <a:r>
-              <a:rPr lang="ko-KR" altLang="en-US" sz="1800" b="1" dirty="0">
-                <a:latin typeface="Open Sans" panose="020F0502020204030204" pitchFamily="34" charset="0"/>
-              </a:rPr>
-              <a:t>연산을 사용하는 횟수의 최솟값을 </a:t>
-            </a:r>
-            <a:r>
-              <a:rPr lang="ko-KR" altLang="en-US" sz="1800" b="1" dirty="0" err="1">
-                <a:latin typeface="Open Sans" panose="020F0502020204030204" pitchFamily="34" charset="0"/>
-              </a:rPr>
-              <a:t>출력하시오</a:t>
-            </a:r>
-            <a:r>
-              <a:rPr lang="en-US" altLang="ko-KR" sz="1800" b="1" dirty="0">
-                <a:latin typeface="Open Sans" panose="020F0502020204030204" pitchFamily="34" charset="0"/>
-              </a:rPr>
-              <a:t>.</a:t>
-            </a:r>
-            <a:endParaRPr lang="en-US" altLang="ko-KR" sz="1800" b="1" i="0" dirty="0">
-              <a:effectLst/>
-              <a:latin typeface="Open Sans" panose="020F0502020204030204" pitchFamily="34" charset="0"/>
-            </a:endParaRPr>
+            <a:endParaRPr lang="en-US" altLang="en-US"/>
           </a:p>
         </p:txBody>
       </p:sp>
       <p:pic>
         <p:nvPicPr>
-          <p:cNvPr id="6" name="그림 5"/>
+          <p:cNvPr id="6" name=""/>
           <p:cNvPicPr>
             <a:picLocks noChangeAspect="1"/>
           </p:cNvPicPr>
           <p:nvPr/>
         </p:nvPicPr>
-        <p:blipFill>
+        <p:blipFill rotWithShape="1">
+          <a:blip r:embed="rId2"/>
+          <a:stretch>
+            <a:fillRect/>
+          </a:stretch>
+        </p:blipFill>
+        <p:spPr>
+          <a:xfrm>
+            <a:off x="683568" y="260648"/>
+            <a:ext cx="3333377" cy="5877272"/>
+          </a:xfrm>
+          <a:prstGeom prst="rect">
+            <a:avLst/>
+          </a:prstGeom>
+        </p:spPr>
+      </p:pic>
+      <p:pic>
+        <p:nvPicPr>
+          <p:cNvPr id="7" name=""/>
+          <p:cNvPicPr>
+            <a:picLocks noChangeAspect="1"/>
+          </p:cNvPicPr>
+          <p:nvPr/>
+        </p:nvPicPr>
+        <p:blipFill rotWithShape="1">
           <a:blip r:embed="rId3"/>
           <a:stretch>
             <a:fillRect/>
@@ -9995,500 +10010,8 @@
         </p:blipFill>
         <p:spPr>
           <a:xfrm>
-            <a:off x="672133" y="4437112"/>
-            <a:ext cx="8014667" cy="1344286"/>
-          </a:xfrm>
-          <a:prstGeom prst="rect">
-            <a:avLst/>
-          </a:prstGeom>
-          <a:ln>
-            <a:solidFill>
-              <a:schemeClr val="tx1"/>
-            </a:solidFill>
-          </a:ln>
-        </p:spPr>
-      </p:pic>
-    </p:spTree>
-    <p:extLst>
-      <p:ext uri="{BB962C8B-B14F-4D97-AF65-F5344CB8AC3E}">
-        <p14:creationId xmlns:p14="http://schemas.microsoft.com/office/powerpoint/2010/main" val="4079443502"/>
-      </p:ext>
-    </p:extLst>
-  </p:cSld>
-  <p:clrMapOvr>
-    <a:masterClrMapping/>
-  </p:clrMapOvr>
-</p:sld>
-</file>
-
-<file path=ppt/slides/slide17.xml><?xml version="1.0" encoding="utf-8"?>
-<p:sld xmlns:a="http://schemas.openxmlformats.org/drawingml/2006/main" xmlns:r="http://schemas.openxmlformats.org/officeDocument/2006/relationships" xmlns:p="http://schemas.openxmlformats.org/presentationml/2006/main">
-  <p:cSld>
-    <p:spTree>
-      <p:nvGrpSpPr>
-        <p:cNvPr id="1" name="">
-          <a:extLst>
-            <a:ext uri="{FF2B5EF4-FFF2-40B4-BE49-F238E27FC236}">
-              <a16:creationId xmlns:a16="http://schemas.microsoft.com/office/drawing/2014/main" id="{BB2182D6-7C3A-1450-0957-0736228992F8}"/>
-            </a:ext>
-          </a:extLst>
-        </p:cNvPr>
-        <p:cNvGrpSpPr/>
-        <p:nvPr/>
-      </p:nvGrpSpPr>
-      <p:grpSpPr>
-        <a:xfrm>
-          <a:off x="0" y="0"/>
-          <a:ext cx="0" cy="0"/>
-          <a:chOff x="0" y="0"/>
-          <a:chExt cx="0" cy="0"/>
-        </a:xfrm>
-      </p:grpSpPr>
-      <p:sp>
-        <p:nvSpPr>
-          <p:cNvPr id="2" name="제목 1">
-            <a:extLst>
-              <a:ext uri="{FF2B5EF4-FFF2-40B4-BE49-F238E27FC236}">
-                <a16:creationId xmlns:a16="http://schemas.microsoft.com/office/drawing/2014/main" id="{00FC0AAC-B616-D4EC-909C-ECC3F2A8B843}"/>
-              </a:ext>
-            </a:extLst>
-          </p:cNvPr>
-          <p:cNvSpPr>
-            <a:spLocks noGrp="1"/>
-          </p:cNvSpPr>
-          <p:nvPr>
-            <p:ph type="title"/>
-          </p:nvPr>
-        </p:nvSpPr>
-        <p:spPr/>
-        <p:txBody>
-          <a:bodyPr/>
-          <a:lstStyle/>
-          <a:p>
-            <a:r>
-              <a:rPr lang="en-US" altLang="ko-KR" sz="2800" dirty="0"/>
-              <a:t>8. </a:t>
-            </a:r>
-            <a:r>
-              <a:rPr lang="ko-KR" altLang="en-US" sz="2800" dirty="0"/>
-              <a:t>내려가기 </a:t>
-            </a:r>
-            <a:r>
-              <a:rPr lang="en-US" altLang="ko-KR" sz="2800" dirty="0"/>
-              <a:t>(</a:t>
-            </a:r>
-            <a:r>
-              <a:rPr lang="en-US" altLang="ko-KR" sz="2800" dirty="0" err="1"/>
-              <a:t>TUKorea</a:t>
-            </a:r>
-            <a:r>
-              <a:rPr lang="en-US" altLang="ko-KR" sz="2800" dirty="0"/>
-              <a:t>, </a:t>
-            </a:r>
-            <a:r>
-              <a:rPr lang="ko-KR" altLang="en-US" sz="2800" dirty="0"/>
-              <a:t>백준</a:t>
-            </a:r>
-            <a:r>
-              <a:rPr lang="en-US" altLang="ko-KR" sz="2800" dirty="0"/>
-              <a:t>2096, DP) </a:t>
-            </a:r>
-            <a:br>
-              <a:rPr lang="en-US" altLang="ko-KR" sz="2800" dirty="0"/>
-            </a:br>
-            <a:r>
-              <a:rPr lang="en-US" altLang="ko-KR" sz="2000" dirty="0"/>
-              <a:t>http://210.93.60.51/problem/0184</a:t>
-            </a:r>
-            <a:br>
-              <a:rPr lang="en-US" altLang="ko-KR" sz="2000" dirty="0"/>
-            </a:br>
-            <a:r>
-              <a:rPr lang="en-US" altLang="ko-KR" sz="2000" dirty="0"/>
-              <a:t>https://www.acmicpc.net/problem/2096</a:t>
-            </a:r>
-            <a:endParaRPr lang="ko-KR" altLang="en-US" sz="2000" dirty="0"/>
-          </a:p>
-        </p:txBody>
-      </p:sp>
-      <p:sp>
-        <p:nvSpPr>
-          <p:cNvPr id="5" name="슬라이드 번호 개체 틀 4">
-            <a:extLst>
-              <a:ext uri="{FF2B5EF4-FFF2-40B4-BE49-F238E27FC236}">
-                <a16:creationId xmlns:a16="http://schemas.microsoft.com/office/drawing/2014/main" id="{81099AAD-C6EA-CB4B-F77E-8434C7D5EADC}"/>
-              </a:ext>
-            </a:extLst>
-          </p:cNvPr>
-          <p:cNvSpPr>
-            <a:spLocks noGrp="1"/>
-          </p:cNvSpPr>
-          <p:nvPr>
-            <p:ph type="sldNum" sz="quarter" idx="12"/>
-          </p:nvPr>
-        </p:nvSpPr>
-        <p:spPr/>
-        <p:txBody>
-          <a:bodyPr/>
-          <a:lstStyle/>
-          <a:p>
-            <a:pPr>
-              <a:defRPr/>
-            </a:pPr>
-            <a:fld id="{A268DA64-E15D-4814-A1DA-86D92D550423}" type="slidenum">
-              <a:rPr lang="ko-KR" altLang="en-US" smtClean="0"/>
-              <a:pPr>
-                <a:defRPr/>
-              </a:pPr>
-              <a:t>17</a:t>
-            </a:fld>
-            <a:endParaRPr lang="ko-KR" altLang="en-US"/>
-          </a:p>
-        </p:txBody>
-      </p:sp>
-      <p:sp>
-        <p:nvSpPr>
-          <p:cNvPr id="3" name="내용 개체 틀 2">
-            <a:extLst>
-              <a:ext uri="{FF2B5EF4-FFF2-40B4-BE49-F238E27FC236}">
-                <a16:creationId xmlns:a16="http://schemas.microsoft.com/office/drawing/2014/main" id="{858C86E8-5349-F7B3-AFB6-B10A83FC024F}"/>
-              </a:ext>
-            </a:extLst>
-          </p:cNvPr>
-          <p:cNvSpPr>
-            <a:spLocks noGrp="1"/>
-          </p:cNvSpPr>
-          <p:nvPr>
-            <p:ph idx="1"/>
-          </p:nvPr>
-        </p:nvSpPr>
-        <p:spPr>
-          <a:xfrm>
-            <a:off x="457200" y="1340768"/>
-            <a:ext cx="8229600" cy="4785395"/>
-          </a:xfrm>
-        </p:spPr>
-        <p:txBody>
-          <a:bodyPr/>
-          <a:lstStyle/>
-          <a:p>
-            <a:pPr algn="just"/>
-            <a:r>
-              <a:rPr lang="en-US" altLang="ko-KR" sz="1800" b="1" dirty="0">
-                <a:latin typeface="Open Sans" panose="020F0502020204030204" pitchFamily="34" charset="0"/>
-              </a:rPr>
-              <a:t>N</a:t>
-            </a:r>
-            <a:r>
-              <a:rPr lang="ko-KR" altLang="en-US" sz="1800" b="1" dirty="0">
-                <a:latin typeface="Open Sans" panose="020F0502020204030204" pitchFamily="34" charset="0"/>
-              </a:rPr>
-              <a:t>줄에 </a:t>
-            </a:r>
-            <a:r>
-              <a:rPr lang="en-US" altLang="ko-KR" sz="1800" b="1" dirty="0">
-                <a:latin typeface="Open Sans" panose="020F0502020204030204" pitchFamily="34" charset="0"/>
-              </a:rPr>
-              <a:t>0 </a:t>
-            </a:r>
-            <a:r>
-              <a:rPr lang="ko-KR" altLang="en-US" sz="1800" b="1" dirty="0">
-                <a:latin typeface="Open Sans" panose="020F0502020204030204" pitchFamily="34" charset="0"/>
-              </a:rPr>
-              <a:t>이상 </a:t>
-            </a:r>
-            <a:r>
-              <a:rPr lang="en-US" altLang="ko-KR" sz="1800" b="1" dirty="0">
-                <a:latin typeface="Open Sans" panose="020F0502020204030204" pitchFamily="34" charset="0"/>
-              </a:rPr>
-              <a:t>9 </a:t>
-            </a:r>
-            <a:r>
-              <a:rPr lang="ko-KR" altLang="en-US" sz="1800" b="1" dirty="0">
-                <a:latin typeface="Open Sans" panose="020F0502020204030204" pitchFamily="34" charset="0"/>
-              </a:rPr>
-              <a:t>이하의 숫자가 세 개씩 적혀 있다</a:t>
-            </a:r>
-            <a:r>
-              <a:rPr lang="en-US" altLang="ko-KR" sz="1800" b="1" dirty="0">
-                <a:latin typeface="Open Sans" panose="020F0502020204030204" pitchFamily="34" charset="0"/>
-              </a:rPr>
-              <a:t>. </a:t>
-            </a:r>
-            <a:r>
-              <a:rPr lang="ko-KR" altLang="en-US" sz="1800" dirty="0">
-                <a:latin typeface="Open Sans" panose="020F0502020204030204" pitchFamily="34" charset="0"/>
-              </a:rPr>
-              <a:t>내려가기 게임을 하고 있는데</a:t>
-            </a:r>
-            <a:r>
-              <a:rPr lang="en-US" altLang="ko-KR" sz="1800" dirty="0">
-                <a:latin typeface="Open Sans" panose="020F0502020204030204" pitchFamily="34" charset="0"/>
-              </a:rPr>
-              <a:t>, </a:t>
-            </a:r>
-            <a:r>
-              <a:rPr lang="ko-KR" altLang="en-US" sz="1800" dirty="0">
-                <a:latin typeface="Open Sans" panose="020F0502020204030204" pitchFamily="34" charset="0"/>
-              </a:rPr>
-              <a:t>이 게임은 </a:t>
-            </a:r>
-            <a:r>
-              <a:rPr lang="ko-KR" altLang="en-US" sz="1800" b="1" dirty="0">
-                <a:latin typeface="Open Sans" panose="020F0502020204030204" pitchFamily="34" charset="0"/>
-              </a:rPr>
-              <a:t>첫 줄에서 시작해서 마지막 줄에서 끝나게 되는 놀이이다</a:t>
-            </a:r>
-            <a:r>
-              <a:rPr lang="en-US" altLang="ko-KR" sz="1800" dirty="0">
-                <a:latin typeface="Open Sans" panose="020F0502020204030204" pitchFamily="34" charset="0"/>
-              </a:rPr>
-              <a:t>.</a:t>
-            </a:r>
-          </a:p>
-          <a:p>
-            <a:pPr algn="just"/>
-            <a:endParaRPr lang="en-US" altLang="ko-KR" sz="1800" dirty="0">
-              <a:latin typeface="Open Sans" panose="020F0502020204030204" pitchFamily="34" charset="0"/>
-            </a:endParaRPr>
-          </a:p>
-          <a:p>
-            <a:pPr algn="just"/>
-            <a:r>
-              <a:rPr lang="ko-KR" altLang="en-US" sz="1800" dirty="0">
-                <a:latin typeface="Open Sans" panose="020F0502020204030204" pitchFamily="34" charset="0"/>
-              </a:rPr>
-              <a:t>먼저 처음에 적혀 있는 세 개의 숫자 중에서 하나를 골라서 시작하게 된다</a:t>
-            </a:r>
-            <a:r>
-              <a:rPr lang="en-US" altLang="ko-KR" sz="1800" dirty="0">
-                <a:latin typeface="Open Sans" panose="020F0502020204030204" pitchFamily="34" charset="0"/>
-              </a:rPr>
-              <a:t>.  </a:t>
-            </a:r>
-            <a:r>
-              <a:rPr lang="ko-KR" altLang="en-US" sz="1800" dirty="0">
-                <a:latin typeface="Open Sans" panose="020F0502020204030204" pitchFamily="34" charset="0"/>
-              </a:rPr>
-              <a:t>다음 줄로 내려갈 때에는 </a:t>
-            </a:r>
-            <a:r>
-              <a:rPr lang="ko-KR" altLang="en-US" sz="1800" b="1" dirty="0">
-                <a:latin typeface="Open Sans" panose="020F0502020204030204" pitchFamily="34" charset="0"/>
-              </a:rPr>
-              <a:t>다음과 같은 제약 조건이 있다</a:t>
-            </a:r>
-            <a:r>
-              <a:rPr lang="en-US" altLang="ko-KR" sz="1800" b="1" dirty="0">
-                <a:latin typeface="Open Sans" panose="020F0502020204030204" pitchFamily="34" charset="0"/>
-              </a:rPr>
-              <a:t>.</a:t>
-            </a:r>
-          </a:p>
-          <a:p>
-            <a:pPr algn="just"/>
-            <a:endParaRPr lang="en-US" altLang="ko-KR" sz="1800" b="1" dirty="0">
-              <a:latin typeface="Open Sans" panose="020F0502020204030204" pitchFamily="34" charset="0"/>
-            </a:endParaRPr>
-          </a:p>
-          <a:p>
-            <a:pPr algn="just"/>
-            <a:endParaRPr lang="en-US" altLang="ko-KR" sz="1800" b="1" dirty="0">
-              <a:latin typeface="Open Sans" panose="020F0502020204030204" pitchFamily="34" charset="0"/>
-            </a:endParaRPr>
-          </a:p>
-          <a:p>
-            <a:pPr algn="just"/>
-            <a:endParaRPr lang="en-US" altLang="ko-KR" sz="1800" b="1" dirty="0">
-              <a:latin typeface="Open Sans" panose="020F0502020204030204" pitchFamily="34" charset="0"/>
-            </a:endParaRPr>
-          </a:p>
-          <a:p>
-            <a:pPr algn="just"/>
-            <a:endParaRPr lang="en-US" altLang="ko-KR" sz="1800" b="1" dirty="0">
-              <a:latin typeface="Open Sans" panose="020F0502020204030204" pitchFamily="34" charset="0"/>
-            </a:endParaRPr>
-          </a:p>
-          <a:p>
-            <a:pPr algn="just"/>
-            <a:r>
-              <a:rPr lang="ko-KR" altLang="en-US" sz="1800" dirty="0">
-                <a:latin typeface="Open Sans" panose="020F0502020204030204" pitchFamily="34" charset="0"/>
-              </a:rPr>
-              <a:t>별표는 현재 위치이고</a:t>
-            </a:r>
-            <a:r>
-              <a:rPr lang="en-US" altLang="ko-KR" sz="1800" dirty="0">
-                <a:latin typeface="Open Sans" panose="020F0502020204030204" pitchFamily="34" charset="0"/>
-              </a:rPr>
-              <a:t>, </a:t>
-            </a:r>
-            <a:r>
-              <a:rPr lang="ko-KR" altLang="en-US" sz="1800" dirty="0">
-                <a:latin typeface="Open Sans" panose="020F0502020204030204" pitchFamily="34" charset="0"/>
-              </a:rPr>
-              <a:t>그 </a:t>
-            </a:r>
-            <a:r>
-              <a:rPr lang="ko-KR" altLang="en-US" sz="1800" dirty="0" err="1">
-                <a:latin typeface="Open Sans" panose="020F0502020204030204" pitchFamily="34" charset="0"/>
-              </a:rPr>
-              <a:t>아랫</a:t>
-            </a:r>
-            <a:r>
-              <a:rPr lang="ko-KR" altLang="en-US" sz="1800" dirty="0">
-                <a:latin typeface="Open Sans" panose="020F0502020204030204" pitchFamily="34" charset="0"/>
-              </a:rPr>
-              <a:t> 줄의 </a:t>
-            </a:r>
-            <a:r>
-              <a:rPr lang="ko-KR" altLang="en-US" sz="1800" b="1" dirty="0">
-                <a:latin typeface="Open Sans" panose="020F0502020204030204" pitchFamily="34" charset="0"/>
-              </a:rPr>
-              <a:t>파란 동그라미는 </a:t>
-            </a:r>
-            <a:r>
-              <a:rPr lang="ko-KR" altLang="en-US" sz="1800" b="1" dirty="0" err="1">
-                <a:latin typeface="Open Sans" panose="020F0502020204030204" pitchFamily="34" charset="0"/>
-              </a:rPr>
-              <a:t>원룡이가</a:t>
-            </a:r>
-            <a:r>
-              <a:rPr lang="ko-KR" altLang="en-US" sz="1800" b="1" dirty="0">
-                <a:latin typeface="Open Sans" panose="020F0502020204030204" pitchFamily="34" charset="0"/>
-              </a:rPr>
-              <a:t> 다음 줄로 내려갈 수 있는 위치이며</a:t>
-            </a:r>
-            <a:r>
-              <a:rPr lang="en-US" altLang="ko-KR" sz="1800" b="1" dirty="0">
-                <a:latin typeface="Open Sans" panose="020F0502020204030204" pitchFamily="34" charset="0"/>
-              </a:rPr>
-              <a:t>, </a:t>
-            </a:r>
-            <a:r>
-              <a:rPr lang="ko-KR" altLang="en-US" sz="1800" b="1" dirty="0">
-                <a:latin typeface="Open Sans" panose="020F0502020204030204" pitchFamily="34" charset="0"/>
-              </a:rPr>
-              <a:t>빨간 </a:t>
-            </a:r>
-            <a:r>
-              <a:rPr lang="ko-KR" altLang="en-US" sz="1800" b="1" dirty="0" err="1">
-                <a:latin typeface="Open Sans" panose="020F0502020204030204" pitchFamily="34" charset="0"/>
-              </a:rPr>
-              <a:t>가위표는</a:t>
-            </a:r>
-            <a:r>
-              <a:rPr lang="ko-KR" altLang="en-US" sz="1800" b="1" dirty="0">
-                <a:latin typeface="Open Sans" panose="020F0502020204030204" pitchFamily="34" charset="0"/>
-              </a:rPr>
-              <a:t> </a:t>
-            </a:r>
-            <a:r>
-              <a:rPr lang="ko-KR" altLang="en-US" sz="1800" b="1" dirty="0" err="1">
-                <a:latin typeface="Open Sans" panose="020F0502020204030204" pitchFamily="34" charset="0"/>
-              </a:rPr>
-              <a:t>원룡이가</a:t>
-            </a:r>
-            <a:r>
-              <a:rPr lang="ko-KR" altLang="en-US" sz="1800" b="1" dirty="0">
-                <a:latin typeface="Open Sans" panose="020F0502020204030204" pitchFamily="34" charset="0"/>
-              </a:rPr>
-              <a:t> 내려갈 수 없는 위치가 </a:t>
-            </a:r>
-            <a:r>
-              <a:rPr lang="ko-KR" altLang="en-US" sz="1800" dirty="0">
-                <a:latin typeface="Open Sans" panose="020F0502020204030204" pitchFamily="34" charset="0"/>
-              </a:rPr>
-              <a:t>된다</a:t>
-            </a:r>
-            <a:r>
-              <a:rPr lang="en-US" altLang="ko-KR" sz="1800" dirty="0">
-                <a:latin typeface="Open Sans" panose="020F0502020204030204" pitchFamily="34" charset="0"/>
-              </a:rPr>
-              <a:t>. </a:t>
-            </a:r>
-          </a:p>
-          <a:p>
-            <a:pPr algn="just"/>
-            <a:endParaRPr lang="en-US" altLang="ko-KR" sz="1800" dirty="0">
-              <a:latin typeface="Open Sans" panose="020F0502020204030204" pitchFamily="34" charset="0"/>
-            </a:endParaRPr>
-          </a:p>
-          <a:p>
-            <a:pPr algn="just"/>
-            <a:r>
-              <a:rPr lang="ko-KR" altLang="en-US" sz="1800" dirty="0" err="1">
-                <a:latin typeface="Open Sans" panose="020F0502020204030204" pitchFamily="34" charset="0"/>
-              </a:rPr>
-              <a:t>숫자표가</a:t>
-            </a:r>
-            <a:r>
-              <a:rPr lang="ko-KR" altLang="en-US" sz="1800" dirty="0">
-                <a:latin typeface="Open Sans" panose="020F0502020204030204" pitchFamily="34" charset="0"/>
-              </a:rPr>
-              <a:t> 주어져 있을 때</a:t>
-            </a:r>
-            <a:r>
-              <a:rPr lang="en-US" altLang="ko-KR" sz="1800" dirty="0">
-                <a:latin typeface="Open Sans" panose="020F0502020204030204" pitchFamily="34" charset="0"/>
-              </a:rPr>
-              <a:t>, </a:t>
-            </a:r>
-            <a:r>
-              <a:rPr lang="ko-KR" altLang="en-US" sz="1800" dirty="0">
-                <a:latin typeface="Open Sans" panose="020F0502020204030204" pitchFamily="34" charset="0"/>
-              </a:rPr>
-              <a:t>얻을 수 있는 </a:t>
-            </a:r>
-            <a:r>
-              <a:rPr lang="ko-KR" altLang="en-US" sz="1800" b="1" dirty="0">
-                <a:latin typeface="Open Sans" panose="020F0502020204030204" pitchFamily="34" charset="0"/>
-              </a:rPr>
-              <a:t>최대 점수</a:t>
-            </a:r>
-            <a:r>
-              <a:rPr lang="en-US" altLang="ko-KR" sz="1800" b="1" dirty="0">
-                <a:latin typeface="Open Sans" panose="020F0502020204030204" pitchFamily="34" charset="0"/>
-              </a:rPr>
-              <a:t>, </a:t>
-            </a:r>
-            <a:r>
-              <a:rPr lang="ko-KR" altLang="en-US" sz="1800" b="1" dirty="0">
-                <a:latin typeface="Open Sans" panose="020F0502020204030204" pitchFamily="34" charset="0"/>
-              </a:rPr>
-              <a:t>최소 점수를 구하는 프로그램을 작성하시오</a:t>
-            </a:r>
-            <a:r>
-              <a:rPr lang="en-US" altLang="ko-KR" sz="1800" b="1" dirty="0">
-                <a:latin typeface="Open Sans" panose="020F0502020204030204" pitchFamily="34" charset="0"/>
-              </a:rPr>
-              <a:t>.</a:t>
-            </a:r>
-            <a:endParaRPr lang="en-US" altLang="ko-KR" sz="1800" b="1" i="0" dirty="0">
-              <a:effectLst/>
-              <a:latin typeface="Open Sans" panose="020F0502020204030204" pitchFamily="34" charset="0"/>
-            </a:endParaRPr>
-          </a:p>
-        </p:txBody>
-      </p:sp>
-      <p:pic>
-        <p:nvPicPr>
-          <p:cNvPr id="4" name="그림 3"/>
-          <p:cNvPicPr>
-            <a:picLocks noChangeAspect="1"/>
-          </p:cNvPicPr>
-          <p:nvPr/>
-        </p:nvPicPr>
-        <p:blipFill>
-          <a:blip r:embed="rId3"/>
-          <a:stretch>
-            <a:fillRect/>
-          </a:stretch>
-        </p:blipFill>
-        <p:spPr>
-          <a:xfrm>
-            <a:off x="552450" y="2881312"/>
-            <a:ext cx="8039100" cy="1095375"/>
+            <a:off x="3059832" y="4509120"/>
+            <a:ext cx="5847898" cy="1572509"/>
           </a:xfrm>
           <a:prstGeom prst="rect">
             <a:avLst/>
@@ -10496,880 +10019,18 @@
         </p:spPr>
       </p:pic>
     </p:spTree>
-    <p:extLst>
-      <p:ext uri="{BB962C8B-B14F-4D97-AF65-F5344CB8AC3E}">
-        <p14:creationId xmlns:p14="http://schemas.microsoft.com/office/powerpoint/2010/main" val="686906298"/>
-      </p:ext>
-    </p:extLst>
   </p:cSld>
   <p:clrMapOvr>
     <a:masterClrMapping/>
   </p:clrMapOvr>
-</p:sld>
-</file>
-
-<file path=ppt/slides/slide18.xml><?xml version="1.0" encoding="utf-8"?>
-<p:sld xmlns:a="http://schemas.openxmlformats.org/drawingml/2006/main" xmlns:r="http://schemas.openxmlformats.org/officeDocument/2006/relationships" xmlns:p="http://schemas.openxmlformats.org/presentationml/2006/main">
-  <p:cSld>
-    <p:spTree>
-      <p:nvGrpSpPr>
-        <p:cNvPr id="1" name="">
-          <a:extLst>
-            <a:ext uri="{FF2B5EF4-FFF2-40B4-BE49-F238E27FC236}">
-              <a16:creationId xmlns:a16="http://schemas.microsoft.com/office/drawing/2014/main" id="{BB2182D6-7C3A-1450-0957-0736228992F8}"/>
-            </a:ext>
-          </a:extLst>
-        </p:cNvPr>
-        <p:cNvGrpSpPr/>
-        <p:nvPr/>
-      </p:nvGrpSpPr>
-      <p:grpSpPr>
-        <a:xfrm>
-          <a:off x="0" y="0"/>
-          <a:ext cx="0" cy="0"/>
-          <a:chOff x="0" y="0"/>
-          <a:chExt cx="0" cy="0"/>
-        </a:xfrm>
-      </p:grpSpPr>
-      <p:sp>
-        <p:nvSpPr>
-          <p:cNvPr id="2" name="제목 1">
-            <a:extLst>
-              <a:ext uri="{FF2B5EF4-FFF2-40B4-BE49-F238E27FC236}">
-                <a16:creationId xmlns:a16="http://schemas.microsoft.com/office/drawing/2014/main" id="{00FC0AAC-B616-D4EC-909C-ECC3F2A8B843}"/>
-              </a:ext>
-            </a:extLst>
-          </p:cNvPr>
-          <p:cNvSpPr>
-            <a:spLocks noGrp="1"/>
-          </p:cNvSpPr>
-          <p:nvPr>
-            <p:ph type="title"/>
-          </p:nvPr>
-        </p:nvSpPr>
-        <p:spPr>
-          <a:xfrm>
-            <a:off x="0" y="274638"/>
-            <a:ext cx="9144000" cy="868346"/>
-          </a:xfrm>
-        </p:spPr>
-        <p:txBody>
-          <a:bodyPr/>
-          <a:lstStyle/>
-          <a:p>
-            <a:r>
-              <a:rPr lang="en-US" altLang="ko-KR" sz="2800" dirty="0"/>
-              <a:t>9. </a:t>
-            </a:r>
-            <a:r>
-              <a:rPr lang="ko-KR" altLang="en-US" sz="2800" dirty="0"/>
-              <a:t>가장 큰 증가하는 부분 수열 </a:t>
-            </a:r>
-            <a:r>
-              <a:rPr lang="en-US" altLang="ko-KR" sz="2800" dirty="0"/>
-              <a:t>(</a:t>
-            </a:r>
-            <a:r>
-              <a:rPr lang="en-US" altLang="ko-KR" sz="2800" dirty="0" err="1"/>
-              <a:t>TUKorea</a:t>
-            </a:r>
-            <a:r>
-              <a:rPr lang="en-US" altLang="ko-KR" sz="2800" dirty="0"/>
-              <a:t>,</a:t>
-            </a:r>
-            <a:r>
-              <a:rPr lang="ko-KR" altLang="en-US" sz="2800" dirty="0"/>
-              <a:t>백준</a:t>
-            </a:r>
-            <a:r>
-              <a:rPr lang="en-US" altLang="ko-KR" sz="2800" dirty="0"/>
-              <a:t>11055,DP)</a:t>
-            </a:r>
-            <a:r>
-              <a:rPr lang="en-US" altLang="ko-KR" sz="2400" dirty="0"/>
-              <a:t> </a:t>
-            </a:r>
-            <a:br>
-              <a:rPr lang="en-US" altLang="ko-KR" sz="2400" dirty="0"/>
-            </a:br>
-            <a:r>
-              <a:rPr lang="en-US" altLang="ko-KR" sz="1800" dirty="0"/>
-              <a:t>http://210.93.60.51/problem/0185</a:t>
-            </a:r>
-            <a:br>
-              <a:rPr lang="en-US" altLang="ko-KR" sz="1800" dirty="0"/>
-            </a:br>
-            <a:r>
-              <a:rPr lang="en-US" altLang="ko-KR" sz="1800" dirty="0"/>
-              <a:t>https://www.acmicpc.net/problem/11055</a:t>
-            </a:r>
-            <a:endParaRPr lang="ko-KR" altLang="en-US" sz="1800" dirty="0"/>
-          </a:p>
-        </p:txBody>
-      </p:sp>
-      <p:sp>
-        <p:nvSpPr>
-          <p:cNvPr id="5" name="슬라이드 번호 개체 틀 4">
-            <a:extLst>
-              <a:ext uri="{FF2B5EF4-FFF2-40B4-BE49-F238E27FC236}">
-                <a16:creationId xmlns:a16="http://schemas.microsoft.com/office/drawing/2014/main" id="{81099AAD-C6EA-CB4B-F77E-8434C7D5EADC}"/>
-              </a:ext>
-            </a:extLst>
-          </p:cNvPr>
-          <p:cNvSpPr>
-            <a:spLocks noGrp="1"/>
-          </p:cNvSpPr>
-          <p:nvPr>
-            <p:ph type="sldNum" sz="quarter" idx="12"/>
-          </p:nvPr>
-        </p:nvSpPr>
-        <p:spPr/>
-        <p:txBody>
-          <a:bodyPr/>
-          <a:lstStyle/>
-          <a:p>
-            <a:pPr>
-              <a:defRPr/>
-            </a:pPr>
-            <a:fld id="{A268DA64-E15D-4814-A1DA-86D92D550423}" type="slidenum">
-              <a:rPr lang="ko-KR" altLang="en-US" smtClean="0"/>
-              <a:pPr>
-                <a:defRPr/>
-              </a:pPr>
-              <a:t>18</a:t>
-            </a:fld>
-            <a:endParaRPr lang="ko-KR" altLang="en-US" dirty="0"/>
-          </a:p>
-        </p:txBody>
-      </p:sp>
-      <p:sp>
-        <p:nvSpPr>
-          <p:cNvPr id="3" name="내용 개체 틀 2">
-            <a:extLst>
-              <a:ext uri="{FF2B5EF4-FFF2-40B4-BE49-F238E27FC236}">
-                <a16:creationId xmlns:a16="http://schemas.microsoft.com/office/drawing/2014/main" id="{858C86E8-5349-F7B3-AFB6-B10A83FC024F}"/>
-              </a:ext>
-            </a:extLst>
-          </p:cNvPr>
-          <p:cNvSpPr>
-            <a:spLocks noGrp="1"/>
-          </p:cNvSpPr>
-          <p:nvPr>
-            <p:ph idx="1"/>
-          </p:nvPr>
-        </p:nvSpPr>
-        <p:spPr>
-          <a:xfrm>
-            <a:off x="457200" y="1340768"/>
-            <a:ext cx="8229600" cy="4785395"/>
-          </a:xfrm>
-        </p:spPr>
-        <p:txBody>
-          <a:bodyPr/>
-          <a:lstStyle/>
-          <a:p>
-            <a:pPr algn="just"/>
-            <a:r>
-              <a:rPr lang="ko-KR" altLang="en-US" sz="1800" dirty="0">
-                <a:latin typeface="Open Sans" panose="020F0502020204030204" pitchFamily="34" charset="0"/>
-              </a:rPr>
-              <a:t>수열 </a:t>
-            </a:r>
-            <a:r>
-              <a:rPr lang="en-US" altLang="ko-KR" sz="1800" dirty="0">
-                <a:latin typeface="Open Sans" panose="020F0502020204030204" pitchFamily="34" charset="0"/>
-              </a:rPr>
-              <a:t>A</a:t>
-            </a:r>
-            <a:r>
-              <a:rPr lang="ko-KR" altLang="en-US" sz="1800" dirty="0">
-                <a:latin typeface="Open Sans" panose="020F0502020204030204" pitchFamily="34" charset="0"/>
-              </a:rPr>
-              <a:t>가 주어졌을 때</a:t>
-            </a:r>
-            <a:r>
-              <a:rPr lang="en-US" altLang="ko-KR" sz="1800" dirty="0">
-                <a:latin typeface="Open Sans" panose="020F0502020204030204" pitchFamily="34" charset="0"/>
-              </a:rPr>
-              <a:t>, </a:t>
-            </a:r>
-            <a:r>
-              <a:rPr lang="ko-KR" altLang="en-US" sz="1800" dirty="0">
-                <a:latin typeface="Open Sans" panose="020F0502020204030204" pitchFamily="34" charset="0"/>
-              </a:rPr>
-              <a:t>그 </a:t>
-            </a:r>
-            <a:r>
-              <a:rPr lang="ko-KR" altLang="en-US" sz="1800" b="1" dirty="0">
-                <a:latin typeface="Open Sans" panose="020F0502020204030204" pitchFamily="34" charset="0"/>
-              </a:rPr>
-              <a:t>수열의 증가하는 부분 수열 중에서 합이 가장 큰 것을 구하는 프로그램을 작성하시오</a:t>
-            </a:r>
-            <a:r>
-              <a:rPr lang="en-US" altLang="ko-KR" sz="1800" b="1" dirty="0">
-                <a:latin typeface="Open Sans" panose="020F0502020204030204" pitchFamily="34" charset="0"/>
-              </a:rPr>
-              <a:t>.</a:t>
-            </a:r>
-          </a:p>
-          <a:p>
-            <a:pPr algn="just"/>
-            <a:endParaRPr lang="en-US" altLang="ko-KR" sz="1800" dirty="0">
-              <a:latin typeface="Open Sans" panose="020F0502020204030204" pitchFamily="34" charset="0"/>
-            </a:endParaRPr>
-          </a:p>
-          <a:p>
-            <a:pPr algn="just"/>
-            <a:r>
-              <a:rPr lang="ko-KR" altLang="en-US" sz="1800" dirty="0">
-                <a:latin typeface="Open Sans" panose="020F0502020204030204" pitchFamily="34" charset="0"/>
-              </a:rPr>
-              <a:t>예를 들어</a:t>
-            </a:r>
-            <a:r>
-              <a:rPr lang="en-US" altLang="ko-KR" sz="1800" dirty="0">
-                <a:latin typeface="Open Sans" panose="020F0502020204030204" pitchFamily="34" charset="0"/>
-              </a:rPr>
-              <a:t>, </a:t>
-            </a:r>
-            <a:r>
-              <a:rPr lang="ko-KR" altLang="en-US" sz="1800" dirty="0">
-                <a:latin typeface="Open Sans" panose="020F0502020204030204" pitchFamily="34" charset="0"/>
-              </a:rPr>
-              <a:t>수열 </a:t>
-            </a:r>
-            <a:r>
-              <a:rPr lang="en-US" altLang="ko-KR" sz="1800" dirty="0">
-                <a:latin typeface="Open Sans" panose="020F0502020204030204" pitchFamily="34" charset="0"/>
-              </a:rPr>
-              <a:t>A = {1, 100, 2, 50, 60, 3, 5, 6, 7, 8} </a:t>
-            </a:r>
-            <a:r>
-              <a:rPr lang="ko-KR" altLang="en-US" sz="1800" dirty="0">
-                <a:latin typeface="Open Sans" panose="020F0502020204030204" pitchFamily="34" charset="0"/>
-              </a:rPr>
-              <a:t>인 경우에 합이 가장 큰 증가하는 부분 수열은 </a:t>
-            </a:r>
-            <a:r>
-              <a:rPr lang="en-US" altLang="ko-KR" sz="1800" dirty="0">
-                <a:latin typeface="Open Sans" panose="020F0502020204030204" pitchFamily="34" charset="0"/>
-              </a:rPr>
-              <a:t>A = {</a:t>
-            </a:r>
-            <a:r>
-              <a:rPr lang="en-US" altLang="ko-KR" sz="1800" b="1" dirty="0">
-                <a:solidFill>
-                  <a:srgbClr val="0000FF"/>
-                </a:solidFill>
-                <a:latin typeface="Open Sans" panose="020F0502020204030204" pitchFamily="34" charset="0"/>
-              </a:rPr>
-              <a:t>1</a:t>
-            </a:r>
-            <a:r>
-              <a:rPr lang="en-US" altLang="ko-KR" sz="1800" dirty="0">
-                <a:latin typeface="Open Sans" panose="020F0502020204030204" pitchFamily="34" charset="0"/>
-              </a:rPr>
-              <a:t>, 100, </a:t>
-            </a:r>
-            <a:r>
-              <a:rPr lang="en-US" altLang="ko-KR" sz="1800" b="1" dirty="0">
-                <a:solidFill>
-                  <a:srgbClr val="0000FF"/>
-                </a:solidFill>
-                <a:latin typeface="Open Sans" panose="020F0502020204030204" pitchFamily="34" charset="0"/>
-              </a:rPr>
-              <a:t>2</a:t>
-            </a:r>
-            <a:r>
-              <a:rPr lang="en-US" altLang="ko-KR" sz="1800" dirty="0">
-                <a:latin typeface="Open Sans" panose="020F0502020204030204" pitchFamily="34" charset="0"/>
-              </a:rPr>
-              <a:t>, </a:t>
-            </a:r>
-            <a:r>
-              <a:rPr lang="en-US" altLang="ko-KR" sz="1800" b="1" dirty="0">
-                <a:solidFill>
-                  <a:srgbClr val="0000FF"/>
-                </a:solidFill>
-                <a:latin typeface="Open Sans" panose="020F0502020204030204" pitchFamily="34" charset="0"/>
-              </a:rPr>
-              <a:t>50, 60, </a:t>
-            </a:r>
-            <a:r>
-              <a:rPr lang="en-US" altLang="ko-KR" sz="1800" dirty="0">
-                <a:latin typeface="Open Sans" panose="020F0502020204030204" pitchFamily="34" charset="0"/>
-              </a:rPr>
-              <a:t>3, 5, 6, 7, 8} </a:t>
-            </a:r>
-            <a:r>
-              <a:rPr lang="ko-KR" altLang="en-US" sz="1800" dirty="0">
-                <a:latin typeface="Open Sans" panose="020F0502020204030204" pitchFamily="34" charset="0"/>
-              </a:rPr>
-              <a:t>이고</a:t>
-            </a:r>
-            <a:r>
-              <a:rPr lang="en-US" altLang="ko-KR" sz="1800" dirty="0">
-                <a:latin typeface="Open Sans" panose="020F0502020204030204" pitchFamily="34" charset="0"/>
-              </a:rPr>
-              <a:t>, </a:t>
-            </a:r>
-            <a:r>
-              <a:rPr lang="ko-KR" altLang="en-US" sz="1800" dirty="0">
-                <a:latin typeface="Open Sans" panose="020F0502020204030204" pitchFamily="34" charset="0"/>
-              </a:rPr>
-              <a:t>합은 </a:t>
-            </a:r>
-            <a:r>
-              <a:rPr lang="en-US" altLang="ko-KR" sz="1800" b="1" dirty="0">
-                <a:solidFill>
-                  <a:srgbClr val="0000FF"/>
-                </a:solidFill>
-                <a:latin typeface="Open Sans" panose="020F0502020204030204" pitchFamily="34" charset="0"/>
-              </a:rPr>
-              <a:t>113</a:t>
-            </a:r>
-            <a:r>
-              <a:rPr lang="ko-KR" altLang="en-US" sz="1800" dirty="0">
-                <a:latin typeface="Open Sans" panose="020F0502020204030204" pitchFamily="34" charset="0"/>
-              </a:rPr>
-              <a:t>이다</a:t>
-            </a:r>
-            <a:r>
-              <a:rPr lang="en-US" altLang="ko-KR" sz="1800" dirty="0">
-                <a:latin typeface="Open Sans" panose="020F0502020204030204" pitchFamily="34" charset="0"/>
-              </a:rPr>
-              <a:t>.</a:t>
-            </a:r>
-          </a:p>
-          <a:p>
-            <a:pPr algn="just"/>
-            <a:endParaRPr lang="en-US" altLang="ko-KR" sz="1800" dirty="0">
-              <a:latin typeface="Open Sans" panose="020F0502020204030204" pitchFamily="34" charset="0"/>
-            </a:endParaRPr>
-          </a:p>
-        </p:txBody>
-      </p:sp>
-      <p:pic>
-        <p:nvPicPr>
-          <p:cNvPr id="6" name="그림 5"/>
-          <p:cNvPicPr>
-            <a:picLocks noChangeAspect="1"/>
-          </p:cNvPicPr>
-          <p:nvPr/>
-        </p:nvPicPr>
-        <p:blipFill>
-          <a:blip r:embed="rId3"/>
-          <a:stretch>
-            <a:fillRect/>
-          </a:stretch>
-        </p:blipFill>
-        <p:spPr>
-          <a:xfrm>
-            <a:off x="611560" y="3429000"/>
-            <a:ext cx="7711777" cy="1640976"/>
-          </a:xfrm>
-          <a:prstGeom prst="rect">
-            <a:avLst/>
-          </a:prstGeom>
-          <a:ln>
-            <a:solidFill>
-              <a:schemeClr val="tx1"/>
-            </a:solidFill>
-          </a:ln>
-        </p:spPr>
-      </p:pic>
-    </p:spTree>
-    <p:extLst>
-      <p:ext uri="{BB962C8B-B14F-4D97-AF65-F5344CB8AC3E}">
-        <p14:creationId xmlns:p14="http://schemas.microsoft.com/office/powerpoint/2010/main" val="1747533405"/>
-      </p:ext>
-    </p:extLst>
-  </p:cSld>
-  <p:clrMapOvr>
-    <a:masterClrMapping/>
-  </p:clrMapOvr>
-</p:sld>
-</file>
-
-<file path=ppt/slides/slide19.xml><?xml version="1.0" encoding="utf-8"?>
-<p:sld xmlns:a="http://schemas.openxmlformats.org/drawingml/2006/main" xmlns:r="http://schemas.openxmlformats.org/officeDocument/2006/relationships" xmlns:p="http://schemas.openxmlformats.org/presentationml/2006/main">
-  <p:cSld>
-    <p:spTree>
-      <p:nvGrpSpPr>
-        <p:cNvPr id="1" name="">
-          <a:extLst>
-            <a:ext uri="{FF2B5EF4-FFF2-40B4-BE49-F238E27FC236}">
-              <a16:creationId xmlns:a16="http://schemas.microsoft.com/office/drawing/2014/main" id="{038F8DE6-BFC4-7515-24A8-A8AC87EFB205}"/>
-            </a:ext>
-          </a:extLst>
-        </p:cNvPr>
-        <p:cNvGrpSpPr/>
-        <p:nvPr/>
-      </p:nvGrpSpPr>
-      <p:grpSpPr>
-        <a:xfrm>
-          <a:off x="0" y="0"/>
-          <a:ext cx="0" cy="0"/>
-          <a:chOff x="0" y="0"/>
-          <a:chExt cx="0" cy="0"/>
-        </a:xfrm>
-      </p:grpSpPr>
-      <p:sp>
-        <p:nvSpPr>
-          <p:cNvPr id="2" name="제목 1">
-            <a:extLst>
-              <a:ext uri="{FF2B5EF4-FFF2-40B4-BE49-F238E27FC236}">
-                <a16:creationId xmlns:a16="http://schemas.microsoft.com/office/drawing/2014/main" id="{DF63A519-F783-50A8-ED79-D702E664470C}"/>
-              </a:ext>
-            </a:extLst>
-          </p:cNvPr>
-          <p:cNvSpPr>
-            <a:spLocks noGrp="1"/>
-          </p:cNvSpPr>
-          <p:nvPr>
-            <p:ph type="title"/>
-          </p:nvPr>
-        </p:nvSpPr>
-        <p:spPr>
-          <a:xfrm>
-            <a:off x="0" y="274638"/>
-            <a:ext cx="9144000" cy="868346"/>
-          </a:xfrm>
-        </p:spPr>
-        <p:txBody>
-          <a:bodyPr/>
-          <a:lstStyle/>
-          <a:p>
-            <a:r>
-              <a:rPr lang="en-US" altLang="ko-KR" sz="2800" dirty="0"/>
-              <a:t>10. RGB</a:t>
-            </a:r>
-            <a:r>
-              <a:rPr lang="ko-KR" altLang="en-US" sz="2800" dirty="0"/>
-              <a:t>거리 </a:t>
-            </a:r>
-            <a:r>
-              <a:rPr lang="en-US" altLang="ko-KR" sz="2800" dirty="0"/>
-              <a:t>(</a:t>
-            </a:r>
-            <a:r>
-              <a:rPr lang="en-US" altLang="ko-KR" sz="2800" dirty="0" err="1"/>
-              <a:t>TUKorea</a:t>
-            </a:r>
-            <a:r>
-              <a:rPr lang="en-US" altLang="ko-KR" sz="2800" dirty="0"/>
-              <a:t>,</a:t>
-            </a:r>
-            <a:r>
-              <a:rPr lang="ko-KR" altLang="en-US" sz="2800" dirty="0"/>
-              <a:t>백준</a:t>
-            </a:r>
-            <a:r>
-              <a:rPr lang="en-US" altLang="ko-KR" sz="2800" dirty="0"/>
-              <a:t>1149, DP)</a:t>
-            </a:r>
-            <a:r>
-              <a:rPr lang="en-US" altLang="ko-KR" sz="2400" dirty="0"/>
-              <a:t> </a:t>
-            </a:r>
-            <a:br>
-              <a:rPr lang="en-US" altLang="ko-KR" sz="2400" dirty="0"/>
-            </a:br>
-            <a:r>
-              <a:rPr lang="en-US" altLang="ko-KR" sz="1800" dirty="0"/>
-              <a:t>http://210.93.60.51/problem/0141</a:t>
-            </a:r>
-            <a:br>
-              <a:rPr lang="en-US" altLang="ko-KR" sz="1800" dirty="0"/>
-            </a:br>
-            <a:r>
-              <a:rPr lang="en-US" altLang="ko-KR" sz="1800" dirty="0"/>
-              <a:t>https://www.acmicpc.net/problem/1149</a:t>
-            </a:r>
-            <a:endParaRPr lang="ko-KR" altLang="en-US" sz="1800" dirty="0"/>
-          </a:p>
-        </p:txBody>
-      </p:sp>
-      <p:sp>
-        <p:nvSpPr>
-          <p:cNvPr id="5" name="슬라이드 번호 개체 틀 4">
-            <a:extLst>
-              <a:ext uri="{FF2B5EF4-FFF2-40B4-BE49-F238E27FC236}">
-                <a16:creationId xmlns:a16="http://schemas.microsoft.com/office/drawing/2014/main" id="{DDD5EF35-03CF-3E4F-F1EE-1D0130E91A8E}"/>
-              </a:ext>
-            </a:extLst>
-          </p:cNvPr>
-          <p:cNvSpPr>
-            <a:spLocks noGrp="1"/>
-          </p:cNvSpPr>
-          <p:nvPr>
-            <p:ph type="sldNum" sz="quarter" idx="12"/>
-          </p:nvPr>
-        </p:nvSpPr>
-        <p:spPr/>
-        <p:txBody>
-          <a:bodyPr/>
-          <a:lstStyle/>
-          <a:p>
-            <a:pPr>
-              <a:defRPr/>
-            </a:pPr>
-            <a:fld id="{A268DA64-E15D-4814-A1DA-86D92D550423}" type="slidenum">
-              <a:rPr lang="ko-KR" altLang="en-US" smtClean="0"/>
-              <a:pPr>
-                <a:defRPr/>
-              </a:pPr>
-              <a:t>19</a:t>
-            </a:fld>
-            <a:endParaRPr lang="ko-KR" altLang="en-US" dirty="0"/>
-          </a:p>
-        </p:txBody>
-      </p:sp>
-      <p:sp>
-        <p:nvSpPr>
-          <p:cNvPr id="3" name="내용 개체 틀 2">
-            <a:extLst>
-              <a:ext uri="{FF2B5EF4-FFF2-40B4-BE49-F238E27FC236}">
-                <a16:creationId xmlns:a16="http://schemas.microsoft.com/office/drawing/2014/main" id="{B19E3D03-50DE-7CB9-0A1E-409973ECD8C9}"/>
-              </a:ext>
-            </a:extLst>
-          </p:cNvPr>
-          <p:cNvSpPr>
-            <a:spLocks noGrp="1"/>
-          </p:cNvSpPr>
-          <p:nvPr>
-            <p:ph idx="1"/>
-          </p:nvPr>
-        </p:nvSpPr>
-        <p:spPr>
-          <a:xfrm>
-            <a:off x="457200" y="1340768"/>
-            <a:ext cx="8229600" cy="4785395"/>
-          </a:xfrm>
-        </p:spPr>
-        <p:txBody>
-          <a:bodyPr/>
-          <a:lstStyle/>
-          <a:p>
-            <a:pPr algn="just"/>
-            <a:r>
-              <a:rPr lang="en-US" altLang="ko-KR" sz="1800" dirty="0">
-                <a:latin typeface="Open Sans" panose="020F0502020204030204" pitchFamily="34" charset="0"/>
-              </a:rPr>
-              <a:t>RGB</a:t>
-            </a:r>
-            <a:r>
-              <a:rPr lang="ko-KR" altLang="en-US" sz="1800" dirty="0">
-                <a:latin typeface="Open Sans" panose="020F0502020204030204" pitchFamily="34" charset="0"/>
-              </a:rPr>
-              <a:t>거리에는 집이 </a:t>
-            </a:r>
-            <a:r>
-              <a:rPr lang="en-US" altLang="ko-KR" sz="1800" dirty="0">
-                <a:latin typeface="Open Sans" panose="020F0502020204030204" pitchFamily="34" charset="0"/>
-              </a:rPr>
-              <a:t>1</a:t>
-            </a:r>
-            <a:r>
-              <a:rPr lang="ko-KR" altLang="en-US" sz="1800" dirty="0">
-                <a:latin typeface="Open Sans" panose="020F0502020204030204" pitchFamily="34" charset="0"/>
-              </a:rPr>
-              <a:t>번 집부터 </a:t>
-            </a:r>
-            <a:r>
-              <a:rPr lang="en-US" altLang="ko-KR" sz="1800" dirty="0">
-                <a:latin typeface="Open Sans" panose="020F0502020204030204" pitchFamily="34" charset="0"/>
-              </a:rPr>
-              <a:t>N</a:t>
-            </a:r>
-            <a:r>
-              <a:rPr lang="ko-KR" altLang="en-US" sz="1800" dirty="0">
-                <a:latin typeface="Open Sans" panose="020F0502020204030204" pitchFamily="34" charset="0"/>
-              </a:rPr>
-              <a:t>번 집이 순서대로 있다</a:t>
-            </a:r>
-            <a:r>
-              <a:rPr lang="en-US" altLang="ko-KR" sz="1800" dirty="0">
-                <a:latin typeface="Open Sans" panose="020F0502020204030204" pitchFamily="34" charset="0"/>
-              </a:rPr>
-              <a:t>.</a:t>
-            </a:r>
-          </a:p>
-          <a:p>
-            <a:pPr algn="just"/>
-            <a:endParaRPr lang="en-US" altLang="ko-KR" sz="1800" dirty="0">
-              <a:latin typeface="Open Sans" panose="020F0502020204030204" pitchFamily="34" charset="0"/>
-            </a:endParaRPr>
-          </a:p>
-          <a:p>
-            <a:pPr algn="just"/>
-            <a:r>
-              <a:rPr lang="ko-KR" altLang="en-US" sz="1800" dirty="0">
-                <a:latin typeface="Open Sans" panose="020F0502020204030204" pitchFamily="34" charset="0"/>
-              </a:rPr>
-              <a:t>집은 빨강</a:t>
-            </a:r>
-            <a:r>
-              <a:rPr lang="en-US" altLang="ko-KR" sz="1800" dirty="0">
-                <a:latin typeface="Open Sans" panose="020F0502020204030204" pitchFamily="34" charset="0"/>
-              </a:rPr>
-              <a:t>, </a:t>
-            </a:r>
-            <a:r>
-              <a:rPr lang="ko-KR" altLang="en-US" sz="1800" dirty="0">
-                <a:latin typeface="Open Sans" panose="020F0502020204030204" pitchFamily="34" charset="0"/>
-              </a:rPr>
-              <a:t>초록</a:t>
-            </a:r>
-            <a:r>
-              <a:rPr lang="en-US" altLang="ko-KR" sz="1800" dirty="0">
-                <a:latin typeface="Open Sans" panose="020F0502020204030204" pitchFamily="34" charset="0"/>
-              </a:rPr>
-              <a:t>, </a:t>
-            </a:r>
-            <a:r>
-              <a:rPr lang="ko-KR" altLang="en-US" sz="1800" dirty="0">
-                <a:latin typeface="Open Sans" panose="020F0502020204030204" pitchFamily="34" charset="0"/>
-              </a:rPr>
-              <a:t>파랑 중 하나의 색으로 칠해야 한다</a:t>
-            </a:r>
-            <a:r>
-              <a:rPr lang="en-US" altLang="ko-KR" sz="1800" dirty="0">
-                <a:latin typeface="Open Sans" panose="020F0502020204030204" pitchFamily="34" charset="0"/>
-              </a:rPr>
-              <a:t>. </a:t>
-            </a:r>
-            <a:r>
-              <a:rPr lang="ko-KR" altLang="en-US" sz="1800" dirty="0">
-                <a:latin typeface="Open Sans" panose="020F0502020204030204" pitchFamily="34" charset="0"/>
-              </a:rPr>
-              <a:t>아래 규칙을 만족하면서 모든 집을 칠하는 비용의 최솟값을 구해보자</a:t>
-            </a:r>
-            <a:r>
-              <a:rPr lang="en-US" altLang="ko-KR" sz="1800" dirty="0">
-                <a:latin typeface="Open Sans" panose="020F0502020204030204" pitchFamily="34" charset="0"/>
-              </a:rPr>
-              <a:t>.</a:t>
-            </a:r>
-          </a:p>
-          <a:p>
-            <a:pPr algn="just"/>
-            <a:endParaRPr lang="en-US" altLang="ko-KR" sz="1800" dirty="0">
-              <a:latin typeface="Open Sans" panose="020F0502020204030204" pitchFamily="34" charset="0"/>
-            </a:endParaRPr>
-          </a:p>
-          <a:p>
-            <a:pPr algn="just"/>
-            <a:r>
-              <a:rPr lang="en-US" altLang="ko-KR" sz="1800" b="1" dirty="0" err="1">
-                <a:latin typeface="Open Sans" panose="020F0502020204030204" pitchFamily="34" charset="0"/>
-              </a:rPr>
-              <a:t>i</a:t>
-            </a:r>
-            <a:r>
-              <a:rPr lang="en-US" altLang="ko-KR" sz="1800" b="1" dirty="0">
-                <a:latin typeface="Open Sans" panose="020F0502020204030204" pitchFamily="34" charset="0"/>
-              </a:rPr>
-              <a:t>(2 ≤ </a:t>
-            </a:r>
-            <a:r>
-              <a:rPr lang="en-US" altLang="ko-KR" sz="1800" b="1" dirty="0" err="1">
-                <a:latin typeface="Open Sans" panose="020F0502020204030204" pitchFamily="34" charset="0"/>
-              </a:rPr>
-              <a:t>i</a:t>
-            </a:r>
-            <a:r>
-              <a:rPr lang="en-US" altLang="ko-KR" sz="1800" b="1" dirty="0">
-                <a:latin typeface="Open Sans" panose="020F0502020204030204" pitchFamily="34" charset="0"/>
-              </a:rPr>
-              <a:t> ≤ N-1)</a:t>
-            </a:r>
-            <a:r>
-              <a:rPr lang="ko-KR" altLang="en-US" sz="1800" b="1" dirty="0">
-                <a:latin typeface="Open Sans" panose="020F0502020204030204" pitchFamily="34" charset="0"/>
-              </a:rPr>
-              <a:t>번 집의 색은 </a:t>
-            </a:r>
-            <a:r>
-              <a:rPr lang="en-US" altLang="ko-KR" sz="1800" b="1" dirty="0">
-                <a:latin typeface="Open Sans" panose="020F0502020204030204" pitchFamily="34" charset="0"/>
-              </a:rPr>
-              <a:t>i-1</a:t>
-            </a:r>
-            <a:r>
-              <a:rPr lang="ko-KR" altLang="en-US" sz="1800" b="1" dirty="0">
-                <a:latin typeface="Open Sans" panose="020F0502020204030204" pitchFamily="34" charset="0"/>
-              </a:rPr>
-              <a:t>번</a:t>
-            </a:r>
-            <a:r>
-              <a:rPr lang="en-US" altLang="ko-KR" sz="1800" b="1" dirty="0">
-                <a:latin typeface="Open Sans" panose="020F0502020204030204" pitchFamily="34" charset="0"/>
-              </a:rPr>
-              <a:t>, i+1</a:t>
-            </a:r>
-            <a:r>
-              <a:rPr lang="ko-KR" altLang="en-US" sz="1800" b="1" dirty="0">
-                <a:latin typeface="Open Sans" panose="020F0502020204030204" pitchFamily="34" charset="0"/>
-              </a:rPr>
-              <a:t>번 집의 색과 같지 않아야 한다</a:t>
-            </a:r>
-            <a:r>
-              <a:rPr lang="en-US" altLang="ko-KR" sz="1800" b="1" dirty="0">
-                <a:latin typeface="Open Sans" panose="020F0502020204030204" pitchFamily="34" charset="0"/>
-              </a:rPr>
-              <a:t>.</a:t>
-            </a:r>
-          </a:p>
-          <a:p>
-            <a:pPr algn="just"/>
-            <a:endParaRPr lang="en-US" altLang="ko-KR" sz="1800" b="1" dirty="0">
-              <a:latin typeface="Open Sans" panose="020F0502020204030204" pitchFamily="34" charset="0"/>
-            </a:endParaRPr>
-          </a:p>
-          <a:p>
-            <a:pPr algn="just"/>
-            <a:r>
-              <a:rPr lang="ko-KR" altLang="en-US" sz="1800" dirty="0">
-                <a:latin typeface="Open Sans" panose="020F0502020204030204" pitchFamily="34" charset="0"/>
-              </a:rPr>
-              <a:t>첫째 줄에 집의 수 </a:t>
-            </a:r>
-            <a:r>
-              <a:rPr lang="en-US" altLang="ko-KR" sz="1800" dirty="0">
-                <a:latin typeface="Open Sans" panose="020F0502020204030204" pitchFamily="34" charset="0"/>
-              </a:rPr>
-              <a:t>N(2 ≤ N ≤ 1,000)</a:t>
-            </a:r>
-            <a:r>
-              <a:rPr lang="ko-KR" altLang="en-US" sz="1800" dirty="0">
-                <a:latin typeface="Open Sans" panose="020F0502020204030204" pitchFamily="34" charset="0"/>
-              </a:rPr>
-              <a:t>이 주어진다</a:t>
-            </a:r>
-            <a:r>
-              <a:rPr lang="en-US" altLang="ko-KR" sz="1800" dirty="0">
-                <a:latin typeface="Open Sans" panose="020F0502020204030204" pitchFamily="34" charset="0"/>
-              </a:rPr>
-              <a:t>. </a:t>
-            </a:r>
-            <a:r>
-              <a:rPr lang="ko-KR" altLang="en-US" sz="1800" dirty="0">
-                <a:latin typeface="Open Sans" panose="020F0502020204030204" pitchFamily="34" charset="0"/>
-              </a:rPr>
-              <a:t>둘째 줄부터 </a:t>
-            </a:r>
-            <a:r>
-              <a:rPr lang="en-US" altLang="ko-KR" sz="1800" dirty="0">
-                <a:latin typeface="Open Sans" panose="020F0502020204030204" pitchFamily="34" charset="0"/>
-              </a:rPr>
-              <a:t>N</a:t>
-            </a:r>
-            <a:r>
-              <a:rPr lang="ko-KR" altLang="en-US" sz="1800" dirty="0">
-                <a:latin typeface="Open Sans" panose="020F0502020204030204" pitchFamily="34" charset="0"/>
-              </a:rPr>
-              <a:t>개의 줄에는 각 집을 빨강</a:t>
-            </a:r>
-            <a:r>
-              <a:rPr lang="en-US" altLang="ko-KR" sz="1800" dirty="0">
-                <a:latin typeface="Open Sans" panose="020F0502020204030204" pitchFamily="34" charset="0"/>
-              </a:rPr>
-              <a:t>, </a:t>
-            </a:r>
-            <a:r>
-              <a:rPr lang="ko-KR" altLang="en-US" sz="1800" dirty="0">
-                <a:latin typeface="Open Sans" panose="020F0502020204030204" pitchFamily="34" charset="0"/>
-              </a:rPr>
-              <a:t>초록</a:t>
-            </a:r>
-            <a:r>
-              <a:rPr lang="en-US" altLang="ko-KR" sz="1800" dirty="0">
-                <a:latin typeface="Open Sans" panose="020F0502020204030204" pitchFamily="34" charset="0"/>
-              </a:rPr>
-              <a:t>, </a:t>
-            </a:r>
-            <a:r>
-              <a:rPr lang="ko-KR" altLang="en-US" sz="1800" dirty="0">
-                <a:latin typeface="Open Sans" panose="020F0502020204030204" pitchFamily="34" charset="0"/>
-              </a:rPr>
-              <a:t>파랑으로 칠하는 비용이 </a:t>
-            </a:r>
-            <a:r>
-              <a:rPr lang="en-US" altLang="ko-KR" sz="1800" dirty="0">
-                <a:latin typeface="Open Sans" panose="020F0502020204030204" pitchFamily="34" charset="0"/>
-              </a:rPr>
-              <a:t>1</a:t>
-            </a:r>
-            <a:r>
-              <a:rPr lang="ko-KR" altLang="en-US" sz="1800" dirty="0">
-                <a:latin typeface="Open Sans" panose="020F0502020204030204" pitchFamily="34" charset="0"/>
-              </a:rPr>
-              <a:t>번 집부터 한 줄에 하나씩 주어진다</a:t>
-            </a:r>
-            <a:r>
-              <a:rPr lang="en-US" altLang="ko-KR" sz="1800" dirty="0">
-                <a:latin typeface="Open Sans" panose="020F0502020204030204" pitchFamily="34" charset="0"/>
-              </a:rPr>
-              <a:t>.</a:t>
-            </a:r>
-          </a:p>
-          <a:p>
-            <a:pPr marL="0" indent="0" algn="just">
-              <a:buNone/>
-            </a:pPr>
-            <a:endParaRPr lang="en-US" altLang="ko-KR" sz="1800" dirty="0">
-              <a:latin typeface="Open Sans" panose="020F0502020204030204" pitchFamily="34" charset="0"/>
-            </a:endParaRPr>
-          </a:p>
-          <a:p>
-            <a:pPr algn="just"/>
-            <a:endParaRPr lang="en-US" altLang="ko-KR" sz="1800" dirty="0">
-              <a:latin typeface="Open Sans" panose="020F0502020204030204" pitchFamily="34" charset="0"/>
-            </a:endParaRPr>
-          </a:p>
-        </p:txBody>
-      </p:sp>
-      <p:pic>
-        <p:nvPicPr>
-          <p:cNvPr id="7" name="그림 6">
-            <a:extLst>
-              <a:ext uri="{FF2B5EF4-FFF2-40B4-BE49-F238E27FC236}">
-                <a16:creationId xmlns:a16="http://schemas.microsoft.com/office/drawing/2014/main" id="{1D63AAAA-9140-84C1-1554-069F1D551E69}"/>
-              </a:ext>
-            </a:extLst>
-          </p:cNvPr>
-          <p:cNvPicPr>
-            <a:picLocks noChangeAspect="1"/>
-          </p:cNvPicPr>
-          <p:nvPr/>
-        </p:nvPicPr>
-        <p:blipFill>
-          <a:blip r:embed="rId3"/>
-          <a:stretch>
-            <a:fillRect/>
-          </a:stretch>
-        </p:blipFill>
-        <p:spPr>
-          <a:xfrm>
-            <a:off x="1457908" y="4656504"/>
-            <a:ext cx="6228184" cy="1721455"/>
-          </a:xfrm>
-          <a:prstGeom prst="rect">
-            <a:avLst/>
-          </a:prstGeom>
-        </p:spPr>
-      </p:pic>
-    </p:spTree>
-    <p:extLst>
-      <p:ext uri="{BB962C8B-B14F-4D97-AF65-F5344CB8AC3E}">
-        <p14:creationId xmlns:p14="http://schemas.microsoft.com/office/powerpoint/2010/main" val="2862514786"/>
-      </p:ext>
-    </p:extLst>
-  </p:cSld>
-  <p:clrMapOvr>
-    <a:masterClrMapping/>
-  </p:clrMapOvr>
+  <mc:AlternateContent xmlns:mc="http://schemas.openxmlformats.org/markup-compatibility/2006">
+    <mc:Choice xmlns:p14="http://schemas.microsoft.com/office/powerpoint/2010/main" Requires="p14">
+      <p:transition xmlns:mc="http://schemas.openxmlformats.org/markup-compatibility/2006" xmlns:p14="http://schemas.microsoft.com/office/powerpoint/2010/main" mc:Ignorable="p14" p14:dur="500"/>
+    </mc:Choice>
+    <mc:Fallback>
+      <p:transition/>
+    </mc:Fallback>
+  </mc:AlternateContent>
 </p:sld>
 </file>
 
@@ -11858,6 +10519,2243 @@
     <p:extLst>
       <p:ext uri="{BB962C8B-B14F-4D97-AF65-F5344CB8AC3E}">
         <p14:creationId xmlns:p14="http://schemas.microsoft.com/office/powerpoint/2010/main" val="709718645"/>
+      </p:ext>
+    </p:extLst>
+  </p:cSld>
+  <p:clrMapOvr>
+    <a:masterClrMapping/>
+  </p:clrMapOvr>
+</p:sld>
+</file>
+
+<file path=ppt/slides/slide20.xml><?xml version="1.0" encoding="utf-8"?>
+<p:sld xmlns:a="http://schemas.openxmlformats.org/drawingml/2006/main" xmlns:r="http://schemas.openxmlformats.org/officeDocument/2006/relationships" xmlns:p="http://schemas.openxmlformats.org/presentationml/2006/main">
+  <p:cSld>
+    <p:spTree>
+      <p:nvGrpSpPr>
+        <p:cNvPr id="1" name="">
+          <a:extLst>
+            <a:ext uri="{FF2B5EF4-FFF2-40B4-BE49-F238E27FC236}">
+              <a16:creationId xmlns:a16="http://schemas.microsoft.com/office/drawing/2014/main" id="{BB2182D6-7C3A-1450-0957-0736228992F8}"/>
+            </a:ext>
+          </a:extLst>
+        </p:cNvPr>
+        <p:cNvGrpSpPr/>
+        <p:nvPr/>
+      </p:nvGrpSpPr>
+      <p:grpSpPr>
+        <a:xfrm>
+          <a:off x="0" y="0"/>
+          <a:ext cx="0" cy="0"/>
+          <a:chOff x="0" y="0"/>
+          <a:chExt cx="0" cy="0"/>
+        </a:xfrm>
+      </p:grpSpPr>
+      <p:sp>
+        <p:nvSpPr>
+          <p:cNvPr id="2" name="제목 1">
+            <a:extLst>
+              <a:ext uri="{FF2B5EF4-FFF2-40B4-BE49-F238E27FC236}">
+                <a16:creationId xmlns:a16="http://schemas.microsoft.com/office/drawing/2014/main" id="{00FC0AAC-B616-D4EC-909C-ECC3F2A8B843}"/>
+              </a:ext>
+            </a:extLst>
+          </p:cNvPr>
+          <p:cNvSpPr>
+            <a:spLocks noGrp="1"/>
+          </p:cNvSpPr>
+          <p:nvPr>
+            <p:ph type="title"/>
+          </p:nvPr>
+        </p:nvSpPr>
+        <p:spPr/>
+        <p:txBody>
+          <a:bodyPr/>
+          <a:lstStyle/>
+          <a:p>
+            <a:r>
+              <a:rPr lang="en-US" altLang="ko-KR" sz="2800" dirty="0"/>
+              <a:t>7. 1</a:t>
+            </a:r>
+            <a:r>
+              <a:rPr lang="ko-KR" altLang="en-US" sz="2800" dirty="0"/>
+              <a:t>로 만들기 </a:t>
+            </a:r>
+            <a:r>
+              <a:rPr lang="en-US" altLang="ko-KR" sz="2800" dirty="0"/>
+              <a:t>(</a:t>
+            </a:r>
+            <a:r>
+              <a:rPr lang="en-US" altLang="ko-KR" sz="2800" dirty="0" err="1"/>
+              <a:t>TUKorea</a:t>
+            </a:r>
+            <a:r>
+              <a:rPr lang="en-US" altLang="ko-KR" sz="2800" dirty="0"/>
+              <a:t>, </a:t>
+            </a:r>
+            <a:r>
+              <a:rPr lang="ko-KR" altLang="en-US" sz="2800" dirty="0"/>
+              <a:t>백준</a:t>
+            </a:r>
+            <a:r>
+              <a:rPr lang="en-US" altLang="ko-KR" sz="2800" dirty="0"/>
+              <a:t>1463, DP) </a:t>
+            </a:r>
+            <a:br>
+              <a:rPr lang="en-US" altLang="ko-KR" sz="2800" dirty="0"/>
+            </a:br>
+            <a:r>
+              <a:rPr lang="en-US" altLang="ko-KR" sz="2000" dirty="0"/>
+              <a:t>http://210.93.60.51/problem/0183</a:t>
+            </a:r>
+            <a:br>
+              <a:rPr lang="en-US" altLang="ko-KR" sz="2000" dirty="0"/>
+            </a:br>
+            <a:r>
+              <a:rPr lang="en-US" altLang="ko-KR" sz="2000" dirty="0"/>
+              <a:t>https://www.acmicpc.net/problem/1463</a:t>
+            </a:r>
+            <a:endParaRPr lang="ko-KR" altLang="en-US" sz="2000" dirty="0"/>
+          </a:p>
+        </p:txBody>
+      </p:sp>
+      <p:sp>
+        <p:nvSpPr>
+          <p:cNvPr id="5" name="슬라이드 번호 개체 틀 4">
+            <a:extLst>
+              <a:ext uri="{FF2B5EF4-FFF2-40B4-BE49-F238E27FC236}">
+                <a16:creationId xmlns:a16="http://schemas.microsoft.com/office/drawing/2014/main" id="{81099AAD-C6EA-CB4B-F77E-8434C7D5EADC}"/>
+              </a:ext>
+            </a:extLst>
+          </p:cNvPr>
+          <p:cNvSpPr>
+            <a:spLocks noGrp="1"/>
+          </p:cNvSpPr>
+          <p:nvPr>
+            <p:ph type="sldNum" sz="quarter" idx="12"/>
+          </p:nvPr>
+        </p:nvSpPr>
+        <p:spPr/>
+        <p:txBody>
+          <a:bodyPr/>
+          <a:lstStyle/>
+          <a:p>
+            <a:pPr>
+              <a:defRPr/>
+            </a:pPr>
+            <a:fld id="{A268DA64-E15D-4814-A1DA-86D92D550423}" type="slidenum">
+              <a:rPr lang="ko-KR" altLang="en-US" smtClean="0"/>
+              <a:pPr>
+                <a:defRPr/>
+              </a:pPr>
+              <a:t>14</a:t>
+            </a:fld>
+            <a:endParaRPr lang="ko-KR" altLang="en-US"/>
+          </a:p>
+        </p:txBody>
+      </p:sp>
+      <p:sp>
+        <p:nvSpPr>
+          <p:cNvPr id="3" name="내용 개체 틀 2">
+            <a:extLst>
+              <a:ext uri="{FF2B5EF4-FFF2-40B4-BE49-F238E27FC236}">
+                <a16:creationId xmlns:a16="http://schemas.microsoft.com/office/drawing/2014/main" id="{858C86E8-5349-F7B3-AFB6-B10A83FC024F}"/>
+              </a:ext>
+            </a:extLst>
+          </p:cNvPr>
+          <p:cNvSpPr>
+            <a:spLocks noGrp="1"/>
+          </p:cNvSpPr>
+          <p:nvPr>
+            <p:ph idx="1"/>
+          </p:nvPr>
+        </p:nvSpPr>
+        <p:spPr>
+          <a:xfrm>
+            <a:off x="457200" y="1340768"/>
+            <a:ext cx="8229600" cy="4785395"/>
+          </a:xfrm>
+        </p:spPr>
+        <p:txBody>
+          <a:bodyPr/>
+          <a:lstStyle/>
+          <a:p>
+            <a:pPr algn="just"/>
+            <a:r>
+              <a:rPr lang="ko-KR" altLang="en-US" sz="1800" dirty="0">
+                <a:latin typeface="Open Sans" panose="020F0502020204030204" pitchFamily="34" charset="0"/>
+              </a:rPr>
+              <a:t>정수 </a:t>
+            </a:r>
+            <a:r>
+              <a:rPr lang="en-US" altLang="ko-KR" sz="1800" dirty="0">
+                <a:latin typeface="Open Sans" panose="020F0502020204030204" pitchFamily="34" charset="0"/>
+              </a:rPr>
+              <a:t>X</a:t>
+            </a:r>
+            <a:r>
+              <a:rPr lang="ko-KR" altLang="en-US" sz="1800" dirty="0">
+                <a:latin typeface="Open Sans" panose="020F0502020204030204" pitchFamily="34" charset="0"/>
+              </a:rPr>
+              <a:t>에 사용할 수 있는 연산은 다음과 같이 세 가지 이다</a:t>
+            </a:r>
+            <a:r>
+              <a:rPr lang="en-US" altLang="ko-KR" sz="1800" dirty="0">
+                <a:latin typeface="Open Sans" panose="020F0502020204030204" pitchFamily="34" charset="0"/>
+              </a:rPr>
+              <a:t>.</a:t>
+            </a:r>
+          </a:p>
+          <a:p>
+            <a:pPr algn="just"/>
+            <a:endParaRPr lang="en-US" altLang="ko-KR" sz="1800" dirty="0">
+              <a:latin typeface="Open Sans" panose="020F0502020204030204" pitchFamily="34" charset="0"/>
+            </a:endParaRPr>
+          </a:p>
+          <a:p>
+            <a:pPr algn="just"/>
+            <a:r>
+              <a:rPr lang="en-US" altLang="ko-KR" sz="1800" b="1" dirty="0">
+                <a:latin typeface="Open Sans" panose="020F0502020204030204" pitchFamily="34" charset="0"/>
+              </a:rPr>
+              <a:t>X</a:t>
+            </a:r>
+            <a:r>
+              <a:rPr lang="ko-KR" altLang="en-US" sz="1800" b="1" dirty="0">
+                <a:latin typeface="Open Sans" panose="020F0502020204030204" pitchFamily="34" charset="0"/>
+              </a:rPr>
+              <a:t>가 </a:t>
+            </a:r>
+            <a:r>
+              <a:rPr lang="en-US" altLang="ko-KR" sz="1800" b="1" dirty="0">
+                <a:latin typeface="Open Sans" panose="020F0502020204030204" pitchFamily="34" charset="0"/>
+              </a:rPr>
+              <a:t>3</a:t>
+            </a:r>
+            <a:r>
+              <a:rPr lang="ko-KR" altLang="en-US" sz="1800" b="1" dirty="0">
+                <a:latin typeface="Open Sans" panose="020F0502020204030204" pitchFamily="34" charset="0"/>
+              </a:rPr>
+              <a:t>으로 나누어 떨어지면</a:t>
+            </a:r>
+            <a:r>
+              <a:rPr lang="en-US" altLang="ko-KR" sz="1800" b="1" dirty="0">
+                <a:latin typeface="Open Sans" panose="020F0502020204030204" pitchFamily="34" charset="0"/>
+              </a:rPr>
+              <a:t>, 3</a:t>
+            </a:r>
+            <a:r>
+              <a:rPr lang="ko-KR" altLang="en-US" sz="1800" b="1" dirty="0">
+                <a:latin typeface="Open Sans" panose="020F0502020204030204" pitchFamily="34" charset="0"/>
+              </a:rPr>
+              <a:t>으로 나눈다</a:t>
+            </a:r>
+            <a:r>
+              <a:rPr lang="en-US" altLang="ko-KR" sz="1800" b="1" dirty="0">
+                <a:latin typeface="Open Sans" panose="020F0502020204030204" pitchFamily="34" charset="0"/>
+              </a:rPr>
+              <a:t>.</a:t>
+            </a:r>
+          </a:p>
+          <a:p>
+            <a:pPr algn="just"/>
+            <a:r>
+              <a:rPr lang="en-US" altLang="ko-KR" sz="1800" b="1" dirty="0">
+                <a:latin typeface="Open Sans" panose="020F0502020204030204" pitchFamily="34" charset="0"/>
+              </a:rPr>
+              <a:t>X</a:t>
+            </a:r>
+            <a:r>
+              <a:rPr lang="ko-KR" altLang="en-US" sz="1800" b="1" dirty="0">
+                <a:latin typeface="Open Sans" panose="020F0502020204030204" pitchFamily="34" charset="0"/>
+              </a:rPr>
+              <a:t>가 </a:t>
+            </a:r>
+            <a:r>
+              <a:rPr lang="en-US" altLang="ko-KR" sz="1800" b="1" dirty="0">
+                <a:latin typeface="Open Sans" panose="020F0502020204030204" pitchFamily="34" charset="0"/>
+              </a:rPr>
+              <a:t>2</a:t>
+            </a:r>
+            <a:r>
+              <a:rPr lang="ko-KR" altLang="en-US" sz="1800" b="1" dirty="0">
+                <a:latin typeface="Open Sans" panose="020F0502020204030204" pitchFamily="34" charset="0"/>
+              </a:rPr>
+              <a:t>로 나누어 떨어지면</a:t>
+            </a:r>
+            <a:r>
+              <a:rPr lang="en-US" altLang="ko-KR" sz="1800" b="1" dirty="0">
+                <a:latin typeface="Open Sans" panose="020F0502020204030204" pitchFamily="34" charset="0"/>
+              </a:rPr>
+              <a:t>, 2</a:t>
+            </a:r>
+            <a:r>
+              <a:rPr lang="ko-KR" altLang="en-US" sz="1800" b="1" dirty="0">
+                <a:latin typeface="Open Sans" panose="020F0502020204030204" pitchFamily="34" charset="0"/>
+              </a:rPr>
+              <a:t>로 나눈다</a:t>
+            </a:r>
+            <a:r>
+              <a:rPr lang="en-US" altLang="ko-KR" sz="1800" b="1" dirty="0">
+                <a:latin typeface="Open Sans" panose="020F0502020204030204" pitchFamily="34" charset="0"/>
+              </a:rPr>
+              <a:t>.</a:t>
+            </a:r>
+          </a:p>
+          <a:p>
+            <a:pPr algn="just"/>
+            <a:r>
+              <a:rPr lang="en-US" altLang="ko-KR" sz="1800" b="1" dirty="0">
+                <a:latin typeface="Open Sans" panose="020F0502020204030204" pitchFamily="34" charset="0"/>
+              </a:rPr>
+              <a:t>1</a:t>
+            </a:r>
+            <a:r>
+              <a:rPr lang="ko-KR" altLang="en-US" sz="1800" b="1" dirty="0">
+                <a:latin typeface="Open Sans" panose="020F0502020204030204" pitchFamily="34" charset="0"/>
+              </a:rPr>
+              <a:t>을 뺀다</a:t>
+            </a:r>
+            <a:r>
+              <a:rPr lang="en-US" altLang="ko-KR" sz="1800" b="1" dirty="0">
+                <a:latin typeface="Open Sans" panose="020F0502020204030204" pitchFamily="34" charset="0"/>
+              </a:rPr>
+              <a:t>.</a:t>
+            </a:r>
+          </a:p>
+          <a:p>
+            <a:pPr algn="just"/>
+            <a:endParaRPr lang="en-US" altLang="ko-KR" sz="1800" b="1" dirty="0">
+              <a:latin typeface="Open Sans" panose="020F0502020204030204" pitchFamily="34" charset="0"/>
+            </a:endParaRPr>
+          </a:p>
+          <a:p>
+            <a:pPr algn="just"/>
+            <a:r>
+              <a:rPr lang="ko-KR" altLang="en-US" sz="1800" b="1" dirty="0">
+                <a:latin typeface="Open Sans" panose="020F0502020204030204" pitchFamily="34" charset="0"/>
+              </a:rPr>
+              <a:t>정수 </a:t>
+            </a:r>
+            <a:r>
+              <a:rPr lang="en-US" altLang="ko-KR" sz="1800" b="1" dirty="0">
+                <a:latin typeface="Open Sans" panose="020F0502020204030204" pitchFamily="34" charset="0"/>
+              </a:rPr>
+              <a:t>N</a:t>
+            </a:r>
+            <a:r>
+              <a:rPr lang="ko-KR" altLang="en-US" sz="1800" b="1" dirty="0">
+                <a:latin typeface="Open Sans" panose="020F0502020204030204" pitchFamily="34" charset="0"/>
+              </a:rPr>
+              <a:t>이 주어졌을 때</a:t>
+            </a:r>
+            <a:r>
+              <a:rPr lang="en-US" altLang="ko-KR" sz="1800" b="1" dirty="0">
+                <a:latin typeface="Open Sans" panose="020F0502020204030204" pitchFamily="34" charset="0"/>
+              </a:rPr>
+              <a:t>, </a:t>
+            </a:r>
+            <a:r>
+              <a:rPr lang="ko-KR" altLang="en-US" sz="1800" dirty="0">
+                <a:latin typeface="Open Sans" panose="020F0502020204030204" pitchFamily="34" charset="0"/>
+              </a:rPr>
+              <a:t>위와 같은 연산 세 개를 적절히 사용해서 </a:t>
+            </a:r>
+            <a:r>
+              <a:rPr lang="en-US" altLang="ko-KR" sz="1800" dirty="0">
+                <a:latin typeface="Open Sans" panose="020F0502020204030204" pitchFamily="34" charset="0"/>
+              </a:rPr>
+              <a:t>1</a:t>
+            </a:r>
+            <a:r>
+              <a:rPr lang="ko-KR" altLang="en-US" sz="1800" dirty="0">
+                <a:latin typeface="Open Sans" panose="020F0502020204030204" pitchFamily="34" charset="0"/>
+              </a:rPr>
+              <a:t>을 만들려고 한다</a:t>
+            </a:r>
+            <a:r>
+              <a:rPr lang="en-US" altLang="ko-KR" sz="1800" dirty="0">
+                <a:latin typeface="Open Sans" panose="020F0502020204030204" pitchFamily="34" charset="0"/>
+              </a:rPr>
+              <a:t>. </a:t>
+            </a:r>
+            <a:r>
+              <a:rPr lang="ko-KR" altLang="en-US" sz="1800" b="1" dirty="0">
+                <a:latin typeface="Open Sans" panose="020F0502020204030204" pitchFamily="34" charset="0"/>
+              </a:rPr>
+              <a:t>연산을 사용하는 횟수의 최솟값을 </a:t>
+            </a:r>
+            <a:r>
+              <a:rPr lang="ko-KR" altLang="en-US" sz="1800" b="1" dirty="0" err="1">
+                <a:latin typeface="Open Sans" panose="020F0502020204030204" pitchFamily="34" charset="0"/>
+              </a:rPr>
+              <a:t>출력하시오</a:t>
+            </a:r>
+            <a:r>
+              <a:rPr lang="en-US" altLang="ko-KR" sz="1800" b="1" dirty="0">
+                <a:latin typeface="Open Sans" panose="020F0502020204030204" pitchFamily="34" charset="0"/>
+              </a:rPr>
+              <a:t>.</a:t>
+            </a:r>
+            <a:endParaRPr lang="en-US" altLang="ko-KR" sz="1800" b="1" i="0" dirty="0">
+              <a:effectLst/>
+              <a:latin typeface="Open Sans" panose="020F0502020204030204" pitchFamily="34" charset="0"/>
+            </a:endParaRPr>
+          </a:p>
+        </p:txBody>
+      </p:sp>
+      <p:pic>
+        <p:nvPicPr>
+          <p:cNvPr id="6" name="그림 5"/>
+          <p:cNvPicPr>
+            <a:picLocks noChangeAspect="1"/>
+          </p:cNvPicPr>
+          <p:nvPr/>
+        </p:nvPicPr>
+        <p:blipFill>
+          <a:blip r:embed="rId3"/>
+          <a:stretch>
+            <a:fillRect/>
+          </a:stretch>
+        </p:blipFill>
+        <p:spPr>
+          <a:xfrm>
+            <a:off x="672133" y="4437112"/>
+            <a:ext cx="8014667" cy="1344286"/>
+          </a:xfrm>
+          <a:prstGeom prst="rect">
+            <a:avLst/>
+          </a:prstGeom>
+          <a:ln>
+            <a:solidFill>
+              <a:schemeClr val="tx1"/>
+            </a:solidFill>
+          </a:ln>
+        </p:spPr>
+      </p:pic>
+    </p:spTree>
+    <p:extLst>
+      <p:ext uri="{BB962C8B-B14F-4D97-AF65-F5344CB8AC3E}">
+        <p14:creationId xmlns:p14="http://schemas.microsoft.com/office/powerpoint/2010/main" val="4079443502"/>
+      </p:ext>
+    </p:extLst>
+  </p:cSld>
+  <p:clrMapOvr>
+    <a:masterClrMapping/>
+  </p:clrMapOvr>
+</p:sld>
+</file>
+
+<file path=ppt/slides/slide21.xml><?xml version="1.0" encoding="utf-8"?>
+<p:sld xmlns:r="http://schemas.openxmlformats.org/officeDocument/2006/relationships" xmlns:c="http://schemas.openxmlformats.org/drawingml/2006/chart" xmlns:a="http://schemas.openxmlformats.org/drawingml/2006/main" xmlns:dgm="http://schemas.openxmlformats.org/drawingml/2006/diagram" xmlns:dsp="http://schemas.microsoft.com/office/drawing/2008/diagram" xmlns:p="http://schemas.openxmlformats.org/presentationml/2006/main">
+  <p:cSld>
+    <p:spTree>
+      <p:nvGrpSpPr>
+        <p:cNvPr id="1" name=""/>
+        <p:cNvGrpSpPr/>
+        <p:nvPr/>
+      </p:nvGrpSpPr>
+      <p:grpSpPr>
+        <a:xfrm>
+          <a:off x="0" y="0"/>
+          <a:ext cx="0" cy="0"/>
+          <a:chOff x="0" y="0"/>
+          <a:chExt cx="0" cy="0"/>
+        </a:xfrm>
+      </p:grpSpPr>
+      <p:sp>
+        <p:nvSpPr>
+          <p:cNvPr id="2" name="제목 1"/>
+          <p:cNvSpPr>
+            <a:spLocks noGrp="1"/>
+          </p:cNvSpPr>
+          <p:nvPr>
+            <p:ph type="title" idx="0"/>
+          </p:nvPr>
+        </p:nvSpPr>
+        <p:spPr/>
+        <p:txBody>
+          <a:bodyPr/>
+          <a:lstStyle/>
+          <a:p>
+            <a:pPr>
+              <a:defRPr/>
+            </a:pPr>
+            <a:r>
+              <a:rPr lang="ko-KR" altLang="en-US"/>
+              <a:t/>
+            </a:r>
+            <a:endParaRPr lang="ko-KR" altLang="en-US"/>
+          </a:p>
+        </p:txBody>
+      </p:sp>
+      <p:sp>
+        <p:nvSpPr>
+          <p:cNvPr id="3" name="내용 개체 틀 2"/>
+          <p:cNvSpPr>
+            <a:spLocks noGrp="1"/>
+          </p:cNvSpPr>
+          <p:nvPr>
+            <p:ph idx="1"/>
+          </p:nvPr>
+        </p:nvSpPr>
+        <p:spPr/>
+        <p:txBody>
+          <a:bodyPr/>
+          <a:lstStyle/>
+          <a:p>
+            <a:pPr>
+              <a:defRPr/>
+            </a:pPr>
+            <a:endParaRPr lang="ko-KR" altLang="en-US"/>
+          </a:p>
+        </p:txBody>
+      </p:sp>
+      <p:sp>
+        <p:nvSpPr>
+          <p:cNvPr id="4" name="날짜 개체 틀 3"/>
+          <p:cNvSpPr>
+            <a:spLocks noGrp="1"/>
+          </p:cNvSpPr>
+          <p:nvPr>
+            <p:ph type="dt" sz="half" idx="10"/>
+          </p:nvPr>
+        </p:nvSpPr>
+        <p:spPr/>
+        <p:txBody>
+          <a:bodyPr/>
+          <a:lstStyle/>
+          <a:p>
+            <a:pPr>
+              <a:defRPr/>
+            </a:pPr>
+            <a:r>
+              <a:rPr lang="en-US" altLang="ko-KR"/>
+              <a:t>2008</a:t>
+            </a:r>
+            <a:r>
+              <a:rPr lang="ko-KR" altLang="en-US"/>
+              <a:t>년</a:t>
+            </a:r>
+            <a:r>
+              <a:rPr lang="en-US" altLang="ko-KR"/>
+              <a:t>2</a:t>
+            </a:r>
+            <a:r>
+              <a:rPr lang="ko-KR" altLang="en-US"/>
+              <a:t>학기 </a:t>
+            </a:r>
+            <a:r>
+              <a:rPr lang="en-US" altLang="ko-KR"/>
+              <a:t>3D</a:t>
+            </a:r>
+            <a:r>
+              <a:rPr lang="ko-KR" altLang="en-US"/>
+              <a:t>게임프로그래밍</a:t>
+            </a:r>
+            <a:r>
+              <a:rPr lang="en-US" altLang="ko-KR"/>
+              <a:t>II </a:t>
+            </a:r>
+            <a:r>
+              <a:rPr lang="ko-KR" altLang="en-US"/>
+              <a:t>담당교수</a:t>
+            </a:r>
+            <a:r>
+              <a:rPr lang="en-US" altLang="ko-KR"/>
+              <a:t>:</a:t>
+            </a:r>
+            <a:r>
+              <a:rPr lang="ko-KR" altLang="en-US"/>
+              <a:t>김영식</a:t>
+            </a:r>
+            <a:endParaRPr lang="ko-KR" altLang="en-US"/>
+          </a:p>
+        </p:txBody>
+      </p:sp>
+      <p:sp>
+        <p:nvSpPr>
+          <p:cNvPr id="5" name="슬라이드 번호 개체 틀 5"/>
+          <p:cNvSpPr>
+            <a:spLocks noGrp="1"/>
+          </p:cNvSpPr>
+          <p:nvPr>
+            <p:ph type="sldNum" sz="quarter" idx="12"/>
+          </p:nvPr>
+        </p:nvSpPr>
+        <p:spPr/>
+        <p:txBody>
+          <a:bodyPr/>
+          <a:lstStyle/>
+          <a:p>
+            <a:pPr>
+              <a:defRPr/>
+            </a:pPr>
+            <a:fld id="{A268DA64-E15D-4814-A1DA-86D92D550423}" type="slidenum">
+              <a:rPr lang="en-US" altLang="en-US"/>
+              <a:pPr>
+                <a:defRPr/>
+              </a:pPr>
+              <a:t>21</a:t>
+            </a:fld>
+            <a:endParaRPr lang="en-US" altLang="en-US"/>
+          </a:p>
+        </p:txBody>
+      </p:sp>
+      <p:pic>
+        <p:nvPicPr>
+          <p:cNvPr id="6" name=""/>
+          <p:cNvPicPr>
+            <a:picLocks noChangeAspect="1"/>
+          </p:cNvPicPr>
+          <p:nvPr/>
+        </p:nvPicPr>
+        <p:blipFill rotWithShape="1">
+          <a:blip r:embed="rId2"/>
+          <a:stretch>
+            <a:fillRect/>
+          </a:stretch>
+        </p:blipFill>
+        <p:spPr>
+          <a:xfrm>
+            <a:off x="654703" y="1268760"/>
+            <a:ext cx="3269224" cy="4913784"/>
+          </a:xfrm>
+          <a:prstGeom prst="rect">
+            <a:avLst/>
+          </a:prstGeom>
+        </p:spPr>
+      </p:pic>
+      <p:pic>
+        <p:nvPicPr>
+          <p:cNvPr id="7" name=""/>
+          <p:cNvPicPr>
+            <a:picLocks noChangeAspect="1"/>
+          </p:cNvPicPr>
+          <p:nvPr/>
+        </p:nvPicPr>
+        <p:blipFill rotWithShape="1">
+          <a:blip r:embed="rId3"/>
+          <a:stretch>
+            <a:fillRect/>
+          </a:stretch>
+        </p:blipFill>
+        <p:spPr>
+          <a:xfrm>
+            <a:off x="2483768" y="1357024"/>
+            <a:ext cx="6633154" cy="1711935"/>
+          </a:xfrm>
+          <a:prstGeom prst="rect">
+            <a:avLst/>
+          </a:prstGeom>
+        </p:spPr>
+      </p:pic>
+    </p:spTree>
+  </p:cSld>
+  <p:clrMapOvr>
+    <a:masterClrMapping/>
+  </p:clrMapOvr>
+  <mc:AlternateContent xmlns:mc="http://schemas.openxmlformats.org/markup-compatibility/2006">
+    <mc:Choice xmlns:p14="http://schemas.microsoft.com/office/powerpoint/2010/main" Requires="p14">
+      <p:transition xmlns:mc="http://schemas.openxmlformats.org/markup-compatibility/2006" xmlns:p14="http://schemas.microsoft.com/office/powerpoint/2010/main" mc:Ignorable="p14" p14:dur="500"/>
+    </mc:Choice>
+    <mc:Fallback>
+      <p:transition/>
+    </mc:Fallback>
+  </mc:AlternateContent>
+</p:sld>
+</file>
+
+<file path=ppt/slides/slide22.xml><?xml version="1.0" encoding="utf-8"?>
+<p:sld xmlns:a="http://schemas.openxmlformats.org/drawingml/2006/main" xmlns:r="http://schemas.openxmlformats.org/officeDocument/2006/relationships" xmlns:p="http://schemas.openxmlformats.org/presentationml/2006/main">
+  <p:cSld>
+    <p:spTree>
+      <p:nvGrpSpPr>
+        <p:cNvPr id="1" name="">
+          <a:extLst>
+            <a:ext uri="{FF2B5EF4-FFF2-40B4-BE49-F238E27FC236}">
+              <a16:creationId xmlns:a16="http://schemas.microsoft.com/office/drawing/2014/main" id="{BB2182D6-7C3A-1450-0957-0736228992F8}"/>
+            </a:ext>
+          </a:extLst>
+        </p:cNvPr>
+        <p:cNvGrpSpPr/>
+        <p:nvPr/>
+      </p:nvGrpSpPr>
+      <p:grpSpPr>
+        <a:xfrm>
+          <a:off x="0" y="0"/>
+          <a:ext cx="0" cy="0"/>
+          <a:chOff x="0" y="0"/>
+          <a:chExt cx="0" cy="0"/>
+        </a:xfrm>
+      </p:grpSpPr>
+      <p:sp>
+        <p:nvSpPr>
+          <p:cNvPr id="2" name="제목 1">
+            <a:extLst>
+              <a:ext uri="{FF2B5EF4-FFF2-40B4-BE49-F238E27FC236}">
+                <a16:creationId xmlns:a16="http://schemas.microsoft.com/office/drawing/2014/main" id="{00FC0AAC-B616-D4EC-909C-ECC3F2A8B843}"/>
+              </a:ext>
+            </a:extLst>
+          </p:cNvPr>
+          <p:cNvSpPr>
+            <a:spLocks noGrp="1"/>
+          </p:cNvSpPr>
+          <p:nvPr>
+            <p:ph type="title"/>
+          </p:nvPr>
+        </p:nvSpPr>
+        <p:spPr/>
+        <p:txBody>
+          <a:bodyPr/>
+          <a:lstStyle/>
+          <a:p>
+            <a:r>
+              <a:rPr lang="en-US" altLang="ko-KR" sz="2800" dirty="0"/>
+              <a:t>8. </a:t>
+            </a:r>
+            <a:r>
+              <a:rPr lang="ko-KR" altLang="en-US" sz="2800" dirty="0"/>
+              <a:t>내려가기 </a:t>
+            </a:r>
+            <a:r>
+              <a:rPr lang="en-US" altLang="ko-KR" sz="2800" dirty="0"/>
+              <a:t>(</a:t>
+            </a:r>
+            <a:r>
+              <a:rPr lang="en-US" altLang="ko-KR" sz="2800" dirty="0" err="1"/>
+              <a:t>TUKorea</a:t>
+            </a:r>
+            <a:r>
+              <a:rPr lang="en-US" altLang="ko-KR" sz="2800" dirty="0"/>
+              <a:t>, </a:t>
+            </a:r>
+            <a:r>
+              <a:rPr lang="ko-KR" altLang="en-US" sz="2800" dirty="0"/>
+              <a:t>백준</a:t>
+            </a:r>
+            <a:r>
+              <a:rPr lang="en-US" altLang="ko-KR" sz="2800" dirty="0"/>
+              <a:t>2096, DP) </a:t>
+            </a:r>
+            <a:br>
+              <a:rPr lang="en-US" altLang="ko-KR" sz="2800" dirty="0"/>
+            </a:br>
+            <a:r>
+              <a:rPr lang="en-US" altLang="ko-KR" sz="2000" dirty="0"/>
+              <a:t>http://210.93.60.51/problem/0184</a:t>
+            </a:r>
+            <a:br>
+              <a:rPr lang="en-US" altLang="ko-KR" sz="2000" dirty="0"/>
+            </a:br>
+            <a:r>
+              <a:rPr lang="en-US" altLang="ko-KR" sz="2000" dirty="0"/>
+              <a:t>https://www.acmicpc.net/problem/2096</a:t>
+            </a:r>
+            <a:endParaRPr lang="ko-KR" altLang="en-US" sz="2000" dirty="0"/>
+          </a:p>
+        </p:txBody>
+      </p:sp>
+      <p:sp>
+        <p:nvSpPr>
+          <p:cNvPr id="5" name="슬라이드 번호 개체 틀 4">
+            <a:extLst>
+              <a:ext uri="{FF2B5EF4-FFF2-40B4-BE49-F238E27FC236}">
+                <a16:creationId xmlns:a16="http://schemas.microsoft.com/office/drawing/2014/main" id="{81099AAD-C6EA-CB4B-F77E-8434C7D5EADC}"/>
+              </a:ext>
+            </a:extLst>
+          </p:cNvPr>
+          <p:cNvSpPr>
+            <a:spLocks noGrp="1"/>
+          </p:cNvSpPr>
+          <p:nvPr>
+            <p:ph type="sldNum" sz="quarter" idx="12"/>
+          </p:nvPr>
+        </p:nvSpPr>
+        <p:spPr/>
+        <p:txBody>
+          <a:bodyPr/>
+          <a:lstStyle/>
+          <a:p>
+            <a:pPr>
+              <a:defRPr/>
+            </a:pPr>
+            <a:fld id="{A268DA64-E15D-4814-A1DA-86D92D550423}" type="slidenum">
+              <a:rPr lang="ko-KR" altLang="en-US" smtClean="0"/>
+              <a:pPr>
+                <a:defRPr/>
+              </a:pPr>
+              <a:t>15</a:t>
+            </a:fld>
+            <a:endParaRPr lang="ko-KR" altLang="en-US"/>
+          </a:p>
+        </p:txBody>
+      </p:sp>
+      <p:sp>
+        <p:nvSpPr>
+          <p:cNvPr id="3" name="내용 개체 틀 2">
+            <a:extLst>
+              <a:ext uri="{FF2B5EF4-FFF2-40B4-BE49-F238E27FC236}">
+                <a16:creationId xmlns:a16="http://schemas.microsoft.com/office/drawing/2014/main" id="{858C86E8-5349-F7B3-AFB6-B10A83FC024F}"/>
+              </a:ext>
+            </a:extLst>
+          </p:cNvPr>
+          <p:cNvSpPr>
+            <a:spLocks noGrp="1"/>
+          </p:cNvSpPr>
+          <p:nvPr>
+            <p:ph idx="1"/>
+          </p:nvPr>
+        </p:nvSpPr>
+        <p:spPr>
+          <a:xfrm>
+            <a:off x="457200" y="1340768"/>
+            <a:ext cx="8229600" cy="4785395"/>
+          </a:xfrm>
+        </p:spPr>
+        <p:txBody>
+          <a:bodyPr/>
+          <a:lstStyle/>
+          <a:p>
+            <a:pPr algn="just"/>
+            <a:r>
+              <a:rPr lang="en-US" altLang="ko-KR" sz="1800" b="1" dirty="0">
+                <a:latin typeface="Open Sans" panose="020F0502020204030204" pitchFamily="34" charset="0"/>
+              </a:rPr>
+              <a:t>N</a:t>
+            </a:r>
+            <a:r>
+              <a:rPr lang="ko-KR" altLang="en-US" sz="1800" b="1" dirty="0">
+                <a:latin typeface="Open Sans" panose="020F0502020204030204" pitchFamily="34" charset="0"/>
+              </a:rPr>
+              <a:t>줄에 </a:t>
+            </a:r>
+            <a:r>
+              <a:rPr lang="en-US" altLang="ko-KR" sz="1800" b="1" dirty="0">
+                <a:latin typeface="Open Sans" panose="020F0502020204030204" pitchFamily="34" charset="0"/>
+              </a:rPr>
+              <a:t>0 </a:t>
+            </a:r>
+            <a:r>
+              <a:rPr lang="ko-KR" altLang="en-US" sz="1800" b="1" dirty="0">
+                <a:latin typeface="Open Sans" panose="020F0502020204030204" pitchFamily="34" charset="0"/>
+              </a:rPr>
+              <a:t>이상 </a:t>
+            </a:r>
+            <a:r>
+              <a:rPr lang="en-US" altLang="ko-KR" sz="1800" b="1" dirty="0">
+                <a:latin typeface="Open Sans" panose="020F0502020204030204" pitchFamily="34" charset="0"/>
+              </a:rPr>
+              <a:t>9 </a:t>
+            </a:r>
+            <a:r>
+              <a:rPr lang="ko-KR" altLang="en-US" sz="1800" b="1" dirty="0">
+                <a:latin typeface="Open Sans" panose="020F0502020204030204" pitchFamily="34" charset="0"/>
+              </a:rPr>
+              <a:t>이하의 숫자가 세 개씩 적혀 있다</a:t>
+            </a:r>
+            <a:r>
+              <a:rPr lang="en-US" altLang="ko-KR" sz="1800" b="1" dirty="0">
+                <a:latin typeface="Open Sans" panose="020F0502020204030204" pitchFamily="34" charset="0"/>
+              </a:rPr>
+              <a:t>. </a:t>
+            </a:r>
+            <a:r>
+              <a:rPr lang="ko-KR" altLang="en-US" sz="1800" dirty="0">
+                <a:latin typeface="Open Sans" panose="020F0502020204030204" pitchFamily="34" charset="0"/>
+              </a:rPr>
+              <a:t>내려가기 게임을 하고 있는데</a:t>
+            </a:r>
+            <a:r>
+              <a:rPr lang="en-US" altLang="ko-KR" sz="1800" dirty="0">
+                <a:latin typeface="Open Sans" panose="020F0502020204030204" pitchFamily="34" charset="0"/>
+              </a:rPr>
+              <a:t>, </a:t>
+            </a:r>
+            <a:r>
+              <a:rPr lang="ko-KR" altLang="en-US" sz="1800" dirty="0">
+                <a:latin typeface="Open Sans" panose="020F0502020204030204" pitchFamily="34" charset="0"/>
+              </a:rPr>
+              <a:t>이 게임은 </a:t>
+            </a:r>
+            <a:r>
+              <a:rPr lang="ko-KR" altLang="en-US" sz="1800" b="1" dirty="0">
+                <a:latin typeface="Open Sans" panose="020F0502020204030204" pitchFamily="34" charset="0"/>
+              </a:rPr>
+              <a:t>첫 줄에서 시작해서 마지막 줄에서 끝나게 되는 놀이이다</a:t>
+            </a:r>
+            <a:r>
+              <a:rPr lang="en-US" altLang="ko-KR" sz="1800" dirty="0">
+                <a:latin typeface="Open Sans" panose="020F0502020204030204" pitchFamily="34" charset="0"/>
+              </a:rPr>
+              <a:t>.</a:t>
+            </a:r>
+          </a:p>
+          <a:p>
+            <a:pPr algn="just"/>
+            <a:endParaRPr lang="en-US" altLang="ko-KR" sz="1800" dirty="0">
+              <a:latin typeface="Open Sans" panose="020F0502020204030204" pitchFamily="34" charset="0"/>
+            </a:endParaRPr>
+          </a:p>
+          <a:p>
+            <a:pPr algn="just"/>
+            <a:r>
+              <a:rPr lang="ko-KR" altLang="en-US" sz="1800" dirty="0">
+                <a:latin typeface="Open Sans" panose="020F0502020204030204" pitchFamily="34" charset="0"/>
+              </a:rPr>
+              <a:t>먼저 처음에 적혀 있는 세 개의 숫자 중에서 하나를 골라서 시작하게 된다</a:t>
+            </a:r>
+            <a:r>
+              <a:rPr lang="en-US" altLang="ko-KR" sz="1800" dirty="0">
+                <a:latin typeface="Open Sans" panose="020F0502020204030204" pitchFamily="34" charset="0"/>
+              </a:rPr>
+              <a:t>.  </a:t>
+            </a:r>
+            <a:r>
+              <a:rPr lang="ko-KR" altLang="en-US" sz="1800" dirty="0">
+                <a:latin typeface="Open Sans" panose="020F0502020204030204" pitchFamily="34" charset="0"/>
+              </a:rPr>
+              <a:t>다음 줄로 내려갈 때에는 </a:t>
+            </a:r>
+            <a:r>
+              <a:rPr lang="ko-KR" altLang="en-US" sz="1800" b="1" dirty="0">
+                <a:latin typeface="Open Sans" panose="020F0502020204030204" pitchFamily="34" charset="0"/>
+              </a:rPr>
+              <a:t>다음과 같은 제약 조건이 있다</a:t>
+            </a:r>
+            <a:r>
+              <a:rPr lang="en-US" altLang="ko-KR" sz="1800" b="1" dirty="0">
+                <a:latin typeface="Open Sans" panose="020F0502020204030204" pitchFamily="34" charset="0"/>
+              </a:rPr>
+              <a:t>.</a:t>
+            </a:r>
+          </a:p>
+          <a:p>
+            <a:pPr algn="just"/>
+            <a:endParaRPr lang="en-US" altLang="ko-KR" sz="1800" b="1" dirty="0">
+              <a:latin typeface="Open Sans" panose="020F0502020204030204" pitchFamily="34" charset="0"/>
+            </a:endParaRPr>
+          </a:p>
+          <a:p>
+            <a:pPr algn="just"/>
+            <a:endParaRPr lang="en-US" altLang="ko-KR" sz="1800" b="1" dirty="0">
+              <a:latin typeface="Open Sans" panose="020F0502020204030204" pitchFamily="34" charset="0"/>
+            </a:endParaRPr>
+          </a:p>
+          <a:p>
+            <a:pPr algn="just"/>
+            <a:endParaRPr lang="en-US" altLang="ko-KR" sz="1800" b="1" dirty="0">
+              <a:latin typeface="Open Sans" panose="020F0502020204030204" pitchFamily="34" charset="0"/>
+            </a:endParaRPr>
+          </a:p>
+          <a:p>
+            <a:pPr algn="just"/>
+            <a:endParaRPr lang="en-US" altLang="ko-KR" sz="1800" b="1" dirty="0">
+              <a:latin typeface="Open Sans" panose="020F0502020204030204" pitchFamily="34" charset="0"/>
+            </a:endParaRPr>
+          </a:p>
+          <a:p>
+            <a:pPr algn="just"/>
+            <a:r>
+              <a:rPr lang="ko-KR" altLang="en-US" sz="1800" dirty="0">
+                <a:latin typeface="Open Sans" panose="020F0502020204030204" pitchFamily="34" charset="0"/>
+              </a:rPr>
+              <a:t>별표는 현재 위치이고</a:t>
+            </a:r>
+            <a:r>
+              <a:rPr lang="en-US" altLang="ko-KR" sz="1800" dirty="0">
+                <a:latin typeface="Open Sans" panose="020F0502020204030204" pitchFamily="34" charset="0"/>
+              </a:rPr>
+              <a:t>, </a:t>
+            </a:r>
+            <a:r>
+              <a:rPr lang="ko-KR" altLang="en-US" sz="1800" dirty="0">
+                <a:latin typeface="Open Sans" panose="020F0502020204030204" pitchFamily="34" charset="0"/>
+              </a:rPr>
+              <a:t>그 </a:t>
+            </a:r>
+            <a:r>
+              <a:rPr lang="ko-KR" altLang="en-US" sz="1800" dirty="0" err="1">
+                <a:latin typeface="Open Sans" panose="020F0502020204030204" pitchFamily="34" charset="0"/>
+              </a:rPr>
+              <a:t>아랫</a:t>
+            </a:r>
+            <a:r>
+              <a:rPr lang="ko-KR" altLang="en-US" sz="1800" dirty="0">
+                <a:latin typeface="Open Sans" panose="020F0502020204030204" pitchFamily="34" charset="0"/>
+              </a:rPr>
+              <a:t> 줄의 </a:t>
+            </a:r>
+            <a:r>
+              <a:rPr lang="ko-KR" altLang="en-US" sz="1800" b="1" dirty="0">
+                <a:latin typeface="Open Sans" panose="020F0502020204030204" pitchFamily="34" charset="0"/>
+              </a:rPr>
+              <a:t>파란 동그라미는 </a:t>
+            </a:r>
+            <a:r>
+              <a:rPr lang="ko-KR" altLang="en-US" sz="1800" b="1" dirty="0" err="1">
+                <a:latin typeface="Open Sans" panose="020F0502020204030204" pitchFamily="34" charset="0"/>
+              </a:rPr>
+              <a:t>원룡이가</a:t>
+            </a:r>
+            <a:r>
+              <a:rPr lang="ko-KR" altLang="en-US" sz="1800" b="1" dirty="0">
+                <a:latin typeface="Open Sans" panose="020F0502020204030204" pitchFamily="34" charset="0"/>
+              </a:rPr>
+              <a:t> 다음 줄로 내려갈 수 있는 위치이며</a:t>
+            </a:r>
+            <a:r>
+              <a:rPr lang="en-US" altLang="ko-KR" sz="1800" b="1" dirty="0">
+                <a:latin typeface="Open Sans" panose="020F0502020204030204" pitchFamily="34" charset="0"/>
+              </a:rPr>
+              <a:t>, </a:t>
+            </a:r>
+            <a:r>
+              <a:rPr lang="ko-KR" altLang="en-US" sz="1800" b="1" dirty="0">
+                <a:latin typeface="Open Sans" panose="020F0502020204030204" pitchFamily="34" charset="0"/>
+              </a:rPr>
+              <a:t>빨간 </a:t>
+            </a:r>
+            <a:r>
+              <a:rPr lang="ko-KR" altLang="en-US" sz="1800" b="1" dirty="0" err="1">
+                <a:latin typeface="Open Sans" panose="020F0502020204030204" pitchFamily="34" charset="0"/>
+              </a:rPr>
+              <a:t>가위표는</a:t>
+            </a:r>
+            <a:r>
+              <a:rPr lang="ko-KR" altLang="en-US" sz="1800" b="1" dirty="0">
+                <a:latin typeface="Open Sans" panose="020F0502020204030204" pitchFamily="34" charset="0"/>
+              </a:rPr>
+              <a:t> </a:t>
+            </a:r>
+            <a:r>
+              <a:rPr lang="ko-KR" altLang="en-US" sz="1800" b="1" dirty="0" err="1">
+                <a:latin typeface="Open Sans" panose="020F0502020204030204" pitchFamily="34" charset="0"/>
+              </a:rPr>
+              <a:t>원룡이가</a:t>
+            </a:r>
+            <a:r>
+              <a:rPr lang="ko-KR" altLang="en-US" sz="1800" b="1" dirty="0">
+                <a:latin typeface="Open Sans" panose="020F0502020204030204" pitchFamily="34" charset="0"/>
+              </a:rPr>
+              <a:t> 내려갈 수 없는 위치가 </a:t>
+            </a:r>
+            <a:r>
+              <a:rPr lang="ko-KR" altLang="en-US" sz="1800" dirty="0">
+                <a:latin typeface="Open Sans" panose="020F0502020204030204" pitchFamily="34" charset="0"/>
+              </a:rPr>
+              <a:t>된다</a:t>
+            </a:r>
+            <a:r>
+              <a:rPr lang="en-US" altLang="ko-KR" sz="1800" dirty="0">
+                <a:latin typeface="Open Sans" panose="020F0502020204030204" pitchFamily="34" charset="0"/>
+              </a:rPr>
+              <a:t>. </a:t>
+            </a:r>
+          </a:p>
+          <a:p>
+            <a:pPr algn="just"/>
+            <a:endParaRPr lang="en-US" altLang="ko-KR" sz="1800" dirty="0">
+              <a:latin typeface="Open Sans" panose="020F0502020204030204" pitchFamily="34" charset="0"/>
+            </a:endParaRPr>
+          </a:p>
+          <a:p>
+            <a:pPr algn="just"/>
+            <a:r>
+              <a:rPr lang="ko-KR" altLang="en-US" sz="1800" dirty="0" err="1">
+                <a:latin typeface="Open Sans" panose="020F0502020204030204" pitchFamily="34" charset="0"/>
+              </a:rPr>
+              <a:t>숫자표가</a:t>
+            </a:r>
+            <a:r>
+              <a:rPr lang="ko-KR" altLang="en-US" sz="1800" dirty="0">
+                <a:latin typeface="Open Sans" panose="020F0502020204030204" pitchFamily="34" charset="0"/>
+              </a:rPr>
+              <a:t> 주어져 있을 때</a:t>
+            </a:r>
+            <a:r>
+              <a:rPr lang="en-US" altLang="ko-KR" sz="1800" dirty="0">
+                <a:latin typeface="Open Sans" panose="020F0502020204030204" pitchFamily="34" charset="0"/>
+              </a:rPr>
+              <a:t>, </a:t>
+            </a:r>
+            <a:r>
+              <a:rPr lang="ko-KR" altLang="en-US" sz="1800" dirty="0">
+                <a:latin typeface="Open Sans" panose="020F0502020204030204" pitchFamily="34" charset="0"/>
+              </a:rPr>
+              <a:t>얻을 수 있는 </a:t>
+            </a:r>
+            <a:r>
+              <a:rPr lang="ko-KR" altLang="en-US" sz="1800" b="1" dirty="0">
+                <a:latin typeface="Open Sans" panose="020F0502020204030204" pitchFamily="34" charset="0"/>
+              </a:rPr>
+              <a:t>최대 점수</a:t>
+            </a:r>
+            <a:r>
+              <a:rPr lang="en-US" altLang="ko-KR" sz="1800" b="1" dirty="0">
+                <a:latin typeface="Open Sans" panose="020F0502020204030204" pitchFamily="34" charset="0"/>
+              </a:rPr>
+              <a:t>, </a:t>
+            </a:r>
+            <a:r>
+              <a:rPr lang="ko-KR" altLang="en-US" sz="1800" b="1" dirty="0">
+                <a:latin typeface="Open Sans" panose="020F0502020204030204" pitchFamily="34" charset="0"/>
+              </a:rPr>
+              <a:t>최소 점수를 구하는 프로그램을 작성하시오</a:t>
+            </a:r>
+            <a:r>
+              <a:rPr lang="en-US" altLang="ko-KR" sz="1800" b="1" dirty="0">
+                <a:latin typeface="Open Sans" panose="020F0502020204030204" pitchFamily="34" charset="0"/>
+              </a:rPr>
+              <a:t>.</a:t>
+            </a:r>
+            <a:endParaRPr lang="en-US" altLang="ko-KR" sz="1800" b="1" i="0" dirty="0">
+              <a:effectLst/>
+              <a:latin typeface="Open Sans" panose="020F0502020204030204" pitchFamily="34" charset="0"/>
+            </a:endParaRPr>
+          </a:p>
+        </p:txBody>
+      </p:sp>
+      <p:pic>
+        <p:nvPicPr>
+          <p:cNvPr id="4" name="그림 3"/>
+          <p:cNvPicPr>
+            <a:picLocks noChangeAspect="1"/>
+          </p:cNvPicPr>
+          <p:nvPr/>
+        </p:nvPicPr>
+        <p:blipFill>
+          <a:blip r:embed="rId3"/>
+          <a:stretch>
+            <a:fillRect/>
+          </a:stretch>
+        </p:blipFill>
+        <p:spPr>
+          <a:xfrm>
+            <a:off x="552450" y="2881312"/>
+            <a:ext cx="8039100" cy="1095375"/>
+          </a:xfrm>
+          <a:prstGeom prst="rect">
+            <a:avLst/>
+          </a:prstGeom>
+        </p:spPr>
+      </p:pic>
+    </p:spTree>
+    <p:extLst>
+      <p:ext uri="{BB962C8B-B14F-4D97-AF65-F5344CB8AC3E}">
+        <p14:creationId xmlns:p14="http://schemas.microsoft.com/office/powerpoint/2010/main" val="686906298"/>
+      </p:ext>
+    </p:extLst>
+  </p:cSld>
+  <p:clrMapOvr>
+    <a:masterClrMapping/>
+  </p:clrMapOvr>
+</p:sld>
+</file>
+
+<file path=ppt/slides/slide23.xml><?xml version="1.0" encoding="utf-8"?>
+<p:sld xmlns:r="http://schemas.openxmlformats.org/officeDocument/2006/relationships" xmlns:c="http://schemas.openxmlformats.org/drawingml/2006/chart" xmlns:a="http://schemas.openxmlformats.org/drawingml/2006/main" xmlns:dgm="http://schemas.openxmlformats.org/drawingml/2006/diagram" xmlns:dsp="http://schemas.microsoft.com/office/drawing/2008/diagram" xmlns:p="http://schemas.openxmlformats.org/presentationml/2006/main">
+  <p:cSld>
+    <p:spTree>
+      <p:nvGrpSpPr>
+        <p:cNvPr id="1" name=""/>
+        <p:cNvGrpSpPr/>
+        <p:nvPr/>
+      </p:nvGrpSpPr>
+      <p:grpSpPr>
+        <a:xfrm>
+          <a:off x="0" y="0"/>
+          <a:ext cx="0" cy="0"/>
+          <a:chOff x="0" y="0"/>
+          <a:chExt cx="0" cy="0"/>
+        </a:xfrm>
+      </p:grpSpPr>
+      <p:sp>
+        <p:nvSpPr>
+          <p:cNvPr id="2" name="제목 1"/>
+          <p:cNvSpPr>
+            <a:spLocks noGrp="1"/>
+          </p:cNvSpPr>
+          <p:nvPr>
+            <p:ph type="title" idx="0"/>
+          </p:nvPr>
+        </p:nvSpPr>
+        <p:spPr/>
+        <p:txBody>
+          <a:bodyPr/>
+          <a:lstStyle/>
+          <a:p>
+            <a:pPr>
+              <a:defRPr/>
+            </a:pPr>
+            <a:r>
+              <a:rPr lang="ko-KR" altLang="en-US"/>
+              <a:t/>
+            </a:r>
+            <a:endParaRPr lang="ko-KR" altLang="en-US"/>
+          </a:p>
+        </p:txBody>
+      </p:sp>
+      <p:sp>
+        <p:nvSpPr>
+          <p:cNvPr id="3" name="내용 개체 틀 2"/>
+          <p:cNvSpPr>
+            <a:spLocks noGrp="1"/>
+          </p:cNvSpPr>
+          <p:nvPr>
+            <p:ph idx="1"/>
+          </p:nvPr>
+        </p:nvSpPr>
+        <p:spPr/>
+        <p:txBody>
+          <a:bodyPr/>
+          <a:lstStyle/>
+          <a:p>
+            <a:pPr>
+              <a:defRPr/>
+            </a:pPr>
+            <a:r>
+              <a:rPr lang="ko-KR" altLang="en-US"/>
+              <a:t/>
+            </a:r>
+            <a:endParaRPr lang="ko-KR" altLang="en-US"/>
+          </a:p>
+        </p:txBody>
+      </p:sp>
+      <p:sp>
+        <p:nvSpPr>
+          <p:cNvPr id="4" name="날짜 개체 틀 3"/>
+          <p:cNvSpPr>
+            <a:spLocks noGrp="1"/>
+          </p:cNvSpPr>
+          <p:nvPr>
+            <p:ph type="dt" sz="half" idx="10"/>
+          </p:nvPr>
+        </p:nvSpPr>
+        <p:spPr/>
+        <p:txBody>
+          <a:bodyPr/>
+          <a:lstStyle/>
+          <a:p>
+            <a:pPr>
+              <a:defRPr/>
+            </a:pPr>
+            <a:r>
+              <a:rPr lang="en-US" altLang="ko-KR"/>
+              <a:t>2008</a:t>
+            </a:r>
+            <a:r>
+              <a:rPr lang="ko-KR" altLang="en-US"/>
+              <a:t>년</a:t>
+            </a:r>
+            <a:r>
+              <a:rPr lang="en-US" altLang="ko-KR"/>
+              <a:t>2</a:t>
+            </a:r>
+            <a:r>
+              <a:rPr lang="ko-KR" altLang="en-US"/>
+              <a:t>학기 </a:t>
+            </a:r>
+            <a:r>
+              <a:rPr lang="en-US" altLang="ko-KR"/>
+              <a:t>3D</a:t>
+            </a:r>
+            <a:r>
+              <a:rPr lang="ko-KR" altLang="en-US"/>
+              <a:t>게임프로그래밍</a:t>
+            </a:r>
+            <a:r>
+              <a:rPr lang="en-US" altLang="ko-KR"/>
+              <a:t>II </a:t>
+            </a:r>
+            <a:r>
+              <a:rPr lang="ko-KR" altLang="en-US"/>
+              <a:t>담당교수</a:t>
+            </a:r>
+            <a:r>
+              <a:rPr lang="en-US" altLang="ko-KR"/>
+              <a:t>:</a:t>
+            </a:r>
+            <a:r>
+              <a:rPr lang="ko-KR" altLang="en-US"/>
+              <a:t>김영식</a:t>
+            </a:r>
+            <a:endParaRPr lang="ko-KR" altLang="en-US"/>
+          </a:p>
+        </p:txBody>
+      </p:sp>
+      <p:sp>
+        <p:nvSpPr>
+          <p:cNvPr id="5" name="슬라이드 번호 개체 틀 5"/>
+          <p:cNvSpPr>
+            <a:spLocks noGrp="1"/>
+          </p:cNvSpPr>
+          <p:nvPr>
+            <p:ph type="sldNum" sz="quarter" idx="12"/>
+          </p:nvPr>
+        </p:nvSpPr>
+        <p:spPr/>
+        <p:txBody>
+          <a:bodyPr/>
+          <a:lstStyle/>
+          <a:p>
+            <a:pPr>
+              <a:defRPr/>
+            </a:pPr>
+            <a:fld id="{A268DA64-E15D-4814-A1DA-86D92D550423}" type="slidenum">
+              <a:rPr lang="en-US" altLang="en-US"/>
+              <a:pPr>
+                <a:defRPr/>
+              </a:pPr>
+              <a:t>24</a:t>
+            </a:fld>
+            <a:endParaRPr lang="en-US" altLang="en-US"/>
+          </a:p>
+        </p:txBody>
+      </p:sp>
+      <p:pic>
+        <p:nvPicPr>
+          <p:cNvPr id="6" name=""/>
+          <p:cNvPicPr>
+            <a:picLocks noChangeAspect="1"/>
+          </p:cNvPicPr>
+          <p:nvPr/>
+        </p:nvPicPr>
+        <p:blipFill rotWithShape="1">
+          <a:blip r:embed="rId2"/>
+          <a:stretch>
+            <a:fillRect/>
+          </a:stretch>
+        </p:blipFill>
+        <p:spPr>
+          <a:xfrm>
+            <a:off x="824231" y="1268760"/>
+            <a:ext cx="3603753" cy="4556557"/>
+          </a:xfrm>
+          <a:prstGeom prst="rect">
+            <a:avLst/>
+          </a:prstGeom>
+        </p:spPr>
+      </p:pic>
+      <p:pic>
+        <p:nvPicPr>
+          <p:cNvPr id="7" name=""/>
+          <p:cNvPicPr>
+            <a:picLocks noChangeAspect="1"/>
+          </p:cNvPicPr>
+          <p:nvPr/>
+        </p:nvPicPr>
+        <p:blipFill rotWithShape="1">
+          <a:blip r:embed="rId3"/>
+          <a:stretch>
+            <a:fillRect/>
+          </a:stretch>
+        </p:blipFill>
+        <p:spPr>
+          <a:xfrm>
+            <a:off x="3585274" y="3627658"/>
+            <a:ext cx="4803150" cy="2825678"/>
+          </a:xfrm>
+          <a:prstGeom prst="rect">
+            <a:avLst/>
+          </a:prstGeom>
+        </p:spPr>
+      </p:pic>
+      <p:pic>
+        <p:nvPicPr>
+          <p:cNvPr id="8" name=""/>
+          <p:cNvPicPr>
+            <a:picLocks noChangeAspect="1"/>
+          </p:cNvPicPr>
+          <p:nvPr/>
+        </p:nvPicPr>
+        <p:blipFill rotWithShape="1">
+          <a:blip r:embed="rId4"/>
+          <a:stretch>
+            <a:fillRect/>
+          </a:stretch>
+        </p:blipFill>
+        <p:spPr>
+          <a:xfrm>
+            <a:off x="323528" y="114209"/>
+            <a:ext cx="7056784" cy="1087941"/>
+          </a:xfrm>
+          <a:prstGeom prst="rect">
+            <a:avLst/>
+          </a:prstGeom>
+        </p:spPr>
+      </p:pic>
+    </p:spTree>
+  </p:cSld>
+  <p:clrMapOvr>
+    <a:masterClrMapping/>
+  </p:clrMapOvr>
+  <mc:AlternateContent xmlns:mc="http://schemas.openxmlformats.org/markup-compatibility/2006">
+    <mc:Choice xmlns:p14="http://schemas.microsoft.com/office/powerpoint/2010/main" Requires="p14">
+      <p:transition xmlns:mc="http://schemas.openxmlformats.org/markup-compatibility/2006" xmlns:p14="http://schemas.microsoft.com/office/powerpoint/2010/main" mc:Ignorable="p14" p14:dur="500"/>
+    </mc:Choice>
+    <mc:Fallback>
+      <p:transition/>
+    </mc:Fallback>
+  </mc:AlternateContent>
+</p:sld>
+</file>
+
+<file path=ppt/slides/slide24.xml><?xml version="1.0" encoding="utf-8"?>
+<p:sld xmlns:a="http://schemas.openxmlformats.org/drawingml/2006/main" xmlns:r="http://schemas.openxmlformats.org/officeDocument/2006/relationships" xmlns:p="http://schemas.openxmlformats.org/presentationml/2006/main">
+  <p:cSld>
+    <p:spTree>
+      <p:nvGrpSpPr>
+        <p:cNvPr id="1" name="">
+          <a:extLst>
+            <a:ext uri="{FF2B5EF4-FFF2-40B4-BE49-F238E27FC236}">
+              <a16:creationId xmlns:a16="http://schemas.microsoft.com/office/drawing/2014/main" id="{BB2182D6-7C3A-1450-0957-0736228992F8}"/>
+            </a:ext>
+          </a:extLst>
+        </p:cNvPr>
+        <p:cNvGrpSpPr/>
+        <p:nvPr/>
+      </p:nvGrpSpPr>
+      <p:grpSpPr>
+        <a:xfrm>
+          <a:off x="0" y="0"/>
+          <a:ext cx="0" cy="0"/>
+          <a:chOff x="0" y="0"/>
+          <a:chExt cx="0" cy="0"/>
+        </a:xfrm>
+      </p:grpSpPr>
+      <p:sp>
+        <p:nvSpPr>
+          <p:cNvPr id="2" name="제목 1">
+            <a:extLst>
+              <a:ext uri="{FF2B5EF4-FFF2-40B4-BE49-F238E27FC236}">
+                <a16:creationId xmlns:a16="http://schemas.microsoft.com/office/drawing/2014/main" id="{00FC0AAC-B616-D4EC-909C-ECC3F2A8B843}"/>
+              </a:ext>
+            </a:extLst>
+          </p:cNvPr>
+          <p:cNvSpPr>
+            <a:spLocks noGrp="1"/>
+          </p:cNvSpPr>
+          <p:nvPr>
+            <p:ph type="title"/>
+          </p:nvPr>
+        </p:nvSpPr>
+        <p:spPr>
+          <a:xfrm>
+            <a:off x="0" y="274638"/>
+            <a:ext cx="9144000" cy="868346"/>
+          </a:xfrm>
+        </p:spPr>
+        <p:txBody>
+          <a:bodyPr/>
+          <a:lstStyle/>
+          <a:p>
+            <a:r>
+              <a:rPr lang="en-US" altLang="ko-KR" sz="2800" dirty="0"/>
+              <a:t>9. </a:t>
+            </a:r>
+            <a:r>
+              <a:rPr lang="ko-KR" altLang="en-US" sz="2800" dirty="0"/>
+              <a:t>가장 큰 증가하는 부분 수열 </a:t>
+            </a:r>
+            <a:r>
+              <a:rPr lang="en-US" altLang="ko-KR" sz="2800" dirty="0"/>
+              <a:t>(</a:t>
+            </a:r>
+            <a:r>
+              <a:rPr lang="en-US" altLang="ko-KR" sz="2800" dirty="0" err="1"/>
+              <a:t>TUKorea</a:t>
+            </a:r>
+            <a:r>
+              <a:rPr lang="en-US" altLang="ko-KR" sz="2800" dirty="0"/>
+              <a:t>,</a:t>
+            </a:r>
+            <a:r>
+              <a:rPr lang="ko-KR" altLang="en-US" sz="2800" dirty="0"/>
+              <a:t>백준</a:t>
+            </a:r>
+            <a:r>
+              <a:rPr lang="en-US" altLang="ko-KR" sz="2800" dirty="0"/>
+              <a:t>11055,DP)</a:t>
+            </a:r>
+            <a:r>
+              <a:rPr lang="en-US" altLang="ko-KR" sz="2400" dirty="0"/>
+              <a:t> </a:t>
+            </a:r>
+            <a:br>
+              <a:rPr lang="en-US" altLang="ko-KR" sz="2400" dirty="0"/>
+            </a:br>
+            <a:r>
+              <a:rPr lang="en-US" altLang="ko-KR" sz="1800" dirty="0"/>
+              <a:t>http://210.93.60.51/problem/0185</a:t>
+            </a:r>
+            <a:br>
+              <a:rPr lang="en-US" altLang="ko-KR" sz="1800" dirty="0"/>
+            </a:br>
+            <a:r>
+              <a:rPr lang="en-US" altLang="ko-KR" sz="1800" dirty="0"/>
+              <a:t>https://www.acmicpc.net/problem/11055</a:t>
+            </a:r>
+            <a:endParaRPr lang="ko-KR" altLang="en-US" sz="1800" dirty="0"/>
+          </a:p>
+        </p:txBody>
+      </p:sp>
+      <p:sp>
+        <p:nvSpPr>
+          <p:cNvPr id="5" name="슬라이드 번호 개체 틀 4">
+            <a:extLst>
+              <a:ext uri="{FF2B5EF4-FFF2-40B4-BE49-F238E27FC236}">
+                <a16:creationId xmlns:a16="http://schemas.microsoft.com/office/drawing/2014/main" id="{81099AAD-C6EA-CB4B-F77E-8434C7D5EADC}"/>
+              </a:ext>
+            </a:extLst>
+          </p:cNvPr>
+          <p:cNvSpPr>
+            <a:spLocks noGrp="1"/>
+          </p:cNvSpPr>
+          <p:nvPr>
+            <p:ph type="sldNum" sz="quarter" idx="12"/>
+          </p:nvPr>
+        </p:nvSpPr>
+        <p:spPr/>
+        <p:txBody>
+          <a:bodyPr/>
+          <a:lstStyle/>
+          <a:p>
+            <a:pPr>
+              <a:defRPr/>
+            </a:pPr>
+            <a:fld id="{A268DA64-E15D-4814-A1DA-86D92D550423}" type="slidenum">
+              <a:rPr lang="ko-KR" altLang="en-US" smtClean="0"/>
+              <a:pPr>
+                <a:defRPr/>
+              </a:pPr>
+              <a:t>16</a:t>
+            </a:fld>
+            <a:endParaRPr lang="ko-KR" altLang="en-US" dirty="0"/>
+          </a:p>
+        </p:txBody>
+      </p:sp>
+      <p:sp>
+        <p:nvSpPr>
+          <p:cNvPr id="3" name="내용 개체 틀 2">
+            <a:extLst>
+              <a:ext uri="{FF2B5EF4-FFF2-40B4-BE49-F238E27FC236}">
+                <a16:creationId xmlns:a16="http://schemas.microsoft.com/office/drawing/2014/main" id="{858C86E8-5349-F7B3-AFB6-B10A83FC024F}"/>
+              </a:ext>
+            </a:extLst>
+          </p:cNvPr>
+          <p:cNvSpPr>
+            <a:spLocks noGrp="1"/>
+          </p:cNvSpPr>
+          <p:nvPr>
+            <p:ph idx="1"/>
+          </p:nvPr>
+        </p:nvSpPr>
+        <p:spPr>
+          <a:xfrm>
+            <a:off x="457200" y="1340768"/>
+            <a:ext cx="8229600" cy="4785395"/>
+          </a:xfrm>
+        </p:spPr>
+        <p:txBody>
+          <a:bodyPr/>
+          <a:lstStyle/>
+          <a:p>
+            <a:pPr algn="just"/>
+            <a:r>
+              <a:rPr lang="ko-KR" altLang="en-US" sz="1800" dirty="0">
+                <a:latin typeface="Open Sans" panose="020F0502020204030204" pitchFamily="34" charset="0"/>
+              </a:rPr>
+              <a:t>수열 </a:t>
+            </a:r>
+            <a:r>
+              <a:rPr lang="en-US" altLang="ko-KR" sz="1800" dirty="0">
+                <a:latin typeface="Open Sans" panose="020F0502020204030204" pitchFamily="34" charset="0"/>
+              </a:rPr>
+              <a:t>A</a:t>
+            </a:r>
+            <a:r>
+              <a:rPr lang="ko-KR" altLang="en-US" sz="1800" dirty="0">
+                <a:latin typeface="Open Sans" panose="020F0502020204030204" pitchFamily="34" charset="0"/>
+              </a:rPr>
+              <a:t>가 주어졌을 때</a:t>
+            </a:r>
+            <a:r>
+              <a:rPr lang="en-US" altLang="ko-KR" sz="1800" dirty="0">
+                <a:latin typeface="Open Sans" panose="020F0502020204030204" pitchFamily="34" charset="0"/>
+              </a:rPr>
+              <a:t>, </a:t>
+            </a:r>
+            <a:r>
+              <a:rPr lang="ko-KR" altLang="en-US" sz="1800" dirty="0">
+                <a:latin typeface="Open Sans" panose="020F0502020204030204" pitchFamily="34" charset="0"/>
+              </a:rPr>
+              <a:t>그 </a:t>
+            </a:r>
+            <a:r>
+              <a:rPr lang="ko-KR" altLang="en-US" sz="1800" b="1" dirty="0">
+                <a:latin typeface="Open Sans" panose="020F0502020204030204" pitchFamily="34" charset="0"/>
+              </a:rPr>
+              <a:t>수열의 증가하는 부분 수열 중에서 합이 가장 큰 것을 구하는 프로그램을 작성하시오</a:t>
+            </a:r>
+            <a:r>
+              <a:rPr lang="en-US" altLang="ko-KR" sz="1800" b="1" dirty="0">
+                <a:latin typeface="Open Sans" panose="020F0502020204030204" pitchFamily="34" charset="0"/>
+              </a:rPr>
+              <a:t>.</a:t>
+            </a:r>
+          </a:p>
+          <a:p>
+            <a:pPr algn="just"/>
+            <a:endParaRPr lang="en-US" altLang="ko-KR" sz="1800" dirty="0">
+              <a:latin typeface="Open Sans" panose="020F0502020204030204" pitchFamily="34" charset="0"/>
+            </a:endParaRPr>
+          </a:p>
+          <a:p>
+            <a:pPr algn="just"/>
+            <a:r>
+              <a:rPr lang="ko-KR" altLang="en-US" sz="1800" dirty="0">
+                <a:latin typeface="Open Sans" panose="020F0502020204030204" pitchFamily="34" charset="0"/>
+              </a:rPr>
+              <a:t>예를 들어</a:t>
+            </a:r>
+            <a:r>
+              <a:rPr lang="en-US" altLang="ko-KR" sz="1800" dirty="0">
+                <a:latin typeface="Open Sans" panose="020F0502020204030204" pitchFamily="34" charset="0"/>
+              </a:rPr>
+              <a:t>, </a:t>
+            </a:r>
+            <a:r>
+              <a:rPr lang="ko-KR" altLang="en-US" sz="1800" dirty="0">
+                <a:latin typeface="Open Sans" panose="020F0502020204030204" pitchFamily="34" charset="0"/>
+              </a:rPr>
+              <a:t>수열 </a:t>
+            </a:r>
+            <a:r>
+              <a:rPr lang="en-US" altLang="ko-KR" sz="1800" dirty="0">
+                <a:latin typeface="Open Sans" panose="020F0502020204030204" pitchFamily="34" charset="0"/>
+              </a:rPr>
+              <a:t>A = {1, 100, 2, 50, 60, 3, 5, 6, 7, 8} </a:t>
+            </a:r>
+            <a:r>
+              <a:rPr lang="ko-KR" altLang="en-US" sz="1800" dirty="0">
+                <a:latin typeface="Open Sans" panose="020F0502020204030204" pitchFamily="34" charset="0"/>
+              </a:rPr>
+              <a:t>인 경우에 합이 가장 큰 증가하는 부분 수열은 </a:t>
+            </a:r>
+            <a:r>
+              <a:rPr lang="en-US" altLang="ko-KR" sz="1800" dirty="0">
+                <a:latin typeface="Open Sans" panose="020F0502020204030204" pitchFamily="34" charset="0"/>
+              </a:rPr>
+              <a:t>A = {</a:t>
+            </a:r>
+            <a:r>
+              <a:rPr lang="en-US" altLang="ko-KR" sz="1800" b="1" dirty="0">
+                <a:solidFill>
+                  <a:srgbClr val="0000FF"/>
+                </a:solidFill>
+                <a:latin typeface="Open Sans" panose="020F0502020204030204" pitchFamily="34" charset="0"/>
+              </a:rPr>
+              <a:t>1</a:t>
+            </a:r>
+            <a:r>
+              <a:rPr lang="en-US" altLang="ko-KR" sz="1800" dirty="0">
+                <a:latin typeface="Open Sans" panose="020F0502020204030204" pitchFamily="34" charset="0"/>
+              </a:rPr>
+              <a:t>, 100, </a:t>
+            </a:r>
+            <a:r>
+              <a:rPr lang="en-US" altLang="ko-KR" sz="1800" b="1" dirty="0">
+                <a:solidFill>
+                  <a:srgbClr val="0000FF"/>
+                </a:solidFill>
+                <a:latin typeface="Open Sans" panose="020F0502020204030204" pitchFamily="34" charset="0"/>
+              </a:rPr>
+              <a:t>2</a:t>
+            </a:r>
+            <a:r>
+              <a:rPr lang="en-US" altLang="ko-KR" sz="1800" dirty="0">
+                <a:latin typeface="Open Sans" panose="020F0502020204030204" pitchFamily="34" charset="0"/>
+              </a:rPr>
+              <a:t>, </a:t>
+            </a:r>
+            <a:r>
+              <a:rPr lang="en-US" altLang="ko-KR" sz="1800" b="1" dirty="0">
+                <a:solidFill>
+                  <a:srgbClr val="0000FF"/>
+                </a:solidFill>
+                <a:latin typeface="Open Sans" panose="020F0502020204030204" pitchFamily="34" charset="0"/>
+              </a:rPr>
+              <a:t>50, 60, </a:t>
+            </a:r>
+            <a:r>
+              <a:rPr lang="en-US" altLang="ko-KR" sz="1800" dirty="0">
+                <a:latin typeface="Open Sans" panose="020F0502020204030204" pitchFamily="34" charset="0"/>
+              </a:rPr>
+              <a:t>3, 5, 6, 7, 8} </a:t>
+            </a:r>
+            <a:r>
+              <a:rPr lang="ko-KR" altLang="en-US" sz="1800" dirty="0">
+                <a:latin typeface="Open Sans" panose="020F0502020204030204" pitchFamily="34" charset="0"/>
+              </a:rPr>
+              <a:t>이고</a:t>
+            </a:r>
+            <a:r>
+              <a:rPr lang="en-US" altLang="ko-KR" sz="1800" dirty="0">
+                <a:latin typeface="Open Sans" panose="020F0502020204030204" pitchFamily="34" charset="0"/>
+              </a:rPr>
+              <a:t>, </a:t>
+            </a:r>
+            <a:r>
+              <a:rPr lang="ko-KR" altLang="en-US" sz="1800" dirty="0">
+                <a:latin typeface="Open Sans" panose="020F0502020204030204" pitchFamily="34" charset="0"/>
+              </a:rPr>
+              <a:t>합은 </a:t>
+            </a:r>
+            <a:r>
+              <a:rPr lang="en-US" altLang="ko-KR" sz="1800" b="1" dirty="0">
+                <a:solidFill>
+                  <a:srgbClr val="0000FF"/>
+                </a:solidFill>
+                <a:latin typeface="Open Sans" panose="020F0502020204030204" pitchFamily="34" charset="0"/>
+              </a:rPr>
+              <a:t>113</a:t>
+            </a:r>
+            <a:r>
+              <a:rPr lang="ko-KR" altLang="en-US" sz="1800" dirty="0">
+                <a:latin typeface="Open Sans" panose="020F0502020204030204" pitchFamily="34" charset="0"/>
+              </a:rPr>
+              <a:t>이다</a:t>
+            </a:r>
+            <a:r>
+              <a:rPr lang="en-US" altLang="ko-KR" sz="1800" dirty="0">
+                <a:latin typeface="Open Sans" panose="020F0502020204030204" pitchFamily="34" charset="0"/>
+              </a:rPr>
+              <a:t>.</a:t>
+            </a:r>
+          </a:p>
+          <a:p>
+            <a:pPr algn="just"/>
+            <a:endParaRPr lang="en-US" altLang="ko-KR" sz="1800" dirty="0">
+              <a:latin typeface="Open Sans" panose="020F0502020204030204" pitchFamily="34" charset="0"/>
+            </a:endParaRPr>
+          </a:p>
+        </p:txBody>
+      </p:sp>
+      <p:pic>
+        <p:nvPicPr>
+          <p:cNvPr id="6" name="그림 5"/>
+          <p:cNvPicPr>
+            <a:picLocks noChangeAspect="1"/>
+          </p:cNvPicPr>
+          <p:nvPr/>
+        </p:nvPicPr>
+        <p:blipFill>
+          <a:blip r:embed="rId3"/>
+          <a:stretch>
+            <a:fillRect/>
+          </a:stretch>
+        </p:blipFill>
+        <p:spPr>
+          <a:xfrm>
+            <a:off x="611560" y="3429000"/>
+            <a:ext cx="7711777" cy="1640976"/>
+          </a:xfrm>
+          <a:prstGeom prst="rect">
+            <a:avLst/>
+          </a:prstGeom>
+          <a:ln>
+            <a:solidFill>
+              <a:schemeClr val="tx1"/>
+            </a:solidFill>
+          </a:ln>
+        </p:spPr>
+      </p:pic>
+    </p:spTree>
+    <p:extLst>
+      <p:ext uri="{BB962C8B-B14F-4D97-AF65-F5344CB8AC3E}">
+        <p14:creationId xmlns:p14="http://schemas.microsoft.com/office/powerpoint/2010/main" val="1747533405"/>
+      </p:ext>
+    </p:extLst>
+  </p:cSld>
+  <p:clrMapOvr>
+    <a:masterClrMapping/>
+  </p:clrMapOvr>
+</p:sld>
+</file>
+
+<file path=ppt/slides/slide25.xml><?xml version="1.0" encoding="utf-8"?>
+<p:sld xmlns:a="http://schemas.openxmlformats.org/drawingml/2006/main" xmlns:r="http://schemas.openxmlformats.org/officeDocument/2006/relationships" xmlns:p="http://schemas.openxmlformats.org/presentationml/2006/main">
+  <p:cSld>
+    <p:spTree>
+      <p:nvGrpSpPr>
+        <p:cNvPr id="1" name="">
+          <a:extLst>
+            <a:ext uri="{FF2B5EF4-FFF2-40B4-BE49-F238E27FC236}">
+              <a16:creationId xmlns:a16="http://schemas.microsoft.com/office/drawing/2014/main" id="{038F8DE6-BFC4-7515-24A8-A8AC87EFB205}"/>
+            </a:ext>
+          </a:extLst>
+        </p:cNvPr>
+        <p:cNvGrpSpPr/>
+        <p:nvPr/>
+      </p:nvGrpSpPr>
+      <p:grpSpPr>
+        <a:xfrm>
+          <a:off x="0" y="0"/>
+          <a:ext cx="0" cy="0"/>
+          <a:chOff x="0" y="0"/>
+          <a:chExt cx="0" cy="0"/>
+        </a:xfrm>
+      </p:grpSpPr>
+      <p:sp>
+        <p:nvSpPr>
+          <p:cNvPr id="2" name="제목 1">
+            <a:extLst>
+              <a:ext uri="{FF2B5EF4-FFF2-40B4-BE49-F238E27FC236}">
+                <a16:creationId xmlns:a16="http://schemas.microsoft.com/office/drawing/2014/main" id="{DF63A519-F783-50A8-ED79-D702E664470C}"/>
+              </a:ext>
+            </a:extLst>
+          </p:cNvPr>
+          <p:cNvSpPr>
+            <a:spLocks noGrp="1"/>
+          </p:cNvSpPr>
+          <p:nvPr>
+            <p:ph type="title"/>
+          </p:nvPr>
+        </p:nvSpPr>
+        <p:spPr>
+          <a:xfrm>
+            <a:off x="0" y="274638"/>
+            <a:ext cx="9144000" cy="868346"/>
+          </a:xfrm>
+        </p:spPr>
+        <p:txBody>
+          <a:bodyPr/>
+          <a:lstStyle/>
+          <a:p>
+            <a:r>
+              <a:rPr lang="en-US" altLang="ko-KR" sz="2800" dirty="0"/>
+              <a:t>10. RGB</a:t>
+            </a:r>
+            <a:r>
+              <a:rPr lang="ko-KR" altLang="en-US" sz="2800" dirty="0"/>
+              <a:t>거리 </a:t>
+            </a:r>
+            <a:r>
+              <a:rPr lang="en-US" altLang="ko-KR" sz="2800" dirty="0"/>
+              <a:t>(</a:t>
+            </a:r>
+            <a:r>
+              <a:rPr lang="en-US" altLang="ko-KR" sz="2800" dirty="0" err="1"/>
+              <a:t>TUKorea</a:t>
+            </a:r>
+            <a:r>
+              <a:rPr lang="en-US" altLang="ko-KR" sz="2800" dirty="0"/>
+              <a:t>,</a:t>
+            </a:r>
+            <a:r>
+              <a:rPr lang="ko-KR" altLang="en-US" sz="2800" dirty="0"/>
+              <a:t>백준</a:t>
+            </a:r>
+            <a:r>
+              <a:rPr lang="en-US" altLang="ko-KR" sz="2800" dirty="0"/>
+              <a:t>1149, DP)</a:t>
+            </a:r>
+            <a:r>
+              <a:rPr lang="en-US" altLang="ko-KR" sz="2400" dirty="0"/>
+              <a:t> </a:t>
+            </a:r>
+            <a:br>
+              <a:rPr lang="en-US" altLang="ko-KR" sz="2400" dirty="0"/>
+            </a:br>
+            <a:r>
+              <a:rPr lang="en-US" altLang="ko-KR" sz="1800" dirty="0"/>
+              <a:t>http://210.93.60.51/problem/0141</a:t>
+            </a:r>
+            <a:br>
+              <a:rPr lang="en-US" altLang="ko-KR" sz="1800" dirty="0"/>
+            </a:br>
+            <a:r>
+              <a:rPr lang="en-US" altLang="ko-KR" sz="1800" dirty="0"/>
+              <a:t>https://www.acmicpc.net/problem/1149</a:t>
+            </a:r>
+            <a:endParaRPr lang="ko-KR" altLang="en-US" sz="1800" dirty="0"/>
+          </a:p>
+        </p:txBody>
+      </p:sp>
+      <p:sp>
+        <p:nvSpPr>
+          <p:cNvPr id="5" name="슬라이드 번호 개체 틀 4">
+            <a:extLst>
+              <a:ext uri="{FF2B5EF4-FFF2-40B4-BE49-F238E27FC236}">
+                <a16:creationId xmlns:a16="http://schemas.microsoft.com/office/drawing/2014/main" id="{DDD5EF35-03CF-3E4F-F1EE-1D0130E91A8E}"/>
+              </a:ext>
+            </a:extLst>
+          </p:cNvPr>
+          <p:cNvSpPr>
+            <a:spLocks noGrp="1"/>
+          </p:cNvSpPr>
+          <p:nvPr>
+            <p:ph type="sldNum" sz="quarter" idx="12"/>
+          </p:nvPr>
+        </p:nvSpPr>
+        <p:spPr/>
+        <p:txBody>
+          <a:bodyPr/>
+          <a:lstStyle/>
+          <a:p>
+            <a:pPr>
+              <a:defRPr/>
+            </a:pPr>
+            <a:fld id="{A268DA64-E15D-4814-A1DA-86D92D550423}" type="slidenum">
+              <a:rPr lang="ko-KR" altLang="en-US" smtClean="0"/>
+              <a:pPr>
+                <a:defRPr/>
+              </a:pPr>
+              <a:t>17</a:t>
+            </a:fld>
+            <a:endParaRPr lang="ko-KR" altLang="en-US" dirty="0"/>
+          </a:p>
+        </p:txBody>
+      </p:sp>
+      <p:sp>
+        <p:nvSpPr>
+          <p:cNvPr id="3" name="내용 개체 틀 2">
+            <a:extLst>
+              <a:ext uri="{FF2B5EF4-FFF2-40B4-BE49-F238E27FC236}">
+                <a16:creationId xmlns:a16="http://schemas.microsoft.com/office/drawing/2014/main" id="{B19E3D03-50DE-7CB9-0A1E-409973ECD8C9}"/>
+              </a:ext>
+            </a:extLst>
+          </p:cNvPr>
+          <p:cNvSpPr>
+            <a:spLocks noGrp="1"/>
+          </p:cNvSpPr>
+          <p:nvPr>
+            <p:ph idx="1"/>
+          </p:nvPr>
+        </p:nvSpPr>
+        <p:spPr>
+          <a:xfrm>
+            <a:off x="457200" y="1340768"/>
+            <a:ext cx="8229600" cy="4785395"/>
+          </a:xfrm>
+        </p:spPr>
+        <p:txBody>
+          <a:bodyPr/>
+          <a:lstStyle/>
+          <a:p>
+            <a:pPr algn="just"/>
+            <a:r>
+              <a:rPr lang="en-US" altLang="ko-KR" sz="1800" dirty="0">
+                <a:latin typeface="Open Sans" panose="020F0502020204030204" pitchFamily="34" charset="0"/>
+              </a:rPr>
+              <a:t>RGB</a:t>
+            </a:r>
+            <a:r>
+              <a:rPr lang="ko-KR" altLang="en-US" sz="1800" dirty="0">
+                <a:latin typeface="Open Sans" panose="020F0502020204030204" pitchFamily="34" charset="0"/>
+              </a:rPr>
+              <a:t>거리에는 집이 </a:t>
+            </a:r>
+            <a:r>
+              <a:rPr lang="en-US" altLang="ko-KR" sz="1800" dirty="0">
+                <a:latin typeface="Open Sans" panose="020F0502020204030204" pitchFamily="34" charset="0"/>
+              </a:rPr>
+              <a:t>1</a:t>
+            </a:r>
+            <a:r>
+              <a:rPr lang="ko-KR" altLang="en-US" sz="1800" dirty="0">
+                <a:latin typeface="Open Sans" panose="020F0502020204030204" pitchFamily="34" charset="0"/>
+              </a:rPr>
+              <a:t>번 집부터 </a:t>
+            </a:r>
+            <a:r>
+              <a:rPr lang="en-US" altLang="ko-KR" sz="1800" dirty="0">
+                <a:latin typeface="Open Sans" panose="020F0502020204030204" pitchFamily="34" charset="0"/>
+              </a:rPr>
+              <a:t>N</a:t>
+            </a:r>
+            <a:r>
+              <a:rPr lang="ko-KR" altLang="en-US" sz="1800" dirty="0">
+                <a:latin typeface="Open Sans" panose="020F0502020204030204" pitchFamily="34" charset="0"/>
+              </a:rPr>
+              <a:t>번 집이 순서대로 있다</a:t>
+            </a:r>
+            <a:r>
+              <a:rPr lang="en-US" altLang="ko-KR" sz="1800" dirty="0">
+                <a:latin typeface="Open Sans" panose="020F0502020204030204" pitchFamily="34" charset="0"/>
+              </a:rPr>
+              <a:t>.</a:t>
+            </a:r>
+          </a:p>
+          <a:p>
+            <a:pPr algn="just"/>
+            <a:endParaRPr lang="en-US" altLang="ko-KR" sz="1800" dirty="0">
+              <a:latin typeface="Open Sans" panose="020F0502020204030204" pitchFamily="34" charset="0"/>
+            </a:endParaRPr>
+          </a:p>
+          <a:p>
+            <a:pPr algn="just"/>
+            <a:r>
+              <a:rPr lang="ko-KR" altLang="en-US" sz="1800" dirty="0">
+                <a:latin typeface="Open Sans" panose="020F0502020204030204" pitchFamily="34" charset="0"/>
+              </a:rPr>
+              <a:t>집은 빨강</a:t>
+            </a:r>
+            <a:r>
+              <a:rPr lang="en-US" altLang="ko-KR" sz="1800" dirty="0">
+                <a:latin typeface="Open Sans" panose="020F0502020204030204" pitchFamily="34" charset="0"/>
+              </a:rPr>
+              <a:t>, </a:t>
+            </a:r>
+            <a:r>
+              <a:rPr lang="ko-KR" altLang="en-US" sz="1800" dirty="0">
+                <a:latin typeface="Open Sans" panose="020F0502020204030204" pitchFamily="34" charset="0"/>
+              </a:rPr>
+              <a:t>초록</a:t>
+            </a:r>
+            <a:r>
+              <a:rPr lang="en-US" altLang="ko-KR" sz="1800" dirty="0">
+                <a:latin typeface="Open Sans" panose="020F0502020204030204" pitchFamily="34" charset="0"/>
+              </a:rPr>
+              <a:t>, </a:t>
+            </a:r>
+            <a:r>
+              <a:rPr lang="ko-KR" altLang="en-US" sz="1800" dirty="0">
+                <a:latin typeface="Open Sans" panose="020F0502020204030204" pitchFamily="34" charset="0"/>
+              </a:rPr>
+              <a:t>파랑 중 하나의 색으로 칠해야 한다</a:t>
+            </a:r>
+            <a:r>
+              <a:rPr lang="en-US" altLang="ko-KR" sz="1800" dirty="0">
+                <a:latin typeface="Open Sans" panose="020F0502020204030204" pitchFamily="34" charset="0"/>
+              </a:rPr>
+              <a:t>. </a:t>
+            </a:r>
+            <a:r>
+              <a:rPr lang="ko-KR" altLang="en-US" sz="1800" dirty="0">
+                <a:latin typeface="Open Sans" panose="020F0502020204030204" pitchFamily="34" charset="0"/>
+              </a:rPr>
+              <a:t>아래 규칙을 만족하면서 모든 집을 칠하는 비용의 최솟값을 구해보자</a:t>
+            </a:r>
+            <a:r>
+              <a:rPr lang="en-US" altLang="ko-KR" sz="1800" dirty="0">
+                <a:latin typeface="Open Sans" panose="020F0502020204030204" pitchFamily="34" charset="0"/>
+              </a:rPr>
+              <a:t>.</a:t>
+            </a:r>
+          </a:p>
+          <a:p>
+            <a:pPr algn="just"/>
+            <a:endParaRPr lang="en-US" altLang="ko-KR" sz="1800" dirty="0">
+              <a:latin typeface="Open Sans" panose="020F0502020204030204" pitchFamily="34" charset="0"/>
+            </a:endParaRPr>
+          </a:p>
+          <a:p>
+            <a:pPr algn="just"/>
+            <a:r>
+              <a:rPr lang="en-US" altLang="ko-KR" sz="1800" b="1" dirty="0" err="1">
+                <a:latin typeface="Open Sans" panose="020F0502020204030204" pitchFamily="34" charset="0"/>
+              </a:rPr>
+              <a:t>i</a:t>
+            </a:r>
+            <a:r>
+              <a:rPr lang="en-US" altLang="ko-KR" sz="1800" b="1" dirty="0">
+                <a:latin typeface="Open Sans" panose="020F0502020204030204" pitchFamily="34" charset="0"/>
+              </a:rPr>
+              <a:t>(2 ≤ </a:t>
+            </a:r>
+            <a:r>
+              <a:rPr lang="en-US" altLang="ko-KR" sz="1800" b="1" dirty="0" err="1">
+                <a:latin typeface="Open Sans" panose="020F0502020204030204" pitchFamily="34" charset="0"/>
+              </a:rPr>
+              <a:t>i</a:t>
+            </a:r>
+            <a:r>
+              <a:rPr lang="en-US" altLang="ko-KR" sz="1800" b="1" dirty="0">
+                <a:latin typeface="Open Sans" panose="020F0502020204030204" pitchFamily="34" charset="0"/>
+              </a:rPr>
+              <a:t> ≤ N-1)</a:t>
+            </a:r>
+            <a:r>
+              <a:rPr lang="ko-KR" altLang="en-US" sz="1800" b="1" dirty="0">
+                <a:latin typeface="Open Sans" panose="020F0502020204030204" pitchFamily="34" charset="0"/>
+              </a:rPr>
+              <a:t>번 집의 색은 </a:t>
+            </a:r>
+            <a:r>
+              <a:rPr lang="en-US" altLang="ko-KR" sz="1800" b="1" dirty="0">
+                <a:latin typeface="Open Sans" panose="020F0502020204030204" pitchFamily="34" charset="0"/>
+              </a:rPr>
+              <a:t>i-1</a:t>
+            </a:r>
+            <a:r>
+              <a:rPr lang="ko-KR" altLang="en-US" sz="1800" b="1" dirty="0">
+                <a:latin typeface="Open Sans" panose="020F0502020204030204" pitchFamily="34" charset="0"/>
+              </a:rPr>
+              <a:t>번</a:t>
+            </a:r>
+            <a:r>
+              <a:rPr lang="en-US" altLang="ko-KR" sz="1800" b="1" dirty="0">
+                <a:latin typeface="Open Sans" panose="020F0502020204030204" pitchFamily="34" charset="0"/>
+              </a:rPr>
+              <a:t>, i+1</a:t>
+            </a:r>
+            <a:r>
+              <a:rPr lang="ko-KR" altLang="en-US" sz="1800" b="1" dirty="0">
+                <a:latin typeface="Open Sans" panose="020F0502020204030204" pitchFamily="34" charset="0"/>
+              </a:rPr>
+              <a:t>번 집의 색과 같지 않아야 한다</a:t>
+            </a:r>
+            <a:r>
+              <a:rPr lang="en-US" altLang="ko-KR" sz="1800" b="1" dirty="0">
+                <a:latin typeface="Open Sans" panose="020F0502020204030204" pitchFamily="34" charset="0"/>
+              </a:rPr>
+              <a:t>.</a:t>
+            </a:r>
+          </a:p>
+          <a:p>
+            <a:pPr algn="just"/>
+            <a:endParaRPr lang="en-US" altLang="ko-KR" sz="1800" b="1" dirty="0">
+              <a:latin typeface="Open Sans" panose="020F0502020204030204" pitchFamily="34" charset="0"/>
+            </a:endParaRPr>
+          </a:p>
+          <a:p>
+            <a:pPr algn="just"/>
+            <a:r>
+              <a:rPr lang="ko-KR" altLang="en-US" sz="1800" dirty="0">
+                <a:latin typeface="Open Sans" panose="020F0502020204030204" pitchFamily="34" charset="0"/>
+              </a:rPr>
+              <a:t>첫째 줄에 집의 수 </a:t>
+            </a:r>
+            <a:r>
+              <a:rPr lang="en-US" altLang="ko-KR" sz="1800" dirty="0">
+                <a:latin typeface="Open Sans" panose="020F0502020204030204" pitchFamily="34" charset="0"/>
+              </a:rPr>
+              <a:t>N(2 ≤ N ≤ 1,000)</a:t>
+            </a:r>
+            <a:r>
+              <a:rPr lang="ko-KR" altLang="en-US" sz="1800" dirty="0">
+                <a:latin typeface="Open Sans" panose="020F0502020204030204" pitchFamily="34" charset="0"/>
+              </a:rPr>
+              <a:t>이 주어진다</a:t>
+            </a:r>
+            <a:r>
+              <a:rPr lang="en-US" altLang="ko-KR" sz="1800" dirty="0">
+                <a:latin typeface="Open Sans" panose="020F0502020204030204" pitchFamily="34" charset="0"/>
+              </a:rPr>
+              <a:t>. </a:t>
+            </a:r>
+            <a:r>
+              <a:rPr lang="ko-KR" altLang="en-US" sz="1800" dirty="0">
+                <a:latin typeface="Open Sans" panose="020F0502020204030204" pitchFamily="34" charset="0"/>
+              </a:rPr>
+              <a:t>둘째 줄부터 </a:t>
+            </a:r>
+            <a:r>
+              <a:rPr lang="en-US" altLang="ko-KR" sz="1800" dirty="0">
+                <a:latin typeface="Open Sans" panose="020F0502020204030204" pitchFamily="34" charset="0"/>
+              </a:rPr>
+              <a:t>N</a:t>
+            </a:r>
+            <a:r>
+              <a:rPr lang="ko-KR" altLang="en-US" sz="1800" dirty="0">
+                <a:latin typeface="Open Sans" panose="020F0502020204030204" pitchFamily="34" charset="0"/>
+              </a:rPr>
+              <a:t>개의 줄에는 각 집을 빨강</a:t>
+            </a:r>
+            <a:r>
+              <a:rPr lang="en-US" altLang="ko-KR" sz="1800" dirty="0">
+                <a:latin typeface="Open Sans" panose="020F0502020204030204" pitchFamily="34" charset="0"/>
+              </a:rPr>
+              <a:t>, </a:t>
+            </a:r>
+            <a:r>
+              <a:rPr lang="ko-KR" altLang="en-US" sz="1800" dirty="0">
+                <a:latin typeface="Open Sans" panose="020F0502020204030204" pitchFamily="34" charset="0"/>
+              </a:rPr>
+              <a:t>초록</a:t>
+            </a:r>
+            <a:r>
+              <a:rPr lang="en-US" altLang="ko-KR" sz="1800" dirty="0">
+                <a:latin typeface="Open Sans" panose="020F0502020204030204" pitchFamily="34" charset="0"/>
+              </a:rPr>
+              <a:t>, </a:t>
+            </a:r>
+            <a:r>
+              <a:rPr lang="ko-KR" altLang="en-US" sz="1800" dirty="0">
+                <a:latin typeface="Open Sans" panose="020F0502020204030204" pitchFamily="34" charset="0"/>
+              </a:rPr>
+              <a:t>파랑으로 칠하는 비용이 </a:t>
+            </a:r>
+            <a:r>
+              <a:rPr lang="en-US" altLang="ko-KR" sz="1800" dirty="0">
+                <a:latin typeface="Open Sans" panose="020F0502020204030204" pitchFamily="34" charset="0"/>
+              </a:rPr>
+              <a:t>1</a:t>
+            </a:r>
+            <a:r>
+              <a:rPr lang="ko-KR" altLang="en-US" sz="1800" dirty="0">
+                <a:latin typeface="Open Sans" panose="020F0502020204030204" pitchFamily="34" charset="0"/>
+              </a:rPr>
+              <a:t>번 집부터 한 줄에 하나씩 주어진다</a:t>
+            </a:r>
+            <a:r>
+              <a:rPr lang="en-US" altLang="ko-KR" sz="1800" dirty="0">
+                <a:latin typeface="Open Sans" panose="020F0502020204030204" pitchFamily="34" charset="0"/>
+              </a:rPr>
+              <a:t>.</a:t>
+            </a:r>
+          </a:p>
+          <a:p>
+            <a:pPr marL="0" indent="0" algn="just">
+              <a:buNone/>
+            </a:pPr>
+            <a:endParaRPr lang="en-US" altLang="ko-KR" sz="1800" dirty="0">
+              <a:latin typeface="Open Sans" panose="020F0502020204030204" pitchFamily="34" charset="0"/>
+            </a:endParaRPr>
+          </a:p>
+          <a:p>
+            <a:pPr algn="just"/>
+            <a:endParaRPr lang="en-US" altLang="ko-KR" sz="1800" dirty="0">
+              <a:latin typeface="Open Sans" panose="020F0502020204030204" pitchFamily="34" charset="0"/>
+            </a:endParaRPr>
+          </a:p>
+        </p:txBody>
+      </p:sp>
+      <p:pic>
+        <p:nvPicPr>
+          <p:cNvPr id="7" name="그림 6">
+            <a:extLst>
+              <a:ext uri="{FF2B5EF4-FFF2-40B4-BE49-F238E27FC236}">
+                <a16:creationId xmlns:a16="http://schemas.microsoft.com/office/drawing/2014/main" id="{1D63AAAA-9140-84C1-1554-069F1D551E69}"/>
+              </a:ext>
+            </a:extLst>
+          </p:cNvPr>
+          <p:cNvPicPr>
+            <a:picLocks noChangeAspect="1"/>
+          </p:cNvPicPr>
+          <p:nvPr/>
+        </p:nvPicPr>
+        <p:blipFill>
+          <a:blip r:embed="rId3"/>
+          <a:stretch>
+            <a:fillRect/>
+          </a:stretch>
+        </p:blipFill>
+        <p:spPr>
+          <a:xfrm>
+            <a:off x="1457908" y="4656504"/>
+            <a:ext cx="6228184" cy="1721455"/>
+          </a:xfrm>
+          <a:prstGeom prst="rect">
+            <a:avLst/>
+          </a:prstGeom>
+        </p:spPr>
+      </p:pic>
+    </p:spTree>
+    <p:extLst>
+      <p:ext uri="{BB962C8B-B14F-4D97-AF65-F5344CB8AC3E}">
+        <p14:creationId xmlns:p14="http://schemas.microsoft.com/office/powerpoint/2010/main" val="2862514786"/>
       </p:ext>
     </p:extLst>
   </p:cSld>
@@ -14121,7 +15019,7 @@
 </file>
 
 <file path=ppt/slides/slide7.xml><?xml version="1.0" encoding="utf-8"?>
-<p:sld xmlns:a="http://schemas.openxmlformats.org/drawingml/2006/main" xmlns:r="http://schemas.openxmlformats.org/officeDocument/2006/relationships" xmlns:p="http://schemas.openxmlformats.org/presentationml/2006/main">
+<p:sld xmlns:r="http://schemas.openxmlformats.org/officeDocument/2006/relationships" xmlns:c="http://schemas.openxmlformats.org/drawingml/2006/chart" xmlns:a="http://schemas.openxmlformats.org/drawingml/2006/main" xmlns:dgm="http://schemas.openxmlformats.org/drawingml/2006/diagram" xmlns:dsp="http://schemas.microsoft.com/office/drawing/2008/diagram" xmlns:p="http://schemas.openxmlformats.org/presentationml/2006/main">
   <p:cSld>
     <p:spTree>
       <p:nvGrpSpPr>
@@ -14139,68 +15037,12 @@
       </p:grpSpPr>
       <p:sp>
         <p:nvSpPr>
-          <p:cNvPr id="2" name="제목 1">
-            <a:extLst>
-              <a:ext uri="{FF2B5EF4-FFF2-40B4-BE49-F238E27FC236}">
-                <a16:creationId xmlns:a16="http://schemas.microsoft.com/office/drawing/2014/main" id="{7722EC49-ADBB-6F94-1AC9-C9CE35E33C99}"/>
-              </a:ext>
-            </a:extLst>
-          </p:cNvPr>
-          <p:cNvSpPr>
-            <a:spLocks noGrp="1"/>
-          </p:cNvSpPr>
-          <p:nvPr>
-            <p:ph type="title"/>
-          </p:nvPr>
-        </p:nvSpPr>
-        <p:spPr/>
-        <p:txBody>
-          <a:bodyPr/>
-          <a:lstStyle/>
-          <a:p>
-            <a:endParaRPr lang="ko-KR" altLang="en-US"/>
-          </a:p>
-        </p:txBody>
-      </p:sp>
-      <p:sp>
-        <p:nvSpPr>
-          <p:cNvPr id="3" name="내용 개체 틀 2">
-            <a:extLst>
-              <a:ext uri="{FF2B5EF4-FFF2-40B4-BE49-F238E27FC236}">
-                <a16:creationId xmlns:a16="http://schemas.microsoft.com/office/drawing/2014/main" id="{60B20EB5-B321-1491-CCFE-4CE427C017FE}"/>
-              </a:ext>
-            </a:extLst>
-          </p:cNvPr>
-          <p:cNvSpPr>
-            <a:spLocks noGrp="1"/>
-          </p:cNvSpPr>
-          <p:nvPr>
-            <p:ph idx="1"/>
-          </p:nvPr>
-        </p:nvSpPr>
-        <p:spPr/>
-        <p:txBody>
-          <a:bodyPr/>
-          <a:lstStyle/>
-          <a:p>
-            <a:endParaRPr lang="ko-KR" altLang="en-US"/>
-          </a:p>
-        </p:txBody>
-      </p:sp>
-      <p:sp>
-        <p:nvSpPr>
-          <p:cNvPr id="4" name="날짜 개체 틀 3">
-            <a:extLst>
-              <a:ext uri="{FF2B5EF4-FFF2-40B4-BE49-F238E27FC236}">
-                <a16:creationId xmlns:a16="http://schemas.microsoft.com/office/drawing/2014/main" id="{8C634A47-1E71-8432-EC24-849ECD2F5019}"/>
-              </a:ext>
-            </a:extLst>
-          </p:cNvPr>
-          <p:cNvSpPr>
-            <a:spLocks noGrp="1"/>
-          </p:cNvSpPr>
-          <p:nvPr>
-            <p:ph type="dt" sz="half" idx="10"/>
+          <p:cNvPr id="2" name="제목 1"/>
+          <p:cNvSpPr>
+            <a:spLocks noGrp="1"/>
+          </p:cNvSpPr>
+          <p:nvPr>
+            <p:ph type="title" idx="0"/>
           </p:nvPr>
         </p:nvSpPr>
         <p:spPr/>
@@ -14212,6 +15054,58 @@
               <a:defRPr/>
             </a:pPr>
             <a:r>
+              <a:rPr lang="ko-KR" altLang="en-US"/>
+              <a:t/>
+            </a:r>
+            <a:endParaRPr lang="ko-KR" altLang="en-US"/>
+          </a:p>
+        </p:txBody>
+      </p:sp>
+      <p:sp>
+        <p:nvSpPr>
+          <p:cNvPr id="3" name="내용 개체 틀 2"/>
+          <p:cNvSpPr>
+            <a:spLocks noGrp="1"/>
+          </p:cNvSpPr>
+          <p:nvPr>
+            <p:ph idx="1"/>
+          </p:nvPr>
+        </p:nvSpPr>
+        <p:spPr/>
+        <p:txBody>
+          <a:bodyPr/>
+          <a:lstStyle/>
+          <a:p>
+            <a:pPr>
+              <a:defRPr/>
+            </a:pPr>
+            <a:r>
+              <a:rPr lang="ko-KR" altLang="en-US"/>
+              <a:t/>
+            </a:r>
+            <a:endParaRPr lang="ko-KR" altLang="en-US"/>
+          </a:p>
+        </p:txBody>
+      </p:sp>
+      <p:sp>
+        <p:nvSpPr>
+          <p:cNvPr id="4" name="날짜 개체 틀 3"/>
+          <p:cNvSpPr>
+            <a:spLocks noGrp="1"/>
+          </p:cNvSpPr>
+          <p:nvPr>
+            <p:ph type="dt" sz="half" idx="10"/>
+          </p:nvPr>
+        </p:nvSpPr>
+        <p:spPr/>
+        <p:txBody>
+          <a:bodyPr/>
+          <a:lstStyle/>
+          <a:p>
+            <a:pPr>
+              <a:defRPr/>
+            </a:pPr>
+            <a:r>
               <a:rPr lang="en-US" altLang="ko-KR"/>
               <a:t>2008</a:t>
             </a:r>
@@ -14251,18 +15145,13 @@
               <a:rPr lang="ko-KR" altLang="en-US"/>
               <a:t>김영식</a:t>
             </a:r>
-          </a:p>
-        </p:txBody>
-      </p:sp>
-      <p:sp>
-        <p:nvSpPr>
-          <p:cNvPr id="5" name="슬라이드 번호 개체 틀 4">
-            <a:extLst>
-              <a:ext uri="{FF2B5EF4-FFF2-40B4-BE49-F238E27FC236}">
-                <a16:creationId xmlns:a16="http://schemas.microsoft.com/office/drawing/2014/main" id="{5C87B16B-B4B2-AD40-1B32-DEF64C34B764}"/>
-              </a:ext>
-            </a:extLst>
-          </p:cNvPr>
+            <a:endParaRPr lang="ko-KR" altLang="en-US"/>
+          </a:p>
+        </p:txBody>
+      </p:sp>
+      <p:sp>
+        <p:nvSpPr>
+          <p:cNvPr id="5" name="슬라이드 번호 개체 틀 5"/>
           <p:cNvSpPr>
             <a:spLocks noGrp="1"/>
           </p:cNvSpPr>
@@ -14279,26 +15168,77 @@
               <a:defRPr/>
             </a:pPr>
             <a:fld id="{A268DA64-E15D-4814-A1DA-86D92D550423}" type="slidenum">
-              <a:rPr lang="ko-KR" altLang="en-US" smtClean="0"/>
+              <a:rPr lang="en-US" altLang="en-US"/>
               <a:pPr>
                 <a:defRPr/>
               </a:pPr>
               <a:t>7</a:t>
             </a:fld>
-            <a:endParaRPr lang="ko-KR" altLang="en-US"/>
-          </a:p>
-        </p:txBody>
-      </p:sp>
+            <a:endParaRPr lang="en-US" altLang="en-US"/>
+          </a:p>
+        </p:txBody>
+      </p:sp>
+      <p:pic>
+        <p:nvPicPr>
+          <p:cNvPr id="6" name=""/>
+          <p:cNvPicPr>
+            <a:picLocks noChangeAspect="1"/>
+          </p:cNvPicPr>
+          <p:nvPr/>
+        </p:nvPicPr>
+        <p:blipFill rotWithShape="1">
+          <a:blip r:embed="rId2"/>
+          <a:stretch>
+            <a:fillRect/>
+          </a:stretch>
+        </p:blipFill>
+        <p:spPr>
+          <a:xfrm>
+            <a:off x="315651" y="1249966"/>
+            <a:ext cx="4904420" cy="3187145"/>
+          </a:xfrm>
+          <a:prstGeom prst="rect">
+            <a:avLst/>
+          </a:prstGeom>
+        </p:spPr>
+      </p:pic>
+      <p:pic>
+        <p:nvPicPr>
+          <p:cNvPr id="7" name=""/>
+          <p:cNvPicPr>
+            <a:picLocks noChangeAspect="1"/>
+          </p:cNvPicPr>
+          <p:nvPr/>
+        </p:nvPicPr>
+        <p:blipFill rotWithShape="1">
+          <a:blip r:embed="rId3"/>
+          <a:stretch>
+            <a:fillRect/>
+          </a:stretch>
+        </p:blipFill>
+        <p:spPr>
+          <a:xfrm>
+            <a:off x="4932040" y="346348"/>
+            <a:ext cx="3743220" cy="6165304"/>
+          </a:xfrm>
+          <a:prstGeom prst="rect">
+            <a:avLst/>
+          </a:prstGeom>
+        </p:spPr>
+      </p:pic>
     </p:spTree>
-    <p:extLst>
-      <p:ext uri="{BB962C8B-B14F-4D97-AF65-F5344CB8AC3E}">
-        <p14:creationId xmlns:p14="http://schemas.microsoft.com/office/powerpoint/2010/main" val="2687290974"/>
-      </p:ext>
-    </p:extLst>
   </p:cSld>
   <p:clrMapOvr>
     <a:masterClrMapping/>
   </p:clrMapOvr>
+  <mc:AlternateContent xmlns:mc="http://schemas.openxmlformats.org/markup-compatibility/2006">
+    <mc:Choice xmlns:p14="http://schemas.microsoft.com/office/powerpoint/2010/main" Requires="p14">
+      <p:transition xmlns:mc="http://schemas.openxmlformats.org/markup-compatibility/2006" xmlns:p14="http://schemas.microsoft.com/office/powerpoint/2010/main" mc:Ignorable="p14" p14:dur="500"/>
+    </mc:Choice>
+    <mc:Fallback>
+      <p:transition/>
+    </mc:Fallback>
+  </mc:AlternateContent>
 </p:sld>
 </file>
 
@@ -14466,7 +15406,7 @@
               <a:pPr>
                 <a:defRPr/>
               </a:pPr>
-              <a:t>8</a:t>
+              <a:t>7</a:t>
             </a:fld>
             <a:endParaRPr lang="ko-KR" altLang="en-US"/>
           </a:p>
@@ -14662,7 +15602,7 @@
               <a:pPr>
                 <a:defRPr/>
               </a:pPr>
-              <a:t>9</a:t>
+              <a:t>8</a:t>
             </a:fld>
             <a:endParaRPr lang="ko-KR" altLang="en-US"/>
           </a:p>
@@ -14880,44 +15820,44 @@
 </file>
 
 <file path=ppt/theme/theme1.xml><?xml version="1.0" encoding="utf-8"?>
-<a:theme xmlns:a="http://schemas.openxmlformats.org/drawingml/2006/main" name="Office 테마">
+<a:theme xmlns:r="http://schemas.openxmlformats.org/officeDocument/2006/relationships" xmlns:c="http://schemas.openxmlformats.org/drawingml/2006/chart" xmlns:dgm="http://schemas.openxmlformats.org/drawingml/2006/diagram" xmlns:dsp="http://schemas.microsoft.com/office/drawing/2008/diagram" xmlns:a="http://schemas.openxmlformats.org/drawingml/2006/main" xmlns:pic="http://schemas.openxmlformats.org/drawingml/2006/picture" xmlns:wp="http://schemas.openxmlformats.org/drawingml/2006/wordprocessingDrawing" xmlns:xdr="http://schemas.openxmlformats.org/drawingml/2006/spreadsheetDrawing" xmlns:p="http://schemas.openxmlformats.org/presentationml/2006/main" name="Office 테마">
   <a:themeElements>
     <a:clrScheme name="풍요">
       <a:dk1>
         <a:sysClr val="windowText" lastClr="000000"/>
       </a:dk1>
       <a:lt1>
-        <a:sysClr val="window" lastClr="FFFFFF"/>
+        <a:sysClr val="window" lastClr="ffffff"/>
       </a:lt1>
       <a:dk2>
-        <a:srgbClr val="B13F9A"/>
+        <a:srgbClr val="b13f9a"/>
       </a:dk2>
       <a:lt2>
-        <a:srgbClr val="F4E7ED"/>
+        <a:srgbClr val="f4e7ed"/>
       </a:lt2>
       <a:accent1>
-        <a:srgbClr val="B83D68"/>
+        <a:srgbClr val="b83d68"/>
       </a:accent1>
       <a:accent2>
-        <a:srgbClr val="AC66BB"/>
+        <a:srgbClr val="ac66bb"/>
       </a:accent2>
       <a:accent3>
-        <a:srgbClr val="DE6C36"/>
+        <a:srgbClr val="de6c36"/>
       </a:accent3>
       <a:accent4>
-        <a:srgbClr val="F9B639"/>
+        <a:srgbClr val="f9b639"/>
       </a:accent4>
       <a:accent5>
-        <a:srgbClr val="CF6DA4"/>
+        <a:srgbClr val="cf6da4"/>
       </a:accent5>
       <a:accent6>
-        <a:srgbClr val="FA8D3D"/>
+        <a:srgbClr val="fa8d3d"/>
       </a:accent6>
       <a:hlink>
-        <a:srgbClr val="FFDE66"/>
+        <a:srgbClr val="ffde66"/>
       </a:hlink>
       <a:folHlink>
-        <a:srgbClr val="D490C5"/>
+        <a:srgbClr val="d490c5"/>
       </a:folHlink>
     </a:clrScheme>
     <a:fontScheme name="Office">
@@ -14925,9 +15865,9 @@
         <a:latin typeface="맑은 고딕"/>
         <a:ea typeface=""/>
         <a:cs typeface=""/>
-        <a:font script="Jpan" typeface="ＭＳ Ｐゴシック"/>
+        <a:font script="Jpan" typeface="MS PGothic"/>
         <a:font script="Hang" typeface="맑은 고딕"/>
-        <a:font script="Hans" typeface="宋体"/>
+        <a:font script="Hans" typeface="SimSun"/>
         <a:font script="Hant" typeface="新細明體"/>
         <a:font script="Arab" typeface="Times New Roman"/>
         <a:font script="Hebr" typeface="Times New Roman"/>
@@ -14959,9 +15899,9 @@
         <a:latin typeface="맑은 고딕"/>
         <a:ea typeface=""/>
         <a:cs typeface=""/>
-        <a:font script="Jpan" typeface="ＭＳ Ｐゴシック"/>
+        <a:font script="Jpan" typeface="MS PGothic"/>
         <a:font script="Hang" typeface="맑은 고딕"/>
-        <a:font script="Hans" typeface="宋体"/>
+        <a:font script="Hans" typeface="SimSun"/>
         <a:font script="Hant" typeface="新細明體"/>
         <a:font script="Arab" typeface="Arial"/>
         <a:font script="Hebr" typeface="Arial"/>
@@ -15157,47 +16097,45 @@
       </a:bgFillStyleLst>
     </a:fmtScheme>
   </a:themeElements>
-  <a:objectDefaults/>
-  <a:extraClrSchemeLst/>
 </a:theme>
 </file>
 
 <file path=ppt/theme/theme2.xml><?xml version="1.0" encoding="utf-8"?>
-<a:theme xmlns:a="http://schemas.openxmlformats.org/drawingml/2006/main" name="Office 테마">
+<a:theme xmlns:r="http://schemas.openxmlformats.org/officeDocument/2006/relationships" xmlns:c="http://schemas.openxmlformats.org/drawingml/2006/chart" xmlns:dgm="http://schemas.openxmlformats.org/drawingml/2006/diagram" xmlns:dsp="http://schemas.microsoft.com/office/drawing/2008/diagram" xmlns:a="http://schemas.openxmlformats.org/drawingml/2006/main" xmlns:pic="http://schemas.openxmlformats.org/drawingml/2006/picture" xmlns:wp="http://schemas.openxmlformats.org/drawingml/2006/wordprocessingDrawing" xmlns:xdr="http://schemas.openxmlformats.org/drawingml/2006/spreadsheetDrawing" xmlns:p="http://schemas.openxmlformats.org/presentationml/2006/main" name="Office 테마">
   <a:themeElements>
     <a:clrScheme name="Office">
       <a:dk1>
         <a:sysClr val="windowText" lastClr="000000"/>
       </a:dk1>
       <a:lt1>
-        <a:sysClr val="window" lastClr="FFFFFF"/>
+        <a:sysClr val="window" lastClr="ffffff"/>
       </a:lt1>
       <a:dk2>
-        <a:srgbClr val="1F497D"/>
+        <a:srgbClr val="1f497d"/>
       </a:dk2>
       <a:lt2>
-        <a:srgbClr val="EEECE1"/>
+        <a:srgbClr val="eeece1"/>
       </a:lt2>
       <a:accent1>
-        <a:srgbClr val="4F81BD"/>
+        <a:srgbClr val="4f81bd"/>
       </a:accent1>
       <a:accent2>
-        <a:srgbClr val="C0504D"/>
+        <a:srgbClr val="c0504d"/>
       </a:accent2>
       <a:accent3>
-        <a:srgbClr val="9BBB59"/>
+        <a:srgbClr val="9bbb59"/>
       </a:accent3>
       <a:accent4>
-        <a:srgbClr val="8064A2"/>
+        <a:srgbClr val="8064a2"/>
       </a:accent4>
       <a:accent5>
-        <a:srgbClr val="4BACC6"/>
+        <a:srgbClr val="4bacc6"/>
       </a:accent5>
       <a:accent6>
-        <a:srgbClr val="F79646"/>
+        <a:srgbClr val="f79646"/>
       </a:accent6>
       <a:hlink>
-        <a:srgbClr val="0000FF"/>
+        <a:srgbClr val="0000ff"/>
       </a:hlink>
       <a:folHlink>
         <a:srgbClr val="800080"/>
@@ -15208,9 +16146,9 @@
         <a:latin typeface="맑은 고딕"/>
         <a:ea typeface=""/>
         <a:cs typeface=""/>
-        <a:font script="Jpan" typeface="ＭＳ Ｐゴシック"/>
+        <a:font script="Jpan" typeface="MS PGothic"/>
         <a:font script="Hang" typeface="맑은 고딕"/>
-        <a:font script="Hans" typeface="宋体"/>
+        <a:font script="Hans" typeface="SimSun"/>
         <a:font script="Hant" typeface="新細明體"/>
         <a:font script="Arab" typeface="Times New Roman"/>
         <a:font script="Hebr" typeface="Times New Roman"/>
@@ -15242,9 +16180,9 @@
         <a:latin typeface="맑은 고딕"/>
         <a:ea typeface=""/>
         <a:cs typeface=""/>
-        <a:font script="Jpan" typeface="ＭＳ Ｐゴシック"/>
+        <a:font script="Jpan" typeface="MS PGothic"/>
         <a:font script="Hang" typeface="맑은 고딕"/>
-        <a:font script="Hans" typeface="宋体"/>
+        <a:font script="Hans" typeface="SimSun"/>
         <a:font script="Hant" typeface="新細明體"/>
         <a:font script="Arab" typeface="Arial"/>
         <a:font script="Hebr" typeface="Arial"/>
@@ -15440,7 +16378,5 @@
       </a:bgFillStyleLst>
     </a:fmtScheme>
   </a:themeElements>
-  <a:objectDefaults/>
-  <a:extraClrSchemeLst/>
 </a:theme>
 </file>
--- a/스크립트언어/2021182014 박신우 숙제6. 다이나믹 프로그래밍.pptx
+++ b/스크립트언어/2021182014 박신우 숙제6. 다이나믹 프로그래밍.pptx
@@ -2,7 +2,7 @@
 <file path=ppt/presentation.xml><?xml version="1.0" encoding="utf-8"?>
 <p:presentation xmlns:r="http://schemas.openxmlformats.org/officeDocument/2006/relationships" xmlns:c="http://schemas.openxmlformats.org/drawingml/2006/chart" xmlns:a="http://schemas.openxmlformats.org/drawingml/2006/main" xmlns:dgm="http://schemas.openxmlformats.org/drawingml/2006/diagram" xmlns:dsp="http://schemas.microsoft.com/office/drawing/2008/diagram" xmlns:p="http://schemas.openxmlformats.org/presentationml/2006/main" showSpecialPlsOnTitleSld="0" saveSubsetFonts="1">
   <p:sldMasterIdLst>
-    <p:sldMasterId id="2147484180" r:id="rId1"/>
+    <p:sldMasterId id="2147484184" r:id="rId1"/>
   </p:sldMasterIdLst>
   <p:notesMasterIdLst>
     <p:notesMasterId r:id="rId2"/>
@@ -33,6 +33,8 @@
     <p:sldId id="278" r:id="rId25"/>
     <p:sldId id="279" r:id="rId26"/>
     <p:sldId id="280" r:id="rId27"/>
+    <p:sldId id="281" r:id="rId28"/>
+    <p:sldId id="282" r:id="rId29"/>
   </p:sldIdLst>
   <p:sldSz cx="9144000" cy="6858000" type="screen4x3"/>
   <p:notesSz cx="6796088" cy="9926638"/>
@@ -12284,6 +12286,212 @@
 </file>
 
 <file path=ppt/slides/slide25.xml><?xml version="1.0" encoding="utf-8"?>
+<p:sld xmlns:r="http://schemas.openxmlformats.org/officeDocument/2006/relationships" xmlns:c="http://schemas.openxmlformats.org/drawingml/2006/chart" xmlns:a="http://schemas.openxmlformats.org/drawingml/2006/main" xmlns:dgm="http://schemas.openxmlformats.org/drawingml/2006/diagram" xmlns:dsp="http://schemas.microsoft.com/office/drawing/2008/diagram" xmlns:p="http://schemas.openxmlformats.org/presentationml/2006/main">
+  <p:cSld>
+    <p:spTree>
+      <p:nvGrpSpPr>
+        <p:cNvPr id="1" name=""/>
+        <p:cNvGrpSpPr/>
+        <p:nvPr/>
+      </p:nvGrpSpPr>
+      <p:grpSpPr>
+        <a:xfrm>
+          <a:off x="0" y="0"/>
+          <a:ext cx="0" cy="0"/>
+          <a:chOff x="0" y="0"/>
+          <a:chExt cx="0" cy="0"/>
+        </a:xfrm>
+      </p:grpSpPr>
+      <p:sp>
+        <p:nvSpPr>
+          <p:cNvPr id="2" name="제목 1"/>
+          <p:cNvSpPr>
+            <a:spLocks noGrp="1"/>
+          </p:cNvSpPr>
+          <p:nvPr>
+            <p:ph type="title" idx="0"/>
+          </p:nvPr>
+        </p:nvSpPr>
+        <p:spPr/>
+        <p:txBody>
+          <a:bodyPr/>
+          <a:lstStyle/>
+          <a:p>
+            <a:pPr>
+              <a:defRPr/>
+            </a:pPr>
+            <a:r>
+              <a:rPr lang="ko-KR" altLang="en-US"/>
+              <a:t/>
+            </a:r>
+            <a:endParaRPr lang="ko-KR" altLang="en-US"/>
+          </a:p>
+        </p:txBody>
+      </p:sp>
+      <p:pic>
+        <p:nvPicPr>
+          <p:cNvPr id="3" name=""/>
+          <p:cNvPicPr>
+            <a:picLocks noGrp="1" noChangeAspect="1"/>
+          </p:cNvPicPr>
+          <p:nvPr>
+            <p:ph idx="1"/>
+          </p:nvPr>
+        </p:nvPicPr>
+        <p:blipFill rotWithShape="1">
+          <a:blip r:embed="rId2"/>
+          <a:stretch>
+            <a:fillRect/>
+          </a:stretch>
+        </p:blipFill>
+        <p:spPr>
+          <a:xfrm>
+            <a:off x="1167050" y="5085184"/>
+            <a:ext cx="6285270" cy="980432"/>
+          </a:xfrm>
+          <a:prstGeom prst="rect">
+            <a:avLst/>
+          </a:prstGeom>
+          <a:noFill/>
+          <a:ln w="9525" cap="flat" cmpd="sng" algn="ctr">
+            <a:noFill/>
+            <a:prstDash val="solid"/>
+            <a:round/>
+          </a:ln>
+        </p:spPr>
+      </p:pic>
+      <p:sp>
+        <p:nvSpPr>
+          <p:cNvPr id="4" name="날짜 개체 틀 3"/>
+          <p:cNvSpPr>
+            <a:spLocks noGrp="1"/>
+          </p:cNvSpPr>
+          <p:nvPr>
+            <p:ph type="dt" sz="half" idx="10"/>
+          </p:nvPr>
+        </p:nvSpPr>
+        <p:spPr/>
+        <p:txBody>
+          <a:bodyPr/>
+          <a:lstStyle/>
+          <a:p>
+            <a:pPr>
+              <a:defRPr/>
+            </a:pPr>
+            <a:r>
+              <a:rPr lang="en-US" altLang="ko-KR"/>
+              <a:t>2008</a:t>
+            </a:r>
+            <a:r>
+              <a:rPr lang="ko-KR" altLang="en-US"/>
+              <a:t>년</a:t>
+            </a:r>
+            <a:r>
+              <a:rPr lang="en-US" altLang="ko-KR"/>
+              <a:t>2</a:t>
+            </a:r>
+            <a:r>
+              <a:rPr lang="ko-KR" altLang="en-US"/>
+              <a:t>학기 </a:t>
+            </a:r>
+            <a:r>
+              <a:rPr lang="en-US" altLang="ko-KR"/>
+              <a:t>3D</a:t>
+            </a:r>
+            <a:r>
+              <a:rPr lang="ko-KR" altLang="en-US"/>
+              <a:t>게임프로그래밍</a:t>
+            </a:r>
+            <a:r>
+              <a:rPr lang="en-US" altLang="ko-KR"/>
+              <a:t>II </a:t>
+            </a:r>
+            <a:r>
+              <a:rPr lang="ko-KR" altLang="en-US"/>
+              <a:t>담당교수</a:t>
+            </a:r>
+            <a:r>
+              <a:rPr lang="en-US" altLang="ko-KR"/>
+              <a:t>:</a:t>
+            </a:r>
+            <a:r>
+              <a:rPr lang="ko-KR" altLang="en-US"/>
+              <a:t>김영식</a:t>
+            </a:r>
+            <a:endParaRPr lang="ko-KR" altLang="en-US"/>
+          </a:p>
+        </p:txBody>
+      </p:sp>
+      <p:sp>
+        <p:nvSpPr>
+          <p:cNvPr id="5" name="슬라이드 번호 개체 틀 5"/>
+          <p:cNvSpPr>
+            <a:spLocks noGrp="1"/>
+          </p:cNvSpPr>
+          <p:nvPr>
+            <p:ph type="sldNum" sz="quarter" idx="12"/>
+          </p:nvPr>
+        </p:nvSpPr>
+        <p:spPr/>
+        <p:txBody>
+          <a:bodyPr/>
+          <a:lstStyle/>
+          <a:p>
+            <a:pPr>
+              <a:defRPr/>
+            </a:pPr>
+            <a:fld id="{A268DA64-E15D-4814-A1DA-86D92D550423}" type="slidenum">
+              <a:rPr lang="en-US" altLang="en-US"/>
+              <a:pPr>
+                <a:defRPr/>
+              </a:pPr>
+              <a:t>25</a:t>
+            </a:fld>
+            <a:endParaRPr lang="en-US" altLang="en-US"/>
+          </a:p>
+        </p:txBody>
+      </p:sp>
+      <p:pic>
+        <p:nvPicPr>
+          <p:cNvPr id="6" name=""/>
+          <p:cNvPicPr>
+            <a:picLocks noChangeAspect="1"/>
+          </p:cNvPicPr>
+          <p:nvPr/>
+        </p:nvPicPr>
+        <p:blipFill rotWithShape="1">
+          <a:blip r:embed="rId3"/>
+          <a:stretch>
+            <a:fillRect/>
+          </a:stretch>
+        </p:blipFill>
+        <p:spPr>
+          <a:xfrm>
+            <a:off x="251530" y="161469"/>
+            <a:ext cx="3419430" cy="4563675"/>
+          </a:xfrm>
+          <a:prstGeom prst="rect">
+            <a:avLst/>
+          </a:prstGeom>
+        </p:spPr>
+      </p:pic>
+    </p:spTree>
+  </p:cSld>
+  <p:clrMapOvr>
+    <a:masterClrMapping/>
+  </p:clrMapOvr>
+  <mc:AlternateContent xmlns:mc="http://schemas.openxmlformats.org/markup-compatibility/2006">
+    <mc:Choice xmlns:p14="http://schemas.microsoft.com/office/powerpoint/2010/main" Requires="p14">
+      <p:transition xmlns:mc="http://schemas.openxmlformats.org/markup-compatibility/2006" xmlns:p14="http://schemas.microsoft.com/office/powerpoint/2010/main" mc:Ignorable="p14" p14:dur="500"/>
+    </mc:Choice>
+    <mc:Fallback>
+      <p:transition/>
+    </mc:Fallback>
+  </mc:AlternateContent>
+</p:sld>
+</file>
+
+<file path=ppt/slides/slide26.xml><?xml version="1.0" encoding="utf-8"?>
 <p:sld xmlns:a="http://schemas.openxmlformats.org/drawingml/2006/main" xmlns:r="http://schemas.openxmlformats.org/officeDocument/2006/relationships" xmlns:p="http://schemas.openxmlformats.org/presentationml/2006/main">
   <p:cSld>
     <p:spTree>
@@ -12762,6 +12970,212 @@
   <p:clrMapOvr>
     <a:masterClrMapping/>
   </p:clrMapOvr>
+</p:sld>
+</file>
+
+<file path=ppt/slides/slide27.xml><?xml version="1.0" encoding="utf-8"?>
+<p:sld xmlns:r="http://schemas.openxmlformats.org/officeDocument/2006/relationships" xmlns:c="http://schemas.openxmlformats.org/drawingml/2006/chart" xmlns:a="http://schemas.openxmlformats.org/drawingml/2006/main" xmlns:dgm="http://schemas.openxmlformats.org/drawingml/2006/diagram" xmlns:dsp="http://schemas.microsoft.com/office/drawing/2008/diagram" xmlns:p="http://schemas.openxmlformats.org/presentationml/2006/main">
+  <p:cSld>
+    <p:spTree>
+      <p:nvGrpSpPr>
+        <p:cNvPr id="1" name=""/>
+        <p:cNvGrpSpPr/>
+        <p:nvPr/>
+      </p:nvGrpSpPr>
+      <p:grpSpPr>
+        <a:xfrm>
+          <a:off x="0" y="0"/>
+          <a:ext cx="0" cy="0"/>
+          <a:chOff x="0" y="0"/>
+          <a:chExt cx="0" cy="0"/>
+        </a:xfrm>
+      </p:grpSpPr>
+      <p:sp>
+        <p:nvSpPr>
+          <p:cNvPr id="2" name="제목 1"/>
+          <p:cNvSpPr>
+            <a:spLocks noGrp="1"/>
+          </p:cNvSpPr>
+          <p:nvPr>
+            <p:ph type="title" idx="0"/>
+          </p:nvPr>
+        </p:nvSpPr>
+        <p:spPr/>
+        <p:txBody>
+          <a:bodyPr/>
+          <a:lstStyle/>
+          <a:p>
+            <a:pPr>
+              <a:defRPr/>
+            </a:pPr>
+            <a:r>
+              <a:rPr lang="ko-KR" altLang="en-US"/>
+              <a:t/>
+            </a:r>
+            <a:endParaRPr lang="ko-KR" altLang="en-US"/>
+          </a:p>
+        </p:txBody>
+      </p:sp>
+      <p:pic>
+        <p:nvPicPr>
+          <p:cNvPr id="3" name=""/>
+          <p:cNvPicPr>
+            <a:picLocks noGrp="1" noChangeAspect="1"/>
+          </p:cNvPicPr>
+          <p:nvPr>
+            <p:ph idx="1"/>
+          </p:nvPr>
+        </p:nvPicPr>
+        <p:blipFill rotWithShape="1">
+          <a:blip r:embed="rId2"/>
+          <a:stretch>
+            <a:fillRect/>
+          </a:stretch>
+        </p:blipFill>
+        <p:spPr>
+          <a:xfrm>
+            <a:off x="683568" y="0"/>
+            <a:ext cx="7005463" cy="1849841"/>
+          </a:xfrm>
+          <a:prstGeom prst="rect">
+            <a:avLst/>
+          </a:prstGeom>
+          <a:noFill/>
+          <a:ln w="9525" cap="flat" cmpd="sng" algn="ctr">
+            <a:noFill/>
+            <a:prstDash val="solid"/>
+            <a:round/>
+          </a:ln>
+        </p:spPr>
+      </p:pic>
+      <p:sp>
+        <p:nvSpPr>
+          <p:cNvPr id="4" name="날짜 개체 틀 3"/>
+          <p:cNvSpPr>
+            <a:spLocks noGrp="1"/>
+          </p:cNvSpPr>
+          <p:nvPr>
+            <p:ph type="dt" sz="half" idx="10"/>
+          </p:nvPr>
+        </p:nvSpPr>
+        <p:spPr/>
+        <p:txBody>
+          <a:bodyPr/>
+          <a:lstStyle/>
+          <a:p>
+            <a:pPr>
+              <a:defRPr/>
+            </a:pPr>
+            <a:r>
+              <a:rPr lang="en-US" altLang="ko-KR"/>
+              <a:t>2008</a:t>
+            </a:r>
+            <a:r>
+              <a:rPr lang="ko-KR" altLang="en-US"/>
+              <a:t>년</a:t>
+            </a:r>
+            <a:r>
+              <a:rPr lang="en-US" altLang="ko-KR"/>
+              <a:t>2</a:t>
+            </a:r>
+            <a:r>
+              <a:rPr lang="ko-KR" altLang="en-US"/>
+              <a:t>학기 </a:t>
+            </a:r>
+            <a:r>
+              <a:rPr lang="en-US" altLang="ko-KR"/>
+              <a:t>3D</a:t>
+            </a:r>
+            <a:r>
+              <a:rPr lang="ko-KR" altLang="en-US"/>
+              <a:t>게임프로그래밍</a:t>
+            </a:r>
+            <a:r>
+              <a:rPr lang="en-US" altLang="ko-KR"/>
+              <a:t>II </a:t>
+            </a:r>
+            <a:r>
+              <a:rPr lang="ko-KR" altLang="en-US"/>
+              <a:t>담당교수</a:t>
+            </a:r>
+            <a:r>
+              <a:rPr lang="en-US" altLang="ko-KR"/>
+              <a:t>:</a:t>
+            </a:r>
+            <a:r>
+              <a:rPr lang="ko-KR" altLang="en-US"/>
+              <a:t>김영식</a:t>
+            </a:r>
+            <a:endParaRPr lang="ko-KR" altLang="en-US"/>
+          </a:p>
+        </p:txBody>
+      </p:sp>
+      <p:sp>
+        <p:nvSpPr>
+          <p:cNvPr id="5" name="슬라이드 번호 개체 틀 5"/>
+          <p:cNvSpPr>
+            <a:spLocks noGrp="1"/>
+          </p:cNvSpPr>
+          <p:nvPr>
+            <p:ph type="sldNum" sz="quarter" idx="12"/>
+          </p:nvPr>
+        </p:nvSpPr>
+        <p:spPr/>
+        <p:txBody>
+          <a:bodyPr/>
+          <a:lstStyle/>
+          <a:p>
+            <a:pPr>
+              <a:defRPr/>
+            </a:pPr>
+            <a:fld id="{A268DA64-E15D-4814-A1DA-86D92D550423}" type="slidenum">
+              <a:rPr lang="en-US" altLang="en-US"/>
+              <a:pPr>
+                <a:defRPr/>
+              </a:pPr>
+              <a:t>27</a:t>
+            </a:fld>
+            <a:endParaRPr lang="en-US" altLang="en-US"/>
+          </a:p>
+        </p:txBody>
+      </p:sp>
+      <p:pic>
+        <p:nvPicPr>
+          <p:cNvPr id="6" name=""/>
+          <p:cNvPicPr>
+            <a:picLocks noChangeAspect="1"/>
+          </p:cNvPicPr>
+          <p:nvPr/>
+        </p:nvPicPr>
+        <p:blipFill rotWithShape="1">
+          <a:blip r:embed="rId3"/>
+          <a:stretch>
+            <a:fillRect/>
+          </a:stretch>
+        </p:blipFill>
+        <p:spPr>
+          <a:xfrm>
+            <a:off x="539552" y="1886306"/>
+            <a:ext cx="3096344" cy="4206989"/>
+          </a:xfrm>
+          <a:prstGeom prst="rect">
+            <a:avLst/>
+          </a:prstGeom>
+        </p:spPr>
+      </p:pic>
+    </p:spTree>
+  </p:cSld>
+  <p:clrMapOvr>
+    <a:masterClrMapping/>
+  </p:clrMapOvr>
+  <mc:AlternateContent xmlns:mc="http://schemas.openxmlformats.org/markup-compatibility/2006">
+    <mc:Choice xmlns:p14="http://schemas.microsoft.com/office/powerpoint/2010/main" Requires="p14">
+      <p:transition xmlns:mc="http://schemas.openxmlformats.org/markup-compatibility/2006" xmlns:p14="http://schemas.microsoft.com/office/powerpoint/2010/main" mc:Ignorable="p14" p14:dur="500"/>
+    </mc:Choice>
+    <mc:Fallback>
+      <p:transition/>
+    </mc:Fallback>
+  </mc:AlternateContent>
 </p:sld>
 </file>
 
